--- a/[실습](3.27) 상황의 기차칸.pptx
+++ b/[실습](3.27) 상황의 기차칸.pptx
@@ -7,6 +7,10 @@
   <p:sldIdLst>
     <p:sldId id="256" r:id="rId2"/>
     <p:sldId id="257" r:id="rId3"/>
+    <p:sldId id="258" r:id="rId4"/>
+    <p:sldId id="259" r:id="rId5"/>
+    <p:sldId id="260" r:id="rId6"/>
+    <p:sldId id="261" r:id="rId7"/>
   </p:sldIdLst>
   <p:sldSz cx="12192000" cy="6858000"/>
   <p:notesSz cx="6858000" cy="9144000"/>
@@ -113,6 +117,559 @@
 </p:presentation>
 </file>
 
+<file path=ppt/revisionInfo.xml><?xml version="1.0" encoding="utf-8"?>
+<p1510:revInfo xmlns:a="http://schemas.openxmlformats.org/drawingml/2006/main" xmlns:r="http://schemas.openxmlformats.org/officeDocument/2006/relationships" xmlns:p1510="http://schemas.microsoft.com/office/powerpoint/2015/10/main">
+  <p1510:revLst>
+    <p1510:client id="{BE85CAB5-BF9D-4577-A3CE-8E24176FA968}" v="33" dt="2026-03-30T02:20:20.268"/>
+  </p1510:revLst>
+</p1510:revInfo>
+</file>
+
+<file path=ppt/changesInfos/changesInfo1.xml><?xml version="1.0" encoding="utf-8"?>
+<pc:chgInfo xmlns:a="http://schemas.openxmlformats.org/drawingml/2006/main" xmlns:r="http://schemas.openxmlformats.org/officeDocument/2006/relationships" xmlns:ac="http://schemas.microsoft.com/office/drawing/2013/main/command" xmlns:pc="http://schemas.microsoft.com/office/powerpoint/2013/main/command">
+  <pc:docChgLst>
+    <pc:chgData name="musukie52@gmail.com" userId="017bd91f96aa8751" providerId="LiveId" clId="{5B2C3894-F97E-4CAB-8812-5BB4D83AAC6A}"/>
+    <pc:docChg chg="undo custSel addSld modSld">
+      <pc:chgData name="musukie52@gmail.com" userId="017bd91f96aa8751" providerId="LiveId" clId="{5B2C3894-F97E-4CAB-8812-5BB4D83AAC6A}" dt="2026-03-30T02:21:16.645" v="429" actId="22"/>
+      <pc:docMkLst>
+        <pc:docMk/>
+      </pc:docMkLst>
+      <pc:sldChg chg="addSp delSp modSp mod setBg">
+        <pc:chgData name="musukie52@gmail.com" userId="017bd91f96aa8751" providerId="LiveId" clId="{5B2C3894-F97E-4CAB-8812-5BB4D83AAC6A}" dt="2026-03-30T01:55:19.062" v="169" actId="2085"/>
+        <pc:sldMkLst>
+          <pc:docMk/>
+          <pc:sldMk cId="2334041143" sldId="257"/>
+        </pc:sldMkLst>
+        <pc:spChg chg="add mod ord">
+          <ac:chgData name="musukie52@gmail.com" userId="017bd91f96aa8751" providerId="LiveId" clId="{5B2C3894-F97E-4CAB-8812-5BB4D83AAC6A}" dt="2026-03-30T01:31:24.392" v="105" actId="166"/>
+          <ac:spMkLst>
+            <pc:docMk/>
+            <pc:sldMk cId="2334041143" sldId="257"/>
+            <ac:spMk id="2" creationId="{343F3A70-89A0-C5C5-7107-AB9C8A3A4728}"/>
+          </ac:spMkLst>
+        </pc:spChg>
+        <pc:spChg chg="add del mod">
+          <ac:chgData name="musukie52@gmail.com" userId="017bd91f96aa8751" providerId="LiveId" clId="{5B2C3894-F97E-4CAB-8812-5BB4D83AAC6A}" dt="2026-03-30T01:27:29.582" v="62" actId="478"/>
+          <ac:spMkLst>
+            <pc:docMk/>
+            <pc:sldMk cId="2334041143" sldId="257"/>
+            <ac:spMk id="3" creationId="{50A00D17-7F9C-2C1E-9C42-2B7E6257356A}"/>
+          </ac:spMkLst>
+        </pc:spChg>
+        <pc:spChg chg="mod">
+          <ac:chgData name="musukie52@gmail.com" userId="017bd91f96aa8751" providerId="LiveId" clId="{5B2C3894-F97E-4CAB-8812-5BB4D83AAC6A}" dt="2026-03-30T01:54:25.661" v="164" actId="207"/>
+          <ac:spMkLst>
+            <pc:docMk/>
+            <pc:sldMk cId="2334041143" sldId="257"/>
+            <ac:spMk id="4" creationId="{00000000-0000-0000-0000-000000000000}"/>
+          </ac:spMkLst>
+        </pc:spChg>
+        <pc:spChg chg="mod">
+          <ac:chgData name="musukie52@gmail.com" userId="017bd91f96aa8751" providerId="LiveId" clId="{5B2C3894-F97E-4CAB-8812-5BB4D83AAC6A}" dt="2026-03-30T01:55:19.062" v="169" actId="2085"/>
+          <ac:spMkLst>
+            <pc:docMk/>
+            <pc:sldMk cId="2334041143" sldId="257"/>
+            <ac:spMk id="5" creationId="{00000000-0000-0000-0000-000000000000}"/>
+          </ac:spMkLst>
+        </pc:spChg>
+        <pc:spChg chg="mod ord">
+          <ac:chgData name="musukie52@gmail.com" userId="017bd91f96aa8751" providerId="LiveId" clId="{5B2C3894-F97E-4CAB-8812-5BB4D83AAC6A}" dt="2026-03-30T01:31:24.392" v="105" actId="166"/>
+          <ac:spMkLst>
+            <pc:docMk/>
+            <pc:sldMk cId="2334041143" sldId="257"/>
+            <ac:spMk id="6" creationId="{00000000-0000-0000-0000-000000000000}"/>
+          </ac:spMkLst>
+        </pc:spChg>
+        <pc:spChg chg="del mod">
+          <ac:chgData name="musukie52@gmail.com" userId="017bd91f96aa8751" providerId="LiveId" clId="{5B2C3894-F97E-4CAB-8812-5BB4D83AAC6A}" dt="2026-03-30T01:20:22.607" v="18" actId="478"/>
+          <ac:spMkLst>
+            <pc:docMk/>
+            <pc:sldMk cId="2334041143" sldId="257"/>
+            <ac:spMk id="7" creationId="{00000000-0000-0000-0000-000000000000}"/>
+          </ac:spMkLst>
+        </pc:spChg>
+        <pc:spChg chg="mod">
+          <ac:chgData name="musukie52@gmail.com" userId="017bd91f96aa8751" providerId="LiveId" clId="{5B2C3894-F97E-4CAB-8812-5BB4D83AAC6A}" dt="2026-03-30T01:39:58.497" v="108" actId="20577"/>
+          <ac:spMkLst>
+            <pc:docMk/>
+            <pc:sldMk cId="2334041143" sldId="257"/>
+            <ac:spMk id="8" creationId="{00000000-0000-0000-0000-000000000000}"/>
+          </ac:spMkLst>
+        </pc:spChg>
+        <pc:spChg chg="mod ord">
+          <ac:chgData name="musukie52@gmail.com" userId="017bd91f96aa8751" providerId="LiveId" clId="{5B2C3894-F97E-4CAB-8812-5BB4D83AAC6A}" dt="2026-03-30T01:40:14.059" v="121"/>
+          <ac:spMkLst>
+            <pc:docMk/>
+            <pc:sldMk cId="2334041143" sldId="257"/>
+            <ac:spMk id="9" creationId="{00000000-0000-0000-0000-000000000000}"/>
+          </ac:spMkLst>
+        </pc:spChg>
+        <pc:spChg chg="mod ord">
+          <ac:chgData name="musukie52@gmail.com" userId="017bd91f96aa8751" providerId="LiveId" clId="{5B2C3894-F97E-4CAB-8812-5BB4D83AAC6A}" dt="2026-03-30T01:31:24.392" v="105" actId="166"/>
+          <ac:spMkLst>
+            <pc:docMk/>
+            <pc:sldMk cId="2334041143" sldId="257"/>
+            <ac:spMk id="11" creationId="{00000000-0000-0000-0000-000000000000}"/>
+          </ac:spMkLst>
+        </pc:spChg>
+        <pc:spChg chg="mod ord">
+          <ac:chgData name="musukie52@gmail.com" userId="017bd91f96aa8751" providerId="LiveId" clId="{5B2C3894-F97E-4CAB-8812-5BB4D83AAC6A}" dt="2026-03-30T01:40:22.437" v="134" actId="14100"/>
+          <ac:spMkLst>
+            <pc:docMk/>
+            <pc:sldMk cId="2334041143" sldId="257"/>
+            <ac:spMk id="12" creationId="{00000000-0000-0000-0000-000000000000}"/>
+          </ac:spMkLst>
+        </pc:spChg>
+        <pc:spChg chg="mod">
+          <ac:chgData name="musukie52@gmail.com" userId="017bd91f96aa8751" providerId="LiveId" clId="{5B2C3894-F97E-4CAB-8812-5BB4D83AAC6A}" dt="2026-03-30T01:21:07.498" v="25" actId="207"/>
+          <ac:spMkLst>
+            <pc:docMk/>
+            <pc:sldMk cId="2334041143" sldId="257"/>
+            <ac:spMk id="13" creationId="{00000000-0000-0000-0000-000000000000}"/>
+          </ac:spMkLst>
+        </pc:spChg>
+        <pc:spChg chg="mod">
+          <ac:chgData name="musukie52@gmail.com" userId="017bd91f96aa8751" providerId="LiveId" clId="{5B2C3894-F97E-4CAB-8812-5BB4D83AAC6A}" dt="2026-03-30T01:21:07.498" v="25" actId="207"/>
+          <ac:spMkLst>
+            <pc:docMk/>
+            <pc:sldMk cId="2334041143" sldId="257"/>
+            <ac:spMk id="14" creationId="{00000000-0000-0000-0000-000000000000}"/>
+          </ac:spMkLst>
+        </pc:spChg>
+        <pc:spChg chg="mod ord">
+          <ac:chgData name="musukie52@gmail.com" userId="017bd91f96aa8751" providerId="LiveId" clId="{5B2C3894-F97E-4CAB-8812-5BB4D83AAC6A}" dt="2026-03-30T01:31:24.392" v="105" actId="166"/>
+          <ac:spMkLst>
+            <pc:docMk/>
+            <pc:sldMk cId="2334041143" sldId="257"/>
+            <ac:spMk id="15" creationId="{00000000-0000-0000-0000-000000000000}"/>
+          </ac:spMkLst>
+        </pc:spChg>
+        <pc:spChg chg="mod ord">
+          <ac:chgData name="musukie52@gmail.com" userId="017bd91f96aa8751" providerId="LiveId" clId="{5B2C3894-F97E-4CAB-8812-5BB4D83AAC6A}" dt="2026-03-30T01:41:07.776" v="139" actId="20577"/>
+          <ac:spMkLst>
+            <pc:docMk/>
+            <pc:sldMk cId="2334041143" sldId="257"/>
+            <ac:spMk id="16" creationId="{00000000-0000-0000-0000-000000000000}"/>
+          </ac:spMkLst>
+        </pc:spChg>
+        <pc:spChg chg="mod ord">
+          <ac:chgData name="musukie52@gmail.com" userId="017bd91f96aa8751" providerId="LiveId" clId="{5B2C3894-F97E-4CAB-8812-5BB4D83AAC6A}" dt="2026-03-30T01:31:24.392" v="105" actId="166"/>
+          <ac:spMkLst>
+            <pc:docMk/>
+            <pc:sldMk cId="2334041143" sldId="257"/>
+            <ac:spMk id="18" creationId="{00000000-0000-0000-0000-000000000000}"/>
+          </ac:spMkLst>
+        </pc:spChg>
+        <pc:spChg chg="mod ord">
+          <ac:chgData name="musukie52@gmail.com" userId="017bd91f96aa8751" providerId="LiveId" clId="{5B2C3894-F97E-4CAB-8812-5BB4D83AAC6A}" dt="2026-03-30T01:31:24.392" v="105" actId="166"/>
+          <ac:spMkLst>
+            <pc:docMk/>
+            <pc:sldMk cId="2334041143" sldId="257"/>
+            <ac:spMk id="20" creationId="{00000000-0000-0000-0000-000000000000}"/>
+          </ac:spMkLst>
+        </pc:spChg>
+        <pc:spChg chg="mod ord">
+          <ac:chgData name="musukie52@gmail.com" userId="017bd91f96aa8751" providerId="LiveId" clId="{5B2C3894-F97E-4CAB-8812-5BB4D83AAC6A}" dt="2026-03-30T01:31:24.392" v="105" actId="166"/>
+          <ac:spMkLst>
+            <pc:docMk/>
+            <pc:sldMk cId="2334041143" sldId="257"/>
+            <ac:spMk id="21" creationId="{00000000-0000-0000-0000-000000000000}"/>
+          </ac:spMkLst>
+        </pc:spChg>
+        <pc:spChg chg="add del mod">
+          <ac:chgData name="musukie52@gmail.com" userId="017bd91f96aa8751" providerId="LiveId" clId="{5B2C3894-F97E-4CAB-8812-5BB4D83AAC6A}" dt="2026-03-30T01:26:02.806" v="38" actId="478"/>
+          <ac:spMkLst>
+            <pc:docMk/>
+            <pc:sldMk cId="2334041143" sldId="257"/>
+            <ac:spMk id="22" creationId="{98339D06-E0F2-2205-960B-A2621009D7D8}"/>
+          </ac:spMkLst>
+        </pc:spChg>
+        <pc:spChg chg="add del mod">
+          <ac:chgData name="musukie52@gmail.com" userId="017bd91f96aa8751" providerId="LiveId" clId="{5B2C3894-F97E-4CAB-8812-5BB4D83AAC6A}" dt="2026-03-30T01:26:03.256" v="39" actId="478"/>
+          <ac:spMkLst>
+            <pc:docMk/>
+            <pc:sldMk cId="2334041143" sldId="257"/>
+            <ac:spMk id="23" creationId="{C9A870D7-E401-4343-0AC0-08C4FC013504}"/>
+          </ac:spMkLst>
+        </pc:spChg>
+        <pc:spChg chg="add del mod">
+          <ac:chgData name="musukie52@gmail.com" userId="017bd91f96aa8751" providerId="LiveId" clId="{5B2C3894-F97E-4CAB-8812-5BB4D83AAC6A}" dt="2026-03-30T01:26:03.793" v="40" actId="478"/>
+          <ac:spMkLst>
+            <pc:docMk/>
+            <pc:sldMk cId="2334041143" sldId="257"/>
+            <ac:spMk id="24" creationId="{190598F3-116A-F31F-86CD-ACAA4DC793AF}"/>
+          </ac:spMkLst>
+        </pc:spChg>
+        <pc:spChg chg="add del mod">
+          <ac:chgData name="musukie52@gmail.com" userId="017bd91f96aa8751" providerId="LiveId" clId="{5B2C3894-F97E-4CAB-8812-5BB4D83AAC6A}" dt="2026-03-30T01:27:28.975" v="61" actId="478"/>
+          <ac:spMkLst>
+            <pc:docMk/>
+            <pc:sldMk cId="2334041143" sldId="257"/>
+            <ac:spMk id="25" creationId="{E780C323-B81F-26BD-8DFC-85DA3C0C9A22}"/>
+          </ac:spMkLst>
+        </pc:spChg>
+        <pc:spChg chg="add del mod">
+          <ac:chgData name="musukie52@gmail.com" userId="017bd91f96aa8751" providerId="LiveId" clId="{5B2C3894-F97E-4CAB-8812-5BB4D83AAC6A}" dt="2026-03-30T01:27:28.358" v="60" actId="478"/>
+          <ac:spMkLst>
+            <pc:docMk/>
+            <pc:sldMk cId="2334041143" sldId="257"/>
+            <ac:spMk id="26" creationId="{98D2D97A-5CF3-A8E8-21A5-56B4C2937060}"/>
+          </ac:spMkLst>
+        </pc:spChg>
+        <pc:spChg chg="add del mod">
+          <ac:chgData name="musukie52@gmail.com" userId="017bd91f96aa8751" providerId="LiveId" clId="{5B2C3894-F97E-4CAB-8812-5BB4D83AAC6A}" dt="2026-03-30T01:27:27.897" v="59" actId="478"/>
+          <ac:spMkLst>
+            <pc:docMk/>
+            <pc:sldMk cId="2334041143" sldId="257"/>
+            <ac:spMk id="27" creationId="{8BC47970-913A-F821-B674-191C6B98ADD2}"/>
+          </ac:spMkLst>
+        </pc:spChg>
+        <pc:spChg chg="add del mod">
+          <ac:chgData name="musukie52@gmail.com" userId="017bd91f96aa8751" providerId="LiveId" clId="{5B2C3894-F97E-4CAB-8812-5BB4D83AAC6A}" dt="2026-03-30T01:27:27.223" v="58" actId="478"/>
+          <ac:spMkLst>
+            <pc:docMk/>
+            <pc:sldMk cId="2334041143" sldId="257"/>
+            <ac:spMk id="28" creationId="{A69413CE-3F21-8A86-5B97-5F896758CD74}"/>
+          </ac:spMkLst>
+        </pc:spChg>
+        <pc:spChg chg="add mod">
+          <ac:chgData name="musukie52@gmail.com" userId="017bd91f96aa8751" providerId="LiveId" clId="{5B2C3894-F97E-4CAB-8812-5BB4D83AAC6A}" dt="2026-03-30T01:30:26.061" v="94" actId="207"/>
+          <ac:spMkLst>
+            <pc:docMk/>
+            <pc:sldMk cId="2334041143" sldId="257"/>
+            <ac:spMk id="33" creationId="{7B91612B-9C7D-5F5D-0C10-A35D76ECBA08}"/>
+          </ac:spMkLst>
+        </pc:spChg>
+        <pc:spChg chg="add mod">
+          <ac:chgData name="musukie52@gmail.com" userId="017bd91f96aa8751" providerId="LiveId" clId="{5B2C3894-F97E-4CAB-8812-5BB4D83AAC6A}" dt="2026-03-30T01:30:34.826" v="98" actId="207"/>
+          <ac:spMkLst>
+            <pc:docMk/>
+            <pc:sldMk cId="2334041143" sldId="257"/>
+            <ac:spMk id="34" creationId="{D23BE304-E2D6-7E6A-9CD7-3D5492D1E2B6}"/>
+          </ac:spMkLst>
+        </pc:spChg>
+        <pc:spChg chg="add mod">
+          <ac:chgData name="musukie52@gmail.com" userId="017bd91f96aa8751" providerId="LiveId" clId="{5B2C3894-F97E-4CAB-8812-5BB4D83AAC6A}" dt="2026-03-30T01:30:40.534" v="100" actId="207"/>
+          <ac:spMkLst>
+            <pc:docMk/>
+            <pc:sldMk cId="2334041143" sldId="257"/>
+            <ac:spMk id="35" creationId="{6BD6E198-2DC6-69E8-6766-25F9CE7270D2}"/>
+          </ac:spMkLst>
+        </pc:spChg>
+        <pc:spChg chg="add mod">
+          <ac:chgData name="musukie52@gmail.com" userId="017bd91f96aa8751" providerId="LiveId" clId="{5B2C3894-F97E-4CAB-8812-5BB4D83AAC6A}" dt="2026-03-30T01:30:44.854" v="102" actId="207"/>
+          <ac:spMkLst>
+            <pc:docMk/>
+            <pc:sldMk cId="2334041143" sldId="257"/>
+            <ac:spMk id="36" creationId="{22199777-3284-B6B3-AF16-A076073C3331}"/>
+          </ac:spMkLst>
+        </pc:spChg>
+        <pc:spChg chg="add mod">
+          <ac:chgData name="musukie52@gmail.com" userId="017bd91f96aa8751" providerId="LiveId" clId="{5B2C3894-F97E-4CAB-8812-5BB4D83AAC6A}" dt="2026-03-30T01:30:48.207" v="104" actId="207"/>
+          <ac:spMkLst>
+            <pc:docMk/>
+            <pc:sldMk cId="2334041143" sldId="257"/>
+            <ac:spMk id="37" creationId="{AFB9FC9D-29A8-DD23-48AB-6CF067B63D08}"/>
+          </ac:spMkLst>
+        </pc:spChg>
+        <pc:spChg chg="add mod">
+          <ac:chgData name="musukie52@gmail.com" userId="017bd91f96aa8751" providerId="LiveId" clId="{5B2C3894-F97E-4CAB-8812-5BB4D83AAC6A}" dt="2026-03-30T01:53:42.772" v="162" actId="20577"/>
+          <ac:spMkLst>
+            <pc:docMk/>
+            <pc:sldMk cId="2334041143" sldId="257"/>
+            <ac:spMk id="38" creationId="{4A4014F0-BAF8-8A49-0B9A-48833BDB1F43}"/>
+          </ac:spMkLst>
+        </pc:spChg>
+        <pc:cxnChg chg="add del mod">
+          <ac:chgData name="musukie52@gmail.com" userId="017bd91f96aa8751" providerId="LiveId" clId="{5B2C3894-F97E-4CAB-8812-5BB4D83AAC6A}" dt="2026-03-30T01:28:59.397" v="74" actId="478"/>
+          <ac:cxnSpMkLst>
+            <pc:docMk/>
+            <pc:sldMk cId="2334041143" sldId="257"/>
+            <ac:cxnSpMk id="30" creationId="{4D2EA3D9-ED12-4B11-B906-0996B37732E5}"/>
+          </ac:cxnSpMkLst>
+        </pc:cxnChg>
+      </pc:sldChg>
+      <pc:sldChg chg="addSp delSp modSp add mod setBg">
+        <pc:chgData name="musukie52@gmail.com" userId="017bd91f96aa8751" providerId="LiveId" clId="{5B2C3894-F97E-4CAB-8812-5BB4D83AAC6A}" dt="2026-03-30T02:20:41.255" v="423" actId="20577"/>
+        <pc:sldMkLst>
+          <pc:docMk/>
+          <pc:sldMk cId="4091973683" sldId="258"/>
+        </pc:sldMkLst>
+        <pc:spChg chg="add mod">
+          <ac:chgData name="musukie52@gmail.com" userId="017bd91f96aa8751" providerId="LiveId" clId="{5B2C3894-F97E-4CAB-8812-5BB4D83AAC6A}" dt="2026-03-30T01:57:17.390" v="198" actId="1037"/>
+          <ac:spMkLst>
+            <pc:docMk/>
+            <pc:sldMk cId="4091973683" sldId="258"/>
+            <ac:spMk id="3" creationId="{96111037-67EC-63EE-A67F-AA1E7C0911D9}"/>
+          </ac:spMkLst>
+        </pc:spChg>
+        <pc:spChg chg="mod">
+          <ac:chgData name="musukie52@gmail.com" userId="017bd91f96aa8751" providerId="LiveId" clId="{5B2C3894-F97E-4CAB-8812-5BB4D83AAC6A}" dt="2026-03-30T01:56:43.608" v="181" actId="14100"/>
+          <ac:spMkLst>
+            <pc:docMk/>
+            <pc:sldMk cId="4091973683" sldId="258"/>
+            <ac:spMk id="4" creationId="{6BF04A61-4923-4C58-BA1E-50FED9DA6032}"/>
+          </ac:spMkLst>
+        </pc:spChg>
+        <pc:spChg chg="mod ord">
+          <ac:chgData name="musukie52@gmail.com" userId="017bd91f96aa8751" providerId="LiveId" clId="{5B2C3894-F97E-4CAB-8812-5BB4D83AAC6A}" dt="2026-03-30T02:13:55.937" v="283" actId="207"/>
+          <ac:spMkLst>
+            <pc:docMk/>
+            <pc:sldMk cId="4091973683" sldId="258"/>
+            <ac:spMk id="5" creationId="{E78D7B35-FFB4-AE3D-4059-8B5F3B129B29}"/>
+          </ac:spMkLst>
+        </pc:spChg>
+        <pc:spChg chg="ord">
+          <ac:chgData name="musukie52@gmail.com" userId="017bd91f96aa8751" providerId="LiveId" clId="{5B2C3894-F97E-4CAB-8812-5BB4D83AAC6A}" dt="2026-03-30T01:58:53.444" v="213" actId="166"/>
+          <ac:spMkLst>
+            <pc:docMk/>
+            <pc:sldMk cId="4091973683" sldId="258"/>
+            <ac:spMk id="6" creationId="{D3FD614B-B3D1-2799-2581-7E19812A71DD}"/>
+          </ac:spMkLst>
+        </pc:spChg>
+        <pc:spChg chg="add mod">
+          <ac:chgData name="musukie52@gmail.com" userId="017bd91f96aa8751" providerId="LiveId" clId="{5B2C3894-F97E-4CAB-8812-5BB4D83AAC6A}" dt="2026-03-30T01:57:35.744" v="201" actId="1076"/>
+          <ac:spMkLst>
+            <pc:docMk/>
+            <pc:sldMk cId="4091973683" sldId="258"/>
+            <ac:spMk id="7" creationId="{D64E15A3-EAED-CE12-FABD-B9C8CCC0C0F5}"/>
+          </ac:spMkLst>
+        </pc:spChg>
+        <pc:spChg chg="ord">
+          <ac:chgData name="musukie52@gmail.com" userId="017bd91f96aa8751" providerId="LiveId" clId="{5B2C3894-F97E-4CAB-8812-5BB4D83AAC6A}" dt="2026-03-30T01:58:53.444" v="213" actId="166"/>
+          <ac:spMkLst>
+            <pc:docMk/>
+            <pc:sldMk cId="4091973683" sldId="258"/>
+            <ac:spMk id="8" creationId="{BDC7C307-FB88-038B-F00C-AF4F7C6E0E27}"/>
+          </ac:spMkLst>
+        </pc:spChg>
+        <pc:spChg chg="ord">
+          <ac:chgData name="musukie52@gmail.com" userId="017bd91f96aa8751" providerId="LiveId" clId="{5B2C3894-F97E-4CAB-8812-5BB4D83AAC6A}" dt="2026-03-30T01:58:53.444" v="213" actId="166"/>
+          <ac:spMkLst>
+            <pc:docMk/>
+            <pc:sldMk cId="4091973683" sldId="258"/>
+            <ac:spMk id="9" creationId="{E413EA34-D317-596F-C3ED-0C7FE2696060}"/>
+          </ac:spMkLst>
+        </pc:spChg>
+        <pc:spChg chg="mod ord">
+          <ac:chgData name="musukie52@gmail.com" userId="017bd91f96aa8751" providerId="LiveId" clId="{5B2C3894-F97E-4CAB-8812-5BB4D83AAC6A}" dt="2026-03-30T02:18:23.219" v="312" actId="20577"/>
+          <ac:spMkLst>
+            <pc:docMk/>
+            <pc:sldMk cId="4091973683" sldId="258"/>
+            <ac:spMk id="10" creationId="{62BFBB14-C716-834C-6AD0-F0E2287E355A}"/>
+          </ac:spMkLst>
+        </pc:spChg>
+        <pc:spChg chg="del ord">
+          <ac:chgData name="musukie52@gmail.com" userId="017bd91f96aa8751" providerId="LiveId" clId="{5B2C3894-F97E-4CAB-8812-5BB4D83AAC6A}" dt="2026-03-30T02:10:06.306" v="258" actId="478"/>
+          <ac:spMkLst>
+            <pc:docMk/>
+            <pc:sldMk cId="4091973683" sldId="258"/>
+            <ac:spMk id="11" creationId="{F94B4076-1B67-5045-86AB-CD7350AA1560}"/>
+          </ac:spMkLst>
+        </pc:spChg>
+        <pc:spChg chg="ord">
+          <ac:chgData name="musukie52@gmail.com" userId="017bd91f96aa8751" providerId="LiveId" clId="{5B2C3894-F97E-4CAB-8812-5BB4D83AAC6A}" dt="2026-03-30T01:58:53.444" v="213" actId="166"/>
+          <ac:spMkLst>
+            <pc:docMk/>
+            <pc:sldMk cId="4091973683" sldId="258"/>
+            <ac:spMk id="14" creationId="{26BE3C65-3436-8099-22CC-BD47487B38E6}"/>
+          </ac:spMkLst>
+        </pc:spChg>
+        <pc:spChg chg="ord">
+          <ac:chgData name="musukie52@gmail.com" userId="017bd91f96aa8751" providerId="LiveId" clId="{5B2C3894-F97E-4CAB-8812-5BB4D83AAC6A}" dt="2026-03-30T01:58:53.444" v="213" actId="166"/>
+          <ac:spMkLst>
+            <pc:docMk/>
+            <pc:sldMk cId="4091973683" sldId="258"/>
+            <ac:spMk id="16" creationId="{F5F303D5-2F6F-1585-A736-4F94BC3CC874}"/>
+          </ac:spMkLst>
+        </pc:spChg>
+        <pc:spChg chg="ord">
+          <ac:chgData name="musukie52@gmail.com" userId="017bd91f96aa8751" providerId="LiveId" clId="{5B2C3894-F97E-4CAB-8812-5BB4D83AAC6A}" dt="2026-03-30T01:58:53.444" v="213" actId="166"/>
+          <ac:spMkLst>
+            <pc:docMk/>
+            <pc:sldMk cId="4091973683" sldId="258"/>
+            <ac:spMk id="18" creationId="{F8B62E21-B0C9-CE94-7A9A-07D8D4C68B8E}"/>
+          </ac:spMkLst>
+        </pc:spChg>
+        <pc:spChg chg="del">
+          <ac:chgData name="musukie52@gmail.com" userId="017bd91f96aa8751" providerId="LiveId" clId="{5B2C3894-F97E-4CAB-8812-5BB4D83AAC6A}" dt="2026-03-30T02:19:21.266" v="353" actId="478"/>
+          <ac:spMkLst>
+            <pc:docMk/>
+            <pc:sldMk cId="4091973683" sldId="258"/>
+            <ac:spMk id="19" creationId="{5C59755A-FE78-8634-7A4D-88039FA0FCC9}"/>
+          </ac:spMkLst>
+        </pc:spChg>
+        <pc:spChg chg="ord">
+          <ac:chgData name="musukie52@gmail.com" userId="017bd91f96aa8751" providerId="LiveId" clId="{5B2C3894-F97E-4CAB-8812-5BB4D83AAC6A}" dt="2026-03-30T01:58:53.444" v="213" actId="166"/>
+          <ac:spMkLst>
+            <pc:docMk/>
+            <pc:sldMk cId="4091973683" sldId="258"/>
+            <ac:spMk id="20" creationId="{AE514579-EFB6-D419-82FA-AF51F61CAE56}"/>
+          </ac:spMkLst>
+        </pc:spChg>
+        <pc:spChg chg="del">
+          <ac:chgData name="musukie52@gmail.com" userId="017bd91f96aa8751" providerId="LiveId" clId="{5B2C3894-F97E-4CAB-8812-5BB4D83AAC6A}" dt="2026-03-30T01:59:35.687" v="215" actId="478"/>
+          <ac:spMkLst>
+            <pc:docMk/>
+            <pc:sldMk cId="4091973683" sldId="258"/>
+            <ac:spMk id="21" creationId="{39B6332B-0BF6-7504-A901-6F9D3FF6A4E9}"/>
+          </ac:spMkLst>
+        </pc:spChg>
+        <pc:spChg chg="add mod">
+          <ac:chgData name="musukie52@gmail.com" userId="017bd91f96aa8751" providerId="LiveId" clId="{5B2C3894-F97E-4CAB-8812-5BB4D83AAC6A}" dt="2026-03-30T01:57:50.669" v="204" actId="1076"/>
+          <ac:spMkLst>
+            <pc:docMk/>
+            <pc:sldMk cId="4091973683" sldId="258"/>
+            <ac:spMk id="22" creationId="{7B2E6166-D437-EDF9-79CD-F9ABC98681E7}"/>
+          </ac:spMkLst>
+        </pc:spChg>
+        <pc:spChg chg="add mod">
+          <ac:chgData name="musukie52@gmail.com" userId="017bd91f96aa8751" providerId="LiveId" clId="{5B2C3894-F97E-4CAB-8812-5BB4D83AAC6A}" dt="2026-03-30T01:58:04.455" v="207" actId="14100"/>
+          <ac:spMkLst>
+            <pc:docMk/>
+            <pc:sldMk cId="4091973683" sldId="258"/>
+            <ac:spMk id="23" creationId="{B368189A-2355-D5A5-2EC1-AAC4C80DC5B2}"/>
+          </ac:spMkLst>
+        </pc:spChg>
+        <pc:spChg chg="add mod">
+          <ac:chgData name="musukie52@gmail.com" userId="017bd91f96aa8751" providerId="LiveId" clId="{5B2C3894-F97E-4CAB-8812-5BB4D83AAC6A}" dt="2026-03-30T01:58:17.098" v="210" actId="14100"/>
+          <ac:spMkLst>
+            <pc:docMk/>
+            <pc:sldMk cId="4091973683" sldId="258"/>
+            <ac:spMk id="24" creationId="{97168B62-7E91-318B-24CE-AB1BC3B02533}"/>
+          </ac:spMkLst>
+        </pc:spChg>
+        <pc:spChg chg="add mod">
+          <ac:chgData name="musukie52@gmail.com" userId="017bd91f96aa8751" providerId="LiveId" clId="{5B2C3894-F97E-4CAB-8812-5BB4D83AAC6A}" dt="2026-03-30T02:00:01.777" v="257" actId="20577"/>
+          <ac:spMkLst>
+            <pc:docMk/>
+            <pc:sldMk cId="4091973683" sldId="258"/>
+            <ac:spMk id="25" creationId="{4F69904C-EC4D-C12D-19BD-EB2390B91B9C}"/>
+          </ac:spMkLst>
+        </pc:spChg>
+        <pc:spChg chg="add mod">
+          <ac:chgData name="musukie52@gmail.com" userId="017bd91f96aa8751" providerId="LiveId" clId="{5B2C3894-F97E-4CAB-8812-5BB4D83AAC6A}" dt="2026-03-30T02:10:41.977" v="280" actId="20577"/>
+          <ac:spMkLst>
+            <pc:docMk/>
+            <pc:sldMk cId="4091973683" sldId="258"/>
+            <ac:spMk id="26" creationId="{FD3CE820-3ACC-CAD9-7460-F158E59EE393}"/>
+          </ac:spMkLst>
+        </pc:spChg>
+        <pc:spChg chg="add mod">
+          <ac:chgData name="musukie52@gmail.com" userId="017bd91f96aa8751" providerId="LiveId" clId="{5B2C3894-F97E-4CAB-8812-5BB4D83AAC6A}" dt="2026-03-30T02:19:09.760" v="352" actId="1076"/>
+          <ac:spMkLst>
+            <pc:docMk/>
+            <pc:sldMk cId="4091973683" sldId="258"/>
+            <ac:spMk id="27" creationId="{0A393C18-E6DB-CEE8-AC60-F383BCB35996}"/>
+          </ac:spMkLst>
+        </pc:spChg>
+        <pc:spChg chg="add mod">
+          <ac:chgData name="musukie52@gmail.com" userId="017bd91f96aa8751" providerId="LiveId" clId="{5B2C3894-F97E-4CAB-8812-5BB4D83AAC6A}" dt="2026-03-30T02:20:20.253" v="383" actId="20577"/>
+          <ac:spMkLst>
+            <pc:docMk/>
+            <pc:sldMk cId="4091973683" sldId="258"/>
+            <ac:spMk id="28" creationId="{C3EFCE05-692B-69A3-A2AF-1D2591CD36DA}"/>
+          </ac:spMkLst>
+        </pc:spChg>
+        <pc:spChg chg="add mod">
+          <ac:chgData name="musukie52@gmail.com" userId="017bd91f96aa8751" providerId="LiveId" clId="{5B2C3894-F97E-4CAB-8812-5BB4D83AAC6A}" dt="2026-03-30T02:20:41.255" v="423" actId="20577"/>
+          <ac:spMkLst>
+            <pc:docMk/>
+            <pc:sldMk cId="4091973683" sldId="258"/>
+            <ac:spMk id="29" creationId="{6ACADD41-7720-83F3-AEEC-14895C32BE4B}"/>
+          </ac:spMkLst>
+        </pc:spChg>
+        <pc:spChg chg="del">
+          <ac:chgData name="musukie52@gmail.com" userId="017bd91f96aa8751" providerId="LiveId" clId="{5B2C3894-F97E-4CAB-8812-5BB4D83AAC6A}" dt="2026-03-30T01:55:54.375" v="177" actId="478"/>
+          <ac:spMkLst>
+            <pc:docMk/>
+            <pc:sldMk cId="4091973683" sldId="258"/>
+            <ac:spMk id="33" creationId="{766406AA-BF1A-F69C-3FB3-B092A283DD44}"/>
+          </ac:spMkLst>
+        </pc:spChg>
+        <pc:spChg chg="del">
+          <ac:chgData name="musukie52@gmail.com" userId="017bd91f96aa8751" providerId="LiveId" clId="{5B2C3894-F97E-4CAB-8812-5BB4D83AAC6A}" dt="2026-03-30T01:55:52.613" v="176" actId="478"/>
+          <ac:spMkLst>
+            <pc:docMk/>
+            <pc:sldMk cId="4091973683" sldId="258"/>
+            <ac:spMk id="34" creationId="{499F7333-F174-6456-AF12-09A75590C99D}"/>
+          </ac:spMkLst>
+        </pc:spChg>
+        <pc:spChg chg="del">
+          <ac:chgData name="musukie52@gmail.com" userId="017bd91f96aa8751" providerId="LiveId" clId="{5B2C3894-F97E-4CAB-8812-5BB4D83AAC6A}" dt="2026-03-30T01:55:51.788" v="175" actId="478"/>
+          <ac:spMkLst>
+            <pc:docMk/>
+            <pc:sldMk cId="4091973683" sldId="258"/>
+            <ac:spMk id="35" creationId="{54C3C0D3-CB36-96C1-C639-481AA3A25125}"/>
+          </ac:spMkLst>
+        </pc:spChg>
+        <pc:spChg chg="del">
+          <ac:chgData name="musukie52@gmail.com" userId="017bd91f96aa8751" providerId="LiveId" clId="{5B2C3894-F97E-4CAB-8812-5BB4D83AAC6A}" dt="2026-03-30T01:55:50.641" v="174" actId="478"/>
+          <ac:spMkLst>
+            <pc:docMk/>
+            <pc:sldMk cId="4091973683" sldId="258"/>
+            <ac:spMk id="36" creationId="{C4181032-F4F6-1605-FA97-CCE7F60C1EBF}"/>
+          </ac:spMkLst>
+        </pc:spChg>
+        <pc:spChg chg="del">
+          <ac:chgData name="musukie52@gmail.com" userId="017bd91f96aa8751" providerId="LiveId" clId="{5B2C3894-F97E-4CAB-8812-5BB4D83AAC6A}" dt="2026-03-30T01:55:49.961" v="173" actId="478"/>
+          <ac:spMkLst>
+            <pc:docMk/>
+            <pc:sldMk cId="4091973683" sldId="258"/>
+            <ac:spMk id="37" creationId="{10CB756F-ADF5-01AD-5D23-A72820AE19A4}"/>
+          </ac:spMkLst>
+        </pc:spChg>
+      </pc:sldChg>
+      <pc:sldChg chg="addSp new mod">
+        <pc:chgData name="musukie52@gmail.com" userId="017bd91f96aa8751" providerId="LiveId" clId="{5B2C3894-F97E-4CAB-8812-5BB4D83AAC6A}" dt="2026-03-30T02:20:51.827" v="425" actId="22"/>
+        <pc:sldMkLst>
+          <pc:docMk/>
+          <pc:sldMk cId="3102480730" sldId="259"/>
+        </pc:sldMkLst>
+        <pc:picChg chg="add">
+          <ac:chgData name="musukie52@gmail.com" userId="017bd91f96aa8751" providerId="LiveId" clId="{5B2C3894-F97E-4CAB-8812-5BB4D83AAC6A}" dt="2026-03-30T02:20:51.827" v="425" actId="22"/>
+          <ac:picMkLst>
+            <pc:docMk/>
+            <pc:sldMk cId="3102480730" sldId="259"/>
+            <ac:picMk id="5" creationId="{9BB5BBA8-1E41-8F9A-A1F1-A6F0D5787EC6}"/>
+          </ac:picMkLst>
+        </pc:picChg>
+      </pc:sldChg>
+      <pc:sldChg chg="addSp new mod">
+        <pc:chgData name="musukie52@gmail.com" userId="017bd91f96aa8751" providerId="LiveId" clId="{5B2C3894-F97E-4CAB-8812-5BB4D83AAC6A}" dt="2026-03-30T02:21:04.926" v="427" actId="22"/>
+        <pc:sldMkLst>
+          <pc:docMk/>
+          <pc:sldMk cId="1706705401" sldId="260"/>
+        </pc:sldMkLst>
+        <pc:picChg chg="add">
+          <ac:chgData name="musukie52@gmail.com" userId="017bd91f96aa8751" providerId="LiveId" clId="{5B2C3894-F97E-4CAB-8812-5BB4D83AAC6A}" dt="2026-03-30T02:21:04.926" v="427" actId="22"/>
+          <ac:picMkLst>
+            <pc:docMk/>
+            <pc:sldMk cId="1706705401" sldId="260"/>
+            <ac:picMk id="5" creationId="{72F39C75-ACE8-C326-62EB-678B363BC616}"/>
+          </ac:picMkLst>
+        </pc:picChg>
+      </pc:sldChg>
+      <pc:sldChg chg="addSp new mod">
+        <pc:chgData name="musukie52@gmail.com" userId="017bd91f96aa8751" providerId="LiveId" clId="{5B2C3894-F97E-4CAB-8812-5BB4D83AAC6A}" dt="2026-03-30T02:21:16.645" v="429" actId="22"/>
+        <pc:sldMkLst>
+          <pc:docMk/>
+          <pc:sldMk cId="1028470326" sldId="261"/>
+        </pc:sldMkLst>
+        <pc:picChg chg="add">
+          <ac:chgData name="musukie52@gmail.com" userId="017bd91f96aa8751" providerId="LiveId" clId="{5B2C3894-F97E-4CAB-8812-5BB4D83AAC6A}" dt="2026-03-30T02:21:16.645" v="429" actId="22"/>
+          <ac:picMkLst>
+            <pc:docMk/>
+            <pc:sldMk cId="1028470326" sldId="261"/>
+            <ac:picMk id="5" creationId="{72FEF2FE-BCAC-46EA-34FB-C2003C6A8194}"/>
+          </ac:picMkLst>
+        </pc:picChg>
+      </pc:sldChg>
+    </pc:docChg>
+  </pc:docChgLst>
+</pc:chgInfo>
+</file>
+
 <file path=ppt/slideLayouts/slideLayout1.xml><?xml version="1.0" encoding="utf-8"?>
 <p:sldLayout xmlns:a="http://schemas.openxmlformats.org/drawingml/2006/main" xmlns:r="http://schemas.openxmlformats.org/officeDocument/2006/relationships" xmlns:p="http://schemas.openxmlformats.org/presentationml/2006/main" type="title" preserve="1">
   <p:cSld name="제목 슬라이드">
@@ -155,10 +712,9 @@
           </a:lstStyle>
           <a:p>
             <a:r>
-              <a:rPr lang="ko-KR" altLang="en-US" smtClean="0"/>
+              <a:rPr lang="ko-KR" altLang="en-US"/>
               <a:t>마스터 제목 스타일 편집</a:t>
             </a:r>
-            <a:endParaRPr lang="ko-KR" altLang="en-US"/>
           </a:p>
         </p:txBody>
       </p:sp>
@@ -220,10 +776,9 @@
           </a:lstStyle>
           <a:p>
             <a:r>
-              <a:rPr lang="ko-KR" altLang="en-US" smtClean="0"/>
+              <a:rPr lang="ko-KR" altLang="en-US"/>
               <a:t>클릭하여 마스터 부제목 스타일 편집</a:t>
             </a:r>
-            <a:endParaRPr lang="ko-KR" altLang="en-US"/>
           </a:p>
         </p:txBody>
       </p:sp>
@@ -244,7 +799,7 @@
           <a:p>
             <a:fld id="{1F511268-C062-4462-9948-2814E8F03C39}" type="datetimeFigureOut">
               <a:rPr lang="ko-KR" altLang="en-US" smtClean="0"/>
-              <a:t>2026-03-27</a:t>
+              <a:t>2026-03-30</a:t>
             </a:fld>
             <a:endParaRPr lang="ko-KR" altLang="en-US"/>
           </a:p>
@@ -338,10 +893,9 @@
           <a:lstStyle/>
           <a:p>
             <a:r>
-              <a:rPr lang="ko-KR" altLang="en-US" smtClean="0"/>
+              <a:rPr lang="ko-KR" altLang="en-US"/>
               <a:t>마스터 제목 스타일 편집</a:t>
             </a:r>
-            <a:endParaRPr lang="ko-KR" altLang="en-US"/>
           </a:p>
         </p:txBody>
       </p:sp>
@@ -362,38 +916,37 @@
           <a:p>
             <a:pPr lvl="0"/>
             <a:r>
-              <a:rPr lang="ko-KR" altLang="en-US" smtClean="0"/>
+              <a:rPr lang="ko-KR" altLang="en-US"/>
               <a:t>마스터 텍스트 스타일 편집</a:t>
             </a:r>
           </a:p>
           <a:p>
             <a:pPr lvl="1"/>
             <a:r>
-              <a:rPr lang="ko-KR" altLang="en-US" smtClean="0"/>
+              <a:rPr lang="ko-KR" altLang="en-US"/>
               <a:t>둘째 수준</a:t>
             </a:r>
           </a:p>
           <a:p>
             <a:pPr lvl="2"/>
             <a:r>
-              <a:rPr lang="ko-KR" altLang="en-US" smtClean="0"/>
+              <a:rPr lang="ko-KR" altLang="en-US"/>
               <a:t>셋째 수준</a:t>
             </a:r>
           </a:p>
           <a:p>
             <a:pPr lvl="3"/>
             <a:r>
-              <a:rPr lang="ko-KR" altLang="en-US" smtClean="0"/>
+              <a:rPr lang="ko-KR" altLang="en-US"/>
               <a:t>넷째 수준</a:t>
             </a:r>
           </a:p>
           <a:p>
             <a:pPr lvl="4"/>
             <a:r>
-              <a:rPr lang="ko-KR" altLang="en-US" smtClean="0"/>
+              <a:rPr lang="ko-KR" altLang="en-US"/>
               <a:t>다섯째 수준</a:t>
             </a:r>
-            <a:endParaRPr lang="ko-KR" altLang="en-US"/>
           </a:p>
         </p:txBody>
       </p:sp>
@@ -414,7 +967,7 @@
           <a:p>
             <a:fld id="{1F511268-C062-4462-9948-2814E8F03C39}" type="datetimeFigureOut">
               <a:rPr lang="ko-KR" altLang="en-US" smtClean="0"/>
-              <a:t>2026-03-27</a:t>
+              <a:t>2026-03-30</a:t>
             </a:fld>
             <a:endParaRPr lang="ko-KR" altLang="en-US"/>
           </a:p>
@@ -513,10 +1066,9 @@
           <a:lstStyle/>
           <a:p>
             <a:r>
-              <a:rPr lang="ko-KR" altLang="en-US" smtClean="0"/>
+              <a:rPr lang="ko-KR" altLang="en-US"/>
               <a:t>마스터 제목 스타일 편집</a:t>
             </a:r>
-            <a:endParaRPr lang="ko-KR" altLang="en-US"/>
           </a:p>
         </p:txBody>
       </p:sp>
@@ -542,38 +1094,37 @@
           <a:p>
             <a:pPr lvl="0"/>
             <a:r>
-              <a:rPr lang="ko-KR" altLang="en-US" smtClean="0"/>
+              <a:rPr lang="ko-KR" altLang="en-US"/>
               <a:t>마스터 텍스트 스타일 편집</a:t>
             </a:r>
           </a:p>
           <a:p>
             <a:pPr lvl="1"/>
             <a:r>
-              <a:rPr lang="ko-KR" altLang="en-US" smtClean="0"/>
+              <a:rPr lang="ko-KR" altLang="en-US"/>
               <a:t>둘째 수준</a:t>
             </a:r>
           </a:p>
           <a:p>
             <a:pPr lvl="2"/>
             <a:r>
-              <a:rPr lang="ko-KR" altLang="en-US" smtClean="0"/>
+              <a:rPr lang="ko-KR" altLang="en-US"/>
               <a:t>셋째 수준</a:t>
             </a:r>
           </a:p>
           <a:p>
             <a:pPr lvl="3"/>
             <a:r>
-              <a:rPr lang="ko-KR" altLang="en-US" smtClean="0"/>
+              <a:rPr lang="ko-KR" altLang="en-US"/>
               <a:t>넷째 수준</a:t>
             </a:r>
           </a:p>
           <a:p>
             <a:pPr lvl="4"/>
             <a:r>
-              <a:rPr lang="ko-KR" altLang="en-US" smtClean="0"/>
+              <a:rPr lang="ko-KR" altLang="en-US"/>
               <a:t>다섯째 수준</a:t>
             </a:r>
-            <a:endParaRPr lang="ko-KR" altLang="en-US"/>
           </a:p>
         </p:txBody>
       </p:sp>
@@ -594,7 +1145,7 @@
           <a:p>
             <a:fld id="{1F511268-C062-4462-9948-2814E8F03C39}" type="datetimeFigureOut">
               <a:rPr lang="ko-KR" altLang="en-US" smtClean="0"/>
-              <a:t>2026-03-27</a:t>
+              <a:t>2026-03-30</a:t>
             </a:fld>
             <a:endParaRPr lang="ko-KR" altLang="en-US"/>
           </a:p>
@@ -688,10 +1239,9 @@
           <a:lstStyle/>
           <a:p>
             <a:r>
-              <a:rPr lang="ko-KR" altLang="en-US" smtClean="0"/>
+              <a:rPr lang="ko-KR" altLang="en-US"/>
               <a:t>마스터 제목 스타일 편집</a:t>
             </a:r>
-            <a:endParaRPr lang="ko-KR" altLang="en-US"/>
           </a:p>
         </p:txBody>
       </p:sp>
@@ -712,38 +1262,37 @@
           <a:p>
             <a:pPr lvl="0"/>
             <a:r>
-              <a:rPr lang="ko-KR" altLang="en-US" smtClean="0"/>
+              <a:rPr lang="ko-KR" altLang="en-US"/>
               <a:t>마스터 텍스트 스타일 편집</a:t>
             </a:r>
           </a:p>
           <a:p>
             <a:pPr lvl="1"/>
             <a:r>
-              <a:rPr lang="ko-KR" altLang="en-US" smtClean="0"/>
+              <a:rPr lang="ko-KR" altLang="en-US"/>
               <a:t>둘째 수준</a:t>
             </a:r>
           </a:p>
           <a:p>
             <a:pPr lvl="2"/>
             <a:r>
-              <a:rPr lang="ko-KR" altLang="en-US" smtClean="0"/>
+              <a:rPr lang="ko-KR" altLang="en-US"/>
               <a:t>셋째 수준</a:t>
             </a:r>
           </a:p>
           <a:p>
             <a:pPr lvl="3"/>
             <a:r>
-              <a:rPr lang="ko-KR" altLang="en-US" smtClean="0"/>
+              <a:rPr lang="ko-KR" altLang="en-US"/>
               <a:t>넷째 수준</a:t>
             </a:r>
           </a:p>
           <a:p>
             <a:pPr lvl="4"/>
             <a:r>
-              <a:rPr lang="ko-KR" altLang="en-US" smtClean="0"/>
+              <a:rPr lang="ko-KR" altLang="en-US"/>
               <a:t>다섯째 수준</a:t>
             </a:r>
-            <a:endParaRPr lang="ko-KR" altLang="en-US"/>
           </a:p>
         </p:txBody>
       </p:sp>
@@ -764,7 +1313,7 @@
           <a:p>
             <a:fld id="{1F511268-C062-4462-9948-2814E8F03C39}" type="datetimeFigureOut">
               <a:rPr lang="ko-KR" altLang="en-US" smtClean="0"/>
-              <a:t>2026-03-27</a:t>
+              <a:t>2026-03-30</a:t>
             </a:fld>
             <a:endParaRPr lang="ko-KR" altLang="en-US"/>
           </a:p>
@@ -867,10 +1416,9 @@
           </a:lstStyle>
           <a:p>
             <a:r>
-              <a:rPr lang="ko-KR" altLang="en-US" smtClean="0"/>
+              <a:rPr lang="ko-KR" altLang="en-US"/>
               <a:t>마스터 제목 스타일 편집</a:t>
             </a:r>
-            <a:endParaRPr lang="ko-KR" altLang="en-US"/>
           </a:p>
         </p:txBody>
       </p:sp>
@@ -987,7 +1535,7 @@
           <a:p>
             <a:pPr lvl="0"/>
             <a:r>
-              <a:rPr lang="ko-KR" altLang="en-US" smtClean="0"/>
+              <a:rPr lang="ko-KR" altLang="en-US"/>
               <a:t>마스터 텍스트 스타일 편집</a:t>
             </a:r>
           </a:p>
@@ -1010,7 +1558,7 @@
           <a:p>
             <a:fld id="{1F511268-C062-4462-9948-2814E8F03C39}" type="datetimeFigureOut">
               <a:rPr lang="ko-KR" altLang="en-US" smtClean="0"/>
-              <a:t>2026-03-27</a:t>
+              <a:t>2026-03-30</a:t>
             </a:fld>
             <a:endParaRPr lang="ko-KR" altLang="en-US"/>
           </a:p>
@@ -1104,10 +1652,9 @@
           <a:lstStyle/>
           <a:p>
             <a:r>
-              <a:rPr lang="ko-KR" altLang="en-US" smtClean="0"/>
+              <a:rPr lang="ko-KR" altLang="en-US"/>
               <a:t>마스터 제목 스타일 편집</a:t>
             </a:r>
-            <a:endParaRPr lang="ko-KR" altLang="en-US"/>
           </a:p>
         </p:txBody>
       </p:sp>
@@ -1133,38 +1680,37 @@
           <a:p>
             <a:pPr lvl="0"/>
             <a:r>
-              <a:rPr lang="ko-KR" altLang="en-US" smtClean="0"/>
+              <a:rPr lang="ko-KR" altLang="en-US"/>
               <a:t>마스터 텍스트 스타일 편집</a:t>
             </a:r>
           </a:p>
           <a:p>
             <a:pPr lvl="1"/>
             <a:r>
-              <a:rPr lang="ko-KR" altLang="en-US" smtClean="0"/>
+              <a:rPr lang="ko-KR" altLang="en-US"/>
               <a:t>둘째 수준</a:t>
             </a:r>
           </a:p>
           <a:p>
             <a:pPr lvl="2"/>
             <a:r>
-              <a:rPr lang="ko-KR" altLang="en-US" smtClean="0"/>
+              <a:rPr lang="ko-KR" altLang="en-US"/>
               <a:t>셋째 수준</a:t>
             </a:r>
           </a:p>
           <a:p>
             <a:pPr lvl="3"/>
             <a:r>
-              <a:rPr lang="ko-KR" altLang="en-US" smtClean="0"/>
+              <a:rPr lang="ko-KR" altLang="en-US"/>
               <a:t>넷째 수준</a:t>
             </a:r>
           </a:p>
           <a:p>
             <a:pPr lvl="4"/>
             <a:r>
-              <a:rPr lang="ko-KR" altLang="en-US" smtClean="0"/>
+              <a:rPr lang="ko-KR" altLang="en-US"/>
               <a:t>다섯째 수준</a:t>
             </a:r>
-            <a:endParaRPr lang="ko-KR" altLang="en-US"/>
           </a:p>
         </p:txBody>
       </p:sp>
@@ -1190,38 +1736,37 @@
           <a:p>
             <a:pPr lvl="0"/>
             <a:r>
-              <a:rPr lang="ko-KR" altLang="en-US" smtClean="0"/>
+              <a:rPr lang="ko-KR" altLang="en-US"/>
               <a:t>마스터 텍스트 스타일 편집</a:t>
             </a:r>
           </a:p>
           <a:p>
             <a:pPr lvl="1"/>
             <a:r>
-              <a:rPr lang="ko-KR" altLang="en-US" smtClean="0"/>
+              <a:rPr lang="ko-KR" altLang="en-US"/>
               <a:t>둘째 수준</a:t>
             </a:r>
           </a:p>
           <a:p>
             <a:pPr lvl="2"/>
             <a:r>
-              <a:rPr lang="ko-KR" altLang="en-US" smtClean="0"/>
+              <a:rPr lang="ko-KR" altLang="en-US"/>
               <a:t>셋째 수준</a:t>
             </a:r>
           </a:p>
           <a:p>
             <a:pPr lvl="3"/>
             <a:r>
-              <a:rPr lang="ko-KR" altLang="en-US" smtClean="0"/>
+              <a:rPr lang="ko-KR" altLang="en-US"/>
               <a:t>넷째 수준</a:t>
             </a:r>
           </a:p>
           <a:p>
             <a:pPr lvl="4"/>
             <a:r>
-              <a:rPr lang="ko-KR" altLang="en-US" smtClean="0"/>
+              <a:rPr lang="ko-KR" altLang="en-US"/>
               <a:t>다섯째 수준</a:t>
             </a:r>
-            <a:endParaRPr lang="ko-KR" altLang="en-US"/>
           </a:p>
         </p:txBody>
       </p:sp>
@@ -1242,7 +1787,7 @@
           <a:p>
             <a:fld id="{1F511268-C062-4462-9948-2814E8F03C39}" type="datetimeFigureOut">
               <a:rPr lang="ko-KR" altLang="en-US" smtClean="0"/>
-              <a:t>2026-03-27</a:t>
+              <a:t>2026-03-30</a:t>
             </a:fld>
             <a:endParaRPr lang="ko-KR" altLang="en-US"/>
           </a:p>
@@ -1341,10 +1886,9 @@
           <a:lstStyle/>
           <a:p>
             <a:r>
-              <a:rPr lang="ko-KR" altLang="en-US" smtClean="0"/>
+              <a:rPr lang="ko-KR" altLang="en-US"/>
               <a:t>마스터 제목 스타일 편집</a:t>
             </a:r>
-            <a:endParaRPr lang="ko-KR" altLang="en-US"/>
           </a:p>
         </p:txBody>
       </p:sp>
@@ -1407,7 +1951,7 @@
           <a:p>
             <a:pPr lvl="0"/>
             <a:r>
-              <a:rPr lang="ko-KR" altLang="en-US" smtClean="0"/>
+              <a:rPr lang="ko-KR" altLang="en-US"/>
               <a:t>마스터 텍스트 스타일 편집</a:t>
             </a:r>
           </a:p>
@@ -1435,38 +1979,37 @@
           <a:p>
             <a:pPr lvl="0"/>
             <a:r>
-              <a:rPr lang="ko-KR" altLang="en-US" smtClean="0"/>
+              <a:rPr lang="ko-KR" altLang="en-US"/>
               <a:t>마스터 텍스트 스타일 편집</a:t>
             </a:r>
           </a:p>
           <a:p>
             <a:pPr lvl="1"/>
             <a:r>
-              <a:rPr lang="ko-KR" altLang="en-US" smtClean="0"/>
+              <a:rPr lang="ko-KR" altLang="en-US"/>
               <a:t>둘째 수준</a:t>
             </a:r>
           </a:p>
           <a:p>
             <a:pPr lvl="2"/>
             <a:r>
-              <a:rPr lang="ko-KR" altLang="en-US" smtClean="0"/>
+              <a:rPr lang="ko-KR" altLang="en-US"/>
               <a:t>셋째 수준</a:t>
             </a:r>
           </a:p>
           <a:p>
             <a:pPr lvl="3"/>
             <a:r>
-              <a:rPr lang="ko-KR" altLang="en-US" smtClean="0"/>
+              <a:rPr lang="ko-KR" altLang="en-US"/>
               <a:t>넷째 수준</a:t>
             </a:r>
           </a:p>
           <a:p>
             <a:pPr lvl="4"/>
             <a:r>
-              <a:rPr lang="ko-KR" altLang="en-US" smtClean="0"/>
+              <a:rPr lang="ko-KR" altLang="en-US"/>
               <a:t>다섯째 수준</a:t>
             </a:r>
-            <a:endParaRPr lang="ko-KR" altLang="en-US"/>
           </a:p>
         </p:txBody>
       </p:sp>
@@ -1529,7 +2072,7 @@
           <a:p>
             <a:pPr lvl="0"/>
             <a:r>
-              <a:rPr lang="ko-KR" altLang="en-US" smtClean="0"/>
+              <a:rPr lang="ko-KR" altLang="en-US"/>
               <a:t>마스터 텍스트 스타일 편집</a:t>
             </a:r>
           </a:p>
@@ -1557,38 +2100,37 @@
           <a:p>
             <a:pPr lvl="0"/>
             <a:r>
-              <a:rPr lang="ko-KR" altLang="en-US" smtClean="0"/>
+              <a:rPr lang="ko-KR" altLang="en-US"/>
               <a:t>마스터 텍스트 스타일 편집</a:t>
             </a:r>
           </a:p>
           <a:p>
             <a:pPr lvl="1"/>
             <a:r>
-              <a:rPr lang="ko-KR" altLang="en-US" smtClean="0"/>
+              <a:rPr lang="ko-KR" altLang="en-US"/>
               <a:t>둘째 수준</a:t>
             </a:r>
           </a:p>
           <a:p>
             <a:pPr lvl="2"/>
             <a:r>
-              <a:rPr lang="ko-KR" altLang="en-US" smtClean="0"/>
+              <a:rPr lang="ko-KR" altLang="en-US"/>
               <a:t>셋째 수준</a:t>
             </a:r>
           </a:p>
           <a:p>
             <a:pPr lvl="3"/>
             <a:r>
-              <a:rPr lang="ko-KR" altLang="en-US" smtClean="0"/>
+              <a:rPr lang="ko-KR" altLang="en-US"/>
               <a:t>넷째 수준</a:t>
             </a:r>
           </a:p>
           <a:p>
             <a:pPr lvl="4"/>
             <a:r>
-              <a:rPr lang="ko-KR" altLang="en-US" smtClean="0"/>
+              <a:rPr lang="ko-KR" altLang="en-US"/>
               <a:t>다섯째 수준</a:t>
             </a:r>
-            <a:endParaRPr lang="ko-KR" altLang="en-US"/>
           </a:p>
         </p:txBody>
       </p:sp>
@@ -1609,7 +2151,7 @@
           <a:p>
             <a:fld id="{1F511268-C062-4462-9948-2814E8F03C39}" type="datetimeFigureOut">
               <a:rPr lang="ko-KR" altLang="en-US" smtClean="0"/>
-              <a:t>2026-03-27</a:t>
+              <a:t>2026-03-30</a:t>
             </a:fld>
             <a:endParaRPr lang="ko-KR" altLang="en-US"/>
           </a:p>
@@ -1703,10 +2245,9 @@
           <a:lstStyle/>
           <a:p>
             <a:r>
-              <a:rPr lang="ko-KR" altLang="en-US" smtClean="0"/>
+              <a:rPr lang="ko-KR" altLang="en-US"/>
               <a:t>마스터 제목 스타일 편집</a:t>
             </a:r>
-            <a:endParaRPr lang="ko-KR" altLang="en-US"/>
           </a:p>
         </p:txBody>
       </p:sp>
@@ -1727,7 +2268,7 @@
           <a:p>
             <a:fld id="{1F511268-C062-4462-9948-2814E8F03C39}" type="datetimeFigureOut">
               <a:rPr lang="ko-KR" altLang="en-US" smtClean="0"/>
-              <a:t>2026-03-27</a:t>
+              <a:t>2026-03-30</a:t>
             </a:fld>
             <a:endParaRPr lang="ko-KR" altLang="en-US"/>
           </a:p>
@@ -1822,7 +2363,7 @@
           <a:p>
             <a:fld id="{1F511268-C062-4462-9948-2814E8F03C39}" type="datetimeFigureOut">
               <a:rPr lang="ko-KR" altLang="en-US" smtClean="0"/>
-              <a:t>2026-03-27</a:t>
+              <a:t>2026-03-30</a:t>
             </a:fld>
             <a:endParaRPr lang="ko-KR" altLang="en-US"/>
           </a:p>
@@ -1925,10 +2466,9 @@
           </a:lstStyle>
           <a:p>
             <a:r>
-              <a:rPr lang="ko-KR" altLang="en-US" smtClean="0"/>
+              <a:rPr lang="ko-KR" altLang="en-US"/>
               <a:t>마스터 제목 스타일 편집</a:t>
             </a:r>
-            <a:endParaRPr lang="ko-KR" altLang="en-US"/>
           </a:p>
         </p:txBody>
       </p:sp>
@@ -1982,38 +2522,37 @@
           <a:p>
             <a:pPr lvl="0"/>
             <a:r>
-              <a:rPr lang="ko-KR" altLang="en-US" smtClean="0"/>
+              <a:rPr lang="ko-KR" altLang="en-US"/>
               <a:t>마스터 텍스트 스타일 편집</a:t>
             </a:r>
           </a:p>
           <a:p>
             <a:pPr lvl="1"/>
             <a:r>
-              <a:rPr lang="ko-KR" altLang="en-US" smtClean="0"/>
+              <a:rPr lang="ko-KR" altLang="en-US"/>
               <a:t>둘째 수준</a:t>
             </a:r>
           </a:p>
           <a:p>
             <a:pPr lvl="2"/>
             <a:r>
-              <a:rPr lang="ko-KR" altLang="en-US" smtClean="0"/>
+              <a:rPr lang="ko-KR" altLang="en-US"/>
               <a:t>셋째 수준</a:t>
             </a:r>
           </a:p>
           <a:p>
             <a:pPr lvl="3"/>
             <a:r>
-              <a:rPr lang="ko-KR" altLang="en-US" smtClean="0"/>
+              <a:rPr lang="ko-KR" altLang="en-US"/>
               <a:t>넷째 수준</a:t>
             </a:r>
           </a:p>
           <a:p>
             <a:pPr lvl="4"/>
             <a:r>
-              <a:rPr lang="ko-KR" altLang="en-US" smtClean="0"/>
+              <a:rPr lang="ko-KR" altLang="en-US"/>
               <a:t>다섯째 수준</a:t>
             </a:r>
-            <a:endParaRPr lang="ko-KR" altLang="en-US"/>
           </a:p>
         </p:txBody>
       </p:sp>
@@ -2076,7 +2615,7 @@
           <a:p>
             <a:pPr lvl="0"/>
             <a:r>
-              <a:rPr lang="ko-KR" altLang="en-US" smtClean="0"/>
+              <a:rPr lang="ko-KR" altLang="en-US"/>
               <a:t>마스터 텍스트 스타일 편집</a:t>
             </a:r>
           </a:p>
@@ -2099,7 +2638,7 @@
           <a:p>
             <a:fld id="{1F511268-C062-4462-9948-2814E8F03C39}" type="datetimeFigureOut">
               <a:rPr lang="ko-KR" altLang="en-US" smtClean="0"/>
-              <a:t>2026-03-27</a:t>
+              <a:t>2026-03-30</a:t>
             </a:fld>
             <a:endParaRPr lang="ko-KR" altLang="en-US"/>
           </a:p>
@@ -2202,10 +2741,9 @@
           </a:lstStyle>
           <a:p>
             <a:r>
-              <a:rPr lang="ko-KR" altLang="en-US" smtClean="0"/>
+              <a:rPr lang="ko-KR" altLang="en-US"/>
               <a:t>마스터 제목 스타일 편집</a:t>
             </a:r>
-            <a:endParaRPr lang="ko-KR" altLang="en-US"/>
           </a:p>
         </p:txBody>
       </p:sp>
@@ -2329,7 +2867,7 @@
           <a:p>
             <a:pPr lvl="0"/>
             <a:r>
-              <a:rPr lang="ko-KR" altLang="en-US" smtClean="0"/>
+              <a:rPr lang="ko-KR" altLang="en-US"/>
               <a:t>마스터 텍스트 스타일 편집</a:t>
             </a:r>
           </a:p>
@@ -2352,7 +2890,7 @@
           <a:p>
             <a:fld id="{1F511268-C062-4462-9948-2814E8F03C39}" type="datetimeFigureOut">
               <a:rPr lang="ko-KR" altLang="en-US" smtClean="0"/>
-              <a:t>2026-03-27</a:t>
+              <a:t>2026-03-30</a:t>
             </a:fld>
             <a:endParaRPr lang="ko-KR" altLang="en-US"/>
           </a:p>
@@ -2461,10 +2999,9 @@
           <a:lstStyle/>
           <a:p>
             <a:r>
-              <a:rPr lang="ko-KR" altLang="en-US" smtClean="0"/>
+              <a:rPr lang="ko-KR" altLang="en-US"/>
               <a:t>마스터 제목 스타일 편집</a:t>
             </a:r>
-            <a:endParaRPr lang="ko-KR" altLang="en-US"/>
           </a:p>
         </p:txBody>
       </p:sp>
@@ -2495,38 +3032,37 @@
           <a:p>
             <a:pPr lvl="0"/>
             <a:r>
-              <a:rPr lang="ko-KR" altLang="en-US" smtClean="0"/>
+              <a:rPr lang="ko-KR" altLang="en-US"/>
               <a:t>마스터 텍스트 스타일 편집</a:t>
             </a:r>
           </a:p>
           <a:p>
             <a:pPr lvl="1"/>
             <a:r>
-              <a:rPr lang="ko-KR" altLang="en-US" smtClean="0"/>
+              <a:rPr lang="ko-KR" altLang="en-US"/>
               <a:t>둘째 수준</a:t>
             </a:r>
           </a:p>
           <a:p>
             <a:pPr lvl="2"/>
             <a:r>
-              <a:rPr lang="ko-KR" altLang="en-US" smtClean="0"/>
+              <a:rPr lang="ko-KR" altLang="en-US"/>
               <a:t>셋째 수준</a:t>
             </a:r>
           </a:p>
           <a:p>
             <a:pPr lvl="3"/>
             <a:r>
-              <a:rPr lang="ko-KR" altLang="en-US" smtClean="0"/>
+              <a:rPr lang="ko-KR" altLang="en-US"/>
               <a:t>넷째 수준</a:t>
             </a:r>
           </a:p>
           <a:p>
             <a:pPr lvl="4"/>
             <a:r>
-              <a:rPr lang="ko-KR" altLang="en-US" smtClean="0"/>
+              <a:rPr lang="ko-KR" altLang="en-US"/>
               <a:t>다섯째 수준</a:t>
             </a:r>
-            <a:endParaRPr lang="ko-KR" altLang="en-US"/>
           </a:p>
         </p:txBody>
       </p:sp>
@@ -2565,7 +3101,7 @@
           <a:p>
             <a:fld id="{1F511268-C062-4462-9948-2814E8F03C39}" type="datetimeFigureOut">
               <a:rPr lang="ko-KR" altLang="en-US" smtClean="0"/>
-              <a:t>2026-03-27</a:t>
+              <a:t>2026-03-30</a:t>
             </a:fld>
             <a:endParaRPr lang="ko-KR" altLang="en-US"/>
           </a:p>
@@ -3091,18 +3627,13 @@
           <a:p>
             <a:pPr algn="ctr"/>
             <a:r>
-              <a:rPr lang="ko-KR" altLang="en-US" sz="1000" smtClean="0">
+              <a:rPr lang="ko-KR" altLang="en-US" sz="1000">
                 <a:solidFill>
                   <a:schemeClr val="tx1"/>
                 </a:solidFill>
               </a:rPr>
               <a:t>소재들</a:t>
             </a:r>
-            <a:endParaRPr lang="ko-KR" altLang="en-US" sz="1000">
-              <a:solidFill>
-                <a:schemeClr val="tx1"/>
-              </a:solidFill>
-            </a:endParaRPr>
           </a:p>
         </p:txBody>
       </p:sp>
@@ -3146,18 +3677,13 @@
           <a:p>
             <a:pPr algn="ctr"/>
             <a:r>
-              <a:rPr lang="ko-KR" altLang="en-US" sz="1000" smtClean="0">
+              <a:rPr lang="ko-KR" altLang="en-US" sz="1000">
                 <a:solidFill>
                   <a:schemeClr val="tx1"/>
                 </a:solidFill>
               </a:rPr>
               <a:t>상황의 기차칸</a:t>
             </a:r>
-            <a:endParaRPr lang="ko-KR" altLang="en-US" sz="1000">
-              <a:solidFill>
-                <a:schemeClr val="tx1"/>
-              </a:solidFill>
-            </a:endParaRPr>
           </a:p>
         </p:txBody>
       </p:sp>
@@ -3177,6 +3703,14 @@
 <file path=ppt/slides/slide2.xml><?xml version="1.0" encoding="utf-8"?>
 <p:sld xmlns:a="http://schemas.openxmlformats.org/drawingml/2006/main" xmlns:r="http://schemas.openxmlformats.org/officeDocument/2006/relationships" xmlns:p="http://schemas.openxmlformats.org/presentationml/2006/main">
   <p:cSld>
+    <p:bg>
+      <p:bgPr>
+        <a:solidFill>
+          <a:srgbClr val="4B4443"/>
+        </a:solidFill>
+        <a:effectLst/>
+      </p:bgPr>
+    </p:bg>
     <p:spTree>
       <p:nvGrpSpPr>
         <p:cNvPr id="1" name=""/>
@@ -3199,14 +3733,17 @@
         </p:nvSpPr>
         <p:spPr>
           <a:xfrm>
-            <a:off x="165168" y="411480"/>
-            <a:ext cx="11850624" cy="6446520"/>
+            <a:off x="696000" y="411480"/>
+            <a:ext cx="10800000" cy="6446520"/>
           </a:xfrm>
           <a:prstGeom prst="triangle">
             <a:avLst>
               <a:gd name="adj" fmla="val 100000"/>
             </a:avLst>
           </a:prstGeom>
+          <a:solidFill>
+            <a:srgbClr val="669E40"/>
+          </a:solidFill>
         </p:spPr>
         <p:style>
           <a:lnRef idx="2">
@@ -3228,6 +3765,286 @@
           <a:bodyPr rtlCol="0" anchor="ctr"/>
           <a:lstStyle/>
           <a:p>
+            <a:pPr algn="dist"/>
+            <a:endParaRPr lang="ko-KR" altLang="en-US" dirty="0"/>
+          </a:p>
+        </p:txBody>
+      </p:sp>
+      <p:sp>
+        <p:nvSpPr>
+          <p:cNvPr id="33" name="직사각형 32">
+            <a:extLst>
+              <a:ext uri="{FF2B5EF4-FFF2-40B4-BE49-F238E27FC236}">
+                <a16:creationId xmlns:a16="http://schemas.microsoft.com/office/drawing/2014/main" id="{7B91612B-9C7D-5F5D-0C10-A35D76ECBA08}"/>
+              </a:ext>
+            </a:extLst>
+          </p:cNvPr>
+          <p:cNvSpPr/>
+          <p:nvPr/>
+        </p:nvSpPr>
+        <p:spPr>
+          <a:xfrm>
+            <a:off x="695999" y="0"/>
+            <a:ext cx="2160000" cy="6857999"/>
+          </a:xfrm>
+          <a:prstGeom prst="rect">
+            <a:avLst/>
+          </a:prstGeom>
+          <a:solidFill>
+            <a:srgbClr val="4B4443">
+              <a:alpha val="0"/>
+            </a:srgbClr>
+          </a:solidFill>
+          <a:ln>
+            <a:solidFill>
+              <a:srgbClr val="FAEBA0"/>
+            </a:solidFill>
+          </a:ln>
+        </p:spPr>
+        <p:style>
+          <a:lnRef idx="2">
+            <a:schemeClr val="accent1">
+              <a:shade val="15000"/>
+            </a:schemeClr>
+          </a:lnRef>
+          <a:fillRef idx="1">
+            <a:schemeClr val="accent1"/>
+          </a:fillRef>
+          <a:effectRef idx="0">
+            <a:schemeClr val="accent1"/>
+          </a:effectRef>
+          <a:fontRef idx="minor">
+            <a:schemeClr val="lt1"/>
+          </a:fontRef>
+        </p:style>
+        <p:txBody>
+          <a:bodyPr rtlCol="0" anchor="ctr"/>
+          <a:lstStyle/>
+          <a:p>
+            <a:pPr algn="ctr"/>
+            <a:endParaRPr lang="ko-KR" altLang="en-US"/>
+          </a:p>
+        </p:txBody>
+      </p:sp>
+      <p:sp>
+        <p:nvSpPr>
+          <p:cNvPr id="34" name="직사각형 33">
+            <a:extLst>
+              <a:ext uri="{FF2B5EF4-FFF2-40B4-BE49-F238E27FC236}">
+                <a16:creationId xmlns:a16="http://schemas.microsoft.com/office/drawing/2014/main" id="{D23BE304-E2D6-7E6A-9CD7-3D5492D1E2B6}"/>
+              </a:ext>
+            </a:extLst>
+          </p:cNvPr>
+          <p:cNvSpPr/>
+          <p:nvPr/>
+        </p:nvSpPr>
+        <p:spPr>
+          <a:xfrm>
+            <a:off x="2861261" y="1"/>
+            <a:ext cx="2160000" cy="6857999"/>
+          </a:xfrm>
+          <a:prstGeom prst="rect">
+            <a:avLst/>
+          </a:prstGeom>
+          <a:solidFill>
+            <a:srgbClr val="4B4443">
+              <a:alpha val="20000"/>
+            </a:srgbClr>
+          </a:solidFill>
+          <a:ln>
+            <a:solidFill>
+              <a:srgbClr val="FAEBA0"/>
+            </a:solidFill>
+          </a:ln>
+        </p:spPr>
+        <p:style>
+          <a:lnRef idx="2">
+            <a:schemeClr val="accent1">
+              <a:shade val="15000"/>
+            </a:schemeClr>
+          </a:lnRef>
+          <a:fillRef idx="1">
+            <a:schemeClr val="accent1"/>
+          </a:fillRef>
+          <a:effectRef idx="0">
+            <a:schemeClr val="accent1"/>
+          </a:effectRef>
+          <a:fontRef idx="minor">
+            <a:schemeClr val="lt1"/>
+          </a:fontRef>
+        </p:style>
+        <p:txBody>
+          <a:bodyPr rtlCol="0" anchor="ctr"/>
+          <a:lstStyle/>
+          <a:p>
+            <a:pPr algn="ctr"/>
+            <a:endParaRPr lang="ko-KR" altLang="en-US"/>
+          </a:p>
+        </p:txBody>
+      </p:sp>
+      <p:sp>
+        <p:nvSpPr>
+          <p:cNvPr id="35" name="직사각형 34">
+            <a:extLst>
+              <a:ext uri="{FF2B5EF4-FFF2-40B4-BE49-F238E27FC236}">
+                <a16:creationId xmlns:a16="http://schemas.microsoft.com/office/drawing/2014/main" id="{6BD6E198-2DC6-69E8-6766-25F9CE7270D2}"/>
+              </a:ext>
+            </a:extLst>
+          </p:cNvPr>
+          <p:cNvSpPr/>
+          <p:nvPr/>
+        </p:nvSpPr>
+        <p:spPr>
+          <a:xfrm>
+            <a:off x="5026522" y="1"/>
+            <a:ext cx="2160000" cy="6857999"/>
+          </a:xfrm>
+          <a:prstGeom prst="rect">
+            <a:avLst/>
+          </a:prstGeom>
+          <a:solidFill>
+            <a:srgbClr val="4B4443">
+              <a:alpha val="40000"/>
+            </a:srgbClr>
+          </a:solidFill>
+          <a:ln>
+            <a:solidFill>
+              <a:srgbClr val="FAEBA0"/>
+            </a:solidFill>
+          </a:ln>
+        </p:spPr>
+        <p:style>
+          <a:lnRef idx="2">
+            <a:schemeClr val="accent1">
+              <a:shade val="15000"/>
+            </a:schemeClr>
+          </a:lnRef>
+          <a:fillRef idx="1">
+            <a:schemeClr val="accent1"/>
+          </a:fillRef>
+          <a:effectRef idx="0">
+            <a:schemeClr val="accent1"/>
+          </a:effectRef>
+          <a:fontRef idx="minor">
+            <a:schemeClr val="lt1"/>
+          </a:fontRef>
+        </p:style>
+        <p:txBody>
+          <a:bodyPr rtlCol="0" anchor="ctr"/>
+          <a:lstStyle/>
+          <a:p>
+            <a:pPr algn="ctr"/>
+            <a:endParaRPr lang="ko-KR" altLang="en-US"/>
+          </a:p>
+        </p:txBody>
+      </p:sp>
+      <p:sp>
+        <p:nvSpPr>
+          <p:cNvPr id="36" name="직사각형 35">
+            <a:extLst>
+              <a:ext uri="{FF2B5EF4-FFF2-40B4-BE49-F238E27FC236}">
+                <a16:creationId xmlns:a16="http://schemas.microsoft.com/office/drawing/2014/main" id="{22199777-3284-B6B3-AF16-A076073C3331}"/>
+              </a:ext>
+            </a:extLst>
+          </p:cNvPr>
+          <p:cNvSpPr/>
+          <p:nvPr/>
+        </p:nvSpPr>
+        <p:spPr>
+          <a:xfrm>
+            <a:off x="7186522" y="-1"/>
+            <a:ext cx="2160000" cy="6857999"/>
+          </a:xfrm>
+          <a:prstGeom prst="rect">
+            <a:avLst/>
+          </a:prstGeom>
+          <a:solidFill>
+            <a:srgbClr val="4B4443">
+              <a:alpha val="60000"/>
+            </a:srgbClr>
+          </a:solidFill>
+          <a:ln>
+            <a:solidFill>
+              <a:srgbClr val="FAEBA0"/>
+            </a:solidFill>
+          </a:ln>
+        </p:spPr>
+        <p:style>
+          <a:lnRef idx="2">
+            <a:schemeClr val="accent1">
+              <a:shade val="15000"/>
+            </a:schemeClr>
+          </a:lnRef>
+          <a:fillRef idx="1">
+            <a:schemeClr val="accent1"/>
+          </a:fillRef>
+          <a:effectRef idx="0">
+            <a:schemeClr val="accent1"/>
+          </a:effectRef>
+          <a:fontRef idx="minor">
+            <a:schemeClr val="lt1"/>
+          </a:fontRef>
+        </p:style>
+        <p:txBody>
+          <a:bodyPr rtlCol="0" anchor="ctr"/>
+          <a:lstStyle/>
+          <a:p>
+            <a:pPr algn="ctr"/>
+            <a:endParaRPr lang="ko-KR" altLang="en-US"/>
+          </a:p>
+        </p:txBody>
+      </p:sp>
+      <p:sp>
+        <p:nvSpPr>
+          <p:cNvPr id="37" name="직사각형 36">
+            <a:extLst>
+              <a:ext uri="{FF2B5EF4-FFF2-40B4-BE49-F238E27FC236}">
+                <a16:creationId xmlns:a16="http://schemas.microsoft.com/office/drawing/2014/main" id="{AFB9FC9D-29A8-DD23-48AB-6CF067B63D08}"/>
+              </a:ext>
+            </a:extLst>
+          </p:cNvPr>
+          <p:cNvSpPr/>
+          <p:nvPr/>
+        </p:nvSpPr>
+        <p:spPr>
+          <a:xfrm>
+            <a:off x="9344809" y="-3"/>
+            <a:ext cx="2160000" cy="6857999"/>
+          </a:xfrm>
+          <a:prstGeom prst="rect">
+            <a:avLst/>
+          </a:prstGeom>
+          <a:solidFill>
+            <a:srgbClr val="4B4443">
+              <a:alpha val="80000"/>
+            </a:srgbClr>
+          </a:solidFill>
+          <a:ln>
+            <a:solidFill>
+              <a:srgbClr val="FAEBA0"/>
+            </a:solidFill>
+          </a:ln>
+        </p:spPr>
+        <p:style>
+          <a:lnRef idx="2">
+            <a:schemeClr val="accent1">
+              <a:shade val="15000"/>
+            </a:schemeClr>
+          </a:lnRef>
+          <a:fillRef idx="1">
+            <a:schemeClr val="accent1"/>
+          </a:fillRef>
+          <a:effectRef idx="0">
+            <a:schemeClr val="accent1"/>
+          </a:effectRef>
+          <a:fontRef idx="minor">
+            <a:schemeClr val="lt1"/>
+          </a:fontRef>
+        </p:style>
+        <p:txBody>
+          <a:bodyPr rtlCol="0" anchor="ctr"/>
+          <a:lstStyle/>
+          <a:p>
             <a:pPr algn="ctr"/>
             <a:endParaRPr lang="ko-KR" altLang="en-US"/>
           </a:p>
@@ -3241,14 +4058,20 @@
         </p:nvSpPr>
         <p:spPr>
           <a:xfrm flipH="1" flipV="1">
-            <a:off x="164592" y="0"/>
-            <a:ext cx="11851200" cy="6447600"/>
+            <a:off x="696000" y="0"/>
+            <a:ext cx="10800000" cy="6447600"/>
           </a:xfrm>
           <a:prstGeom prst="triangle">
             <a:avLst>
               <a:gd name="adj" fmla="val 100000"/>
             </a:avLst>
           </a:prstGeom>
+          <a:solidFill>
+            <a:srgbClr val="540B9D"/>
+          </a:solidFill>
+          <a:ln>
+            <a:noFill/>
+          </a:ln>
         </p:spPr>
         <p:style>
           <a:lnRef idx="2">
@@ -3271,7 +4094,7 @@
           <a:lstStyle/>
           <a:p>
             <a:pPr algn="ctr"/>
-            <a:endParaRPr lang="ko-KR" altLang="en-US"/>
+            <a:endParaRPr lang="ko-KR" altLang="en-US" dirty="0"/>
           </a:p>
         </p:txBody>
       </p:sp>
@@ -3289,6 +4112,7 @@
           <a:prstGeom prst="rect">
             <a:avLst/>
           </a:prstGeom>
+          <a:noFill/>
           <a:ln>
             <a:noFill/>
           </a:ln>
@@ -3315,38 +4139,34 @@
           <a:p>
             <a:pPr algn="ctr"/>
             <a:r>
-              <a:rPr lang="ko-KR" altLang="en-US" sz="1000" smtClean="0">
+              <a:rPr lang="ko-KR" altLang="en-US" sz="1000">
                 <a:solidFill>
-                  <a:schemeClr val="tx1"/>
+                  <a:schemeClr val="bg1"/>
                 </a:solidFill>
               </a:rPr>
               <a:t>쓰레기 줍기</a:t>
             </a:r>
-            <a:endParaRPr lang="ko-KR" altLang="en-US" sz="1000">
-              <a:solidFill>
-                <a:schemeClr val="tx1"/>
-              </a:solidFill>
-            </a:endParaRPr>
-          </a:p>
-        </p:txBody>
-      </p:sp>
-      <p:sp>
-        <p:nvSpPr>
-          <p:cNvPr id="7" name="직사각형 6"/>
+          </a:p>
+        </p:txBody>
+      </p:sp>
+      <p:sp>
+        <p:nvSpPr>
+          <p:cNvPr id="8" name="직사각형 7"/>
           <p:cNvSpPr/>
           <p:nvPr/>
         </p:nvSpPr>
         <p:spPr>
           <a:xfrm>
-            <a:off x="490728" y="6278436"/>
+            <a:off x="4676952" y="610155"/>
             <a:ext cx="1069848" cy="411480"/>
           </a:xfrm>
           <a:prstGeom prst="rect">
             <a:avLst/>
           </a:prstGeom>
-          <a:solidFill>
-            <a:srgbClr val="92D050"/>
-          </a:solidFill>
+          <a:noFill/>
+          <a:ln>
+            <a:noFill/>
+          </a:ln>
         </p:spPr>
         <p:style>
           <a:lnRef idx="2">
@@ -3370,35 +4190,31 @@
           <a:p>
             <a:pPr algn="ctr"/>
             <a:r>
-              <a:rPr lang="ko-KR" altLang="en-US" sz="1000" smtClean="0">
+              <a:rPr lang="ko-KR" altLang="en-US" sz="1000" dirty="0">
                 <a:solidFill>
-                  <a:schemeClr val="tx1"/>
+                  <a:schemeClr val="bg1"/>
                 </a:solidFill>
               </a:rPr>
-              <a:t>상황의 기차칸</a:t>
-            </a:r>
-            <a:endParaRPr lang="ko-KR" altLang="en-US" sz="1000">
-              <a:solidFill>
-                <a:schemeClr val="tx1"/>
-              </a:solidFill>
-            </a:endParaRPr>
-          </a:p>
-        </p:txBody>
-      </p:sp>
-      <p:sp>
-        <p:nvSpPr>
-          <p:cNvPr id="8" name="직사각형 7"/>
+              <a:t>첫 번째 균열</a:t>
+            </a:r>
+          </a:p>
+        </p:txBody>
+      </p:sp>
+      <p:sp>
+        <p:nvSpPr>
+          <p:cNvPr id="9" name="직사각형 8"/>
           <p:cNvSpPr/>
           <p:nvPr/>
         </p:nvSpPr>
         <p:spPr>
           <a:xfrm>
-            <a:off x="4676952" y="610155"/>
+            <a:off x="6072360" y="610155"/>
             <a:ext cx="1069848" cy="411480"/>
           </a:xfrm>
           <a:prstGeom prst="rect">
             <a:avLst/>
           </a:prstGeom>
+          <a:noFill/>
           <a:ln>
             <a:noFill/>
           </a:ln>
@@ -3425,35 +4241,31 @@
           <a:p>
             <a:pPr algn="ctr"/>
             <a:r>
-              <a:rPr lang="ko-KR" altLang="en-US" sz="1000" smtClean="0">
+              <a:rPr lang="ko-KR" altLang="en-US" sz="1000" dirty="0">
                 <a:solidFill>
-                  <a:schemeClr val="tx1"/>
+                  <a:schemeClr val="bg1"/>
                 </a:solidFill>
               </a:rPr>
-              <a:t>첫 번째 균열 발견</a:t>
-            </a:r>
-            <a:endParaRPr lang="ko-KR" altLang="en-US" sz="1000">
-              <a:solidFill>
-                <a:schemeClr val="tx1"/>
-              </a:solidFill>
-            </a:endParaRPr>
-          </a:p>
-        </p:txBody>
-      </p:sp>
-      <p:sp>
-        <p:nvSpPr>
-          <p:cNvPr id="9" name="직사각형 8"/>
+              <a:t>선의 지수 측정</a:t>
+            </a:r>
+          </a:p>
+        </p:txBody>
+      </p:sp>
+      <p:sp>
+        <p:nvSpPr>
+          <p:cNvPr id="10" name="직사각형 9"/>
           <p:cNvSpPr/>
           <p:nvPr/>
         </p:nvSpPr>
         <p:spPr>
           <a:xfrm>
-            <a:off x="6072360" y="610155"/>
+            <a:off x="1886136" y="610155"/>
             <a:ext cx="1069848" cy="411480"/>
           </a:xfrm>
           <a:prstGeom prst="rect">
             <a:avLst/>
           </a:prstGeom>
+          <a:noFill/>
           <a:ln>
             <a:noFill/>
           </a:ln>
@@ -3480,35 +4292,31 @@
           <a:p>
             <a:pPr algn="ctr"/>
             <a:r>
-              <a:rPr lang="ko-KR" altLang="en-US" sz="1000" smtClean="0">
+              <a:rPr lang="ko-KR" altLang="en-US" sz="1000" dirty="0">
                 <a:solidFill>
-                  <a:schemeClr val="tx1"/>
+                  <a:schemeClr val="bg1"/>
                 </a:solidFill>
               </a:rPr>
-              <a:t>선의 지수 측장</a:t>
-            </a:r>
-            <a:endParaRPr lang="ko-KR" altLang="en-US" sz="1000">
-              <a:solidFill>
-                <a:schemeClr val="tx1"/>
-              </a:solidFill>
-            </a:endParaRPr>
-          </a:p>
-        </p:txBody>
-      </p:sp>
-      <p:sp>
-        <p:nvSpPr>
-          <p:cNvPr id="10" name="직사각형 9"/>
+              <a:t>부모의 정서적 학대</a:t>
+            </a:r>
+          </a:p>
+        </p:txBody>
+      </p:sp>
+      <p:sp>
+        <p:nvSpPr>
+          <p:cNvPr id="11" name="직사각형 10"/>
           <p:cNvSpPr/>
           <p:nvPr/>
         </p:nvSpPr>
         <p:spPr>
           <a:xfrm>
-            <a:off x="1886136" y="610155"/>
+            <a:off x="490728" y="610155"/>
             <a:ext cx="1069848" cy="411480"/>
           </a:xfrm>
           <a:prstGeom prst="rect">
             <a:avLst/>
           </a:prstGeom>
+          <a:noFill/>
           <a:ln>
             <a:noFill/>
           </a:ln>
@@ -3535,43 +4343,31 @@
           <a:p>
             <a:pPr algn="ctr"/>
             <a:r>
-              <a:rPr lang="ko-KR" altLang="en-US" sz="1000" smtClean="0">
+              <a:rPr lang="ko-KR" altLang="en-US" sz="1000" dirty="0">
                 <a:solidFill>
-                  <a:schemeClr val="tx1"/>
+                  <a:schemeClr val="bg1"/>
                 </a:solidFill>
               </a:rPr>
-              <a:t>부모의 정서적 </a:t>
-            </a:r>
-            <a:r>
-              <a:rPr lang="ko-KR" altLang="en-US" sz="1000" smtClean="0">
-                <a:solidFill>
-                  <a:schemeClr val="tx1"/>
-                </a:solidFill>
-              </a:rPr>
-              <a:t>학대</a:t>
-            </a:r>
-            <a:endParaRPr lang="ko-KR" altLang="en-US" sz="1000">
-              <a:solidFill>
-                <a:schemeClr val="tx1"/>
-              </a:solidFill>
-            </a:endParaRPr>
-          </a:p>
-        </p:txBody>
-      </p:sp>
-      <p:sp>
-        <p:nvSpPr>
-          <p:cNvPr id="11" name="직사각형 10"/>
+              <a:t>입양</a:t>
+            </a:r>
+          </a:p>
+        </p:txBody>
+      </p:sp>
+      <p:sp>
+        <p:nvSpPr>
+          <p:cNvPr id="12" name="직사각형 11"/>
           <p:cNvSpPr/>
           <p:nvPr/>
         </p:nvSpPr>
         <p:spPr>
           <a:xfrm>
-            <a:off x="490728" y="610155"/>
-            <a:ext cx="1069848" cy="411480"/>
+            <a:off x="7467767" y="610155"/>
+            <a:ext cx="1401315" cy="411480"/>
           </a:xfrm>
           <a:prstGeom prst="rect">
             <a:avLst/>
           </a:prstGeom>
+          <a:noFill/>
           <a:ln>
             <a:noFill/>
           </a:ln>
@@ -3598,35 +4394,31 @@
           <a:p>
             <a:pPr algn="ctr"/>
             <a:r>
-              <a:rPr lang="ko-KR" altLang="en-US" sz="1000" smtClean="0">
+              <a:rPr lang="ko-KR" altLang="en-US" sz="1000">
                 <a:solidFill>
-                  <a:schemeClr val="tx1"/>
+                  <a:schemeClr val="bg1"/>
                 </a:solidFill>
               </a:rPr>
-              <a:t>입양</a:t>
-            </a:r>
-            <a:endParaRPr lang="ko-KR" altLang="en-US" sz="1000">
-              <a:solidFill>
-                <a:schemeClr val="tx1"/>
-              </a:solidFill>
-            </a:endParaRPr>
-          </a:p>
-        </p:txBody>
-      </p:sp>
-      <p:sp>
-        <p:nvSpPr>
-          <p:cNvPr id="12" name="직사각형 11"/>
+              <a:t>무한대의 선의 지수</a:t>
+            </a:r>
+          </a:p>
+        </p:txBody>
+      </p:sp>
+      <p:sp>
+        <p:nvSpPr>
+          <p:cNvPr id="13" name="직사각형 12"/>
           <p:cNvSpPr/>
           <p:nvPr/>
         </p:nvSpPr>
         <p:spPr>
           <a:xfrm>
-            <a:off x="7467768" y="610155"/>
+            <a:off x="3281544" y="1276838"/>
             <a:ext cx="1069848" cy="411480"/>
           </a:xfrm>
           <a:prstGeom prst="rect">
             <a:avLst/>
           </a:prstGeom>
+          <a:noFill/>
           <a:ln>
             <a:noFill/>
           </a:ln>
@@ -3653,35 +4445,31 @@
           <a:p>
             <a:pPr algn="ctr"/>
             <a:r>
-              <a:rPr lang="ko-KR" altLang="en-US" sz="1000" smtClean="0">
+              <a:rPr lang="ko-KR" altLang="en-US" sz="1000">
                 <a:solidFill>
-                  <a:schemeClr val="tx1"/>
+                  <a:schemeClr val="bg1"/>
                 </a:solidFill>
               </a:rPr>
-              <a:t>무한대에 가까운 선의 지수</a:t>
-            </a:r>
-            <a:endParaRPr lang="ko-KR" altLang="en-US" sz="1000">
-              <a:solidFill>
-                <a:schemeClr val="tx1"/>
-              </a:solidFill>
-            </a:endParaRPr>
-          </a:p>
-        </p:txBody>
-      </p:sp>
-      <p:sp>
-        <p:nvSpPr>
-          <p:cNvPr id="13" name="직사각형 12"/>
+              <a:t>칭찬 중독</a:t>
+            </a:r>
+          </a:p>
+        </p:txBody>
+      </p:sp>
+      <p:sp>
+        <p:nvSpPr>
+          <p:cNvPr id="14" name="직사각형 13"/>
           <p:cNvSpPr/>
           <p:nvPr/>
         </p:nvSpPr>
         <p:spPr>
           <a:xfrm>
-            <a:off x="3281544" y="1276838"/>
+            <a:off x="6072360" y="1276838"/>
             <a:ext cx="1069848" cy="411480"/>
           </a:xfrm>
           <a:prstGeom prst="rect">
             <a:avLst/>
           </a:prstGeom>
+          <a:noFill/>
           <a:ln>
             <a:noFill/>
           </a:ln>
@@ -3708,35 +4496,31 @@
           <a:p>
             <a:pPr algn="ctr"/>
             <a:r>
-              <a:rPr lang="ko-KR" altLang="en-US" sz="1000" smtClean="0">
+              <a:rPr lang="ko-KR" altLang="en-US" sz="1000">
                 <a:solidFill>
-                  <a:schemeClr val="tx1"/>
+                  <a:schemeClr val="bg1"/>
                 </a:solidFill>
               </a:rPr>
-              <a:t>칭찬 중독</a:t>
-            </a:r>
-            <a:endParaRPr lang="ko-KR" altLang="en-US" sz="1000">
-              <a:solidFill>
-                <a:schemeClr val="tx1"/>
-              </a:solidFill>
-            </a:endParaRPr>
-          </a:p>
-        </p:txBody>
-      </p:sp>
-      <p:sp>
-        <p:nvSpPr>
-          <p:cNvPr id="14" name="직사각형 13"/>
+              <a:t>선의 랭킹 시스템</a:t>
+            </a:r>
+          </a:p>
+        </p:txBody>
+      </p:sp>
+      <p:sp>
+        <p:nvSpPr>
+          <p:cNvPr id="15" name="직사각형 14"/>
           <p:cNvSpPr/>
           <p:nvPr/>
         </p:nvSpPr>
         <p:spPr>
           <a:xfrm>
-            <a:off x="6072360" y="1276838"/>
+            <a:off x="6072360" y="1943521"/>
             <a:ext cx="1069848" cy="411480"/>
           </a:xfrm>
           <a:prstGeom prst="rect">
             <a:avLst/>
           </a:prstGeom>
+          <a:noFill/>
           <a:ln>
             <a:noFill/>
           </a:ln>
@@ -3763,35 +4547,31 @@
           <a:p>
             <a:pPr algn="ctr"/>
             <a:r>
-              <a:rPr lang="ko-KR" altLang="en-US" sz="1000" smtClean="0">
+              <a:rPr lang="ko-KR" altLang="en-US" sz="1000">
                 <a:solidFill>
-                  <a:schemeClr val="tx1"/>
+                  <a:schemeClr val="bg1"/>
                 </a:solidFill>
               </a:rPr>
-              <a:t>선의 랭킹 시스템</a:t>
-            </a:r>
-            <a:endParaRPr lang="ko-KR" altLang="en-US" sz="1000">
-              <a:solidFill>
-                <a:schemeClr val="tx1"/>
-              </a:solidFill>
-            </a:endParaRPr>
-          </a:p>
-        </p:txBody>
-      </p:sp>
-      <p:sp>
-        <p:nvSpPr>
-          <p:cNvPr id="15" name="직사각형 14"/>
+              <a:t>선의 고갈자</a:t>
+            </a:r>
+          </a:p>
+        </p:txBody>
+      </p:sp>
+      <p:sp>
+        <p:nvSpPr>
+          <p:cNvPr id="16" name="직사각형 15"/>
           <p:cNvSpPr/>
           <p:nvPr/>
         </p:nvSpPr>
         <p:spPr>
           <a:xfrm>
-            <a:off x="6072360" y="1943521"/>
+            <a:off x="2421060" y="2355001"/>
             <a:ext cx="1069848" cy="411480"/>
           </a:xfrm>
           <a:prstGeom prst="rect">
             <a:avLst/>
           </a:prstGeom>
+          <a:noFill/>
           <a:ln>
             <a:noFill/>
           </a:ln>
@@ -3818,35 +4598,31 @@
           <a:p>
             <a:pPr algn="ctr"/>
             <a:r>
-              <a:rPr lang="ko-KR" altLang="en-US" sz="1000" smtClean="0">
+              <a:rPr lang="ko-KR" altLang="en-US" sz="1000" dirty="0">
                 <a:solidFill>
-                  <a:schemeClr val="tx1"/>
+                  <a:schemeClr val="bg1"/>
                 </a:solidFill>
               </a:rPr>
-              <a:t>선의 고갈자</a:t>
-            </a:r>
-            <a:endParaRPr lang="ko-KR" altLang="en-US" sz="1000">
-              <a:solidFill>
-                <a:schemeClr val="tx1"/>
-              </a:solidFill>
-            </a:endParaRPr>
-          </a:p>
-        </p:txBody>
-      </p:sp>
-      <p:sp>
-        <p:nvSpPr>
-          <p:cNvPr id="16" name="직사각형 15"/>
+              <a:t>첫 붕괴</a:t>
+            </a:r>
+          </a:p>
+        </p:txBody>
+      </p:sp>
+      <p:sp>
+        <p:nvSpPr>
+          <p:cNvPr id="17" name="직사각형 16"/>
           <p:cNvSpPr/>
           <p:nvPr/>
         </p:nvSpPr>
         <p:spPr>
           <a:xfrm>
-            <a:off x="2421060" y="2355001"/>
+            <a:off x="4182257" y="2879243"/>
             <a:ext cx="1069848" cy="411480"/>
           </a:xfrm>
           <a:prstGeom prst="rect">
             <a:avLst/>
           </a:prstGeom>
+          <a:noFill/>
           <a:ln>
             <a:noFill/>
           </a:ln>
@@ -3873,35 +4649,31 @@
           <a:p>
             <a:pPr algn="ctr"/>
             <a:r>
-              <a:rPr lang="ko-KR" altLang="en-US" sz="1000" smtClean="0">
+              <a:rPr lang="ko-KR" altLang="en-US" sz="1000">
                 <a:solidFill>
-                  <a:schemeClr val="tx1"/>
+                  <a:schemeClr val="bg1"/>
                 </a:solidFill>
               </a:rPr>
-              <a:t>주인공의 첫 붕괴</a:t>
-            </a:r>
-            <a:endParaRPr lang="ko-KR" altLang="en-US" sz="1000">
-              <a:solidFill>
-                <a:schemeClr val="tx1"/>
-              </a:solidFill>
-            </a:endParaRPr>
-          </a:p>
-        </p:txBody>
-      </p:sp>
-      <p:sp>
-        <p:nvSpPr>
-          <p:cNvPr id="17" name="직사각형 16"/>
+              <a:t>선의 강제 징집</a:t>
+            </a:r>
+          </a:p>
+        </p:txBody>
+      </p:sp>
+      <p:sp>
+        <p:nvSpPr>
+          <p:cNvPr id="18" name="직사각형 17"/>
           <p:cNvSpPr/>
           <p:nvPr/>
         </p:nvSpPr>
         <p:spPr>
           <a:xfrm>
-            <a:off x="4182257" y="2879243"/>
+            <a:off x="4253689" y="1970805"/>
             <a:ext cx="1069848" cy="411480"/>
           </a:xfrm>
           <a:prstGeom prst="rect">
             <a:avLst/>
           </a:prstGeom>
+          <a:noFill/>
           <a:ln>
             <a:noFill/>
           </a:ln>
@@ -3928,35 +4700,31 @@
           <a:p>
             <a:pPr algn="ctr"/>
             <a:r>
-              <a:rPr lang="ko-KR" altLang="en-US" sz="1000" smtClean="0">
+              <a:rPr lang="ko-KR" altLang="en-US" sz="1000" dirty="0">
                 <a:solidFill>
-                  <a:schemeClr val="tx1"/>
+                  <a:schemeClr val="bg1"/>
                 </a:solidFill>
               </a:rPr>
-              <a:t>선의 강제 징집</a:t>
-            </a:r>
-            <a:endParaRPr lang="ko-KR" altLang="en-US" sz="1000">
-              <a:solidFill>
-                <a:schemeClr val="tx1"/>
-              </a:solidFill>
-            </a:endParaRPr>
-          </a:p>
-        </p:txBody>
-      </p:sp>
-      <p:sp>
-        <p:nvSpPr>
-          <p:cNvPr id="18" name="직사각형 17"/>
+              <a:t>동생의 한마디</a:t>
+            </a:r>
+          </a:p>
+        </p:txBody>
+      </p:sp>
+      <p:sp>
+        <p:nvSpPr>
+          <p:cNvPr id="19" name="직사각형 18"/>
           <p:cNvSpPr/>
           <p:nvPr/>
         </p:nvSpPr>
         <p:spPr>
           <a:xfrm>
-            <a:off x="4253689" y="1970805"/>
+            <a:off x="1188432" y="1597567"/>
             <a:ext cx="1069848" cy="411480"/>
           </a:xfrm>
           <a:prstGeom prst="rect">
             <a:avLst/>
           </a:prstGeom>
+          <a:noFill/>
           <a:ln>
             <a:noFill/>
           </a:ln>
@@ -3983,35 +4751,31 @@
           <a:p>
             <a:pPr algn="ctr"/>
             <a:r>
-              <a:rPr lang="ko-KR" altLang="en-US" sz="1000" smtClean="0">
+              <a:rPr lang="ko-KR" altLang="en-US" sz="1000">
                 <a:solidFill>
-                  <a:schemeClr val="tx1"/>
+                  <a:schemeClr val="bg1"/>
                 </a:solidFill>
               </a:rPr>
-              <a:t>동생의 한마디</a:t>
-            </a:r>
-            <a:endParaRPr lang="ko-KR" altLang="en-US" sz="1000">
-              <a:solidFill>
-                <a:schemeClr val="tx1"/>
-              </a:solidFill>
-            </a:endParaRPr>
-          </a:p>
-        </p:txBody>
-      </p:sp>
-      <p:sp>
-        <p:nvSpPr>
-          <p:cNvPr id="19" name="직사각형 18"/>
+              <a:t>무한의 역설</a:t>
+            </a:r>
+          </a:p>
+        </p:txBody>
+      </p:sp>
+      <p:sp>
+        <p:nvSpPr>
+          <p:cNvPr id="20" name="직사각형 19"/>
           <p:cNvSpPr/>
           <p:nvPr/>
         </p:nvSpPr>
         <p:spPr>
           <a:xfrm>
-            <a:off x="1188432" y="1597567"/>
+            <a:off x="1351212" y="3429000"/>
             <a:ext cx="1069848" cy="411480"/>
           </a:xfrm>
           <a:prstGeom prst="rect">
             <a:avLst/>
           </a:prstGeom>
+          <a:noFill/>
           <a:ln>
             <a:noFill/>
           </a:ln>
@@ -4038,35 +4802,31 @@
           <a:p>
             <a:pPr algn="ctr"/>
             <a:r>
-              <a:rPr lang="ko-KR" altLang="en-US" sz="1000" smtClean="0">
+              <a:rPr lang="ko-KR" altLang="en-US" sz="1000">
                 <a:solidFill>
-                  <a:schemeClr val="tx1"/>
+                  <a:schemeClr val="bg1"/>
                 </a:solidFill>
               </a:rPr>
-              <a:t>무한의 역설</a:t>
-            </a:r>
-            <a:endParaRPr lang="ko-KR" altLang="en-US" sz="1000">
-              <a:solidFill>
-                <a:schemeClr val="tx1"/>
-              </a:solidFill>
-            </a:endParaRPr>
-          </a:p>
-        </p:txBody>
-      </p:sp>
-      <p:sp>
-        <p:nvSpPr>
-          <p:cNvPr id="20" name="직사각형 19"/>
+              <a:t>마지막 선택</a:t>
+            </a:r>
+          </a:p>
+        </p:txBody>
+      </p:sp>
+      <p:sp>
+        <p:nvSpPr>
+          <p:cNvPr id="21" name="직사각형 20"/>
           <p:cNvSpPr/>
           <p:nvPr/>
         </p:nvSpPr>
         <p:spPr>
           <a:xfrm>
-            <a:off x="1351212" y="3429000"/>
+            <a:off x="2597020" y="3613824"/>
             <a:ext cx="1069848" cy="411480"/>
           </a:xfrm>
           <a:prstGeom prst="rect">
             <a:avLst/>
           </a:prstGeom>
+          <a:noFill/>
           <a:ln>
             <a:noFill/>
           </a:ln>
@@ -4093,35 +4853,86 @@
           <a:p>
             <a:pPr algn="ctr"/>
             <a:r>
-              <a:rPr lang="ko-KR" altLang="en-US" sz="1000" smtClean="0">
+              <a:rPr lang="ko-KR" altLang="en-US" sz="1000">
                 <a:solidFill>
-                  <a:schemeClr val="tx1"/>
+                  <a:schemeClr val="bg1"/>
                 </a:solidFill>
               </a:rPr>
-              <a:t>마지막 선택</a:t>
-            </a:r>
-            <a:endParaRPr lang="ko-KR" altLang="en-US" sz="1000">
-              <a:solidFill>
-                <a:schemeClr val="tx1"/>
-              </a:solidFill>
-            </a:endParaRPr>
-          </a:p>
-        </p:txBody>
-      </p:sp>
-      <p:sp>
-        <p:nvSpPr>
-          <p:cNvPr id="21" name="직사각형 20"/>
+              <a:t>거절</a:t>
+            </a:r>
+          </a:p>
+        </p:txBody>
+      </p:sp>
+      <p:sp>
+        <p:nvSpPr>
+          <p:cNvPr id="2" name="화살표: 오각형 1">
+            <a:extLst>
+              <a:ext uri="{FF2B5EF4-FFF2-40B4-BE49-F238E27FC236}">
+                <a16:creationId xmlns:a16="http://schemas.microsoft.com/office/drawing/2014/main" id="{343F3A70-89A0-C5C5-7107-AB9C8A3A4728}"/>
+              </a:ext>
+            </a:extLst>
+          </p:cNvPr>
           <p:cNvSpPr/>
           <p:nvPr/>
         </p:nvSpPr>
         <p:spPr>
           <a:xfrm>
-            <a:off x="2597020" y="3613824"/>
+            <a:off x="396579" y="6227806"/>
+            <a:ext cx="1069848" cy="411481"/>
+          </a:xfrm>
+          <a:prstGeom prst="homePlate">
+            <a:avLst/>
+          </a:prstGeom>
+          <a:solidFill>
+            <a:srgbClr val="FAEBA0"/>
+          </a:solidFill>
+        </p:spPr>
+        <p:style>
+          <a:lnRef idx="2">
+            <a:schemeClr val="accent1">
+              <a:shade val="15000"/>
+            </a:schemeClr>
+          </a:lnRef>
+          <a:fillRef idx="1">
+            <a:schemeClr val="accent1"/>
+          </a:fillRef>
+          <a:effectRef idx="0">
+            <a:schemeClr val="accent1"/>
+          </a:effectRef>
+          <a:fontRef idx="minor">
+            <a:schemeClr val="lt1"/>
+          </a:fontRef>
+        </p:style>
+        <p:txBody>
+          <a:bodyPr rtlCol="0" anchor="ctr"/>
+          <a:lstStyle/>
+          <a:p>
+            <a:pPr algn="ctr"/>
+            <a:endParaRPr lang="ko-KR" altLang="en-US" dirty="0"/>
+          </a:p>
+        </p:txBody>
+      </p:sp>
+      <p:sp>
+        <p:nvSpPr>
+          <p:cNvPr id="38" name="직사각형 37">
+            <a:extLst>
+              <a:ext uri="{FF2B5EF4-FFF2-40B4-BE49-F238E27FC236}">
+                <a16:creationId xmlns:a16="http://schemas.microsoft.com/office/drawing/2014/main" id="{4A4014F0-BAF8-8A49-0B9A-48833BDB1F43}"/>
+              </a:ext>
+            </a:extLst>
+          </p:cNvPr>
+          <p:cNvSpPr/>
+          <p:nvPr/>
+        </p:nvSpPr>
+        <p:spPr>
+          <a:xfrm>
+            <a:off x="4607353" y="1433114"/>
             <a:ext cx="1069848" cy="411480"/>
           </a:xfrm>
           <a:prstGeom prst="rect">
             <a:avLst/>
           </a:prstGeom>
+          <a:noFill/>
           <a:ln>
             <a:noFill/>
           </a:ln>
@@ -4148,18 +4959,13 @@
           <a:p>
             <a:pPr algn="ctr"/>
             <a:r>
-              <a:rPr lang="ko-KR" altLang="en-US" sz="1000" smtClean="0">
+              <a:rPr lang="ko-KR" altLang="en-US" sz="1000" dirty="0">
                 <a:solidFill>
-                  <a:schemeClr val="tx1"/>
+                  <a:schemeClr val="bg1"/>
                 </a:solidFill>
               </a:rPr>
-              <a:t>거절</a:t>
-            </a:r>
-            <a:endParaRPr lang="ko-KR" altLang="en-US" sz="1000">
-              <a:solidFill>
-                <a:schemeClr val="tx1"/>
-              </a:solidFill>
-            </a:endParaRPr>
+              <a:t>영웅 산업</a:t>
+            </a:r>
           </a:p>
         </p:txBody>
       </p:sp>
@@ -4167,6 +4973,1796 @@
     <p:extLst>
       <p:ext uri="{BB962C8B-B14F-4D97-AF65-F5344CB8AC3E}">
         <p14:creationId xmlns:p14="http://schemas.microsoft.com/office/powerpoint/2010/main" val="2334041143"/>
+      </p:ext>
+    </p:extLst>
+  </p:cSld>
+  <p:clrMapOvr>
+    <a:masterClrMapping/>
+  </p:clrMapOvr>
+</p:sld>
+</file>
+
+<file path=ppt/slides/slide3.xml><?xml version="1.0" encoding="utf-8"?>
+<p:sld xmlns:a="http://schemas.openxmlformats.org/drawingml/2006/main" xmlns:r="http://schemas.openxmlformats.org/officeDocument/2006/relationships" xmlns:p="http://schemas.openxmlformats.org/presentationml/2006/main">
+  <p:cSld>
+    <p:bg>
+      <p:bgPr>
+        <a:solidFill>
+          <a:srgbClr val="4B4443"/>
+        </a:solidFill>
+        <a:effectLst/>
+      </p:bgPr>
+    </p:bg>
+    <p:spTree>
+      <p:nvGrpSpPr>
+        <p:cNvPr id="1" name="">
+          <a:extLst>
+            <a:ext uri="{FF2B5EF4-FFF2-40B4-BE49-F238E27FC236}">
+              <a16:creationId xmlns:a16="http://schemas.microsoft.com/office/drawing/2014/main" id="{36D1DA44-CC47-6EB3-35D0-DB823C81282B}"/>
+            </a:ext>
+          </a:extLst>
+        </p:cNvPr>
+        <p:cNvGrpSpPr/>
+        <p:nvPr/>
+      </p:nvGrpSpPr>
+      <p:grpSpPr>
+        <a:xfrm>
+          <a:off x="0" y="0"/>
+          <a:ext cx="0" cy="0"/>
+          <a:chOff x="0" y="0"/>
+          <a:chExt cx="0" cy="0"/>
+        </a:xfrm>
+      </p:grpSpPr>
+      <p:sp>
+        <p:nvSpPr>
+          <p:cNvPr id="4" name="이등변 삼각형 3">
+            <a:extLst>
+              <a:ext uri="{FF2B5EF4-FFF2-40B4-BE49-F238E27FC236}">
+                <a16:creationId xmlns:a16="http://schemas.microsoft.com/office/drawing/2014/main" id="{6BF04A61-4923-4C58-BA1E-50FED9DA6032}"/>
+              </a:ext>
+            </a:extLst>
+          </p:cNvPr>
+          <p:cNvSpPr/>
+          <p:nvPr/>
+        </p:nvSpPr>
+        <p:spPr>
+          <a:xfrm>
+            <a:off x="-1" y="411480"/>
+            <a:ext cx="12191999" cy="6446520"/>
+          </a:xfrm>
+          <a:prstGeom prst="triangle">
+            <a:avLst>
+              <a:gd name="adj" fmla="val 100000"/>
+            </a:avLst>
+          </a:prstGeom>
+          <a:solidFill>
+            <a:srgbClr val="669E40"/>
+          </a:solidFill>
+        </p:spPr>
+        <p:style>
+          <a:lnRef idx="2">
+            <a:schemeClr val="accent1">
+              <a:shade val="50000"/>
+            </a:schemeClr>
+          </a:lnRef>
+          <a:fillRef idx="1">
+            <a:schemeClr val="accent1"/>
+          </a:fillRef>
+          <a:effectRef idx="0">
+            <a:schemeClr val="accent1"/>
+          </a:effectRef>
+          <a:fontRef idx="minor">
+            <a:schemeClr val="lt1"/>
+          </a:fontRef>
+        </p:style>
+        <p:txBody>
+          <a:bodyPr rtlCol="0" anchor="ctr"/>
+          <a:lstStyle/>
+          <a:p>
+            <a:pPr algn="dist"/>
+            <a:endParaRPr lang="ko-KR" altLang="en-US" dirty="0"/>
+          </a:p>
+        </p:txBody>
+      </p:sp>
+      <p:sp>
+        <p:nvSpPr>
+          <p:cNvPr id="2" name="화살표: 오각형 1">
+            <a:extLst>
+              <a:ext uri="{FF2B5EF4-FFF2-40B4-BE49-F238E27FC236}">
+                <a16:creationId xmlns:a16="http://schemas.microsoft.com/office/drawing/2014/main" id="{BB431C50-A9BF-C9E4-B3D6-224F16BDF128}"/>
+              </a:ext>
+            </a:extLst>
+          </p:cNvPr>
+          <p:cNvSpPr/>
+          <p:nvPr/>
+        </p:nvSpPr>
+        <p:spPr>
+          <a:xfrm>
+            <a:off x="396579" y="6227806"/>
+            <a:ext cx="1069848" cy="411481"/>
+          </a:xfrm>
+          <a:prstGeom prst="homePlate">
+            <a:avLst/>
+          </a:prstGeom>
+          <a:solidFill>
+            <a:srgbClr val="FAEBA0"/>
+          </a:solidFill>
+        </p:spPr>
+        <p:style>
+          <a:lnRef idx="2">
+            <a:schemeClr val="accent1">
+              <a:shade val="15000"/>
+            </a:schemeClr>
+          </a:lnRef>
+          <a:fillRef idx="1">
+            <a:schemeClr val="accent1"/>
+          </a:fillRef>
+          <a:effectRef idx="0">
+            <a:schemeClr val="accent1"/>
+          </a:effectRef>
+          <a:fontRef idx="minor">
+            <a:schemeClr val="lt1"/>
+          </a:fontRef>
+        </p:style>
+        <p:txBody>
+          <a:bodyPr rtlCol="0" anchor="ctr"/>
+          <a:lstStyle/>
+          <a:p>
+            <a:pPr algn="ctr"/>
+            <a:endParaRPr lang="ko-KR" altLang="en-US" dirty="0"/>
+          </a:p>
+        </p:txBody>
+      </p:sp>
+      <p:sp>
+        <p:nvSpPr>
+          <p:cNvPr id="3" name="직사각형 2">
+            <a:extLst>
+              <a:ext uri="{FF2B5EF4-FFF2-40B4-BE49-F238E27FC236}">
+                <a16:creationId xmlns:a16="http://schemas.microsoft.com/office/drawing/2014/main" id="{96111037-67EC-63EE-A67F-AA1E7C0911D9}"/>
+              </a:ext>
+            </a:extLst>
+          </p:cNvPr>
+          <p:cNvSpPr/>
+          <p:nvPr/>
+        </p:nvSpPr>
+        <p:spPr>
+          <a:xfrm>
+            <a:off x="-436" y="1"/>
+            <a:ext cx="2448000" cy="6857999"/>
+          </a:xfrm>
+          <a:prstGeom prst="rect">
+            <a:avLst/>
+          </a:prstGeom>
+          <a:solidFill>
+            <a:srgbClr val="4B4443">
+              <a:alpha val="0"/>
+            </a:srgbClr>
+          </a:solidFill>
+          <a:ln>
+            <a:solidFill>
+              <a:srgbClr val="FAEBA0"/>
+            </a:solidFill>
+          </a:ln>
+        </p:spPr>
+        <p:style>
+          <a:lnRef idx="2">
+            <a:schemeClr val="accent1">
+              <a:shade val="15000"/>
+            </a:schemeClr>
+          </a:lnRef>
+          <a:fillRef idx="1">
+            <a:schemeClr val="accent1"/>
+          </a:fillRef>
+          <a:effectRef idx="0">
+            <a:schemeClr val="accent1"/>
+          </a:effectRef>
+          <a:fontRef idx="minor">
+            <a:schemeClr val="lt1"/>
+          </a:fontRef>
+        </p:style>
+        <p:txBody>
+          <a:bodyPr rtlCol="0" anchor="ctr"/>
+          <a:lstStyle/>
+          <a:p>
+            <a:pPr algn="ctr"/>
+            <a:endParaRPr lang="ko-KR" altLang="en-US"/>
+          </a:p>
+        </p:txBody>
+      </p:sp>
+      <p:sp>
+        <p:nvSpPr>
+          <p:cNvPr id="7" name="직사각형 6">
+            <a:extLst>
+              <a:ext uri="{FF2B5EF4-FFF2-40B4-BE49-F238E27FC236}">
+                <a16:creationId xmlns:a16="http://schemas.microsoft.com/office/drawing/2014/main" id="{D64E15A3-EAED-CE12-FABD-B9C8CCC0C0F5}"/>
+              </a:ext>
+            </a:extLst>
+          </p:cNvPr>
+          <p:cNvSpPr/>
+          <p:nvPr/>
+        </p:nvSpPr>
+        <p:spPr>
+          <a:xfrm>
+            <a:off x="2442868" y="1"/>
+            <a:ext cx="2448000" cy="6857999"/>
+          </a:xfrm>
+          <a:prstGeom prst="rect">
+            <a:avLst/>
+          </a:prstGeom>
+          <a:solidFill>
+            <a:srgbClr val="4B4443">
+              <a:alpha val="20000"/>
+            </a:srgbClr>
+          </a:solidFill>
+          <a:ln>
+            <a:solidFill>
+              <a:srgbClr val="FAEBA0"/>
+            </a:solidFill>
+          </a:ln>
+        </p:spPr>
+        <p:style>
+          <a:lnRef idx="2">
+            <a:schemeClr val="accent1">
+              <a:shade val="15000"/>
+            </a:schemeClr>
+          </a:lnRef>
+          <a:fillRef idx="1">
+            <a:schemeClr val="accent1"/>
+          </a:fillRef>
+          <a:effectRef idx="0">
+            <a:schemeClr val="accent1"/>
+          </a:effectRef>
+          <a:fontRef idx="minor">
+            <a:schemeClr val="lt1"/>
+          </a:fontRef>
+        </p:style>
+        <p:txBody>
+          <a:bodyPr rtlCol="0" anchor="ctr"/>
+          <a:lstStyle/>
+          <a:p>
+            <a:pPr algn="ctr"/>
+            <a:endParaRPr lang="ko-KR" altLang="en-US"/>
+          </a:p>
+        </p:txBody>
+      </p:sp>
+      <p:sp>
+        <p:nvSpPr>
+          <p:cNvPr id="22" name="직사각형 21">
+            <a:extLst>
+              <a:ext uri="{FF2B5EF4-FFF2-40B4-BE49-F238E27FC236}">
+                <a16:creationId xmlns:a16="http://schemas.microsoft.com/office/drawing/2014/main" id="{7B2E6166-D437-EDF9-79CD-F9ABC98681E7}"/>
+              </a:ext>
+            </a:extLst>
+          </p:cNvPr>
+          <p:cNvSpPr/>
+          <p:nvPr/>
+        </p:nvSpPr>
+        <p:spPr>
+          <a:xfrm>
+            <a:off x="4885736" y="1"/>
+            <a:ext cx="2448000" cy="6857999"/>
+          </a:xfrm>
+          <a:prstGeom prst="rect">
+            <a:avLst/>
+          </a:prstGeom>
+          <a:solidFill>
+            <a:srgbClr val="4B4443">
+              <a:alpha val="40000"/>
+            </a:srgbClr>
+          </a:solidFill>
+          <a:ln>
+            <a:solidFill>
+              <a:srgbClr val="FAEBA0"/>
+            </a:solidFill>
+          </a:ln>
+        </p:spPr>
+        <p:style>
+          <a:lnRef idx="2">
+            <a:schemeClr val="accent1">
+              <a:shade val="15000"/>
+            </a:schemeClr>
+          </a:lnRef>
+          <a:fillRef idx="1">
+            <a:schemeClr val="accent1"/>
+          </a:fillRef>
+          <a:effectRef idx="0">
+            <a:schemeClr val="accent1"/>
+          </a:effectRef>
+          <a:fontRef idx="minor">
+            <a:schemeClr val="lt1"/>
+          </a:fontRef>
+        </p:style>
+        <p:txBody>
+          <a:bodyPr rtlCol="0" anchor="ctr"/>
+          <a:lstStyle/>
+          <a:p>
+            <a:pPr algn="ctr"/>
+            <a:endParaRPr lang="ko-KR" altLang="en-US"/>
+          </a:p>
+        </p:txBody>
+      </p:sp>
+      <p:sp>
+        <p:nvSpPr>
+          <p:cNvPr id="23" name="직사각형 22">
+            <a:extLst>
+              <a:ext uri="{FF2B5EF4-FFF2-40B4-BE49-F238E27FC236}">
+                <a16:creationId xmlns:a16="http://schemas.microsoft.com/office/drawing/2014/main" id="{B368189A-2355-D5A5-2EC1-AAC4C80DC5B2}"/>
+              </a:ext>
+            </a:extLst>
+          </p:cNvPr>
+          <p:cNvSpPr/>
+          <p:nvPr/>
+        </p:nvSpPr>
+        <p:spPr>
+          <a:xfrm>
+            <a:off x="7329040" y="-1"/>
+            <a:ext cx="2448000" cy="6857999"/>
+          </a:xfrm>
+          <a:prstGeom prst="rect">
+            <a:avLst/>
+          </a:prstGeom>
+          <a:solidFill>
+            <a:srgbClr val="4B4443">
+              <a:alpha val="60000"/>
+            </a:srgbClr>
+          </a:solidFill>
+          <a:ln>
+            <a:solidFill>
+              <a:srgbClr val="FAEBA0"/>
+            </a:solidFill>
+          </a:ln>
+        </p:spPr>
+        <p:style>
+          <a:lnRef idx="2">
+            <a:schemeClr val="accent1">
+              <a:shade val="15000"/>
+            </a:schemeClr>
+          </a:lnRef>
+          <a:fillRef idx="1">
+            <a:schemeClr val="accent1"/>
+          </a:fillRef>
+          <a:effectRef idx="0">
+            <a:schemeClr val="accent1"/>
+          </a:effectRef>
+          <a:fontRef idx="minor">
+            <a:schemeClr val="lt1"/>
+          </a:fontRef>
+        </p:style>
+        <p:txBody>
+          <a:bodyPr rtlCol="0" anchor="ctr"/>
+          <a:lstStyle/>
+          <a:p>
+            <a:pPr algn="ctr"/>
+            <a:endParaRPr lang="ko-KR" altLang="en-US"/>
+          </a:p>
+        </p:txBody>
+      </p:sp>
+      <p:sp>
+        <p:nvSpPr>
+          <p:cNvPr id="24" name="직사각형 23">
+            <a:extLst>
+              <a:ext uri="{FF2B5EF4-FFF2-40B4-BE49-F238E27FC236}">
+                <a16:creationId xmlns:a16="http://schemas.microsoft.com/office/drawing/2014/main" id="{97168B62-7E91-318B-24CE-AB1BC3B02533}"/>
+              </a:ext>
+            </a:extLst>
+          </p:cNvPr>
+          <p:cNvSpPr/>
+          <p:nvPr/>
+        </p:nvSpPr>
+        <p:spPr>
+          <a:xfrm>
+            <a:off x="9777918" y="-3"/>
+            <a:ext cx="2448000" cy="6857999"/>
+          </a:xfrm>
+          <a:prstGeom prst="rect">
+            <a:avLst/>
+          </a:prstGeom>
+          <a:solidFill>
+            <a:srgbClr val="4B4443">
+              <a:alpha val="80000"/>
+            </a:srgbClr>
+          </a:solidFill>
+          <a:ln>
+            <a:solidFill>
+              <a:srgbClr val="FAEBA0"/>
+            </a:solidFill>
+          </a:ln>
+        </p:spPr>
+        <p:style>
+          <a:lnRef idx="2">
+            <a:schemeClr val="accent1">
+              <a:shade val="15000"/>
+            </a:schemeClr>
+          </a:lnRef>
+          <a:fillRef idx="1">
+            <a:schemeClr val="accent1"/>
+          </a:fillRef>
+          <a:effectRef idx="0">
+            <a:schemeClr val="accent1"/>
+          </a:effectRef>
+          <a:fontRef idx="minor">
+            <a:schemeClr val="lt1"/>
+          </a:fontRef>
+        </p:style>
+        <p:txBody>
+          <a:bodyPr rtlCol="0" anchor="ctr"/>
+          <a:lstStyle/>
+          <a:p>
+            <a:pPr algn="ctr"/>
+            <a:endParaRPr lang="ko-KR" altLang="en-US"/>
+          </a:p>
+        </p:txBody>
+      </p:sp>
+      <p:sp>
+        <p:nvSpPr>
+          <p:cNvPr id="5" name="이등변 삼각형 4">
+            <a:extLst>
+              <a:ext uri="{FF2B5EF4-FFF2-40B4-BE49-F238E27FC236}">
+                <a16:creationId xmlns:a16="http://schemas.microsoft.com/office/drawing/2014/main" id="{E78D7B35-FFB4-AE3D-4059-8B5F3B129B29}"/>
+              </a:ext>
+            </a:extLst>
+          </p:cNvPr>
+          <p:cNvSpPr/>
+          <p:nvPr/>
+        </p:nvSpPr>
+        <p:spPr>
+          <a:xfrm flipH="1" flipV="1">
+            <a:off x="0" y="0"/>
+            <a:ext cx="12192000" cy="6447600"/>
+          </a:xfrm>
+          <a:prstGeom prst="triangle">
+            <a:avLst>
+              <a:gd name="adj" fmla="val 100000"/>
+            </a:avLst>
+          </a:prstGeom>
+          <a:solidFill>
+            <a:srgbClr val="4E0A74"/>
+          </a:solidFill>
+          <a:ln>
+            <a:noFill/>
+          </a:ln>
+        </p:spPr>
+        <p:style>
+          <a:lnRef idx="2">
+            <a:schemeClr val="accent1">
+              <a:shade val="50000"/>
+            </a:schemeClr>
+          </a:lnRef>
+          <a:fillRef idx="1">
+            <a:schemeClr val="accent1"/>
+          </a:fillRef>
+          <a:effectRef idx="0">
+            <a:schemeClr val="accent1"/>
+          </a:effectRef>
+          <a:fontRef idx="minor">
+            <a:schemeClr val="lt1"/>
+          </a:fontRef>
+        </p:style>
+        <p:txBody>
+          <a:bodyPr rtlCol="0" anchor="ctr"/>
+          <a:lstStyle/>
+          <a:p>
+            <a:pPr algn="ctr"/>
+            <a:endParaRPr lang="ko-KR" altLang="en-US" dirty="0"/>
+          </a:p>
+        </p:txBody>
+      </p:sp>
+      <p:sp>
+        <p:nvSpPr>
+          <p:cNvPr id="6" name="직사각형 5">
+            <a:extLst>
+              <a:ext uri="{FF2B5EF4-FFF2-40B4-BE49-F238E27FC236}">
+                <a16:creationId xmlns:a16="http://schemas.microsoft.com/office/drawing/2014/main" id="{D3FD614B-B3D1-2799-2581-7E19812A71DD}"/>
+              </a:ext>
+            </a:extLst>
+          </p:cNvPr>
+          <p:cNvSpPr/>
+          <p:nvPr/>
+        </p:nvSpPr>
+        <p:spPr>
+          <a:xfrm>
+            <a:off x="3281544" y="610155"/>
+            <a:ext cx="1069848" cy="411480"/>
+          </a:xfrm>
+          <a:prstGeom prst="rect">
+            <a:avLst/>
+          </a:prstGeom>
+          <a:noFill/>
+          <a:ln>
+            <a:noFill/>
+          </a:ln>
+        </p:spPr>
+        <p:style>
+          <a:lnRef idx="2">
+            <a:schemeClr val="accent1">
+              <a:shade val="50000"/>
+            </a:schemeClr>
+          </a:lnRef>
+          <a:fillRef idx="1">
+            <a:schemeClr val="accent1"/>
+          </a:fillRef>
+          <a:effectRef idx="0">
+            <a:schemeClr val="accent1"/>
+          </a:effectRef>
+          <a:fontRef idx="minor">
+            <a:schemeClr val="lt1"/>
+          </a:fontRef>
+        </p:style>
+        <p:txBody>
+          <a:bodyPr rtlCol="0" anchor="ctr"/>
+          <a:lstStyle/>
+          <a:p>
+            <a:pPr algn="ctr"/>
+            <a:r>
+              <a:rPr lang="ko-KR" altLang="en-US" sz="1000" dirty="0">
+                <a:solidFill>
+                  <a:schemeClr val="bg1"/>
+                </a:solidFill>
+              </a:rPr>
+              <a:t>쓰레기 줍기</a:t>
+            </a:r>
+          </a:p>
+        </p:txBody>
+      </p:sp>
+      <p:sp>
+        <p:nvSpPr>
+          <p:cNvPr id="8" name="직사각형 7">
+            <a:extLst>
+              <a:ext uri="{FF2B5EF4-FFF2-40B4-BE49-F238E27FC236}">
+                <a16:creationId xmlns:a16="http://schemas.microsoft.com/office/drawing/2014/main" id="{BDC7C307-FB88-038B-F00C-AF4F7C6E0E27}"/>
+              </a:ext>
+            </a:extLst>
+          </p:cNvPr>
+          <p:cNvSpPr/>
+          <p:nvPr/>
+        </p:nvSpPr>
+        <p:spPr>
+          <a:xfrm>
+            <a:off x="4676952" y="610155"/>
+            <a:ext cx="1069848" cy="411480"/>
+          </a:xfrm>
+          <a:prstGeom prst="rect">
+            <a:avLst/>
+          </a:prstGeom>
+          <a:noFill/>
+          <a:ln>
+            <a:noFill/>
+          </a:ln>
+        </p:spPr>
+        <p:style>
+          <a:lnRef idx="2">
+            <a:schemeClr val="accent1">
+              <a:shade val="50000"/>
+            </a:schemeClr>
+          </a:lnRef>
+          <a:fillRef idx="1">
+            <a:schemeClr val="accent1"/>
+          </a:fillRef>
+          <a:effectRef idx="0">
+            <a:schemeClr val="accent1"/>
+          </a:effectRef>
+          <a:fontRef idx="minor">
+            <a:schemeClr val="lt1"/>
+          </a:fontRef>
+        </p:style>
+        <p:txBody>
+          <a:bodyPr rtlCol="0" anchor="ctr"/>
+          <a:lstStyle/>
+          <a:p>
+            <a:pPr algn="ctr"/>
+            <a:r>
+              <a:rPr lang="ko-KR" altLang="en-US" sz="1000" dirty="0">
+                <a:solidFill>
+                  <a:schemeClr val="bg1"/>
+                </a:solidFill>
+              </a:rPr>
+              <a:t>첫 번째 균열</a:t>
+            </a:r>
+          </a:p>
+        </p:txBody>
+      </p:sp>
+      <p:sp>
+        <p:nvSpPr>
+          <p:cNvPr id="9" name="직사각형 8">
+            <a:extLst>
+              <a:ext uri="{FF2B5EF4-FFF2-40B4-BE49-F238E27FC236}">
+                <a16:creationId xmlns:a16="http://schemas.microsoft.com/office/drawing/2014/main" id="{E413EA34-D317-596F-C3ED-0C7FE2696060}"/>
+              </a:ext>
+            </a:extLst>
+          </p:cNvPr>
+          <p:cNvSpPr/>
+          <p:nvPr/>
+        </p:nvSpPr>
+        <p:spPr>
+          <a:xfrm>
+            <a:off x="6072360" y="610155"/>
+            <a:ext cx="1069848" cy="411480"/>
+          </a:xfrm>
+          <a:prstGeom prst="rect">
+            <a:avLst/>
+          </a:prstGeom>
+          <a:noFill/>
+          <a:ln>
+            <a:noFill/>
+          </a:ln>
+        </p:spPr>
+        <p:style>
+          <a:lnRef idx="2">
+            <a:schemeClr val="accent1">
+              <a:shade val="50000"/>
+            </a:schemeClr>
+          </a:lnRef>
+          <a:fillRef idx="1">
+            <a:schemeClr val="accent1"/>
+          </a:fillRef>
+          <a:effectRef idx="0">
+            <a:schemeClr val="accent1"/>
+          </a:effectRef>
+          <a:fontRef idx="minor">
+            <a:schemeClr val="lt1"/>
+          </a:fontRef>
+        </p:style>
+        <p:txBody>
+          <a:bodyPr rtlCol="0" anchor="ctr"/>
+          <a:lstStyle/>
+          <a:p>
+            <a:pPr algn="ctr"/>
+            <a:r>
+              <a:rPr lang="ko-KR" altLang="en-US" sz="1000" dirty="0">
+                <a:solidFill>
+                  <a:schemeClr val="bg1"/>
+                </a:solidFill>
+              </a:rPr>
+              <a:t>선의 지수 측정</a:t>
+            </a:r>
+          </a:p>
+        </p:txBody>
+      </p:sp>
+      <p:sp>
+        <p:nvSpPr>
+          <p:cNvPr id="10" name="직사각형 9">
+            <a:extLst>
+              <a:ext uri="{FF2B5EF4-FFF2-40B4-BE49-F238E27FC236}">
+                <a16:creationId xmlns:a16="http://schemas.microsoft.com/office/drawing/2014/main" id="{62BFBB14-C716-834C-6AD0-F0E2287E355A}"/>
+              </a:ext>
+            </a:extLst>
+          </p:cNvPr>
+          <p:cNvSpPr/>
+          <p:nvPr/>
+        </p:nvSpPr>
+        <p:spPr>
+          <a:xfrm>
+            <a:off x="1783779" y="333102"/>
+            <a:ext cx="1361488" cy="411480"/>
+          </a:xfrm>
+          <a:prstGeom prst="rect">
+            <a:avLst/>
+          </a:prstGeom>
+          <a:noFill/>
+          <a:ln>
+            <a:noFill/>
+          </a:ln>
+        </p:spPr>
+        <p:style>
+          <a:lnRef idx="2">
+            <a:schemeClr val="accent1">
+              <a:shade val="50000"/>
+            </a:schemeClr>
+          </a:lnRef>
+          <a:fillRef idx="1">
+            <a:schemeClr val="accent1"/>
+          </a:fillRef>
+          <a:effectRef idx="0">
+            <a:schemeClr val="accent1"/>
+          </a:effectRef>
+          <a:fontRef idx="minor">
+            <a:schemeClr val="lt1"/>
+          </a:fontRef>
+        </p:style>
+        <p:txBody>
+          <a:bodyPr rtlCol="0" anchor="ctr"/>
+          <a:lstStyle/>
+          <a:p>
+            <a:pPr algn="ctr"/>
+            <a:r>
+              <a:rPr lang="ko-KR" altLang="en-US" sz="1000" dirty="0">
+                <a:solidFill>
+                  <a:schemeClr val="bg1"/>
+                </a:solidFill>
+              </a:rPr>
+              <a:t>가정 환경</a:t>
+            </a:r>
+          </a:p>
+        </p:txBody>
+      </p:sp>
+      <p:sp>
+        <p:nvSpPr>
+          <p:cNvPr id="12" name="직사각형 11">
+            <a:extLst>
+              <a:ext uri="{FF2B5EF4-FFF2-40B4-BE49-F238E27FC236}">
+                <a16:creationId xmlns:a16="http://schemas.microsoft.com/office/drawing/2014/main" id="{0A5A3AF7-5731-8BDD-2C11-8F2E1CB81D7E}"/>
+              </a:ext>
+            </a:extLst>
+          </p:cNvPr>
+          <p:cNvSpPr/>
+          <p:nvPr/>
+        </p:nvSpPr>
+        <p:spPr>
+          <a:xfrm>
+            <a:off x="7467767" y="610155"/>
+            <a:ext cx="1401315" cy="411480"/>
+          </a:xfrm>
+          <a:prstGeom prst="rect">
+            <a:avLst/>
+          </a:prstGeom>
+          <a:noFill/>
+          <a:ln>
+            <a:noFill/>
+          </a:ln>
+        </p:spPr>
+        <p:style>
+          <a:lnRef idx="2">
+            <a:schemeClr val="accent1">
+              <a:shade val="50000"/>
+            </a:schemeClr>
+          </a:lnRef>
+          <a:fillRef idx="1">
+            <a:schemeClr val="accent1"/>
+          </a:fillRef>
+          <a:effectRef idx="0">
+            <a:schemeClr val="accent1"/>
+          </a:effectRef>
+          <a:fontRef idx="minor">
+            <a:schemeClr val="lt1"/>
+          </a:fontRef>
+        </p:style>
+        <p:txBody>
+          <a:bodyPr rtlCol="0" anchor="ctr"/>
+          <a:lstStyle/>
+          <a:p>
+            <a:pPr algn="ctr"/>
+            <a:r>
+              <a:rPr lang="ko-KR" altLang="en-US" sz="1000">
+                <a:solidFill>
+                  <a:schemeClr val="bg1"/>
+                </a:solidFill>
+              </a:rPr>
+              <a:t>무한대의 선의 지수</a:t>
+            </a:r>
+          </a:p>
+        </p:txBody>
+      </p:sp>
+      <p:sp>
+        <p:nvSpPr>
+          <p:cNvPr id="13" name="직사각형 12">
+            <a:extLst>
+              <a:ext uri="{FF2B5EF4-FFF2-40B4-BE49-F238E27FC236}">
+                <a16:creationId xmlns:a16="http://schemas.microsoft.com/office/drawing/2014/main" id="{F7498CD9-1DA7-81E1-FB4A-82A557A89F58}"/>
+              </a:ext>
+            </a:extLst>
+          </p:cNvPr>
+          <p:cNvSpPr/>
+          <p:nvPr/>
+        </p:nvSpPr>
+        <p:spPr>
+          <a:xfrm>
+            <a:off x="3281544" y="1276838"/>
+            <a:ext cx="1069848" cy="411480"/>
+          </a:xfrm>
+          <a:prstGeom prst="rect">
+            <a:avLst/>
+          </a:prstGeom>
+          <a:noFill/>
+          <a:ln>
+            <a:noFill/>
+          </a:ln>
+        </p:spPr>
+        <p:style>
+          <a:lnRef idx="2">
+            <a:schemeClr val="accent1">
+              <a:shade val="50000"/>
+            </a:schemeClr>
+          </a:lnRef>
+          <a:fillRef idx="1">
+            <a:schemeClr val="accent1"/>
+          </a:fillRef>
+          <a:effectRef idx="0">
+            <a:schemeClr val="accent1"/>
+          </a:effectRef>
+          <a:fontRef idx="minor">
+            <a:schemeClr val="lt1"/>
+          </a:fontRef>
+        </p:style>
+        <p:txBody>
+          <a:bodyPr rtlCol="0" anchor="ctr"/>
+          <a:lstStyle/>
+          <a:p>
+            <a:pPr algn="ctr"/>
+            <a:r>
+              <a:rPr lang="ko-KR" altLang="en-US" sz="1000" dirty="0">
+                <a:solidFill>
+                  <a:schemeClr val="bg1"/>
+                </a:solidFill>
+              </a:rPr>
+              <a:t>칭찬 중독</a:t>
+            </a:r>
+          </a:p>
+        </p:txBody>
+      </p:sp>
+      <p:sp>
+        <p:nvSpPr>
+          <p:cNvPr id="14" name="직사각형 13">
+            <a:extLst>
+              <a:ext uri="{FF2B5EF4-FFF2-40B4-BE49-F238E27FC236}">
+                <a16:creationId xmlns:a16="http://schemas.microsoft.com/office/drawing/2014/main" id="{26BE3C65-3436-8099-22CC-BD47487B38E6}"/>
+              </a:ext>
+            </a:extLst>
+          </p:cNvPr>
+          <p:cNvSpPr/>
+          <p:nvPr/>
+        </p:nvSpPr>
+        <p:spPr>
+          <a:xfrm>
+            <a:off x="6072360" y="1276838"/>
+            <a:ext cx="1069848" cy="411480"/>
+          </a:xfrm>
+          <a:prstGeom prst="rect">
+            <a:avLst/>
+          </a:prstGeom>
+          <a:noFill/>
+          <a:ln>
+            <a:noFill/>
+          </a:ln>
+        </p:spPr>
+        <p:style>
+          <a:lnRef idx="2">
+            <a:schemeClr val="accent1">
+              <a:shade val="50000"/>
+            </a:schemeClr>
+          </a:lnRef>
+          <a:fillRef idx="1">
+            <a:schemeClr val="accent1"/>
+          </a:fillRef>
+          <a:effectRef idx="0">
+            <a:schemeClr val="accent1"/>
+          </a:effectRef>
+          <a:fontRef idx="minor">
+            <a:schemeClr val="lt1"/>
+          </a:fontRef>
+        </p:style>
+        <p:txBody>
+          <a:bodyPr rtlCol="0" anchor="ctr"/>
+          <a:lstStyle/>
+          <a:p>
+            <a:pPr algn="ctr"/>
+            <a:r>
+              <a:rPr lang="ko-KR" altLang="en-US" sz="1000">
+                <a:solidFill>
+                  <a:schemeClr val="bg1"/>
+                </a:solidFill>
+              </a:rPr>
+              <a:t>선의 랭킹 시스템</a:t>
+            </a:r>
+          </a:p>
+        </p:txBody>
+      </p:sp>
+      <p:sp>
+        <p:nvSpPr>
+          <p:cNvPr id="15" name="직사각형 14">
+            <a:extLst>
+              <a:ext uri="{FF2B5EF4-FFF2-40B4-BE49-F238E27FC236}">
+                <a16:creationId xmlns:a16="http://schemas.microsoft.com/office/drawing/2014/main" id="{719433AB-929B-1C3E-CB2E-88B9EC80CB59}"/>
+              </a:ext>
+            </a:extLst>
+          </p:cNvPr>
+          <p:cNvSpPr/>
+          <p:nvPr/>
+        </p:nvSpPr>
+        <p:spPr>
+          <a:xfrm>
+            <a:off x="6072360" y="1943521"/>
+            <a:ext cx="1069848" cy="411480"/>
+          </a:xfrm>
+          <a:prstGeom prst="rect">
+            <a:avLst/>
+          </a:prstGeom>
+          <a:noFill/>
+          <a:ln>
+            <a:noFill/>
+          </a:ln>
+        </p:spPr>
+        <p:style>
+          <a:lnRef idx="2">
+            <a:schemeClr val="accent1">
+              <a:shade val="50000"/>
+            </a:schemeClr>
+          </a:lnRef>
+          <a:fillRef idx="1">
+            <a:schemeClr val="accent1"/>
+          </a:fillRef>
+          <a:effectRef idx="0">
+            <a:schemeClr val="accent1"/>
+          </a:effectRef>
+          <a:fontRef idx="minor">
+            <a:schemeClr val="lt1"/>
+          </a:fontRef>
+        </p:style>
+        <p:txBody>
+          <a:bodyPr rtlCol="0" anchor="ctr"/>
+          <a:lstStyle/>
+          <a:p>
+            <a:pPr algn="ctr"/>
+            <a:r>
+              <a:rPr lang="ko-KR" altLang="en-US" sz="1000" dirty="0">
+                <a:solidFill>
+                  <a:schemeClr val="bg1"/>
+                </a:solidFill>
+              </a:rPr>
+              <a:t>선의 </a:t>
+            </a:r>
+            <a:r>
+              <a:rPr lang="ko-KR" altLang="en-US" sz="1000" dirty="0" err="1">
+                <a:solidFill>
+                  <a:schemeClr val="bg1"/>
+                </a:solidFill>
+              </a:rPr>
+              <a:t>고갈자</a:t>
+            </a:r>
+            <a:endParaRPr lang="ko-KR" altLang="en-US" sz="1000" dirty="0">
+              <a:solidFill>
+                <a:schemeClr val="bg1"/>
+              </a:solidFill>
+            </a:endParaRPr>
+          </a:p>
+        </p:txBody>
+      </p:sp>
+      <p:sp>
+        <p:nvSpPr>
+          <p:cNvPr id="16" name="직사각형 15">
+            <a:extLst>
+              <a:ext uri="{FF2B5EF4-FFF2-40B4-BE49-F238E27FC236}">
+                <a16:creationId xmlns:a16="http://schemas.microsoft.com/office/drawing/2014/main" id="{F5F303D5-2F6F-1585-A736-4F94BC3CC874}"/>
+              </a:ext>
+            </a:extLst>
+          </p:cNvPr>
+          <p:cNvSpPr/>
+          <p:nvPr/>
+        </p:nvSpPr>
+        <p:spPr>
+          <a:xfrm>
+            <a:off x="2421060" y="2355001"/>
+            <a:ext cx="1069848" cy="411480"/>
+          </a:xfrm>
+          <a:prstGeom prst="rect">
+            <a:avLst/>
+          </a:prstGeom>
+          <a:noFill/>
+          <a:ln>
+            <a:noFill/>
+          </a:ln>
+        </p:spPr>
+        <p:style>
+          <a:lnRef idx="2">
+            <a:schemeClr val="accent1">
+              <a:shade val="50000"/>
+            </a:schemeClr>
+          </a:lnRef>
+          <a:fillRef idx="1">
+            <a:schemeClr val="accent1"/>
+          </a:fillRef>
+          <a:effectRef idx="0">
+            <a:schemeClr val="accent1"/>
+          </a:effectRef>
+          <a:fontRef idx="minor">
+            <a:schemeClr val="lt1"/>
+          </a:fontRef>
+        </p:style>
+        <p:txBody>
+          <a:bodyPr rtlCol="0" anchor="ctr"/>
+          <a:lstStyle/>
+          <a:p>
+            <a:pPr algn="ctr"/>
+            <a:r>
+              <a:rPr lang="ko-KR" altLang="en-US" sz="1000" dirty="0">
+                <a:solidFill>
+                  <a:schemeClr val="bg1"/>
+                </a:solidFill>
+              </a:rPr>
+              <a:t>첫 붕괴</a:t>
+            </a:r>
+          </a:p>
+        </p:txBody>
+      </p:sp>
+      <p:sp>
+        <p:nvSpPr>
+          <p:cNvPr id="17" name="직사각형 16">
+            <a:extLst>
+              <a:ext uri="{FF2B5EF4-FFF2-40B4-BE49-F238E27FC236}">
+                <a16:creationId xmlns:a16="http://schemas.microsoft.com/office/drawing/2014/main" id="{C097B9AA-4B38-F750-705B-E419957719F2}"/>
+              </a:ext>
+            </a:extLst>
+          </p:cNvPr>
+          <p:cNvSpPr/>
+          <p:nvPr/>
+        </p:nvSpPr>
+        <p:spPr>
+          <a:xfrm>
+            <a:off x="4182257" y="2879243"/>
+            <a:ext cx="1069848" cy="411480"/>
+          </a:xfrm>
+          <a:prstGeom prst="rect">
+            <a:avLst/>
+          </a:prstGeom>
+          <a:noFill/>
+          <a:ln>
+            <a:noFill/>
+          </a:ln>
+        </p:spPr>
+        <p:style>
+          <a:lnRef idx="2">
+            <a:schemeClr val="accent1">
+              <a:shade val="50000"/>
+            </a:schemeClr>
+          </a:lnRef>
+          <a:fillRef idx="1">
+            <a:schemeClr val="accent1"/>
+          </a:fillRef>
+          <a:effectRef idx="0">
+            <a:schemeClr val="accent1"/>
+          </a:effectRef>
+          <a:fontRef idx="minor">
+            <a:schemeClr val="lt1"/>
+          </a:fontRef>
+        </p:style>
+        <p:txBody>
+          <a:bodyPr rtlCol="0" anchor="ctr"/>
+          <a:lstStyle/>
+          <a:p>
+            <a:pPr algn="ctr"/>
+            <a:r>
+              <a:rPr lang="ko-KR" altLang="en-US" sz="1000" dirty="0">
+                <a:solidFill>
+                  <a:schemeClr val="bg1"/>
+                </a:solidFill>
+              </a:rPr>
+              <a:t>선의 강제 징집</a:t>
+            </a:r>
+          </a:p>
+        </p:txBody>
+      </p:sp>
+      <p:sp>
+        <p:nvSpPr>
+          <p:cNvPr id="18" name="직사각형 17">
+            <a:extLst>
+              <a:ext uri="{FF2B5EF4-FFF2-40B4-BE49-F238E27FC236}">
+                <a16:creationId xmlns:a16="http://schemas.microsoft.com/office/drawing/2014/main" id="{F8B62E21-B0C9-CE94-7A9A-07D8D4C68B8E}"/>
+              </a:ext>
+            </a:extLst>
+          </p:cNvPr>
+          <p:cNvSpPr/>
+          <p:nvPr/>
+        </p:nvSpPr>
+        <p:spPr>
+          <a:xfrm>
+            <a:off x="4253689" y="1970805"/>
+            <a:ext cx="1069848" cy="411480"/>
+          </a:xfrm>
+          <a:prstGeom prst="rect">
+            <a:avLst/>
+          </a:prstGeom>
+          <a:noFill/>
+          <a:ln>
+            <a:noFill/>
+          </a:ln>
+        </p:spPr>
+        <p:style>
+          <a:lnRef idx="2">
+            <a:schemeClr val="accent1">
+              <a:shade val="50000"/>
+            </a:schemeClr>
+          </a:lnRef>
+          <a:fillRef idx="1">
+            <a:schemeClr val="accent1"/>
+          </a:fillRef>
+          <a:effectRef idx="0">
+            <a:schemeClr val="accent1"/>
+          </a:effectRef>
+          <a:fontRef idx="minor">
+            <a:schemeClr val="lt1"/>
+          </a:fontRef>
+        </p:style>
+        <p:txBody>
+          <a:bodyPr rtlCol="0" anchor="ctr"/>
+          <a:lstStyle/>
+          <a:p>
+            <a:pPr algn="ctr"/>
+            <a:r>
+              <a:rPr lang="ko-KR" altLang="en-US" sz="1000" dirty="0">
+                <a:solidFill>
+                  <a:schemeClr val="bg1"/>
+                </a:solidFill>
+              </a:rPr>
+              <a:t>동생의 한마디</a:t>
+            </a:r>
+          </a:p>
+        </p:txBody>
+      </p:sp>
+      <p:sp>
+        <p:nvSpPr>
+          <p:cNvPr id="20" name="직사각형 19">
+            <a:extLst>
+              <a:ext uri="{FF2B5EF4-FFF2-40B4-BE49-F238E27FC236}">
+                <a16:creationId xmlns:a16="http://schemas.microsoft.com/office/drawing/2014/main" id="{AE514579-EFB6-D419-82FA-AF51F61CAE56}"/>
+              </a:ext>
+            </a:extLst>
+          </p:cNvPr>
+          <p:cNvSpPr/>
+          <p:nvPr/>
+        </p:nvSpPr>
+        <p:spPr>
+          <a:xfrm>
+            <a:off x="1351212" y="3429000"/>
+            <a:ext cx="1069848" cy="411480"/>
+          </a:xfrm>
+          <a:prstGeom prst="rect">
+            <a:avLst/>
+          </a:prstGeom>
+          <a:noFill/>
+          <a:ln>
+            <a:noFill/>
+          </a:ln>
+        </p:spPr>
+        <p:style>
+          <a:lnRef idx="2">
+            <a:schemeClr val="accent1">
+              <a:shade val="50000"/>
+            </a:schemeClr>
+          </a:lnRef>
+          <a:fillRef idx="1">
+            <a:schemeClr val="accent1"/>
+          </a:fillRef>
+          <a:effectRef idx="0">
+            <a:schemeClr val="accent1"/>
+          </a:effectRef>
+          <a:fontRef idx="minor">
+            <a:schemeClr val="lt1"/>
+          </a:fontRef>
+        </p:style>
+        <p:txBody>
+          <a:bodyPr rtlCol="0" anchor="ctr"/>
+          <a:lstStyle/>
+          <a:p>
+            <a:pPr algn="ctr"/>
+            <a:r>
+              <a:rPr lang="ko-KR" altLang="en-US" sz="1000" dirty="0">
+                <a:solidFill>
+                  <a:schemeClr val="bg1"/>
+                </a:solidFill>
+              </a:rPr>
+              <a:t>마지막 선택</a:t>
+            </a:r>
+          </a:p>
+        </p:txBody>
+      </p:sp>
+      <p:sp>
+        <p:nvSpPr>
+          <p:cNvPr id="38" name="직사각형 37">
+            <a:extLst>
+              <a:ext uri="{FF2B5EF4-FFF2-40B4-BE49-F238E27FC236}">
+                <a16:creationId xmlns:a16="http://schemas.microsoft.com/office/drawing/2014/main" id="{3411E15E-7AE3-A513-B116-5F3937E8BB23}"/>
+              </a:ext>
+            </a:extLst>
+          </p:cNvPr>
+          <p:cNvSpPr/>
+          <p:nvPr/>
+        </p:nvSpPr>
+        <p:spPr>
+          <a:xfrm>
+            <a:off x="4607353" y="1433114"/>
+            <a:ext cx="1069848" cy="411480"/>
+          </a:xfrm>
+          <a:prstGeom prst="rect">
+            <a:avLst/>
+          </a:prstGeom>
+          <a:noFill/>
+          <a:ln>
+            <a:noFill/>
+          </a:ln>
+        </p:spPr>
+        <p:style>
+          <a:lnRef idx="2">
+            <a:schemeClr val="accent1">
+              <a:shade val="50000"/>
+            </a:schemeClr>
+          </a:lnRef>
+          <a:fillRef idx="1">
+            <a:schemeClr val="accent1"/>
+          </a:fillRef>
+          <a:effectRef idx="0">
+            <a:schemeClr val="accent1"/>
+          </a:effectRef>
+          <a:fontRef idx="minor">
+            <a:schemeClr val="lt1"/>
+          </a:fontRef>
+        </p:style>
+        <p:txBody>
+          <a:bodyPr rtlCol="0" anchor="ctr"/>
+          <a:lstStyle/>
+          <a:p>
+            <a:pPr algn="ctr"/>
+            <a:r>
+              <a:rPr lang="ko-KR" altLang="en-US" sz="1000" dirty="0">
+                <a:solidFill>
+                  <a:schemeClr val="bg1"/>
+                </a:solidFill>
+              </a:rPr>
+              <a:t>영웅 산업</a:t>
+            </a:r>
+          </a:p>
+        </p:txBody>
+      </p:sp>
+      <p:sp>
+        <p:nvSpPr>
+          <p:cNvPr id="25" name="직사각형 24">
+            <a:extLst>
+              <a:ext uri="{FF2B5EF4-FFF2-40B4-BE49-F238E27FC236}">
+                <a16:creationId xmlns:a16="http://schemas.microsoft.com/office/drawing/2014/main" id="{4F69904C-EC4D-C12D-19BD-EB2390B91B9C}"/>
+              </a:ext>
+            </a:extLst>
+          </p:cNvPr>
+          <p:cNvSpPr/>
+          <p:nvPr/>
+        </p:nvSpPr>
+        <p:spPr>
+          <a:xfrm>
+            <a:off x="842792" y="2522975"/>
+            <a:ext cx="1069848" cy="411480"/>
+          </a:xfrm>
+          <a:prstGeom prst="rect">
+            <a:avLst/>
+          </a:prstGeom>
+          <a:noFill/>
+          <a:ln>
+            <a:noFill/>
+          </a:ln>
+        </p:spPr>
+        <p:style>
+          <a:lnRef idx="2">
+            <a:schemeClr val="accent1">
+              <a:shade val="50000"/>
+            </a:schemeClr>
+          </a:lnRef>
+          <a:fillRef idx="1">
+            <a:schemeClr val="accent1"/>
+          </a:fillRef>
+          <a:effectRef idx="0">
+            <a:schemeClr val="accent1"/>
+          </a:effectRef>
+          <a:fontRef idx="minor">
+            <a:schemeClr val="lt1"/>
+          </a:fontRef>
+        </p:style>
+        <p:txBody>
+          <a:bodyPr rtlCol="0" anchor="ctr"/>
+          <a:lstStyle/>
+          <a:p>
+            <a:pPr algn="ctr"/>
+            <a:r>
+              <a:rPr lang="ko-KR" altLang="en-US" sz="1000" dirty="0">
+                <a:solidFill>
+                  <a:schemeClr val="bg1"/>
+                </a:solidFill>
+              </a:rPr>
+              <a:t>정서적 피난처</a:t>
+            </a:r>
+          </a:p>
+        </p:txBody>
+      </p:sp>
+      <p:sp>
+        <p:nvSpPr>
+          <p:cNvPr id="26" name="직사각형 25">
+            <a:extLst>
+              <a:ext uri="{FF2B5EF4-FFF2-40B4-BE49-F238E27FC236}">
+                <a16:creationId xmlns:a16="http://schemas.microsoft.com/office/drawing/2014/main" id="{FD3CE820-3ACC-CAD9-7460-F158E59EE393}"/>
+              </a:ext>
+            </a:extLst>
+          </p:cNvPr>
+          <p:cNvSpPr/>
+          <p:nvPr/>
+        </p:nvSpPr>
+        <p:spPr>
+          <a:xfrm>
+            <a:off x="547101" y="815895"/>
+            <a:ext cx="1069848" cy="411480"/>
+          </a:xfrm>
+          <a:prstGeom prst="rect">
+            <a:avLst/>
+          </a:prstGeom>
+          <a:noFill/>
+          <a:ln>
+            <a:noFill/>
+          </a:ln>
+        </p:spPr>
+        <p:style>
+          <a:lnRef idx="2">
+            <a:schemeClr val="accent1">
+              <a:shade val="50000"/>
+            </a:schemeClr>
+          </a:lnRef>
+          <a:fillRef idx="1">
+            <a:schemeClr val="accent1"/>
+          </a:fillRef>
+          <a:effectRef idx="0">
+            <a:schemeClr val="accent1"/>
+          </a:effectRef>
+          <a:fontRef idx="minor">
+            <a:schemeClr val="lt1"/>
+          </a:fontRef>
+        </p:style>
+        <p:txBody>
+          <a:bodyPr rtlCol="0" anchor="ctr"/>
+          <a:lstStyle/>
+          <a:p>
+            <a:pPr algn="ctr"/>
+            <a:r>
+              <a:rPr lang="ko-KR" altLang="en-US" sz="1000" dirty="0">
+                <a:solidFill>
+                  <a:schemeClr val="bg1"/>
+                </a:solidFill>
+              </a:rPr>
+              <a:t>첫 번째 거절</a:t>
+            </a:r>
+          </a:p>
+        </p:txBody>
+      </p:sp>
+      <p:sp>
+        <p:nvSpPr>
+          <p:cNvPr id="28" name="직사각형 27">
+            <a:extLst>
+              <a:ext uri="{FF2B5EF4-FFF2-40B4-BE49-F238E27FC236}">
+                <a16:creationId xmlns:a16="http://schemas.microsoft.com/office/drawing/2014/main" id="{C3EFCE05-692B-69A3-A2AF-1D2591CD36DA}"/>
+              </a:ext>
+            </a:extLst>
+          </p:cNvPr>
+          <p:cNvSpPr/>
+          <p:nvPr/>
+        </p:nvSpPr>
+        <p:spPr>
+          <a:xfrm>
+            <a:off x="1204864" y="1576585"/>
+            <a:ext cx="1069848" cy="411480"/>
+          </a:xfrm>
+          <a:prstGeom prst="rect">
+            <a:avLst/>
+          </a:prstGeom>
+          <a:noFill/>
+          <a:ln>
+            <a:noFill/>
+          </a:ln>
+        </p:spPr>
+        <p:style>
+          <a:lnRef idx="2">
+            <a:schemeClr val="accent1">
+              <a:shade val="50000"/>
+            </a:schemeClr>
+          </a:lnRef>
+          <a:fillRef idx="1">
+            <a:schemeClr val="accent1"/>
+          </a:fillRef>
+          <a:effectRef idx="0">
+            <a:schemeClr val="accent1"/>
+          </a:effectRef>
+          <a:fontRef idx="minor">
+            <a:schemeClr val="lt1"/>
+          </a:fontRef>
+        </p:style>
+        <p:txBody>
+          <a:bodyPr rtlCol="0" anchor="ctr"/>
+          <a:lstStyle/>
+          <a:p>
+            <a:pPr algn="ctr"/>
+            <a:r>
+              <a:rPr lang="ko-KR" altLang="en-US" sz="1000" dirty="0">
+                <a:solidFill>
+                  <a:schemeClr val="bg1"/>
+                </a:solidFill>
+              </a:rPr>
+              <a:t>구원 방법 발견</a:t>
+            </a:r>
+          </a:p>
+        </p:txBody>
+      </p:sp>
+      <p:sp>
+        <p:nvSpPr>
+          <p:cNvPr id="29" name="직사각형 28">
+            <a:extLst>
+              <a:ext uri="{FF2B5EF4-FFF2-40B4-BE49-F238E27FC236}">
+                <a16:creationId xmlns:a16="http://schemas.microsoft.com/office/drawing/2014/main" id="{6ACADD41-7720-83F3-AEEC-14895C32BE4B}"/>
+              </a:ext>
+            </a:extLst>
+          </p:cNvPr>
+          <p:cNvSpPr/>
+          <p:nvPr/>
+        </p:nvSpPr>
+        <p:spPr>
+          <a:xfrm>
+            <a:off x="2713732" y="3733057"/>
+            <a:ext cx="1069848" cy="411480"/>
+          </a:xfrm>
+          <a:prstGeom prst="rect">
+            <a:avLst/>
+          </a:prstGeom>
+          <a:noFill/>
+          <a:ln>
+            <a:noFill/>
+          </a:ln>
+        </p:spPr>
+        <p:style>
+          <a:lnRef idx="2">
+            <a:schemeClr val="accent1">
+              <a:shade val="50000"/>
+            </a:schemeClr>
+          </a:lnRef>
+          <a:fillRef idx="1">
+            <a:schemeClr val="accent1"/>
+          </a:fillRef>
+          <a:effectRef idx="0">
+            <a:schemeClr val="accent1"/>
+          </a:effectRef>
+          <a:fontRef idx="minor">
+            <a:schemeClr val="lt1"/>
+          </a:fontRef>
+        </p:style>
+        <p:txBody>
+          <a:bodyPr rtlCol="0" anchor="ctr"/>
+          <a:lstStyle/>
+          <a:p>
+            <a:pPr algn="ctr"/>
+            <a:r>
+              <a:rPr lang="ko-KR" altLang="en-US" sz="1000" dirty="0">
+                <a:solidFill>
+                  <a:schemeClr val="bg1"/>
+                </a:solidFill>
+              </a:rPr>
+              <a:t>최종 선택</a:t>
+            </a:r>
+          </a:p>
+        </p:txBody>
+      </p:sp>
+    </p:spTree>
+    <p:extLst>
+      <p:ext uri="{BB962C8B-B14F-4D97-AF65-F5344CB8AC3E}">
+        <p14:creationId xmlns:p14="http://schemas.microsoft.com/office/powerpoint/2010/main" val="4091973683"/>
+      </p:ext>
+    </p:extLst>
+  </p:cSld>
+  <p:clrMapOvr>
+    <a:masterClrMapping/>
+  </p:clrMapOvr>
+</p:sld>
+</file>
+
+<file path=ppt/slides/slide4.xml><?xml version="1.0" encoding="utf-8"?>
+<p:sld xmlns:a="http://schemas.openxmlformats.org/drawingml/2006/main" xmlns:r="http://schemas.openxmlformats.org/officeDocument/2006/relationships" xmlns:p="http://schemas.openxmlformats.org/presentationml/2006/main">
+  <p:cSld>
+    <p:spTree>
+      <p:nvGrpSpPr>
+        <p:cNvPr id="1" name=""/>
+        <p:cNvGrpSpPr/>
+        <p:nvPr/>
+      </p:nvGrpSpPr>
+      <p:grpSpPr>
+        <a:xfrm>
+          <a:off x="0" y="0"/>
+          <a:ext cx="0" cy="0"/>
+          <a:chOff x="0" y="0"/>
+          <a:chExt cx="0" cy="0"/>
+        </a:xfrm>
+      </p:grpSpPr>
+      <p:sp>
+        <p:nvSpPr>
+          <p:cNvPr id="2" name="제목 1">
+            <a:extLst>
+              <a:ext uri="{FF2B5EF4-FFF2-40B4-BE49-F238E27FC236}">
+                <a16:creationId xmlns:a16="http://schemas.microsoft.com/office/drawing/2014/main" id="{F27D6BFB-FF7E-D68E-477B-A9B8A1E21022}"/>
+              </a:ext>
+            </a:extLst>
+          </p:cNvPr>
+          <p:cNvSpPr>
+            <a:spLocks noGrp="1"/>
+          </p:cNvSpPr>
+          <p:nvPr>
+            <p:ph type="title"/>
+          </p:nvPr>
+        </p:nvSpPr>
+        <p:spPr/>
+        <p:txBody>
+          <a:bodyPr/>
+          <a:lstStyle/>
+          <a:p>
+            <a:endParaRPr lang="ko-KR" altLang="en-US"/>
+          </a:p>
+        </p:txBody>
+      </p:sp>
+      <p:sp>
+        <p:nvSpPr>
+          <p:cNvPr id="3" name="내용 개체 틀 2">
+            <a:extLst>
+              <a:ext uri="{FF2B5EF4-FFF2-40B4-BE49-F238E27FC236}">
+                <a16:creationId xmlns:a16="http://schemas.microsoft.com/office/drawing/2014/main" id="{0E228903-57E8-35EB-9540-22A817D1F052}"/>
+              </a:ext>
+            </a:extLst>
+          </p:cNvPr>
+          <p:cNvSpPr>
+            <a:spLocks noGrp="1"/>
+          </p:cNvSpPr>
+          <p:nvPr>
+            <p:ph idx="1"/>
+          </p:nvPr>
+        </p:nvSpPr>
+        <p:spPr/>
+        <p:txBody>
+          <a:bodyPr/>
+          <a:lstStyle/>
+          <a:p>
+            <a:endParaRPr lang="ko-KR" altLang="en-US"/>
+          </a:p>
+        </p:txBody>
+      </p:sp>
+      <p:pic>
+        <p:nvPicPr>
+          <p:cNvPr id="5" name="그림 4">
+            <a:extLst>
+              <a:ext uri="{FF2B5EF4-FFF2-40B4-BE49-F238E27FC236}">
+                <a16:creationId xmlns:a16="http://schemas.microsoft.com/office/drawing/2014/main" id="{9BB5BBA8-1E41-8F9A-A1F1-A6F0D5787EC6}"/>
+              </a:ext>
+            </a:extLst>
+          </p:cNvPr>
+          <p:cNvPicPr>
+            <a:picLocks noChangeAspect="1"/>
+          </p:cNvPicPr>
+          <p:nvPr/>
+        </p:nvPicPr>
+        <p:blipFill>
+          <a:blip r:embed="rId2"/>
+          <a:stretch>
+            <a:fillRect/>
+          </a:stretch>
+        </p:blipFill>
+        <p:spPr>
+          <a:xfrm>
+            <a:off x="3185706" y="475838"/>
+            <a:ext cx="5820587" cy="5906324"/>
+          </a:xfrm>
+          <a:prstGeom prst="rect">
+            <a:avLst/>
+          </a:prstGeom>
+        </p:spPr>
+      </p:pic>
+    </p:spTree>
+    <p:extLst>
+      <p:ext uri="{BB962C8B-B14F-4D97-AF65-F5344CB8AC3E}">
+        <p14:creationId xmlns:p14="http://schemas.microsoft.com/office/powerpoint/2010/main" val="3102480730"/>
+      </p:ext>
+    </p:extLst>
+  </p:cSld>
+  <p:clrMapOvr>
+    <a:masterClrMapping/>
+  </p:clrMapOvr>
+</p:sld>
+</file>
+
+<file path=ppt/slides/slide5.xml><?xml version="1.0" encoding="utf-8"?>
+<p:sld xmlns:a="http://schemas.openxmlformats.org/drawingml/2006/main" xmlns:r="http://schemas.openxmlformats.org/officeDocument/2006/relationships" xmlns:p="http://schemas.openxmlformats.org/presentationml/2006/main">
+  <p:cSld>
+    <p:spTree>
+      <p:nvGrpSpPr>
+        <p:cNvPr id="1" name=""/>
+        <p:cNvGrpSpPr/>
+        <p:nvPr/>
+      </p:nvGrpSpPr>
+      <p:grpSpPr>
+        <a:xfrm>
+          <a:off x="0" y="0"/>
+          <a:ext cx="0" cy="0"/>
+          <a:chOff x="0" y="0"/>
+          <a:chExt cx="0" cy="0"/>
+        </a:xfrm>
+      </p:grpSpPr>
+      <p:sp>
+        <p:nvSpPr>
+          <p:cNvPr id="2" name="제목 1">
+            <a:extLst>
+              <a:ext uri="{FF2B5EF4-FFF2-40B4-BE49-F238E27FC236}">
+                <a16:creationId xmlns:a16="http://schemas.microsoft.com/office/drawing/2014/main" id="{F90E05EB-1C0D-4603-512B-0EABC944A851}"/>
+              </a:ext>
+            </a:extLst>
+          </p:cNvPr>
+          <p:cNvSpPr>
+            <a:spLocks noGrp="1"/>
+          </p:cNvSpPr>
+          <p:nvPr>
+            <p:ph type="title"/>
+          </p:nvPr>
+        </p:nvSpPr>
+        <p:spPr/>
+        <p:txBody>
+          <a:bodyPr/>
+          <a:lstStyle/>
+          <a:p>
+            <a:endParaRPr lang="ko-KR" altLang="en-US"/>
+          </a:p>
+        </p:txBody>
+      </p:sp>
+      <p:sp>
+        <p:nvSpPr>
+          <p:cNvPr id="3" name="내용 개체 틀 2">
+            <a:extLst>
+              <a:ext uri="{FF2B5EF4-FFF2-40B4-BE49-F238E27FC236}">
+                <a16:creationId xmlns:a16="http://schemas.microsoft.com/office/drawing/2014/main" id="{EB118E4D-9F69-7B5C-2FC5-EC3067C7968D}"/>
+              </a:ext>
+            </a:extLst>
+          </p:cNvPr>
+          <p:cNvSpPr>
+            <a:spLocks noGrp="1"/>
+          </p:cNvSpPr>
+          <p:nvPr>
+            <p:ph idx="1"/>
+          </p:nvPr>
+        </p:nvSpPr>
+        <p:spPr/>
+        <p:txBody>
+          <a:bodyPr/>
+          <a:lstStyle/>
+          <a:p>
+            <a:endParaRPr lang="ko-KR" altLang="en-US"/>
+          </a:p>
+        </p:txBody>
+      </p:sp>
+      <p:pic>
+        <p:nvPicPr>
+          <p:cNvPr id="5" name="그림 4">
+            <a:extLst>
+              <a:ext uri="{FF2B5EF4-FFF2-40B4-BE49-F238E27FC236}">
+                <a16:creationId xmlns:a16="http://schemas.microsoft.com/office/drawing/2014/main" id="{72F39C75-ACE8-C326-62EB-678B363BC616}"/>
+              </a:ext>
+            </a:extLst>
+          </p:cNvPr>
+          <p:cNvPicPr>
+            <a:picLocks noChangeAspect="1"/>
+          </p:cNvPicPr>
+          <p:nvPr/>
+        </p:nvPicPr>
+        <p:blipFill>
+          <a:blip r:embed="rId2"/>
+          <a:stretch>
+            <a:fillRect/>
+          </a:stretch>
+        </p:blipFill>
+        <p:spPr>
+          <a:xfrm>
+            <a:off x="3266680" y="699706"/>
+            <a:ext cx="5658640" cy="5458587"/>
+          </a:xfrm>
+          <a:prstGeom prst="rect">
+            <a:avLst/>
+          </a:prstGeom>
+        </p:spPr>
+      </p:pic>
+    </p:spTree>
+    <p:extLst>
+      <p:ext uri="{BB962C8B-B14F-4D97-AF65-F5344CB8AC3E}">
+        <p14:creationId xmlns:p14="http://schemas.microsoft.com/office/powerpoint/2010/main" val="1706705401"/>
+      </p:ext>
+    </p:extLst>
+  </p:cSld>
+  <p:clrMapOvr>
+    <a:masterClrMapping/>
+  </p:clrMapOvr>
+</p:sld>
+</file>
+
+<file path=ppt/slides/slide6.xml><?xml version="1.0" encoding="utf-8"?>
+<p:sld xmlns:a="http://schemas.openxmlformats.org/drawingml/2006/main" xmlns:r="http://schemas.openxmlformats.org/officeDocument/2006/relationships" xmlns:p="http://schemas.openxmlformats.org/presentationml/2006/main">
+  <p:cSld>
+    <p:spTree>
+      <p:nvGrpSpPr>
+        <p:cNvPr id="1" name=""/>
+        <p:cNvGrpSpPr/>
+        <p:nvPr/>
+      </p:nvGrpSpPr>
+      <p:grpSpPr>
+        <a:xfrm>
+          <a:off x="0" y="0"/>
+          <a:ext cx="0" cy="0"/>
+          <a:chOff x="0" y="0"/>
+          <a:chExt cx="0" cy="0"/>
+        </a:xfrm>
+      </p:grpSpPr>
+      <p:sp>
+        <p:nvSpPr>
+          <p:cNvPr id="2" name="제목 1">
+            <a:extLst>
+              <a:ext uri="{FF2B5EF4-FFF2-40B4-BE49-F238E27FC236}">
+                <a16:creationId xmlns:a16="http://schemas.microsoft.com/office/drawing/2014/main" id="{1B4042C3-FC63-5023-7020-C35CFF92DA54}"/>
+              </a:ext>
+            </a:extLst>
+          </p:cNvPr>
+          <p:cNvSpPr>
+            <a:spLocks noGrp="1"/>
+          </p:cNvSpPr>
+          <p:nvPr>
+            <p:ph type="title"/>
+          </p:nvPr>
+        </p:nvSpPr>
+        <p:spPr/>
+        <p:txBody>
+          <a:bodyPr/>
+          <a:lstStyle/>
+          <a:p>
+            <a:endParaRPr lang="ko-KR" altLang="en-US"/>
+          </a:p>
+        </p:txBody>
+      </p:sp>
+      <p:sp>
+        <p:nvSpPr>
+          <p:cNvPr id="3" name="내용 개체 틀 2">
+            <a:extLst>
+              <a:ext uri="{FF2B5EF4-FFF2-40B4-BE49-F238E27FC236}">
+                <a16:creationId xmlns:a16="http://schemas.microsoft.com/office/drawing/2014/main" id="{05D71D12-BB1B-730D-2EAE-4109591AC8D6}"/>
+              </a:ext>
+            </a:extLst>
+          </p:cNvPr>
+          <p:cNvSpPr>
+            <a:spLocks noGrp="1"/>
+          </p:cNvSpPr>
+          <p:nvPr>
+            <p:ph idx="1"/>
+          </p:nvPr>
+        </p:nvSpPr>
+        <p:spPr/>
+        <p:txBody>
+          <a:bodyPr/>
+          <a:lstStyle/>
+          <a:p>
+            <a:endParaRPr lang="ko-KR" altLang="en-US"/>
+          </a:p>
+        </p:txBody>
+      </p:sp>
+      <p:pic>
+        <p:nvPicPr>
+          <p:cNvPr id="5" name="그림 4">
+            <a:extLst>
+              <a:ext uri="{FF2B5EF4-FFF2-40B4-BE49-F238E27FC236}">
+                <a16:creationId xmlns:a16="http://schemas.microsoft.com/office/drawing/2014/main" id="{72FEF2FE-BCAC-46EA-34FB-C2003C6A8194}"/>
+              </a:ext>
+            </a:extLst>
+          </p:cNvPr>
+          <p:cNvPicPr>
+            <a:picLocks noChangeAspect="1"/>
+          </p:cNvPicPr>
+          <p:nvPr/>
+        </p:nvPicPr>
+        <p:blipFill>
+          <a:blip r:embed="rId2"/>
+          <a:stretch>
+            <a:fillRect/>
+          </a:stretch>
+        </p:blipFill>
+        <p:spPr>
+          <a:xfrm>
+            <a:off x="3228575" y="2562104"/>
+            <a:ext cx="5734850" cy="1733792"/>
+          </a:xfrm>
+          <a:prstGeom prst="rect">
+            <a:avLst/>
+          </a:prstGeom>
+        </p:spPr>
+      </p:pic>
+    </p:spTree>
+    <p:extLst>
+      <p:ext uri="{BB962C8B-B14F-4D97-AF65-F5344CB8AC3E}">
+        <p14:creationId xmlns:p14="http://schemas.microsoft.com/office/powerpoint/2010/main" val="1028470326"/>
       </p:ext>
     </p:extLst>
   </p:cSld>

--- a/[실습](3.27) 상황의 기차칸.pptx
+++ b/[실습](3.27) 상황의 기차칸.pptx
@@ -4,13 +4,13 @@
   <p:sldMasterIdLst>
     <p:sldMasterId id="2147483648" r:id="rId1"/>
   </p:sldMasterIdLst>
+  <p:notesMasterIdLst>
+    <p:notesMasterId r:id="rId5"/>
+  </p:notesMasterIdLst>
   <p:sldIdLst>
     <p:sldId id="256" r:id="rId2"/>
     <p:sldId id="257" r:id="rId3"/>
     <p:sldId id="258" r:id="rId4"/>
-    <p:sldId id="259" r:id="rId5"/>
-    <p:sldId id="260" r:id="rId6"/>
-    <p:sldId id="261" r:id="rId7"/>
   </p:sldIdLst>
   <p:sldSz cx="12192000" cy="6858000"/>
   <p:notesSz cx="6858000" cy="9144000"/>
@@ -670,6 +670,439 @@
 </pc:chgInfo>
 </file>
 
+<file path=ppt/notesMasters/notesMaster1.xml><?xml version="1.0" encoding="utf-8"?>
+<p:notesMaster xmlns:a="http://schemas.openxmlformats.org/drawingml/2006/main" xmlns:r="http://schemas.openxmlformats.org/officeDocument/2006/relationships" xmlns:p="http://schemas.openxmlformats.org/presentationml/2006/main">
+  <p:cSld>
+    <p:bg>
+      <p:bgRef idx="1001">
+        <a:schemeClr val="bg1"/>
+      </p:bgRef>
+    </p:bg>
+    <p:spTree>
+      <p:nvGrpSpPr>
+        <p:cNvPr id="1" name=""/>
+        <p:cNvGrpSpPr/>
+        <p:nvPr/>
+      </p:nvGrpSpPr>
+      <p:grpSpPr>
+        <a:xfrm>
+          <a:off x="0" y="0"/>
+          <a:ext cx="0" cy="0"/>
+          <a:chOff x="0" y="0"/>
+          <a:chExt cx="0" cy="0"/>
+        </a:xfrm>
+      </p:grpSpPr>
+      <p:sp>
+        <p:nvSpPr>
+          <p:cNvPr id="2" name="머리글 개체 틀 1"/>
+          <p:cNvSpPr>
+            <a:spLocks noGrp="1"/>
+          </p:cNvSpPr>
+          <p:nvPr>
+            <p:ph type="hdr" sz="quarter"/>
+          </p:nvPr>
+        </p:nvSpPr>
+        <p:spPr>
+          <a:xfrm>
+            <a:off x="0" y="0"/>
+            <a:ext cx="2971800" cy="458788"/>
+          </a:xfrm>
+          <a:prstGeom prst="rect">
+            <a:avLst/>
+          </a:prstGeom>
+        </p:spPr>
+        <p:txBody>
+          <a:bodyPr vert="horz" lIns="91440" tIns="45720" rIns="91440" bIns="45720" rtlCol="0"/>
+          <a:lstStyle>
+            <a:lvl1pPr algn="l">
+              <a:defRPr sz="1200"/>
+            </a:lvl1pPr>
+          </a:lstStyle>
+          <a:p>
+            <a:endParaRPr lang="ko-KR" altLang="en-US"/>
+          </a:p>
+        </p:txBody>
+      </p:sp>
+      <p:sp>
+        <p:nvSpPr>
+          <p:cNvPr id="3" name="날짜 개체 틀 2"/>
+          <p:cNvSpPr>
+            <a:spLocks noGrp="1"/>
+          </p:cNvSpPr>
+          <p:nvPr>
+            <p:ph type="dt" idx="1"/>
+          </p:nvPr>
+        </p:nvSpPr>
+        <p:spPr>
+          <a:xfrm>
+            <a:off x="3884613" y="0"/>
+            <a:ext cx="2971800" cy="458788"/>
+          </a:xfrm>
+          <a:prstGeom prst="rect">
+            <a:avLst/>
+          </a:prstGeom>
+        </p:spPr>
+        <p:txBody>
+          <a:bodyPr vert="horz" lIns="91440" tIns="45720" rIns="91440" bIns="45720" rtlCol="0"/>
+          <a:lstStyle>
+            <a:lvl1pPr algn="r">
+              <a:defRPr sz="1200"/>
+            </a:lvl1pPr>
+          </a:lstStyle>
+          <a:p>
+            <a:fld id="{00232D13-99AA-4636-90AA-800F69AD8C37}" type="datetimeFigureOut">
+              <a:rPr lang="ko-KR" altLang="en-US" smtClean="0"/>
+              <a:t>2026-03-30</a:t>
+            </a:fld>
+            <a:endParaRPr lang="ko-KR" altLang="en-US"/>
+          </a:p>
+        </p:txBody>
+      </p:sp>
+      <p:sp>
+        <p:nvSpPr>
+          <p:cNvPr id="4" name="슬라이드 이미지 개체 틀 3"/>
+          <p:cNvSpPr>
+            <a:spLocks noGrp="1" noRot="1" noChangeAspect="1"/>
+          </p:cNvSpPr>
+          <p:nvPr>
+            <p:ph type="sldImg" idx="2"/>
+          </p:nvPr>
+        </p:nvSpPr>
+        <p:spPr>
+          <a:xfrm>
+            <a:off x="685800" y="1143000"/>
+            <a:ext cx="5486400" cy="3086100"/>
+          </a:xfrm>
+          <a:prstGeom prst="rect">
+            <a:avLst/>
+          </a:prstGeom>
+          <a:noFill/>
+          <a:ln w="12700">
+            <a:solidFill>
+              <a:prstClr val="black"/>
+            </a:solidFill>
+          </a:ln>
+        </p:spPr>
+        <p:txBody>
+          <a:bodyPr vert="horz" lIns="91440" tIns="45720" rIns="91440" bIns="45720" rtlCol="0" anchor="ctr"/>
+          <a:lstStyle/>
+          <a:p>
+            <a:endParaRPr lang="ko-KR" altLang="en-US"/>
+          </a:p>
+        </p:txBody>
+      </p:sp>
+      <p:sp>
+        <p:nvSpPr>
+          <p:cNvPr id="5" name="슬라이드 노트 개체 틀 4"/>
+          <p:cNvSpPr>
+            <a:spLocks noGrp="1"/>
+          </p:cNvSpPr>
+          <p:nvPr>
+            <p:ph type="body" sz="quarter" idx="3"/>
+          </p:nvPr>
+        </p:nvSpPr>
+        <p:spPr>
+          <a:xfrm>
+            <a:off x="685800" y="4400550"/>
+            <a:ext cx="5486400" cy="3600450"/>
+          </a:xfrm>
+          <a:prstGeom prst="rect">
+            <a:avLst/>
+          </a:prstGeom>
+        </p:spPr>
+        <p:txBody>
+          <a:bodyPr vert="horz" lIns="91440" tIns="45720" rIns="91440" bIns="45720" rtlCol="0"/>
+          <a:lstStyle/>
+          <a:p>
+            <a:pPr lvl="0"/>
+            <a:r>
+              <a:rPr lang="ko-KR" altLang="en-US"/>
+              <a:t>마스터 텍스트 스타일을 편집하려면 클릭</a:t>
+            </a:r>
+          </a:p>
+          <a:p>
+            <a:pPr lvl="1"/>
+            <a:r>
+              <a:rPr lang="ko-KR" altLang="en-US"/>
+              <a:t>두 번째 수준</a:t>
+            </a:r>
+          </a:p>
+          <a:p>
+            <a:pPr lvl="2"/>
+            <a:r>
+              <a:rPr lang="ko-KR" altLang="en-US"/>
+              <a:t>세 번째 수준</a:t>
+            </a:r>
+          </a:p>
+          <a:p>
+            <a:pPr lvl="3"/>
+            <a:r>
+              <a:rPr lang="ko-KR" altLang="en-US"/>
+              <a:t>네 번째 수준</a:t>
+            </a:r>
+          </a:p>
+          <a:p>
+            <a:pPr lvl="4"/>
+            <a:r>
+              <a:rPr lang="ko-KR" altLang="en-US"/>
+              <a:t>다섯 번째 수준</a:t>
+            </a:r>
+          </a:p>
+        </p:txBody>
+      </p:sp>
+      <p:sp>
+        <p:nvSpPr>
+          <p:cNvPr id="6" name="바닥글 개체 틀 5"/>
+          <p:cNvSpPr>
+            <a:spLocks noGrp="1"/>
+          </p:cNvSpPr>
+          <p:nvPr>
+            <p:ph type="ftr" sz="quarter" idx="4"/>
+          </p:nvPr>
+        </p:nvSpPr>
+        <p:spPr>
+          <a:xfrm>
+            <a:off x="0" y="8685213"/>
+            <a:ext cx="2971800" cy="458787"/>
+          </a:xfrm>
+          <a:prstGeom prst="rect">
+            <a:avLst/>
+          </a:prstGeom>
+        </p:spPr>
+        <p:txBody>
+          <a:bodyPr vert="horz" lIns="91440" tIns="45720" rIns="91440" bIns="45720" rtlCol="0" anchor="b"/>
+          <a:lstStyle>
+            <a:lvl1pPr algn="l">
+              <a:defRPr sz="1200"/>
+            </a:lvl1pPr>
+          </a:lstStyle>
+          <a:p>
+            <a:endParaRPr lang="ko-KR" altLang="en-US"/>
+          </a:p>
+        </p:txBody>
+      </p:sp>
+      <p:sp>
+        <p:nvSpPr>
+          <p:cNvPr id="7" name="슬라이드 번호 개체 틀 6"/>
+          <p:cNvSpPr>
+            <a:spLocks noGrp="1"/>
+          </p:cNvSpPr>
+          <p:nvPr>
+            <p:ph type="sldNum" sz="quarter" idx="5"/>
+          </p:nvPr>
+        </p:nvSpPr>
+        <p:spPr>
+          <a:xfrm>
+            <a:off x="3884613" y="8685213"/>
+            <a:ext cx="2971800" cy="458787"/>
+          </a:xfrm>
+          <a:prstGeom prst="rect">
+            <a:avLst/>
+          </a:prstGeom>
+        </p:spPr>
+        <p:txBody>
+          <a:bodyPr vert="horz" lIns="91440" tIns="45720" rIns="91440" bIns="45720" rtlCol="0" anchor="b"/>
+          <a:lstStyle>
+            <a:lvl1pPr algn="r">
+              <a:defRPr sz="1200"/>
+            </a:lvl1pPr>
+          </a:lstStyle>
+          <a:p>
+            <a:fld id="{2178B48B-5F30-4934-9677-39BE819839D0}" type="slidenum">
+              <a:rPr lang="ko-KR" altLang="en-US" smtClean="0"/>
+              <a:t>‹#›</a:t>
+            </a:fld>
+            <a:endParaRPr lang="ko-KR" altLang="en-US"/>
+          </a:p>
+        </p:txBody>
+      </p:sp>
+    </p:spTree>
+    <p:extLst>
+      <p:ext uri="{BB962C8B-B14F-4D97-AF65-F5344CB8AC3E}">
+        <p14:creationId xmlns:p14="http://schemas.microsoft.com/office/powerpoint/2010/main" val="2706788982"/>
+      </p:ext>
+    </p:extLst>
+  </p:cSld>
+  <p:clrMap bg1="lt1" tx1="dk1" bg2="lt2" tx2="dk2" accent1="accent1" accent2="accent2" accent3="accent3" accent4="accent4" accent5="accent5" accent6="accent6" hlink="hlink" folHlink="folHlink"/>
+  <p:notesStyle>
+    <a:lvl1pPr marL="0" algn="l" defTabSz="914400" rtl="0" eaLnBrk="1" latinLnBrk="1" hangingPunct="1">
+      <a:defRPr sz="1200" kern="1200">
+        <a:solidFill>
+          <a:schemeClr val="tx1"/>
+        </a:solidFill>
+        <a:latin typeface="+mn-lt"/>
+        <a:ea typeface="+mn-ea"/>
+        <a:cs typeface="+mn-cs"/>
+      </a:defRPr>
+    </a:lvl1pPr>
+    <a:lvl2pPr marL="457200" algn="l" defTabSz="914400" rtl="0" eaLnBrk="1" latinLnBrk="1" hangingPunct="1">
+      <a:defRPr sz="1200" kern="1200">
+        <a:solidFill>
+          <a:schemeClr val="tx1"/>
+        </a:solidFill>
+        <a:latin typeface="+mn-lt"/>
+        <a:ea typeface="+mn-ea"/>
+        <a:cs typeface="+mn-cs"/>
+      </a:defRPr>
+    </a:lvl2pPr>
+    <a:lvl3pPr marL="914400" algn="l" defTabSz="914400" rtl="0" eaLnBrk="1" latinLnBrk="1" hangingPunct="1">
+      <a:defRPr sz="1200" kern="1200">
+        <a:solidFill>
+          <a:schemeClr val="tx1"/>
+        </a:solidFill>
+        <a:latin typeface="+mn-lt"/>
+        <a:ea typeface="+mn-ea"/>
+        <a:cs typeface="+mn-cs"/>
+      </a:defRPr>
+    </a:lvl3pPr>
+    <a:lvl4pPr marL="1371600" algn="l" defTabSz="914400" rtl="0" eaLnBrk="1" latinLnBrk="1" hangingPunct="1">
+      <a:defRPr sz="1200" kern="1200">
+        <a:solidFill>
+          <a:schemeClr val="tx1"/>
+        </a:solidFill>
+        <a:latin typeface="+mn-lt"/>
+        <a:ea typeface="+mn-ea"/>
+        <a:cs typeface="+mn-cs"/>
+      </a:defRPr>
+    </a:lvl4pPr>
+    <a:lvl5pPr marL="1828800" algn="l" defTabSz="914400" rtl="0" eaLnBrk="1" latinLnBrk="1" hangingPunct="1">
+      <a:defRPr sz="1200" kern="1200">
+        <a:solidFill>
+          <a:schemeClr val="tx1"/>
+        </a:solidFill>
+        <a:latin typeface="+mn-lt"/>
+        <a:ea typeface="+mn-ea"/>
+        <a:cs typeface="+mn-cs"/>
+      </a:defRPr>
+    </a:lvl5pPr>
+    <a:lvl6pPr marL="2286000" algn="l" defTabSz="914400" rtl="0" eaLnBrk="1" latinLnBrk="1" hangingPunct="1">
+      <a:defRPr sz="1200" kern="1200">
+        <a:solidFill>
+          <a:schemeClr val="tx1"/>
+        </a:solidFill>
+        <a:latin typeface="+mn-lt"/>
+        <a:ea typeface="+mn-ea"/>
+        <a:cs typeface="+mn-cs"/>
+      </a:defRPr>
+    </a:lvl6pPr>
+    <a:lvl7pPr marL="2743200" algn="l" defTabSz="914400" rtl="0" eaLnBrk="1" latinLnBrk="1" hangingPunct="1">
+      <a:defRPr sz="1200" kern="1200">
+        <a:solidFill>
+          <a:schemeClr val="tx1"/>
+        </a:solidFill>
+        <a:latin typeface="+mn-lt"/>
+        <a:ea typeface="+mn-ea"/>
+        <a:cs typeface="+mn-cs"/>
+      </a:defRPr>
+    </a:lvl7pPr>
+    <a:lvl8pPr marL="3200400" algn="l" defTabSz="914400" rtl="0" eaLnBrk="1" latinLnBrk="1" hangingPunct="1">
+      <a:defRPr sz="1200" kern="1200">
+        <a:solidFill>
+          <a:schemeClr val="tx1"/>
+        </a:solidFill>
+        <a:latin typeface="+mn-lt"/>
+        <a:ea typeface="+mn-ea"/>
+        <a:cs typeface="+mn-cs"/>
+      </a:defRPr>
+    </a:lvl8pPr>
+    <a:lvl9pPr marL="3657600" algn="l" defTabSz="914400" rtl="0" eaLnBrk="1" latinLnBrk="1" hangingPunct="1">
+      <a:defRPr sz="1200" kern="1200">
+        <a:solidFill>
+          <a:schemeClr val="tx1"/>
+        </a:solidFill>
+        <a:latin typeface="+mn-lt"/>
+        <a:ea typeface="+mn-ea"/>
+        <a:cs typeface="+mn-cs"/>
+      </a:defRPr>
+    </a:lvl9pPr>
+  </p:notesStyle>
+</p:notesMaster>
+</file>
+
+<file path=ppt/notesSlides/notesSlide1.xml><?xml version="1.0" encoding="utf-8"?>
+<p:notes xmlns:a="http://schemas.openxmlformats.org/drawingml/2006/main" xmlns:r="http://schemas.openxmlformats.org/officeDocument/2006/relationships" xmlns:p="http://schemas.openxmlformats.org/presentationml/2006/main">
+  <p:cSld>
+    <p:spTree>
+      <p:nvGrpSpPr>
+        <p:cNvPr id="1" name=""/>
+        <p:cNvGrpSpPr/>
+        <p:nvPr/>
+      </p:nvGrpSpPr>
+      <p:grpSpPr>
+        <a:xfrm>
+          <a:off x="0" y="0"/>
+          <a:ext cx="0" cy="0"/>
+          <a:chOff x="0" y="0"/>
+          <a:chExt cx="0" cy="0"/>
+        </a:xfrm>
+      </p:grpSpPr>
+      <p:sp>
+        <p:nvSpPr>
+          <p:cNvPr id="2" name="슬라이드 이미지 개체 틀 1"/>
+          <p:cNvSpPr>
+            <a:spLocks noGrp="1" noRot="1" noChangeAspect="1"/>
+          </p:cNvSpPr>
+          <p:nvPr>
+            <p:ph type="sldImg"/>
+          </p:nvPr>
+        </p:nvSpPr>
+        <p:spPr/>
+      </p:sp>
+      <p:sp>
+        <p:nvSpPr>
+          <p:cNvPr id="3" name="슬라이드 노트 개체 틀 2"/>
+          <p:cNvSpPr>
+            <a:spLocks noGrp="1"/>
+          </p:cNvSpPr>
+          <p:nvPr>
+            <p:ph type="body" idx="1"/>
+          </p:nvPr>
+        </p:nvSpPr>
+        <p:spPr/>
+        <p:txBody>
+          <a:bodyPr/>
+          <a:lstStyle/>
+          <a:p>
+            <a:endParaRPr lang="ko-KR" altLang="en-US" dirty="0"/>
+          </a:p>
+        </p:txBody>
+      </p:sp>
+      <p:sp>
+        <p:nvSpPr>
+          <p:cNvPr id="4" name="슬라이드 번호 개체 틀 3"/>
+          <p:cNvSpPr>
+            <a:spLocks noGrp="1"/>
+          </p:cNvSpPr>
+          <p:nvPr>
+            <p:ph type="sldNum" sz="quarter" idx="5"/>
+          </p:nvPr>
+        </p:nvSpPr>
+        <p:spPr/>
+        <p:txBody>
+          <a:bodyPr/>
+          <a:lstStyle/>
+          <a:p>
+            <a:fld id="{2178B48B-5F30-4934-9677-39BE819839D0}" type="slidenum">
+              <a:rPr lang="ko-KR" altLang="en-US" smtClean="0"/>
+              <a:t>3</a:t>
+            </a:fld>
+            <a:endParaRPr lang="ko-KR" altLang="en-US"/>
+          </a:p>
+        </p:txBody>
+      </p:sp>
+    </p:spTree>
+    <p:extLst>
+      <p:ext uri="{BB962C8B-B14F-4D97-AF65-F5344CB8AC3E}">
+        <p14:creationId xmlns:p14="http://schemas.microsoft.com/office/powerpoint/2010/main" val="913199701"/>
+      </p:ext>
+    </p:extLst>
+  </p:cSld>
+  <p:clrMapOvr>
+    <a:masterClrMapping/>
+  </p:clrMapOvr>
+</p:notes>
+</file>
+
 <file path=ppt/slideLayouts/slideLayout1.xml><?xml version="1.0" encoding="utf-8"?>
 <p:sldLayout xmlns:a="http://schemas.openxmlformats.org/drawingml/2006/main" xmlns:r="http://schemas.openxmlformats.org/officeDocument/2006/relationships" xmlns:p="http://schemas.openxmlformats.org/presentationml/2006/main" type="title" preserve="1">
   <p:cSld name="제목 슬라이드">
@@ -5066,55 +5499,6 @@
       </p:sp>
       <p:sp>
         <p:nvSpPr>
-          <p:cNvPr id="2" name="화살표: 오각형 1">
-            <a:extLst>
-              <a:ext uri="{FF2B5EF4-FFF2-40B4-BE49-F238E27FC236}">
-                <a16:creationId xmlns:a16="http://schemas.microsoft.com/office/drawing/2014/main" id="{BB431C50-A9BF-C9E4-B3D6-224F16BDF128}"/>
-              </a:ext>
-            </a:extLst>
-          </p:cNvPr>
-          <p:cNvSpPr/>
-          <p:nvPr/>
-        </p:nvSpPr>
-        <p:spPr>
-          <a:xfrm>
-            <a:off x="396579" y="6227806"/>
-            <a:ext cx="1069848" cy="411481"/>
-          </a:xfrm>
-          <a:prstGeom prst="homePlate">
-            <a:avLst/>
-          </a:prstGeom>
-          <a:solidFill>
-            <a:srgbClr val="FAEBA0"/>
-          </a:solidFill>
-        </p:spPr>
-        <p:style>
-          <a:lnRef idx="2">
-            <a:schemeClr val="accent1">
-              <a:shade val="15000"/>
-            </a:schemeClr>
-          </a:lnRef>
-          <a:fillRef idx="1">
-            <a:schemeClr val="accent1"/>
-          </a:fillRef>
-          <a:effectRef idx="0">
-            <a:schemeClr val="accent1"/>
-          </a:effectRef>
-          <a:fontRef idx="minor">
-            <a:schemeClr val="lt1"/>
-          </a:fontRef>
-        </p:style>
-        <p:txBody>
-          <a:bodyPr rtlCol="0" anchor="ctr"/>
-          <a:lstStyle/>
-          <a:p>
-            <a:pPr algn="ctr"/>
-            <a:endParaRPr lang="ko-KR" altLang="en-US" dirty="0"/>
-          </a:p>
-        </p:txBody>
-      </p:sp>
-      <p:sp>
-        <p:nvSpPr>
           <p:cNvPr id="3" name="직사각형 2">
             <a:extLst>
               <a:ext uri="{FF2B5EF4-FFF2-40B4-BE49-F238E27FC236}">
@@ -5407,7 +5791,7 @@
         </p:nvSpPr>
         <p:spPr>
           <a:xfrm flipH="1" flipV="1">
-            <a:off x="0" y="0"/>
+            <a:off x="5976" y="5976"/>
             <a:ext cx="12192000" cy="6447600"/>
           </a:xfrm>
           <a:prstGeom prst="triangle">
@@ -5416,7 +5800,7 @@
             </a:avLst>
           </a:prstGeom>
           <a:solidFill>
-            <a:srgbClr val="4E0A74"/>
+            <a:srgbClr val="352F34"/>
           </a:solidFill>
           <a:ln>
             <a:noFill/>
@@ -5461,7 +5845,7 @@
         </p:nvSpPr>
         <p:spPr>
           <a:xfrm>
-            <a:off x="3281544" y="610155"/>
+            <a:off x="2571723" y="1031909"/>
             <a:ext cx="1069848" cy="411480"/>
           </a:xfrm>
           <a:prstGeom prst="rect">
@@ -5518,7 +5902,7 @@
         </p:nvSpPr>
         <p:spPr>
           <a:xfrm>
-            <a:off x="4676952" y="610155"/>
+            <a:off x="3867023" y="476360"/>
             <a:ext cx="1069848" cy="411480"/>
           </a:xfrm>
           <a:prstGeom prst="rect">
@@ -5690,7 +6074,7 @@
         <p:spPr>
           <a:xfrm>
             <a:off x="7467767" y="610155"/>
-            <a:ext cx="1401315" cy="411480"/>
+            <a:ext cx="1702601" cy="411480"/>
           </a:xfrm>
           <a:prstGeom prst="rect">
             <a:avLst/>
@@ -5722,12 +6106,12 @@
           <a:p>
             <a:pPr algn="ctr"/>
             <a:r>
-              <a:rPr lang="ko-KR" altLang="en-US" sz="1000">
+              <a:rPr lang="ko-KR" altLang="en-US" sz="1000" dirty="0">
                 <a:solidFill>
                   <a:schemeClr val="bg1"/>
                 </a:solidFill>
               </a:rPr>
-              <a:t>무한대의 선의 지수</a:t>
+              <a:t>주인공 선의 지수 공개</a:t>
             </a:r>
           </a:p>
         </p:txBody>
@@ -5746,7 +6130,7 @@
         </p:nvSpPr>
         <p:spPr>
           <a:xfrm>
-            <a:off x="3281544" y="1276838"/>
+            <a:off x="3230806" y="1582033"/>
             <a:ext cx="1069848" cy="411480"/>
           </a:xfrm>
           <a:prstGeom prst="rect">
@@ -5803,8 +6187,8 @@
         </p:nvSpPr>
         <p:spPr>
           <a:xfrm>
-            <a:off x="6072360" y="1276838"/>
-            <a:ext cx="1069848" cy="411480"/>
+            <a:off x="2734743" y="2894462"/>
+            <a:ext cx="1262254" cy="411480"/>
           </a:xfrm>
           <a:prstGeom prst="rect">
             <a:avLst/>
@@ -5836,12 +6220,12 @@
           <a:p>
             <a:pPr algn="ctr"/>
             <a:r>
-              <a:rPr lang="ko-KR" altLang="en-US" sz="1000">
+              <a:rPr lang="ko-KR" altLang="en-US" sz="1000" dirty="0">
                 <a:solidFill>
                   <a:schemeClr val="bg1"/>
                 </a:solidFill>
               </a:rPr>
-              <a:t>선의 랭킹 시스템</a:t>
+              <a:t>친구의 죽음</a:t>
             </a:r>
           </a:p>
         </p:txBody>
@@ -5860,7 +6244,7 @@
         </p:nvSpPr>
         <p:spPr>
           <a:xfrm>
-            <a:off x="6072360" y="1943521"/>
+            <a:off x="5458488" y="2370604"/>
             <a:ext cx="1069848" cy="411480"/>
           </a:xfrm>
           <a:prstGeom prst="rect">
@@ -6158,7 +6542,7 @@
         </p:nvSpPr>
         <p:spPr>
           <a:xfrm>
-            <a:off x="4607353" y="1433114"/>
+            <a:off x="4788613" y="1223582"/>
             <a:ext cx="1069848" cy="411480"/>
           </a:xfrm>
           <a:prstGeom prst="rect">
@@ -6429,340 +6813,2224 @@
           </a:p>
         </p:txBody>
       </p:sp>
+      <p:sp>
+        <p:nvSpPr>
+          <p:cNvPr id="2" name="화살표: 오각형 1">
+            <a:extLst>
+              <a:ext uri="{FF2B5EF4-FFF2-40B4-BE49-F238E27FC236}">
+                <a16:creationId xmlns:a16="http://schemas.microsoft.com/office/drawing/2014/main" id="{BB431C50-A9BF-C9E4-B3D6-224F16BDF128}"/>
+              </a:ext>
+            </a:extLst>
+          </p:cNvPr>
+          <p:cNvSpPr/>
+          <p:nvPr/>
+        </p:nvSpPr>
+        <p:spPr>
+          <a:xfrm>
+            <a:off x="46976" y="6310489"/>
+            <a:ext cx="1069848" cy="297092"/>
+          </a:xfrm>
+          <a:prstGeom prst="homePlate">
+            <a:avLst/>
+          </a:prstGeom>
+          <a:solidFill>
+            <a:srgbClr val="FAEBA0"/>
+          </a:solidFill>
+          <a:ln>
+            <a:gradFill>
+              <a:gsLst>
+                <a:gs pos="0">
+                  <a:schemeClr val="accent1">
+                    <a:lumMod val="5000"/>
+                    <a:lumOff val="95000"/>
+                  </a:schemeClr>
+                </a:gs>
+                <a:gs pos="74000">
+                  <a:schemeClr val="accent1">
+                    <a:lumMod val="45000"/>
+                    <a:lumOff val="55000"/>
+                  </a:schemeClr>
+                </a:gs>
+                <a:gs pos="83000">
+                  <a:schemeClr val="accent1">
+                    <a:lumMod val="45000"/>
+                    <a:lumOff val="55000"/>
+                  </a:schemeClr>
+                </a:gs>
+                <a:gs pos="100000">
+                  <a:schemeClr val="accent1">
+                    <a:lumMod val="30000"/>
+                    <a:lumOff val="70000"/>
+                  </a:schemeClr>
+                </a:gs>
+              </a:gsLst>
+              <a:lin ang="5400000" scaled="1"/>
+            </a:gradFill>
+          </a:ln>
+          <a:effectLst>
+            <a:softEdge rad="19050"/>
+          </a:effectLst>
+        </p:spPr>
+        <p:style>
+          <a:lnRef idx="2">
+            <a:schemeClr val="accent1">
+              <a:shade val="15000"/>
+            </a:schemeClr>
+          </a:lnRef>
+          <a:fillRef idx="1">
+            <a:schemeClr val="accent1"/>
+          </a:fillRef>
+          <a:effectRef idx="0">
+            <a:schemeClr val="accent1"/>
+          </a:effectRef>
+          <a:fontRef idx="minor">
+            <a:schemeClr val="lt1"/>
+          </a:fontRef>
+        </p:style>
+        <p:txBody>
+          <a:bodyPr rtlCol="0" anchor="ctr"/>
+          <a:lstStyle/>
+          <a:p>
+            <a:pPr algn="ctr"/>
+            <a:r>
+              <a:rPr lang="ko-KR" altLang="en-US" sz="800" dirty="0">
+                <a:solidFill>
+                  <a:schemeClr val="tx1"/>
+                </a:solidFill>
+              </a:rPr>
+              <a:t>가정 환경</a:t>
+            </a:r>
+          </a:p>
+        </p:txBody>
+      </p:sp>
+      <p:sp>
+        <p:nvSpPr>
+          <p:cNvPr id="11" name="화살표: 오각형 10">
+            <a:extLst>
+              <a:ext uri="{FF2B5EF4-FFF2-40B4-BE49-F238E27FC236}">
+                <a16:creationId xmlns:a16="http://schemas.microsoft.com/office/drawing/2014/main" id="{8EB86231-D003-28EE-0190-33A053BE2B99}"/>
+              </a:ext>
+            </a:extLst>
+          </p:cNvPr>
+          <p:cNvSpPr/>
+          <p:nvPr/>
+        </p:nvSpPr>
+        <p:spPr>
+          <a:xfrm>
+            <a:off x="680724" y="5828237"/>
+            <a:ext cx="1069848" cy="297092"/>
+          </a:xfrm>
+          <a:prstGeom prst="homePlate">
+            <a:avLst/>
+          </a:prstGeom>
+          <a:solidFill>
+            <a:srgbClr val="FAEBA0"/>
+          </a:solidFill>
+          <a:ln>
+            <a:gradFill>
+              <a:gsLst>
+                <a:gs pos="0">
+                  <a:schemeClr val="accent1">
+                    <a:lumMod val="5000"/>
+                    <a:lumOff val="95000"/>
+                  </a:schemeClr>
+                </a:gs>
+                <a:gs pos="74000">
+                  <a:schemeClr val="accent1">
+                    <a:lumMod val="45000"/>
+                    <a:lumOff val="55000"/>
+                  </a:schemeClr>
+                </a:gs>
+                <a:gs pos="83000">
+                  <a:schemeClr val="accent1">
+                    <a:lumMod val="45000"/>
+                    <a:lumOff val="55000"/>
+                  </a:schemeClr>
+                </a:gs>
+                <a:gs pos="100000">
+                  <a:schemeClr val="accent1">
+                    <a:lumMod val="30000"/>
+                    <a:lumOff val="70000"/>
+                  </a:schemeClr>
+                </a:gs>
+              </a:gsLst>
+              <a:lin ang="5400000" scaled="1"/>
+            </a:gradFill>
+          </a:ln>
+          <a:effectLst>
+            <a:softEdge rad="19050"/>
+          </a:effectLst>
+        </p:spPr>
+        <p:style>
+          <a:lnRef idx="2">
+            <a:schemeClr val="accent1">
+              <a:shade val="15000"/>
+            </a:schemeClr>
+          </a:lnRef>
+          <a:fillRef idx="1">
+            <a:schemeClr val="accent1"/>
+          </a:fillRef>
+          <a:effectRef idx="0">
+            <a:schemeClr val="accent1"/>
+          </a:effectRef>
+          <a:fontRef idx="minor">
+            <a:schemeClr val="lt1"/>
+          </a:fontRef>
+        </p:style>
+        <p:txBody>
+          <a:bodyPr rtlCol="0" anchor="ctr"/>
+          <a:lstStyle/>
+          <a:p>
+            <a:pPr algn="ctr"/>
+            <a:r>
+              <a:rPr lang="ko-KR" altLang="en-US" sz="800" dirty="0">
+                <a:solidFill>
+                  <a:schemeClr val="tx1"/>
+                </a:solidFill>
+              </a:rPr>
+              <a:t>쓰레기 줍기</a:t>
+            </a:r>
+          </a:p>
+        </p:txBody>
+      </p:sp>
+      <p:sp>
+        <p:nvSpPr>
+          <p:cNvPr id="19" name="화살표: 오각형 18">
+            <a:extLst>
+              <a:ext uri="{FF2B5EF4-FFF2-40B4-BE49-F238E27FC236}">
+                <a16:creationId xmlns:a16="http://schemas.microsoft.com/office/drawing/2014/main" id="{D994D8C9-CD09-F8AD-E4A1-51AE38A4CDCF}"/>
+              </a:ext>
+            </a:extLst>
+          </p:cNvPr>
+          <p:cNvSpPr/>
+          <p:nvPr/>
+        </p:nvSpPr>
+        <p:spPr>
+          <a:xfrm>
+            <a:off x="1325608" y="6310489"/>
+            <a:ext cx="1069848" cy="297092"/>
+          </a:xfrm>
+          <a:prstGeom prst="homePlate">
+            <a:avLst/>
+          </a:prstGeom>
+          <a:solidFill>
+            <a:srgbClr val="FAEBA0"/>
+          </a:solidFill>
+          <a:ln>
+            <a:gradFill>
+              <a:gsLst>
+                <a:gs pos="0">
+                  <a:schemeClr val="accent1">
+                    <a:lumMod val="5000"/>
+                    <a:lumOff val="95000"/>
+                  </a:schemeClr>
+                </a:gs>
+                <a:gs pos="74000">
+                  <a:schemeClr val="accent1">
+                    <a:lumMod val="45000"/>
+                    <a:lumOff val="55000"/>
+                  </a:schemeClr>
+                </a:gs>
+                <a:gs pos="83000">
+                  <a:schemeClr val="accent1">
+                    <a:lumMod val="45000"/>
+                    <a:lumOff val="55000"/>
+                  </a:schemeClr>
+                </a:gs>
+                <a:gs pos="100000">
+                  <a:schemeClr val="accent1">
+                    <a:lumMod val="30000"/>
+                    <a:lumOff val="70000"/>
+                  </a:schemeClr>
+                </a:gs>
+              </a:gsLst>
+              <a:lin ang="5400000" scaled="1"/>
+            </a:gradFill>
+          </a:ln>
+          <a:effectLst>
+            <a:softEdge rad="19050"/>
+          </a:effectLst>
+        </p:spPr>
+        <p:style>
+          <a:lnRef idx="2">
+            <a:schemeClr val="accent1">
+              <a:shade val="15000"/>
+            </a:schemeClr>
+          </a:lnRef>
+          <a:fillRef idx="1">
+            <a:schemeClr val="accent1"/>
+          </a:fillRef>
+          <a:effectRef idx="0">
+            <a:schemeClr val="accent1"/>
+          </a:effectRef>
+          <a:fontRef idx="minor">
+            <a:schemeClr val="lt1"/>
+          </a:fontRef>
+        </p:style>
+        <p:txBody>
+          <a:bodyPr rtlCol="0" anchor="ctr"/>
+          <a:lstStyle/>
+          <a:p>
+            <a:pPr algn="ctr"/>
+            <a:r>
+              <a:rPr lang="ko-KR" altLang="en-US" sz="800" dirty="0">
+                <a:solidFill>
+                  <a:schemeClr val="tx1"/>
+                </a:solidFill>
+              </a:rPr>
+              <a:t>첫 균열 발견</a:t>
+            </a:r>
+          </a:p>
+        </p:txBody>
+      </p:sp>
+      <p:cxnSp>
+        <p:nvCxnSpPr>
+          <p:cNvPr id="30" name="연결선: 꺾임 29">
+            <a:extLst>
+              <a:ext uri="{FF2B5EF4-FFF2-40B4-BE49-F238E27FC236}">
+                <a16:creationId xmlns:a16="http://schemas.microsoft.com/office/drawing/2014/main" id="{00C2186D-C44A-8D06-9A3A-DD9F54385827}"/>
+              </a:ext>
+            </a:extLst>
+          </p:cNvPr>
+          <p:cNvCxnSpPr>
+            <a:cxnSpLocks/>
+            <a:stCxn id="2" idx="0"/>
+            <a:endCxn id="11" idx="1"/>
+          </p:cNvCxnSpPr>
+          <p:nvPr/>
+        </p:nvCxnSpPr>
+        <p:spPr>
+          <a:xfrm rot="5400000" flipH="1" flipV="1">
+            <a:off x="427322" y="6057088"/>
+            <a:ext cx="333706" cy="173097"/>
+          </a:xfrm>
+          <a:prstGeom prst="bentConnector2">
+            <a:avLst/>
+          </a:prstGeom>
+          <a:ln w="19050">
+            <a:solidFill>
+              <a:srgbClr val="FAEBA0"/>
+            </a:solidFill>
+            <a:tailEnd type="triangle"/>
+          </a:ln>
+        </p:spPr>
+        <p:style>
+          <a:lnRef idx="1">
+            <a:schemeClr val="accent1"/>
+          </a:lnRef>
+          <a:fillRef idx="0">
+            <a:schemeClr val="accent1"/>
+          </a:fillRef>
+          <a:effectRef idx="0">
+            <a:schemeClr val="accent1"/>
+          </a:effectRef>
+          <a:fontRef idx="minor">
+            <a:schemeClr val="tx1"/>
+          </a:fontRef>
+        </p:style>
+      </p:cxnSp>
+      <p:cxnSp>
+        <p:nvCxnSpPr>
+          <p:cNvPr id="32" name="연결선: 꺾임 31">
+            <a:extLst>
+              <a:ext uri="{FF2B5EF4-FFF2-40B4-BE49-F238E27FC236}">
+                <a16:creationId xmlns:a16="http://schemas.microsoft.com/office/drawing/2014/main" id="{530348AF-1F2B-8968-32FA-97E687281648}"/>
+              </a:ext>
+            </a:extLst>
+          </p:cNvPr>
+          <p:cNvCxnSpPr>
+            <a:cxnSpLocks/>
+            <a:stCxn id="11" idx="3"/>
+            <a:endCxn id="19" idx="0"/>
+          </p:cNvCxnSpPr>
+          <p:nvPr/>
+        </p:nvCxnSpPr>
+        <p:spPr>
+          <a:xfrm>
+            <a:off x="1750572" y="5976783"/>
+            <a:ext cx="35687" cy="333706"/>
+          </a:xfrm>
+          <a:prstGeom prst="bentConnector2">
+            <a:avLst/>
+          </a:prstGeom>
+          <a:ln w="19050">
+            <a:solidFill>
+              <a:srgbClr val="FAEBA0"/>
+            </a:solidFill>
+            <a:tailEnd type="triangle"/>
+          </a:ln>
+        </p:spPr>
+        <p:style>
+          <a:lnRef idx="1">
+            <a:schemeClr val="accent1"/>
+          </a:lnRef>
+          <a:fillRef idx="0">
+            <a:schemeClr val="accent1"/>
+          </a:fillRef>
+          <a:effectRef idx="0">
+            <a:schemeClr val="accent1"/>
+          </a:effectRef>
+          <a:fontRef idx="minor">
+            <a:schemeClr val="tx1"/>
+          </a:fontRef>
+        </p:style>
+      </p:cxnSp>
+      <p:cxnSp>
+        <p:nvCxnSpPr>
+          <p:cNvPr id="35" name="연결선: 꺾임 34">
+            <a:extLst>
+              <a:ext uri="{FF2B5EF4-FFF2-40B4-BE49-F238E27FC236}">
+                <a16:creationId xmlns:a16="http://schemas.microsoft.com/office/drawing/2014/main" id="{B6E8F5DB-1D6C-DE7B-FBEC-3A6725D722DD}"/>
+              </a:ext>
+            </a:extLst>
+          </p:cNvPr>
+          <p:cNvCxnSpPr>
+            <a:cxnSpLocks/>
+            <a:stCxn id="19" idx="2"/>
+            <a:endCxn id="45" idx="2"/>
+          </p:cNvCxnSpPr>
+          <p:nvPr/>
+        </p:nvCxnSpPr>
+        <p:spPr>
+          <a:xfrm rot="16200000" flipH="1">
+            <a:off x="2364290" y="6029550"/>
+            <a:ext cx="5428" cy="1161490"/>
+          </a:xfrm>
+          <a:prstGeom prst="bentConnector3">
+            <a:avLst>
+              <a:gd name="adj1" fmla="val 2219510"/>
+            </a:avLst>
+          </a:prstGeom>
+          <a:ln w="19050">
+            <a:solidFill>
+              <a:srgbClr val="FAEBA0"/>
+            </a:solidFill>
+            <a:tailEnd type="triangle"/>
+          </a:ln>
+        </p:spPr>
+        <p:style>
+          <a:lnRef idx="1">
+            <a:schemeClr val="accent1"/>
+          </a:lnRef>
+          <a:fillRef idx="0">
+            <a:schemeClr val="accent1"/>
+          </a:fillRef>
+          <a:effectRef idx="0">
+            <a:schemeClr val="accent1"/>
+          </a:effectRef>
+          <a:fontRef idx="minor">
+            <a:schemeClr val="tx1"/>
+          </a:fontRef>
+        </p:style>
+      </p:cxnSp>
+      <p:sp>
+        <p:nvSpPr>
+          <p:cNvPr id="45" name="화살표: 오각형 44">
+            <a:extLst>
+              <a:ext uri="{FF2B5EF4-FFF2-40B4-BE49-F238E27FC236}">
+                <a16:creationId xmlns:a16="http://schemas.microsoft.com/office/drawing/2014/main" id="{584E6426-EE9B-9BEF-2C41-48ADABE0AD85}"/>
+              </a:ext>
+            </a:extLst>
+          </p:cNvPr>
+          <p:cNvSpPr/>
+          <p:nvPr/>
+        </p:nvSpPr>
+        <p:spPr>
+          <a:xfrm>
+            <a:off x="2487098" y="6315917"/>
+            <a:ext cx="1069848" cy="297092"/>
+          </a:xfrm>
+          <a:prstGeom prst="homePlate">
+            <a:avLst/>
+          </a:prstGeom>
+          <a:solidFill>
+            <a:srgbClr val="FAEBA0"/>
+          </a:solidFill>
+          <a:ln>
+            <a:gradFill>
+              <a:gsLst>
+                <a:gs pos="0">
+                  <a:schemeClr val="accent1">
+                    <a:lumMod val="5000"/>
+                    <a:lumOff val="95000"/>
+                  </a:schemeClr>
+                </a:gs>
+                <a:gs pos="74000">
+                  <a:schemeClr val="accent1">
+                    <a:lumMod val="45000"/>
+                    <a:lumOff val="55000"/>
+                  </a:schemeClr>
+                </a:gs>
+                <a:gs pos="83000">
+                  <a:schemeClr val="accent1">
+                    <a:lumMod val="45000"/>
+                    <a:lumOff val="55000"/>
+                  </a:schemeClr>
+                </a:gs>
+                <a:gs pos="100000">
+                  <a:schemeClr val="accent1">
+                    <a:lumMod val="30000"/>
+                    <a:lumOff val="70000"/>
+                  </a:schemeClr>
+                </a:gs>
+              </a:gsLst>
+              <a:lin ang="5400000" scaled="1"/>
+            </a:gradFill>
+          </a:ln>
+          <a:effectLst>
+            <a:softEdge rad="19050"/>
+          </a:effectLst>
+        </p:spPr>
+        <p:style>
+          <a:lnRef idx="2">
+            <a:schemeClr val="accent1">
+              <a:shade val="15000"/>
+            </a:schemeClr>
+          </a:lnRef>
+          <a:fillRef idx="1">
+            <a:schemeClr val="accent1"/>
+          </a:fillRef>
+          <a:effectRef idx="0">
+            <a:schemeClr val="accent1"/>
+          </a:effectRef>
+          <a:fontRef idx="minor">
+            <a:schemeClr val="lt1"/>
+          </a:fontRef>
+        </p:style>
+        <p:txBody>
+          <a:bodyPr rtlCol="0" anchor="ctr"/>
+          <a:lstStyle/>
+          <a:p>
+            <a:pPr algn="ctr"/>
+            <a:r>
+              <a:rPr lang="ko-KR" altLang="en-US" sz="800" dirty="0">
+                <a:solidFill>
+                  <a:schemeClr val="tx1"/>
+                </a:solidFill>
+              </a:rPr>
+              <a:t>선의 지수 측정</a:t>
+            </a:r>
+          </a:p>
+        </p:txBody>
+      </p:sp>
+      <p:sp>
+        <p:nvSpPr>
+          <p:cNvPr id="46" name="화살표: 오각형 45">
+            <a:extLst>
+              <a:ext uri="{FF2B5EF4-FFF2-40B4-BE49-F238E27FC236}">
+                <a16:creationId xmlns:a16="http://schemas.microsoft.com/office/drawing/2014/main" id="{F7E60FDC-1D02-1C24-6C9F-273E29C30265}"/>
+              </a:ext>
+            </a:extLst>
+          </p:cNvPr>
+          <p:cNvSpPr/>
+          <p:nvPr/>
+        </p:nvSpPr>
+        <p:spPr>
+          <a:xfrm>
+            <a:off x="3094090" y="5833665"/>
+            <a:ext cx="1123360" cy="297092"/>
+          </a:xfrm>
+          <a:prstGeom prst="homePlate">
+            <a:avLst/>
+          </a:prstGeom>
+          <a:solidFill>
+            <a:srgbClr val="FAEBA0"/>
+          </a:solidFill>
+          <a:ln>
+            <a:gradFill>
+              <a:gsLst>
+                <a:gs pos="0">
+                  <a:schemeClr val="accent1">
+                    <a:lumMod val="5000"/>
+                    <a:lumOff val="95000"/>
+                  </a:schemeClr>
+                </a:gs>
+                <a:gs pos="74000">
+                  <a:schemeClr val="accent1">
+                    <a:lumMod val="45000"/>
+                    <a:lumOff val="55000"/>
+                  </a:schemeClr>
+                </a:gs>
+                <a:gs pos="83000">
+                  <a:schemeClr val="accent1">
+                    <a:lumMod val="45000"/>
+                    <a:lumOff val="55000"/>
+                  </a:schemeClr>
+                </a:gs>
+                <a:gs pos="100000">
+                  <a:schemeClr val="accent1">
+                    <a:lumMod val="30000"/>
+                    <a:lumOff val="70000"/>
+                  </a:schemeClr>
+                </a:gs>
+              </a:gsLst>
+              <a:lin ang="5400000" scaled="1"/>
+            </a:gradFill>
+          </a:ln>
+          <a:effectLst>
+            <a:softEdge rad="19050"/>
+          </a:effectLst>
+        </p:spPr>
+        <p:style>
+          <a:lnRef idx="2">
+            <a:schemeClr val="accent1">
+              <a:shade val="15000"/>
+            </a:schemeClr>
+          </a:lnRef>
+          <a:fillRef idx="1">
+            <a:schemeClr val="accent1"/>
+          </a:fillRef>
+          <a:effectRef idx="0">
+            <a:schemeClr val="accent1"/>
+          </a:effectRef>
+          <a:fontRef idx="minor">
+            <a:schemeClr val="lt1"/>
+          </a:fontRef>
+        </p:style>
+        <p:txBody>
+          <a:bodyPr rtlCol="0" anchor="ctr"/>
+          <a:lstStyle/>
+          <a:p>
+            <a:pPr algn="ctr"/>
+            <a:r>
+              <a:rPr lang="ko-KR" altLang="en-US" sz="800" dirty="0">
+                <a:solidFill>
+                  <a:schemeClr val="tx1"/>
+                </a:solidFill>
+              </a:rPr>
+              <a:t>강제 징집</a:t>
+            </a:r>
+          </a:p>
+        </p:txBody>
+      </p:sp>
+      <p:sp>
+        <p:nvSpPr>
+          <p:cNvPr id="47" name="화살표: 오각형 46">
+            <a:extLst>
+              <a:ext uri="{FF2B5EF4-FFF2-40B4-BE49-F238E27FC236}">
+                <a16:creationId xmlns:a16="http://schemas.microsoft.com/office/drawing/2014/main" id="{B1D09D92-4C70-7956-2027-83151D495223}"/>
+              </a:ext>
+            </a:extLst>
+          </p:cNvPr>
+          <p:cNvSpPr/>
+          <p:nvPr/>
+        </p:nvSpPr>
+        <p:spPr>
+          <a:xfrm>
+            <a:off x="3765730" y="6315917"/>
+            <a:ext cx="1069848" cy="297092"/>
+          </a:xfrm>
+          <a:prstGeom prst="homePlate">
+            <a:avLst/>
+          </a:prstGeom>
+          <a:solidFill>
+            <a:srgbClr val="FAEBA0"/>
+          </a:solidFill>
+          <a:ln>
+            <a:gradFill>
+              <a:gsLst>
+                <a:gs pos="0">
+                  <a:schemeClr val="accent1">
+                    <a:lumMod val="5000"/>
+                    <a:lumOff val="95000"/>
+                  </a:schemeClr>
+                </a:gs>
+                <a:gs pos="74000">
+                  <a:schemeClr val="accent1">
+                    <a:lumMod val="45000"/>
+                    <a:lumOff val="55000"/>
+                  </a:schemeClr>
+                </a:gs>
+                <a:gs pos="83000">
+                  <a:schemeClr val="accent1">
+                    <a:lumMod val="45000"/>
+                    <a:lumOff val="55000"/>
+                  </a:schemeClr>
+                </a:gs>
+                <a:gs pos="100000">
+                  <a:schemeClr val="accent1">
+                    <a:lumMod val="30000"/>
+                    <a:lumOff val="70000"/>
+                  </a:schemeClr>
+                </a:gs>
+              </a:gsLst>
+              <a:lin ang="5400000" scaled="1"/>
+            </a:gradFill>
+          </a:ln>
+          <a:effectLst>
+            <a:softEdge rad="19050"/>
+          </a:effectLst>
+        </p:spPr>
+        <p:style>
+          <a:lnRef idx="2">
+            <a:schemeClr val="accent1">
+              <a:shade val="15000"/>
+            </a:schemeClr>
+          </a:lnRef>
+          <a:fillRef idx="1">
+            <a:schemeClr val="accent1"/>
+          </a:fillRef>
+          <a:effectRef idx="0">
+            <a:schemeClr val="accent1"/>
+          </a:effectRef>
+          <a:fontRef idx="minor">
+            <a:schemeClr val="lt1"/>
+          </a:fontRef>
+        </p:style>
+        <p:txBody>
+          <a:bodyPr rtlCol="0" anchor="ctr"/>
+          <a:lstStyle/>
+          <a:p>
+            <a:pPr algn="ctr"/>
+            <a:r>
+              <a:rPr lang="ko-KR" altLang="en-US" sz="800" dirty="0">
+                <a:solidFill>
+                  <a:schemeClr val="tx1"/>
+                </a:solidFill>
+              </a:rPr>
+              <a:t>선의 </a:t>
+            </a:r>
+            <a:r>
+              <a:rPr lang="ko-KR" altLang="en-US" sz="800" dirty="0" err="1">
+                <a:solidFill>
+                  <a:schemeClr val="tx1"/>
+                </a:solidFill>
+              </a:rPr>
+              <a:t>고갈자</a:t>
+            </a:r>
+            <a:endParaRPr lang="ko-KR" altLang="en-US" sz="800" dirty="0">
+              <a:solidFill>
+                <a:schemeClr val="tx1"/>
+              </a:solidFill>
+            </a:endParaRPr>
+          </a:p>
+        </p:txBody>
+      </p:sp>
+      <p:cxnSp>
+        <p:nvCxnSpPr>
+          <p:cNvPr id="48" name="연결선: 꺾임 47">
+            <a:extLst>
+              <a:ext uri="{FF2B5EF4-FFF2-40B4-BE49-F238E27FC236}">
+                <a16:creationId xmlns:a16="http://schemas.microsoft.com/office/drawing/2014/main" id="{3EA178F5-08A6-938A-EF3F-7995FC791306}"/>
+              </a:ext>
+            </a:extLst>
+          </p:cNvPr>
+          <p:cNvCxnSpPr>
+            <a:cxnSpLocks/>
+            <a:stCxn id="45" idx="0"/>
+            <a:endCxn id="46" idx="1"/>
+          </p:cNvCxnSpPr>
+          <p:nvPr/>
+        </p:nvCxnSpPr>
+        <p:spPr>
+          <a:xfrm rot="5400000" flipH="1" flipV="1">
+            <a:off x="2854066" y="6075894"/>
+            <a:ext cx="333706" cy="146341"/>
+          </a:xfrm>
+          <a:prstGeom prst="bentConnector2">
+            <a:avLst/>
+          </a:prstGeom>
+          <a:ln w="19050">
+            <a:solidFill>
+              <a:srgbClr val="FAEBA0"/>
+            </a:solidFill>
+            <a:tailEnd type="triangle"/>
+          </a:ln>
+        </p:spPr>
+        <p:style>
+          <a:lnRef idx="1">
+            <a:schemeClr val="accent1"/>
+          </a:lnRef>
+          <a:fillRef idx="0">
+            <a:schemeClr val="accent1"/>
+          </a:fillRef>
+          <a:effectRef idx="0">
+            <a:schemeClr val="accent1"/>
+          </a:effectRef>
+          <a:fontRef idx="minor">
+            <a:schemeClr val="tx1"/>
+          </a:fontRef>
+        </p:style>
+      </p:cxnSp>
+      <p:cxnSp>
+        <p:nvCxnSpPr>
+          <p:cNvPr id="49" name="연결선: 꺾임 48">
+            <a:extLst>
+              <a:ext uri="{FF2B5EF4-FFF2-40B4-BE49-F238E27FC236}">
+                <a16:creationId xmlns:a16="http://schemas.microsoft.com/office/drawing/2014/main" id="{246CA2A6-781C-1036-2211-52C090321EB7}"/>
+              </a:ext>
+            </a:extLst>
+          </p:cNvPr>
+          <p:cNvCxnSpPr>
+            <a:cxnSpLocks/>
+            <a:stCxn id="46" idx="3"/>
+            <a:endCxn id="47" idx="0"/>
+          </p:cNvCxnSpPr>
+          <p:nvPr/>
+        </p:nvCxnSpPr>
+        <p:spPr>
+          <a:xfrm>
+            <a:off x="4217450" y="5982211"/>
+            <a:ext cx="8931" cy="333706"/>
+          </a:xfrm>
+          <a:prstGeom prst="bentConnector2">
+            <a:avLst/>
+          </a:prstGeom>
+          <a:ln w="19050">
+            <a:solidFill>
+              <a:srgbClr val="FAEBA0"/>
+            </a:solidFill>
+            <a:tailEnd type="triangle"/>
+          </a:ln>
+        </p:spPr>
+        <p:style>
+          <a:lnRef idx="1">
+            <a:schemeClr val="accent1"/>
+          </a:lnRef>
+          <a:fillRef idx="0">
+            <a:schemeClr val="accent1"/>
+          </a:fillRef>
+          <a:effectRef idx="0">
+            <a:schemeClr val="accent1"/>
+          </a:effectRef>
+          <a:fontRef idx="minor">
+            <a:schemeClr val="tx1"/>
+          </a:fontRef>
+        </p:style>
+      </p:cxnSp>
+      <p:sp>
+        <p:nvSpPr>
+          <p:cNvPr id="54" name="화살표: 오각형 53">
+            <a:extLst>
+              <a:ext uri="{FF2B5EF4-FFF2-40B4-BE49-F238E27FC236}">
+                <a16:creationId xmlns:a16="http://schemas.microsoft.com/office/drawing/2014/main" id="{E0501A97-5113-FD6E-75F5-A6943C93087F}"/>
+              </a:ext>
+            </a:extLst>
+          </p:cNvPr>
+          <p:cNvSpPr/>
+          <p:nvPr/>
+        </p:nvSpPr>
+        <p:spPr>
+          <a:xfrm>
+            <a:off x="4935942" y="6315917"/>
+            <a:ext cx="1069848" cy="297092"/>
+          </a:xfrm>
+          <a:prstGeom prst="homePlate">
+            <a:avLst/>
+          </a:prstGeom>
+          <a:solidFill>
+            <a:srgbClr val="FAEBA0"/>
+          </a:solidFill>
+          <a:ln>
+            <a:gradFill>
+              <a:gsLst>
+                <a:gs pos="0">
+                  <a:schemeClr val="accent1">
+                    <a:lumMod val="5000"/>
+                    <a:lumOff val="95000"/>
+                  </a:schemeClr>
+                </a:gs>
+                <a:gs pos="74000">
+                  <a:schemeClr val="accent1">
+                    <a:lumMod val="45000"/>
+                    <a:lumOff val="55000"/>
+                  </a:schemeClr>
+                </a:gs>
+                <a:gs pos="83000">
+                  <a:schemeClr val="accent1">
+                    <a:lumMod val="45000"/>
+                    <a:lumOff val="55000"/>
+                  </a:schemeClr>
+                </a:gs>
+                <a:gs pos="100000">
+                  <a:schemeClr val="accent1">
+                    <a:lumMod val="30000"/>
+                    <a:lumOff val="70000"/>
+                  </a:schemeClr>
+                </a:gs>
+              </a:gsLst>
+              <a:lin ang="5400000" scaled="1"/>
+            </a:gradFill>
+          </a:ln>
+          <a:effectLst>
+            <a:softEdge rad="19050"/>
+          </a:effectLst>
+        </p:spPr>
+        <p:style>
+          <a:lnRef idx="2">
+            <a:schemeClr val="accent1">
+              <a:shade val="15000"/>
+            </a:schemeClr>
+          </a:lnRef>
+          <a:fillRef idx="1">
+            <a:schemeClr val="accent1"/>
+          </a:fillRef>
+          <a:effectRef idx="0">
+            <a:schemeClr val="accent1"/>
+          </a:effectRef>
+          <a:fontRef idx="minor">
+            <a:schemeClr val="lt1"/>
+          </a:fontRef>
+        </p:style>
+        <p:txBody>
+          <a:bodyPr rtlCol="0" anchor="ctr"/>
+          <a:lstStyle/>
+          <a:p>
+            <a:pPr algn="ctr"/>
+            <a:r>
+              <a:rPr lang="ko-KR" altLang="en-US" sz="800" dirty="0">
+                <a:solidFill>
+                  <a:schemeClr val="tx1"/>
+                </a:solidFill>
+              </a:rPr>
+              <a:t>주인공 </a:t>
+            </a:r>
+            <a:endParaRPr lang="en-US" altLang="ko-KR" sz="800" dirty="0">
+              <a:solidFill>
+                <a:schemeClr val="tx1"/>
+              </a:solidFill>
+            </a:endParaRPr>
+          </a:p>
+          <a:p>
+            <a:pPr algn="ctr"/>
+            <a:r>
+              <a:rPr lang="ko-KR" altLang="en-US" sz="800" dirty="0">
+                <a:solidFill>
+                  <a:schemeClr val="tx1"/>
+                </a:solidFill>
+              </a:rPr>
+              <a:t>선의 지수 공개</a:t>
+            </a:r>
+          </a:p>
+        </p:txBody>
+      </p:sp>
+      <p:sp>
+        <p:nvSpPr>
+          <p:cNvPr id="55" name="화살표: 오각형 54">
+            <a:extLst>
+              <a:ext uri="{FF2B5EF4-FFF2-40B4-BE49-F238E27FC236}">
+                <a16:creationId xmlns:a16="http://schemas.microsoft.com/office/drawing/2014/main" id="{81A61468-EC7B-C897-0AC1-2A2BD6AA2750}"/>
+              </a:ext>
+            </a:extLst>
+          </p:cNvPr>
+          <p:cNvSpPr/>
+          <p:nvPr/>
+        </p:nvSpPr>
+        <p:spPr>
+          <a:xfrm>
+            <a:off x="5569690" y="5833665"/>
+            <a:ext cx="1069848" cy="297092"/>
+          </a:xfrm>
+          <a:prstGeom prst="homePlate">
+            <a:avLst/>
+          </a:prstGeom>
+          <a:solidFill>
+            <a:srgbClr val="FAEBA0"/>
+          </a:solidFill>
+          <a:ln>
+            <a:gradFill>
+              <a:gsLst>
+                <a:gs pos="0">
+                  <a:schemeClr val="accent1">
+                    <a:lumMod val="5000"/>
+                    <a:lumOff val="95000"/>
+                  </a:schemeClr>
+                </a:gs>
+                <a:gs pos="74000">
+                  <a:schemeClr val="accent1">
+                    <a:lumMod val="45000"/>
+                    <a:lumOff val="55000"/>
+                  </a:schemeClr>
+                </a:gs>
+                <a:gs pos="83000">
+                  <a:schemeClr val="accent1">
+                    <a:lumMod val="45000"/>
+                    <a:lumOff val="55000"/>
+                  </a:schemeClr>
+                </a:gs>
+                <a:gs pos="100000">
+                  <a:schemeClr val="accent1">
+                    <a:lumMod val="30000"/>
+                    <a:lumOff val="70000"/>
+                  </a:schemeClr>
+                </a:gs>
+              </a:gsLst>
+              <a:lin ang="5400000" scaled="1"/>
+            </a:gradFill>
+          </a:ln>
+          <a:effectLst>
+            <a:softEdge rad="19050"/>
+          </a:effectLst>
+        </p:spPr>
+        <p:style>
+          <a:lnRef idx="2">
+            <a:schemeClr val="accent1">
+              <a:shade val="15000"/>
+            </a:schemeClr>
+          </a:lnRef>
+          <a:fillRef idx="1">
+            <a:schemeClr val="accent1"/>
+          </a:fillRef>
+          <a:effectRef idx="0">
+            <a:schemeClr val="accent1"/>
+          </a:effectRef>
+          <a:fontRef idx="minor">
+            <a:schemeClr val="lt1"/>
+          </a:fontRef>
+        </p:style>
+        <p:txBody>
+          <a:bodyPr rtlCol="0" anchor="ctr"/>
+          <a:lstStyle/>
+          <a:p>
+            <a:pPr algn="ctr"/>
+            <a:r>
+              <a:rPr lang="ko-KR" altLang="en-US" sz="800" dirty="0">
+                <a:solidFill>
+                  <a:schemeClr val="tx1"/>
+                </a:solidFill>
+              </a:rPr>
+              <a:t>구조 실패</a:t>
+            </a:r>
+          </a:p>
+        </p:txBody>
+      </p:sp>
+      <p:sp>
+        <p:nvSpPr>
+          <p:cNvPr id="56" name="화살표: 오각형 55">
+            <a:extLst>
+              <a:ext uri="{FF2B5EF4-FFF2-40B4-BE49-F238E27FC236}">
+                <a16:creationId xmlns:a16="http://schemas.microsoft.com/office/drawing/2014/main" id="{77A5AF9E-9470-98DD-51F2-2D789F2E9E97}"/>
+              </a:ext>
+            </a:extLst>
+          </p:cNvPr>
+          <p:cNvSpPr/>
+          <p:nvPr/>
+        </p:nvSpPr>
+        <p:spPr>
+          <a:xfrm>
+            <a:off x="6214574" y="6315917"/>
+            <a:ext cx="1069848" cy="297092"/>
+          </a:xfrm>
+          <a:prstGeom prst="homePlate">
+            <a:avLst/>
+          </a:prstGeom>
+          <a:solidFill>
+            <a:srgbClr val="FAEBA0"/>
+          </a:solidFill>
+          <a:ln>
+            <a:gradFill>
+              <a:gsLst>
+                <a:gs pos="0">
+                  <a:schemeClr val="accent1">
+                    <a:lumMod val="5000"/>
+                    <a:lumOff val="95000"/>
+                  </a:schemeClr>
+                </a:gs>
+                <a:gs pos="74000">
+                  <a:schemeClr val="accent1">
+                    <a:lumMod val="45000"/>
+                    <a:lumOff val="55000"/>
+                  </a:schemeClr>
+                </a:gs>
+                <a:gs pos="83000">
+                  <a:schemeClr val="accent1">
+                    <a:lumMod val="45000"/>
+                    <a:lumOff val="55000"/>
+                  </a:schemeClr>
+                </a:gs>
+                <a:gs pos="100000">
+                  <a:schemeClr val="accent1">
+                    <a:lumMod val="30000"/>
+                    <a:lumOff val="70000"/>
+                  </a:schemeClr>
+                </a:gs>
+              </a:gsLst>
+              <a:lin ang="5400000" scaled="1"/>
+            </a:gradFill>
+          </a:ln>
+          <a:effectLst>
+            <a:softEdge rad="19050"/>
+          </a:effectLst>
+        </p:spPr>
+        <p:style>
+          <a:lnRef idx="2">
+            <a:schemeClr val="accent1">
+              <a:shade val="15000"/>
+            </a:schemeClr>
+          </a:lnRef>
+          <a:fillRef idx="1">
+            <a:schemeClr val="accent1"/>
+          </a:fillRef>
+          <a:effectRef idx="0">
+            <a:schemeClr val="accent1"/>
+          </a:effectRef>
+          <a:fontRef idx="minor">
+            <a:schemeClr val="lt1"/>
+          </a:fontRef>
+        </p:style>
+        <p:txBody>
+          <a:bodyPr rtlCol="0" anchor="ctr"/>
+          <a:lstStyle/>
+          <a:p>
+            <a:pPr algn="ctr"/>
+            <a:r>
+              <a:rPr lang="ko-KR" altLang="en-US" sz="800" dirty="0">
+                <a:solidFill>
+                  <a:schemeClr val="tx1"/>
+                </a:solidFill>
+              </a:rPr>
+              <a:t>친구의 죽음</a:t>
+            </a:r>
+          </a:p>
+        </p:txBody>
+      </p:sp>
+      <p:cxnSp>
+        <p:nvCxnSpPr>
+          <p:cNvPr id="57" name="연결선: 꺾임 56">
+            <a:extLst>
+              <a:ext uri="{FF2B5EF4-FFF2-40B4-BE49-F238E27FC236}">
+                <a16:creationId xmlns:a16="http://schemas.microsoft.com/office/drawing/2014/main" id="{6DDCD975-41F3-A6D1-8D6C-115DAED2F3F4}"/>
+              </a:ext>
+            </a:extLst>
+          </p:cNvPr>
+          <p:cNvCxnSpPr>
+            <a:cxnSpLocks/>
+            <a:stCxn id="54" idx="0"/>
+            <a:endCxn id="55" idx="1"/>
+          </p:cNvCxnSpPr>
+          <p:nvPr/>
+        </p:nvCxnSpPr>
+        <p:spPr>
+          <a:xfrm rot="5400000" flipH="1" flipV="1">
+            <a:off x="5316288" y="6062516"/>
+            <a:ext cx="333706" cy="173097"/>
+          </a:xfrm>
+          <a:prstGeom prst="bentConnector2">
+            <a:avLst/>
+          </a:prstGeom>
+          <a:ln w="19050">
+            <a:solidFill>
+              <a:srgbClr val="FAEBA0"/>
+            </a:solidFill>
+            <a:tailEnd type="triangle"/>
+          </a:ln>
+        </p:spPr>
+        <p:style>
+          <a:lnRef idx="1">
+            <a:schemeClr val="accent1"/>
+          </a:lnRef>
+          <a:fillRef idx="0">
+            <a:schemeClr val="accent1"/>
+          </a:fillRef>
+          <a:effectRef idx="0">
+            <a:schemeClr val="accent1"/>
+          </a:effectRef>
+          <a:fontRef idx="minor">
+            <a:schemeClr val="tx1"/>
+          </a:fontRef>
+        </p:style>
+      </p:cxnSp>
+      <p:cxnSp>
+        <p:nvCxnSpPr>
+          <p:cNvPr id="58" name="연결선: 꺾임 57">
+            <a:extLst>
+              <a:ext uri="{FF2B5EF4-FFF2-40B4-BE49-F238E27FC236}">
+                <a16:creationId xmlns:a16="http://schemas.microsoft.com/office/drawing/2014/main" id="{C17F1E12-4A5A-E593-ED1D-58D07734489C}"/>
+              </a:ext>
+            </a:extLst>
+          </p:cNvPr>
+          <p:cNvCxnSpPr>
+            <a:cxnSpLocks/>
+            <a:stCxn id="55" idx="3"/>
+            <a:endCxn id="56" idx="0"/>
+          </p:cNvCxnSpPr>
+          <p:nvPr/>
+        </p:nvCxnSpPr>
+        <p:spPr>
+          <a:xfrm>
+            <a:off x="6639538" y="5982211"/>
+            <a:ext cx="35687" cy="333706"/>
+          </a:xfrm>
+          <a:prstGeom prst="bentConnector2">
+            <a:avLst/>
+          </a:prstGeom>
+          <a:ln w="19050">
+            <a:solidFill>
+              <a:srgbClr val="FAEBA0"/>
+            </a:solidFill>
+            <a:tailEnd type="triangle"/>
+          </a:ln>
+        </p:spPr>
+        <p:style>
+          <a:lnRef idx="1">
+            <a:schemeClr val="accent1"/>
+          </a:lnRef>
+          <a:fillRef idx="0">
+            <a:schemeClr val="accent1"/>
+          </a:fillRef>
+          <a:effectRef idx="0">
+            <a:schemeClr val="accent1"/>
+          </a:effectRef>
+          <a:fontRef idx="minor">
+            <a:schemeClr val="tx1"/>
+          </a:fontRef>
+        </p:style>
+      </p:cxnSp>
+      <p:sp>
+        <p:nvSpPr>
+          <p:cNvPr id="67" name="화살표: 오각형 66">
+            <a:extLst>
+              <a:ext uri="{FF2B5EF4-FFF2-40B4-BE49-F238E27FC236}">
+                <a16:creationId xmlns:a16="http://schemas.microsoft.com/office/drawing/2014/main" id="{1CDF306A-BE2E-258F-9738-B9A5B47B115C}"/>
+              </a:ext>
+            </a:extLst>
+          </p:cNvPr>
+          <p:cNvSpPr/>
+          <p:nvPr/>
+        </p:nvSpPr>
+        <p:spPr>
+          <a:xfrm>
+            <a:off x="7380526" y="6310488"/>
+            <a:ext cx="1069848" cy="297092"/>
+          </a:xfrm>
+          <a:prstGeom prst="homePlate">
+            <a:avLst/>
+          </a:prstGeom>
+          <a:solidFill>
+            <a:srgbClr val="FAEBA0"/>
+          </a:solidFill>
+          <a:ln>
+            <a:gradFill>
+              <a:gsLst>
+                <a:gs pos="0">
+                  <a:schemeClr val="accent1">
+                    <a:lumMod val="5000"/>
+                    <a:lumOff val="95000"/>
+                  </a:schemeClr>
+                </a:gs>
+                <a:gs pos="74000">
+                  <a:schemeClr val="accent1">
+                    <a:lumMod val="45000"/>
+                    <a:lumOff val="55000"/>
+                  </a:schemeClr>
+                </a:gs>
+                <a:gs pos="83000">
+                  <a:schemeClr val="accent1">
+                    <a:lumMod val="45000"/>
+                    <a:lumOff val="55000"/>
+                  </a:schemeClr>
+                </a:gs>
+                <a:gs pos="100000">
+                  <a:schemeClr val="accent1">
+                    <a:lumMod val="30000"/>
+                    <a:lumOff val="70000"/>
+                  </a:schemeClr>
+                </a:gs>
+              </a:gsLst>
+              <a:lin ang="5400000" scaled="1"/>
+            </a:gradFill>
+          </a:ln>
+          <a:effectLst>
+            <a:softEdge rad="19050"/>
+          </a:effectLst>
+        </p:spPr>
+        <p:style>
+          <a:lnRef idx="2">
+            <a:schemeClr val="accent1">
+              <a:shade val="15000"/>
+            </a:schemeClr>
+          </a:lnRef>
+          <a:fillRef idx="1">
+            <a:schemeClr val="accent1"/>
+          </a:fillRef>
+          <a:effectRef idx="0">
+            <a:schemeClr val="accent1"/>
+          </a:effectRef>
+          <a:fontRef idx="minor">
+            <a:schemeClr val="lt1"/>
+          </a:fontRef>
+        </p:style>
+        <p:txBody>
+          <a:bodyPr rtlCol="0" anchor="ctr"/>
+          <a:lstStyle/>
+          <a:p>
+            <a:pPr algn="ctr"/>
+            <a:r>
+              <a:rPr lang="ko-KR" altLang="en-US" sz="800" dirty="0">
+                <a:solidFill>
+                  <a:schemeClr val="tx1"/>
+                </a:solidFill>
+              </a:rPr>
+              <a:t>괴물의 정체</a:t>
+            </a:r>
+          </a:p>
+        </p:txBody>
+      </p:sp>
+      <p:sp>
+        <p:nvSpPr>
+          <p:cNvPr id="68" name="화살표: 오각형 67">
+            <a:extLst>
+              <a:ext uri="{FF2B5EF4-FFF2-40B4-BE49-F238E27FC236}">
+                <a16:creationId xmlns:a16="http://schemas.microsoft.com/office/drawing/2014/main" id="{30165209-03A4-1DA5-09AC-AF365CDA165C}"/>
+              </a:ext>
+            </a:extLst>
+          </p:cNvPr>
+          <p:cNvSpPr/>
+          <p:nvPr/>
+        </p:nvSpPr>
+        <p:spPr>
+          <a:xfrm>
+            <a:off x="8014274" y="5828236"/>
+            <a:ext cx="1069848" cy="297092"/>
+          </a:xfrm>
+          <a:prstGeom prst="homePlate">
+            <a:avLst/>
+          </a:prstGeom>
+          <a:solidFill>
+            <a:srgbClr val="FAEBA0"/>
+          </a:solidFill>
+          <a:ln>
+            <a:gradFill>
+              <a:gsLst>
+                <a:gs pos="0">
+                  <a:schemeClr val="accent1">
+                    <a:lumMod val="5000"/>
+                    <a:lumOff val="95000"/>
+                  </a:schemeClr>
+                </a:gs>
+                <a:gs pos="74000">
+                  <a:schemeClr val="accent1">
+                    <a:lumMod val="45000"/>
+                    <a:lumOff val="55000"/>
+                  </a:schemeClr>
+                </a:gs>
+                <a:gs pos="83000">
+                  <a:schemeClr val="accent1">
+                    <a:lumMod val="45000"/>
+                    <a:lumOff val="55000"/>
+                  </a:schemeClr>
+                </a:gs>
+                <a:gs pos="100000">
+                  <a:schemeClr val="accent1">
+                    <a:lumMod val="30000"/>
+                    <a:lumOff val="70000"/>
+                  </a:schemeClr>
+                </a:gs>
+              </a:gsLst>
+              <a:lin ang="5400000" scaled="1"/>
+            </a:gradFill>
+          </a:ln>
+          <a:effectLst>
+            <a:softEdge rad="19050"/>
+          </a:effectLst>
+        </p:spPr>
+        <p:style>
+          <a:lnRef idx="2">
+            <a:schemeClr val="accent1">
+              <a:shade val="15000"/>
+            </a:schemeClr>
+          </a:lnRef>
+          <a:fillRef idx="1">
+            <a:schemeClr val="accent1"/>
+          </a:fillRef>
+          <a:effectRef idx="0">
+            <a:schemeClr val="accent1"/>
+          </a:effectRef>
+          <a:fontRef idx="minor">
+            <a:schemeClr val="lt1"/>
+          </a:fontRef>
+        </p:style>
+        <p:txBody>
+          <a:bodyPr rtlCol="0" anchor="ctr"/>
+          <a:lstStyle/>
+          <a:p>
+            <a:pPr algn="ctr"/>
+            <a:r>
+              <a:rPr lang="ko-KR" altLang="en-US" sz="800" dirty="0">
+                <a:solidFill>
+                  <a:schemeClr val="tx1"/>
+                </a:solidFill>
+              </a:rPr>
+              <a:t>육체 저장소 발견</a:t>
+            </a:r>
+          </a:p>
+        </p:txBody>
+      </p:sp>
+      <p:sp>
+        <p:nvSpPr>
+          <p:cNvPr id="69" name="화살표: 오각형 68">
+            <a:extLst>
+              <a:ext uri="{FF2B5EF4-FFF2-40B4-BE49-F238E27FC236}">
+                <a16:creationId xmlns:a16="http://schemas.microsoft.com/office/drawing/2014/main" id="{1CCCC373-1F82-27EE-EB8C-9D09D44243F1}"/>
+              </a:ext>
+            </a:extLst>
+          </p:cNvPr>
+          <p:cNvSpPr/>
+          <p:nvPr/>
+        </p:nvSpPr>
+        <p:spPr>
+          <a:xfrm>
+            <a:off x="8659158" y="6310488"/>
+            <a:ext cx="1069848" cy="297092"/>
+          </a:xfrm>
+          <a:prstGeom prst="homePlate">
+            <a:avLst/>
+          </a:prstGeom>
+          <a:solidFill>
+            <a:srgbClr val="FAEBA0"/>
+          </a:solidFill>
+          <a:ln>
+            <a:gradFill>
+              <a:gsLst>
+                <a:gs pos="0">
+                  <a:schemeClr val="accent1">
+                    <a:lumMod val="5000"/>
+                    <a:lumOff val="95000"/>
+                  </a:schemeClr>
+                </a:gs>
+                <a:gs pos="74000">
+                  <a:schemeClr val="accent1">
+                    <a:lumMod val="45000"/>
+                    <a:lumOff val="55000"/>
+                  </a:schemeClr>
+                </a:gs>
+                <a:gs pos="83000">
+                  <a:schemeClr val="accent1">
+                    <a:lumMod val="45000"/>
+                    <a:lumOff val="55000"/>
+                  </a:schemeClr>
+                </a:gs>
+                <a:gs pos="100000">
+                  <a:schemeClr val="accent1">
+                    <a:lumMod val="30000"/>
+                    <a:lumOff val="70000"/>
+                  </a:schemeClr>
+                </a:gs>
+              </a:gsLst>
+              <a:lin ang="5400000" scaled="1"/>
+            </a:gradFill>
+          </a:ln>
+          <a:effectLst>
+            <a:softEdge rad="19050"/>
+          </a:effectLst>
+        </p:spPr>
+        <p:style>
+          <a:lnRef idx="2">
+            <a:schemeClr val="accent1">
+              <a:shade val="15000"/>
+            </a:schemeClr>
+          </a:lnRef>
+          <a:fillRef idx="1">
+            <a:schemeClr val="accent1"/>
+          </a:fillRef>
+          <a:effectRef idx="0">
+            <a:schemeClr val="accent1"/>
+          </a:effectRef>
+          <a:fontRef idx="minor">
+            <a:schemeClr val="lt1"/>
+          </a:fontRef>
+        </p:style>
+        <p:txBody>
+          <a:bodyPr rtlCol="0" anchor="ctr"/>
+          <a:lstStyle/>
+          <a:p>
+            <a:pPr algn="ctr"/>
+            <a:r>
+              <a:rPr lang="ko-KR" altLang="en-US" sz="800" dirty="0">
+                <a:solidFill>
+                  <a:schemeClr val="tx1"/>
+                </a:solidFill>
+              </a:rPr>
+              <a:t>구원 방법</a:t>
+            </a:r>
+          </a:p>
+        </p:txBody>
+      </p:sp>
+      <p:cxnSp>
+        <p:nvCxnSpPr>
+          <p:cNvPr id="70" name="연결선: 꺾임 69">
+            <a:extLst>
+              <a:ext uri="{FF2B5EF4-FFF2-40B4-BE49-F238E27FC236}">
+                <a16:creationId xmlns:a16="http://schemas.microsoft.com/office/drawing/2014/main" id="{20F5CBD8-C72D-6784-0F75-14B7A3620DFA}"/>
+              </a:ext>
+            </a:extLst>
+          </p:cNvPr>
+          <p:cNvCxnSpPr>
+            <a:cxnSpLocks/>
+            <a:stCxn id="67" idx="0"/>
+            <a:endCxn id="68" idx="1"/>
+          </p:cNvCxnSpPr>
+          <p:nvPr/>
+        </p:nvCxnSpPr>
+        <p:spPr>
+          <a:xfrm rot="5400000" flipH="1" flipV="1">
+            <a:off x="7760872" y="6057087"/>
+            <a:ext cx="333706" cy="173097"/>
+          </a:xfrm>
+          <a:prstGeom prst="bentConnector2">
+            <a:avLst/>
+          </a:prstGeom>
+          <a:ln w="19050">
+            <a:solidFill>
+              <a:srgbClr val="FAEBA0"/>
+            </a:solidFill>
+            <a:tailEnd type="triangle"/>
+          </a:ln>
+        </p:spPr>
+        <p:style>
+          <a:lnRef idx="1">
+            <a:schemeClr val="accent1"/>
+          </a:lnRef>
+          <a:fillRef idx="0">
+            <a:schemeClr val="accent1"/>
+          </a:fillRef>
+          <a:effectRef idx="0">
+            <a:schemeClr val="accent1"/>
+          </a:effectRef>
+          <a:fontRef idx="minor">
+            <a:schemeClr val="tx1"/>
+          </a:fontRef>
+        </p:style>
+      </p:cxnSp>
+      <p:cxnSp>
+        <p:nvCxnSpPr>
+          <p:cNvPr id="71" name="연결선: 꺾임 70">
+            <a:extLst>
+              <a:ext uri="{FF2B5EF4-FFF2-40B4-BE49-F238E27FC236}">
+                <a16:creationId xmlns:a16="http://schemas.microsoft.com/office/drawing/2014/main" id="{9276516F-B2DC-7B6A-5338-8E4889B4069E}"/>
+              </a:ext>
+            </a:extLst>
+          </p:cNvPr>
+          <p:cNvCxnSpPr>
+            <a:cxnSpLocks/>
+            <a:stCxn id="68" idx="3"/>
+            <a:endCxn id="69" idx="0"/>
+          </p:cNvCxnSpPr>
+          <p:nvPr/>
+        </p:nvCxnSpPr>
+        <p:spPr>
+          <a:xfrm>
+            <a:off x="9084122" y="5976782"/>
+            <a:ext cx="35687" cy="333706"/>
+          </a:xfrm>
+          <a:prstGeom prst="bentConnector2">
+            <a:avLst/>
+          </a:prstGeom>
+          <a:ln w="19050">
+            <a:solidFill>
+              <a:srgbClr val="FAEBA0"/>
+            </a:solidFill>
+            <a:tailEnd type="triangle"/>
+          </a:ln>
+        </p:spPr>
+        <p:style>
+          <a:lnRef idx="1">
+            <a:schemeClr val="accent1"/>
+          </a:lnRef>
+          <a:fillRef idx="0">
+            <a:schemeClr val="accent1"/>
+          </a:fillRef>
+          <a:effectRef idx="0">
+            <a:schemeClr val="accent1"/>
+          </a:effectRef>
+          <a:fontRef idx="minor">
+            <a:schemeClr val="tx1"/>
+          </a:fontRef>
+        </p:style>
+      </p:cxnSp>
+      <p:sp>
+        <p:nvSpPr>
+          <p:cNvPr id="76" name="화살표: 오각형 75">
+            <a:extLst>
+              <a:ext uri="{FF2B5EF4-FFF2-40B4-BE49-F238E27FC236}">
+                <a16:creationId xmlns:a16="http://schemas.microsoft.com/office/drawing/2014/main" id="{D216EC82-415A-355B-5917-9E53B0AF762D}"/>
+              </a:ext>
+            </a:extLst>
+          </p:cNvPr>
+          <p:cNvSpPr/>
+          <p:nvPr/>
+        </p:nvSpPr>
+        <p:spPr>
+          <a:xfrm>
+            <a:off x="10498796" y="6310484"/>
+            <a:ext cx="1069848" cy="297092"/>
+          </a:xfrm>
+          <a:prstGeom prst="homePlate">
+            <a:avLst/>
+          </a:prstGeom>
+          <a:solidFill>
+            <a:srgbClr val="FAEBA0"/>
+          </a:solidFill>
+          <a:ln>
+            <a:gradFill>
+              <a:gsLst>
+                <a:gs pos="0">
+                  <a:schemeClr val="accent1">
+                    <a:lumMod val="5000"/>
+                    <a:lumOff val="95000"/>
+                  </a:schemeClr>
+                </a:gs>
+                <a:gs pos="74000">
+                  <a:schemeClr val="accent1">
+                    <a:lumMod val="45000"/>
+                    <a:lumOff val="55000"/>
+                  </a:schemeClr>
+                </a:gs>
+                <a:gs pos="83000">
+                  <a:schemeClr val="accent1">
+                    <a:lumMod val="45000"/>
+                    <a:lumOff val="55000"/>
+                  </a:schemeClr>
+                </a:gs>
+                <a:gs pos="100000">
+                  <a:schemeClr val="accent1">
+                    <a:lumMod val="30000"/>
+                    <a:lumOff val="70000"/>
+                  </a:schemeClr>
+                </a:gs>
+              </a:gsLst>
+              <a:lin ang="5400000" scaled="1"/>
+            </a:gradFill>
+          </a:ln>
+          <a:effectLst>
+            <a:softEdge rad="19050"/>
+          </a:effectLst>
+        </p:spPr>
+        <p:style>
+          <a:lnRef idx="2">
+            <a:schemeClr val="accent1">
+              <a:shade val="15000"/>
+            </a:schemeClr>
+          </a:lnRef>
+          <a:fillRef idx="1">
+            <a:schemeClr val="accent1"/>
+          </a:fillRef>
+          <a:effectRef idx="0">
+            <a:schemeClr val="accent1"/>
+          </a:effectRef>
+          <a:fontRef idx="minor">
+            <a:schemeClr val="lt1"/>
+          </a:fontRef>
+        </p:style>
+        <p:txBody>
+          <a:bodyPr rtlCol="0" anchor="ctr"/>
+          <a:lstStyle/>
+          <a:p>
+            <a:pPr algn="ctr"/>
+            <a:r>
+              <a:rPr lang="ko-KR" altLang="en-US" sz="800" dirty="0">
+                <a:solidFill>
+                  <a:schemeClr val="tx1"/>
+                </a:solidFill>
+              </a:rPr>
+              <a:t>최종 선택</a:t>
+            </a:r>
+          </a:p>
+        </p:txBody>
+      </p:sp>
+      <p:cxnSp>
+        <p:nvCxnSpPr>
+          <p:cNvPr id="84" name="직선 화살표 연결선 83">
+            <a:extLst>
+              <a:ext uri="{FF2B5EF4-FFF2-40B4-BE49-F238E27FC236}">
+                <a16:creationId xmlns:a16="http://schemas.microsoft.com/office/drawing/2014/main" id="{BADBD593-F14C-0FE6-82A5-BCC7AB757BEB}"/>
+              </a:ext>
+            </a:extLst>
+          </p:cNvPr>
+          <p:cNvCxnSpPr>
+            <a:cxnSpLocks/>
+            <a:stCxn id="69" idx="3"/>
+            <a:endCxn id="76" idx="1"/>
+          </p:cNvCxnSpPr>
+          <p:nvPr/>
+        </p:nvCxnSpPr>
+        <p:spPr>
+          <a:xfrm flipV="1">
+            <a:off x="9729006" y="6459030"/>
+            <a:ext cx="769790" cy="4"/>
+          </a:xfrm>
+          <a:prstGeom prst="straightConnector1">
+            <a:avLst/>
+          </a:prstGeom>
+          <a:ln w="19050">
+            <a:solidFill>
+              <a:srgbClr val="FAEBA0"/>
+            </a:solidFill>
+            <a:tailEnd type="triangle"/>
+          </a:ln>
+        </p:spPr>
+        <p:style>
+          <a:lnRef idx="1">
+            <a:schemeClr val="accent1"/>
+          </a:lnRef>
+          <a:fillRef idx="0">
+            <a:schemeClr val="accent1"/>
+          </a:fillRef>
+          <a:effectRef idx="0">
+            <a:schemeClr val="accent1"/>
+          </a:effectRef>
+          <a:fontRef idx="minor">
+            <a:schemeClr val="tx1"/>
+          </a:fontRef>
+        </p:style>
+      </p:cxnSp>
+      <p:sp>
+        <p:nvSpPr>
+          <p:cNvPr id="86" name="직사각형 85">
+            <a:extLst>
+              <a:ext uri="{FF2B5EF4-FFF2-40B4-BE49-F238E27FC236}">
+                <a16:creationId xmlns:a16="http://schemas.microsoft.com/office/drawing/2014/main" id="{D798ACD7-B299-C70A-E579-659B7593696E}"/>
+              </a:ext>
+            </a:extLst>
+          </p:cNvPr>
+          <p:cNvSpPr/>
+          <p:nvPr/>
+        </p:nvSpPr>
+        <p:spPr>
+          <a:xfrm>
+            <a:off x="7406088" y="1370845"/>
+            <a:ext cx="1262254" cy="411480"/>
+          </a:xfrm>
+          <a:prstGeom prst="rect">
+            <a:avLst/>
+          </a:prstGeom>
+          <a:noFill/>
+          <a:ln>
+            <a:noFill/>
+          </a:ln>
+        </p:spPr>
+        <p:style>
+          <a:lnRef idx="2">
+            <a:schemeClr val="accent1">
+              <a:shade val="50000"/>
+            </a:schemeClr>
+          </a:lnRef>
+          <a:fillRef idx="1">
+            <a:schemeClr val="accent1"/>
+          </a:fillRef>
+          <a:effectRef idx="0">
+            <a:schemeClr val="accent1"/>
+          </a:effectRef>
+          <a:fontRef idx="minor">
+            <a:schemeClr val="lt1"/>
+          </a:fontRef>
+        </p:style>
+        <p:txBody>
+          <a:bodyPr rtlCol="0" anchor="ctr"/>
+          <a:lstStyle/>
+          <a:p>
+            <a:pPr algn="ctr"/>
+            <a:r>
+              <a:rPr lang="ko-KR" altLang="en-US" sz="1000" dirty="0">
+                <a:solidFill>
+                  <a:schemeClr val="bg1"/>
+                </a:solidFill>
+              </a:rPr>
+              <a:t>선의 랭킹 시스템</a:t>
+            </a:r>
+          </a:p>
+        </p:txBody>
+      </p:sp>
+      <p:sp>
+        <p:nvSpPr>
+          <p:cNvPr id="88" name="직사각형 87">
+            <a:extLst>
+              <a:ext uri="{FF2B5EF4-FFF2-40B4-BE49-F238E27FC236}">
+                <a16:creationId xmlns:a16="http://schemas.microsoft.com/office/drawing/2014/main" id="{F7EE0F87-CA86-AF01-237B-0AB7CC4EA54F}"/>
+              </a:ext>
+            </a:extLst>
+          </p:cNvPr>
+          <p:cNvSpPr/>
+          <p:nvPr/>
+        </p:nvSpPr>
+        <p:spPr>
+          <a:xfrm>
+            <a:off x="324682" y="4375390"/>
+            <a:ext cx="1262254" cy="411480"/>
+          </a:xfrm>
+          <a:prstGeom prst="rect">
+            <a:avLst/>
+          </a:prstGeom>
+          <a:noFill/>
+          <a:ln>
+            <a:noFill/>
+          </a:ln>
+        </p:spPr>
+        <p:style>
+          <a:lnRef idx="2">
+            <a:schemeClr val="accent1">
+              <a:shade val="50000"/>
+            </a:schemeClr>
+          </a:lnRef>
+          <a:fillRef idx="1">
+            <a:schemeClr val="accent1"/>
+          </a:fillRef>
+          <a:effectRef idx="0">
+            <a:schemeClr val="accent1"/>
+          </a:effectRef>
+          <a:fontRef idx="minor">
+            <a:schemeClr val="lt1"/>
+          </a:fontRef>
+        </p:style>
+        <p:txBody>
+          <a:bodyPr rtlCol="0" anchor="ctr"/>
+          <a:lstStyle/>
+          <a:p>
+            <a:pPr algn="ctr"/>
+            <a:r>
+              <a:rPr lang="ko-KR" altLang="en-US" sz="1000" dirty="0">
+                <a:solidFill>
+                  <a:schemeClr val="bg1"/>
+                </a:solidFill>
+              </a:rPr>
+              <a:t>강제 징집</a:t>
+            </a:r>
+          </a:p>
+        </p:txBody>
+      </p:sp>
+      <p:sp>
+        <p:nvSpPr>
+          <p:cNvPr id="89" name="생각 풍선: 구름 모양 88">
+            <a:extLst>
+              <a:ext uri="{FF2B5EF4-FFF2-40B4-BE49-F238E27FC236}">
+                <a16:creationId xmlns:a16="http://schemas.microsoft.com/office/drawing/2014/main" id="{0EBC7D41-1B75-4405-892F-02116D9A967C}"/>
+              </a:ext>
+            </a:extLst>
+          </p:cNvPr>
+          <p:cNvSpPr/>
+          <p:nvPr/>
+        </p:nvSpPr>
+        <p:spPr>
+          <a:xfrm>
+            <a:off x="9204288" y="215365"/>
+            <a:ext cx="1262254" cy="411480"/>
+          </a:xfrm>
+          <a:prstGeom prst="cloudCallout">
+            <a:avLst/>
+          </a:prstGeom>
+          <a:solidFill>
+            <a:schemeClr val="bg1"/>
+          </a:solidFill>
+          <a:ln>
+            <a:noFill/>
+          </a:ln>
+          <a:effectLst>
+            <a:softEdge rad="25400"/>
+          </a:effectLst>
+        </p:spPr>
+        <p:style>
+          <a:lnRef idx="2">
+            <a:schemeClr val="accent1">
+              <a:shade val="50000"/>
+            </a:schemeClr>
+          </a:lnRef>
+          <a:fillRef idx="1">
+            <a:schemeClr val="accent1"/>
+          </a:fillRef>
+          <a:effectRef idx="0">
+            <a:schemeClr val="accent1"/>
+          </a:effectRef>
+          <a:fontRef idx="minor">
+            <a:schemeClr val="lt1"/>
+          </a:fontRef>
+        </p:style>
+        <p:txBody>
+          <a:bodyPr rtlCol="0" anchor="ctr"/>
+          <a:lstStyle/>
+          <a:p>
+            <a:pPr algn="ctr"/>
+            <a:r>
+              <a:rPr lang="ko-KR" altLang="en-US" sz="1000" dirty="0">
+                <a:solidFill>
+                  <a:schemeClr val="tx1"/>
+                </a:solidFill>
+              </a:rPr>
+              <a:t>강제 징집</a:t>
+            </a:r>
+          </a:p>
+        </p:txBody>
+      </p:sp>
+      <p:sp>
+        <p:nvSpPr>
+          <p:cNvPr id="91" name="직사각형 90">
+            <a:extLst>
+              <a:ext uri="{FF2B5EF4-FFF2-40B4-BE49-F238E27FC236}">
+                <a16:creationId xmlns:a16="http://schemas.microsoft.com/office/drawing/2014/main" id="{0BACF5E8-B18E-E4F1-31F5-D15622A47334}"/>
+              </a:ext>
+            </a:extLst>
+          </p:cNvPr>
+          <p:cNvSpPr/>
+          <p:nvPr/>
+        </p:nvSpPr>
+        <p:spPr>
+          <a:xfrm>
+            <a:off x="1808954" y="4375390"/>
+            <a:ext cx="1262254" cy="411480"/>
+          </a:xfrm>
+          <a:prstGeom prst="rect">
+            <a:avLst/>
+          </a:prstGeom>
+          <a:noFill/>
+          <a:ln>
+            <a:noFill/>
+          </a:ln>
+        </p:spPr>
+        <p:style>
+          <a:lnRef idx="2">
+            <a:schemeClr val="accent1">
+              <a:shade val="50000"/>
+            </a:schemeClr>
+          </a:lnRef>
+          <a:fillRef idx="1">
+            <a:schemeClr val="accent1"/>
+          </a:fillRef>
+          <a:effectRef idx="0">
+            <a:schemeClr val="accent1"/>
+          </a:effectRef>
+          <a:fontRef idx="minor">
+            <a:schemeClr val="lt1"/>
+          </a:fontRef>
+        </p:style>
+        <p:txBody>
+          <a:bodyPr rtlCol="0" anchor="ctr"/>
+          <a:lstStyle/>
+          <a:p>
+            <a:pPr algn="ctr"/>
+            <a:r>
+              <a:rPr lang="ko-KR" altLang="en-US" sz="1000" dirty="0">
+                <a:solidFill>
+                  <a:schemeClr val="bg1"/>
+                </a:solidFill>
+              </a:rPr>
+              <a:t>구조 실패</a:t>
+            </a:r>
+          </a:p>
+        </p:txBody>
+      </p:sp>
+      <p:sp>
+        <p:nvSpPr>
+          <p:cNvPr id="92" name="직사각형 91">
+            <a:extLst>
+              <a:ext uri="{FF2B5EF4-FFF2-40B4-BE49-F238E27FC236}">
+                <a16:creationId xmlns:a16="http://schemas.microsoft.com/office/drawing/2014/main" id="{F1D86EC7-0B5D-E426-4A1E-96C0AD6369DC}"/>
+              </a:ext>
+            </a:extLst>
+          </p:cNvPr>
+          <p:cNvSpPr/>
+          <p:nvPr/>
+        </p:nvSpPr>
+        <p:spPr>
+          <a:xfrm>
+            <a:off x="6072360" y="1276838"/>
+            <a:ext cx="1262254" cy="411480"/>
+          </a:xfrm>
+          <a:prstGeom prst="rect">
+            <a:avLst/>
+          </a:prstGeom>
+          <a:noFill/>
+          <a:ln>
+            <a:noFill/>
+          </a:ln>
+        </p:spPr>
+        <p:style>
+          <a:lnRef idx="2">
+            <a:schemeClr val="accent1">
+              <a:shade val="50000"/>
+            </a:schemeClr>
+          </a:lnRef>
+          <a:fillRef idx="1">
+            <a:schemeClr val="accent1"/>
+          </a:fillRef>
+          <a:effectRef idx="0">
+            <a:schemeClr val="accent1"/>
+          </a:effectRef>
+          <a:fontRef idx="minor">
+            <a:schemeClr val="lt1"/>
+          </a:fontRef>
+        </p:style>
+        <p:txBody>
+          <a:bodyPr rtlCol="0" anchor="ctr"/>
+          <a:lstStyle/>
+          <a:p>
+            <a:pPr algn="ctr"/>
+            <a:r>
+              <a:rPr lang="ko-KR" altLang="en-US" sz="1000" dirty="0">
+                <a:solidFill>
+                  <a:schemeClr val="bg1"/>
+                </a:solidFill>
+              </a:rPr>
+              <a:t>선의 랭킹 시스템</a:t>
+            </a:r>
+          </a:p>
+        </p:txBody>
+      </p:sp>
+      <p:sp>
+        <p:nvSpPr>
+          <p:cNvPr id="93" name="직사각형 92">
+            <a:extLst>
+              <a:ext uri="{FF2B5EF4-FFF2-40B4-BE49-F238E27FC236}">
+                <a16:creationId xmlns:a16="http://schemas.microsoft.com/office/drawing/2014/main" id="{C7BEDFB0-C6B6-34D0-27F5-C9C042F80467}"/>
+              </a:ext>
+            </a:extLst>
+          </p:cNvPr>
+          <p:cNvSpPr/>
+          <p:nvPr/>
+        </p:nvSpPr>
+        <p:spPr>
+          <a:xfrm>
+            <a:off x="5015819" y="205740"/>
+            <a:ext cx="1262254" cy="411480"/>
+          </a:xfrm>
+          <a:prstGeom prst="rect">
+            <a:avLst/>
+          </a:prstGeom>
+          <a:noFill/>
+          <a:ln>
+            <a:noFill/>
+          </a:ln>
+        </p:spPr>
+        <p:style>
+          <a:lnRef idx="2">
+            <a:schemeClr val="accent1">
+              <a:shade val="50000"/>
+            </a:schemeClr>
+          </a:lnRef>
+          <a:fillRef idx="1">
+            <a:schemeClr val="accent1"/>
+          </a:fillRef>
+          <a:effectRef idx="0">
+            <a:schemeClr val="accent1"/>
+          </a:effectRef>
+          <a:fontRef idx="minor">
+            <a:schemeClr val="lt1"/>
+          </a:fontRef>
+        </p:style>
+        <p:txBody>
+          <a:bodyPr rtlCol="0" anchor="ctr"/>
+          <a:lstStyle/>
+          <a:p>
+            <a:pPr algn="ctr"/>
+            <a:r>
+              <a:rPr lang="ko-KR" altLang="en-US" sz="1000" dirty="0">
+                <a:solidFill>
+                  <a:schemeClr val="bg1"/>
+                </a:solidFill>
+              </a:rPr>
+              <a:t>괴물의 정체</a:t>
+            </a:r>
+          </a:p>
+        </p:txBody>
+      </p:sp>
+      <p:sp>
+        <p:nvSpPr>
+          <p:cNvPr id="95" name="직사각형 94">
+            <a:extLst>
+              <a:ext uri="{FF2B5EF4-FFF2-40B4-BE49-F238E27FC236}">
+                <a16:creationId xmlns:a16="http://schemas.microsoft.com/office/drawing/2014/main" id="{7CEE8659-536F-341A-1E79-4A146B933C78}"/>
+              </a:ext>
+            </a:extLst>
+          </p:cNvPr>
+          <p:cNvSpPr/>
+          <p:nvPr/>
+        </p:nvSpPr>
+        <p:spPr>
+          <a:xfrm>
+            <a:off x="57063" y="3172051"/>
+            <a:ext cx="1262254" cy="411480"/>
+          </a:xfrm>
+          <a:prstGeom prst="rect">
+            <a:avLst/>
+          </a:prstGeom>
+          <a:noFill/>
+          <a:ln>
+            <a:noFill/>
+          </a:ln>
+        </p:spPr>
+        <p:style>
+          <a:lnRef idx="2">
+            <a:schemeClr val="accent1">
+              <a:shade val="50000"/>
+            </a:schemeClr>
+          </a:lnRef>
+          <a:fillRef idx="1">
+            <a:schemeClr val="accent1"/>
+          </a:fillRef>
+          <a:effectRef idx="0">
+            <a:schemeClr val="accent1"/>
+          </a:effectRef>
+          <a:fontRef idx="minor">
+            <a:schemeClr val="lt1"/>
+          </a:fontRef>
+        </p:style>
+        <p:txBody>
+          <a:bodyPr rtlCol="0" anchor="ctr"/>
+          <a:lstStyle/>
+          <a:p>
+            <a:pPr algn="ctr"/>
+            <a:r>
+              <a:rPr lang="ko-KR" altLang="en-US" sz="1000" dirty="0">
+                <a:solidFill>
+                  <a:schemeClr val="bg1"/>
+                </a:solidFill>
+              </a:rPr>
+              <a:t>육체 저장소 발견</a:t>
+            </a:r>
+          </a:p>
+        </p:txBody>
+      </p:sp>
+      <p:sp>
+        <p:nvSpPr>
+          <p:cNvPr id="96" name="직사각형 95">
+            <a:extLst>
+              <a:ext uri="{FF2B5EF4-FFF2-40B4-BE49-F238E27FC236}">
+                <a16:creationId xmlns:a16="http://schemas.microsoft.com/office/drawing/2014/main" id="{95FB94F2-6C50-AA50-740E-7841E9A0DF03}"/>
+              </a:ext>
+            </a:extLst>
+          </p:cNvPr>
+          <p:cNvSpPr/>
+          <p:nvPr/>
+        </p:nvSpPr>
+        <p:spPr>
+          <a:xfrm>
+            <a:off x="-93566" y="1397475"/>
+            <a:ext cx="1262254" cy="411480"/>
+          </a:xfrm>
+          <a:prstGeom prst="rect">
+            <a:avLst/>
+          </a:prstGeom>
+          <a:noFill/>
+          <a:ln>
+            <a:noFill/>
+          </a:ln>
+        </p:spPr>
+        <p:style>
+          <a:lnRef idx="2">
+            <a:schemeClr val="accent1">
+              <a:shade val="50000"/>
+            </a:schemeClr>
+          </a:lnRef>
+          <a:fillRef idx="1">
+            <a:schemeClr val="accent1"/>
+          </a:fillRef>
+          <a:effectRef idx="0">
+            <a:schemeClr val="accent1"/>
+          </a:effectRef>
+          <a:fontRef idx="minor">
+            <a:schemeClr val="lt1"/>
+          </a:fontRef>
+        </p:style>
+        <p:txBody>
+          <a:bodyPr rtlCol="0" anchor="ctr"/>
+          <a:lstStyle/>
+          <a:p>
+            <a:pPr algn="ctr"/>
+            <a:r>
+              <a:rPr lang="ko-KR" altLang="en-US" sz="1000" dirty="0">
+                <a:solidFill>
+                  <a:schemeClr val="bg1"/>
+                </a:solidFill>
+              </a:rPr>
+              <a:t>최종 선택</a:t>
+            </a:r>
+          </a:p>
+        </p:txBody>
+      </p:sp>
+      <p:cxnSp>
+        <p:nvCxnSpPr>
+          <p:cNvPr id="124" name="연결선: 꺾임 123">
+            <a:extLst>
+              <a:ext uri="{FF2B5EF4-FFF2-40B4-BE49-F238E27FC236}">
+                <a16:creationId xmlns:a16="http://schemas.microsoft.com/office/drawing/2014/main" id="{BC660F1B-9D1B-ACB4-23EB-18B00A29F9B9}"/>
+              </a:ext>
+            </a:extLst>
+          </p:cNvPr>
+          <p:cNvCxnSpPr>
+            <a:cxnSpLocks/>
+          </p:cNvCxnSpPr>
+          <p:nvPr/>
+        </p:nvCxnSpPr>
+        <p:spPr>
+          <a:xfrm rot="16200000" flipH="1">
+            <a:off x="4804412" y="6039839"/>
+            <a:ext cx="5428" cy="1161490"/>
+          </a:xfrm>
+          <a:prstGeom prst="bentConnector3">
+            <a:avLst>
+              <a:gd name="adj1" fmla="val 2219510"/>
+            </a:avLst>
+          </a:prstGeom>
+          <a:ln w="19050">
+            <a:solidFill>
+              <a:srgbClr val="FAEBA0"/>
+            </a:solidFill>
+            <a:tailEnd type="triangle"/>
+          </a:ln>
+        </p:spPr>
+        <p:style>
+          <a:lnRef idx="1">
+            <a:schemeClr val="accent1"/>
+          </a:lnRef>
+          <a:fillRef idx="0">
+            <a:schemeClr val="accent1"/>
+          </a:fillRef>
+          <a:effectRef idx="0">
+            <a:schemeClr val="accent1"/>
+          </a:effectRef>
+          <a:fontRef idx="minor">
+            <a:schemeClr val="tx1"/>
+          </a:fontRef>
+        </p:style>
+      </p:cxnSp>
+      <p:cxnSp>
+        <p:nvCxnSpPr>
+          <p:cNvPr id="127" name="연결선: 꺾임 126">
+            <a:extLst>
+              <a:ext uri="{FF2B5EF4-FFF2-40B4-BE49-F238E27FC236}">
+                <a16:creationId xmlns:a16="http://schemas.microsoft.com/office/drawing/2014/main" id="{55455B5E-7F35-3945-07EC-113BCA670A85}"/>
+              </a:ext>
+            </a:extLst>
+          </p:cNvPr>
+          <p:cNvCxnSpPr>
+            <a:cxnSpLocks/>
+          </p:cNvCxnSpPr>
+          <p:nvPr/>
+        </p:nvCxnSpPr>
+        <p:spPr>
+          <a:xfrm rot="16200000" flipH="1">
+            <a:off x="7251739" y="6037349"/>
+            <a:ext cx="5428" cy="1161490"/>
+          </a:xfrm>
+          <a:prstGeom prst="bentConnector3">
+            <a:avLst>
+              <a:gd name="adj1" fmla="val 2219510"/>
+            </a:avLst>
+          </a:prstGeom>
+          <a:ln w="19050">
+            <a:solidFill>
+              <a:srgbClr val="FAEBA0"/>
+            </a:solidFill>
+            <a:tailEnd type="triangle"/>
+          </a:ln>
+        </p:spPr>
+        <p:style>
+          <a:lnRef idx="1">
+            <a:schemeClr val="accent1"/>
+          </a:lnRef>
+          <a:fillRef idx="0">
+            <a:schemeClr val="accent1"/>
+          </a:fillRef>
+          <a:effectRef idx="0">
+            <a:schemeClr val="accent1"/>
+          </a:effectRef>
+          <a:fontRef idx="minor">
+            <a:schemeClr val="tx1"/>
+          </a:fontRef>
+        </p:style>
+      </p:cxnSp>
     </p:spTree>
     <p:extLst>
       <p:ext uri="{BB962C8B-B14F-4D97-AF65-F5344CB8AC3E}">
         <p14:creationId xmlns:p14="http://schemas.microsoft.com/office/powerpoint/2010/main" val="4091973683"/>
-      </p:ext>
-    </p:extLst>
-  </p:cSld>
-  <p:clrMapOvr>
-    <a:masterClrMapping/>
-  </p:clrMapOvr>
-</p:sld>
-</file>
-
-<file path=ppt/slides/slide4.xml><?xml version="1.0" encoding="utf-8"?>
-<p:sld xmlns:a="http://schemas.openxmlformats.org/drawingml/2006/main" xmlns:r="http://schemas.openxmlformats.org/officeDocument/2006/relationships" xmlns:p="http://schemas.openxmlformats.org/presentationml/2006/main">
-  <p:cSld>
-    <p:spTree>
-      <p:nvGrpSpPr>
-        <p:cNvPr id="1" name=""/>
-        <p:cNvGrpSpPr/>
-        <p:nvPr/>
-      </p:nvGrpSpPr>
-      <p:grpSpPr>
-        <a:xfrm>
-          <a:off x="0" y="0"/>
-          <a:ext cx="0" cy="0"/>
-          <a:chOff x="0" y="0"/>
-          <a:chExt cx="0" cy="0"/>
-        </a:xfrm>
-      </p:grpSpPr>
-      <p:sp>
-        <p:nvSpPr>
-          <p:cNvPr id="2" name="제목 1">
-            <a:extLst>
-              <a:ext uri="{FF2B5EF4-FFF2-40B4-BE49-F238E27FC236}">
-                <a16:creationId xmlns:a16="http://schemas.microsoft.com/office/drawing/2014/main" id="{F27D6BFB-FF7E-D68E-477B-A9B8A1E21022}"/>
-              </a:ext>
-            </a:extLst>
-          </p:cNvPr>
-          <p:cNvSpPr>
-            <a:spLocks noGrp="1"/>
-          </p:cNvSpPr>
-          <p:nvPr>
-            <p:ph type="title"/>
-          </p:nvPr>
-        </p:nvSpPr>
-        <p:spPr/>
-        <p:txBody>
-          <a:bodyPr/>
-          <a:lstStyle/>
-          <a:p>
-            <a:endParaRPr lang="ko-KR" altLang="en-US"/>
-          </a:p>
-        </p:txBody>
-      </p:sp>
-      <p:sp>
-        <p:nvSpPr>
-          <p:cNvPr id="3" name="내용 개체 틀 2">
-            <a:extLst>
-              <a:ext uri="{FF2B5EF4-FFF2-40B4-BE49-F238E27FC236}">
-                <a16:creationId xmlns:a16="http://schemas.microsoft.com/office/drawing/2014/main" id="{0E228903-57E8-35EB-9540-22A817D1F052}"/>
-              </a:ext>
-            </a:extLst>
-          </p:cNvPr>
-          <p:cNvSpPr>
-            <a:spLocks noGrp="1"/>
-          </p:cNvSpPr>
-          <p:nvPr>
-            <p:ph idx="1"/>
-          </p:nvPr>
-        </p:nvSpPr>
-        <p:spPr/>
-        <p:txBody>
-          <a:bodyPr/>
-          <a:lstStyle/>
-          <a:p>
-            <a:endParaRPr lang="ko-KR" altLang="en-US"/>
-          </a:p>
-        </p:txBody>
-      </p:sp>
-      <p:pic>
-        <p:nvPicPr>
-          <p:cNvPr id="5" name="그림 4">
-            <a:extLst>
-              <a:ext uri="{FF2B5EF4-FFF2-40B4-BE49-F238E27FC236}">
-                <a16:creationId xmlns:a16="http://schemas.microsoft.com/office/drawing/2014/main" id="{9BB5BBA8-1E41-8F9A-A1F1-A6F0D5787EC6}"/>
-              </a:ext>
-            </a:extLst>
-          </p:cNvPr>
-          <p:cNvPicPr>
-            <a:picLocks noChangeAspect="1"/>
-          </p:cNvPicPr>
-          <p:nvPr/>
-        </p:nvPicPr>
-        <p:blipFill>
-          <a:blip r:embed="rId2"/>
-          <a:stretch>
-            <a:fillRect/>
-          </a:stretch>
-        </p:blipFill>
-        <p:spPr>
-          <a:xfrm>
-            <a:off x="3185706" y="475838"/>
-            <a:ext cx="5820587" cy="5906324"/>
-          </a:xfrm>
-          <a:prstGeom prst="rect">
-            <a:avLst/>
-          </a:prstGeom>
-        </p:spPr>
-      </p:pic>
-    </p:spTree>
-    <p:extLst>
-      <p:ext uri="{BB962C8B-B14F-4D97-AF65-F5344CB8AC3E}">
-        <p14:creationId xmlns:p14="http://schemas.microsoft.com/office/powerpoint/2010/main" val="3102480730"/>
-      </p:ext>
-    </p:extLst>
-  </p:cSld>
-  <p:clrMapOvr>
-    <a:masterClrMapping/>
-  </p:clrMapOvr>
-</p:sld>
-</file>
-
-<file path=ppt/slides/slide5.xml><?xml version="1.0" encoding="utf-8"?>
-<p:sld xmlns:a="http://schemas.openxmlformats.org/drawingml/2006/main" xmlns:r="http://schemas.openxmlformats.org/officeDocument/2006/relationships" xmlns:p="http://schemas.openxmlformats.org/presentationml/2006/main">
-  <p:cSld>
-    <p:spTree>
-      <p:nvGrpSpPr>
-        <p:cNvPr id="1" name=""/>
-        <p:cNvGrpSpPr/>
-        <p:nvPr/>
-      </p:nvGrpSpPr>
-      <p:grpSpPr>
-        <a:xfrm>
-          <a:off x="0" y="0"/>
-          <a:ext cx="0" cy="0"/>
-          <a:chOff x="0" y="0"/>
-          <a:chExt cx="0" cy="0"/>
-        </a:xfrm>
-      </p:grpSpPr>
-      <p:sp>
-        <p:nvSpPr>
-          <p:cNvPr id="2" name="제목 1">
-            <a:extLst>
-              <a:ext uri="{FF2B5EF4-FFF2-40B4-BE49-F238E27FC236}">
-                <a16:creationId xmlns:a16="http://schemas.microsoft.com/office/drawing/2014/main" id="{F90E05EB-1C0D-4603-512B-0EABC944A851}"/>
-              </a:ext>
-            </a:extLst>
-          </p:cNvPr>
-          <p:cNvSpPr>
-            <a:spLocks noGrp="1"/>
-          </p:cNvSpPr>
-          <p:nvPr>
-            <p:ph type="title"/>
-          </p:nvPr>
-        </p:nvSpPr>
-        <p:spPr/>
-        <p:txBody>
-          <a:bodyPr/>
-          <a:lstStyle/>
-          <a:p>
-            <a:endParaRPr lang="ko-KR" altLang="en-US"/>
-          </a:p>
-        </p:txBody>
-      </p:sp>
-      <p:sp>
-        <p:nvSpPr>
-          <p:cNvPr id="3" name="내용 개체 틀 2">
-            <a:extLst>
-              <a:ext uri="{FF2B5EF4-FFF2-40B4-BE49-F238E27FC236}">
-                <a16:creationId xmlns:a16="http://schemas.microsoft.com/office/drawing/2014/main" id="{EB118E4D-9F69-7B5C-2FC5-EC3067C7968D}"/>
-              </a:ext>
-            </a:extLst>
-          </p:cNvPr>
-          <p:cNvSpPr>
-            <a:spLocks noGrp="1"/>
-          </p:cNvSpPr>
-          <p:nvPr>
-            <p:ph idx="1"/>
-          </p:nvPr>
-        </p:nvSpPr>
-        <p:spPr/>
-        <p:txBody>
-          <a:bodyPr/>
-          <a:lstStyle/>
-          <a:p>
-            <a:endParaRPr lang="ko-KR" altLang="en-US"/>
-          </a:p>
-        </p:txBody>
-      </p:sp>
-      <p:pic>
-        <p:nvPicPr>
-          <p:cNvPr id="5" name="그림 4">
-            <a:extLst>
-              <a:ext uri="{FF2B5EF4-FFF2-40B4-BE49-F238E27FC236}">
-                <a16:creationId xmlns:a16="http://schemas.microsoft.com/office/drawing/2014/main" id="{72F39C75-ACE8-C326-62EB-678B363BC616}"/>
-              </a:ext>
-            </a:extLst>
-          </p:cNvPr>
-          <p:cNvPicPr>
-            <a:picLocks noChangeAspect="1"/>
-          </p:cNvPicPr>
-          <p:nvPr/>
-        </p:nvPicPr>
-        <p:blipFill>
-          <a:blip r:embed="rId2"/>
-          <a:stretch>
-            <a:fillRect/>
-          </a:stretch>
-        </p:blipFill>
-        <p:spPr>
-          <a:xfrm>
-            <a:off x="3266680" y="699706"/>
-            <a:ext cx="5658640" cy="5458587"/>
-          </a:xfrm>
-          <a:prstGeom prst="rect">
-            <a:avLst/>
-          </a:prstGeom>
-        </p:spPr>
-      </p:pic>
-    </p:spTree>
-    <p:extLst>
-      <p:ext uri="{BB962C8B-B14F-4D97-AF65-F5344CB8AC3E}">
-        <p14:creationId xmlns:p14="http://schemas.microsoft.com/office/powerpoint/2010/main" val="1706705401"/>
-      </p:ext>
-    </p:extLst>
-  </p:cSld>
-  <p:clrMapOvr>
-    <a:masterClrMapping/>
-  </p:clrMapOvr>
-</p:sld>
-</file>
-
-<file path=ppt/slides/slide6.xml><?xml version="1.0" encoding="utf-8"?>
-<p:sld xmlns:a="http://schemas.openxmlformats.org/drawingml/2006/main" xmlns:r="http://schemas.openxmlformats.org/officeDocument/2006/relationships" xmlns:p="http://schemas.openxmlformats.org/presentationml/2006/main">
-  <p:cSld>
-    <p:spTree>
-      <p:nvGrpSpPr>
-        <p:cNvPr id="1" name=""/>
-        <p:cNvGrpSpPr/>
-        <p:nvPr/>
-      </p:nvGrpSpPr>
-      <p:grpSpPr>
-        <a:xfrm>
-          <a:off x="0" y="0"/>
-          <a:ext cx="0" cy="0"/>
-          <a:chOff x="0" y="0"/>
-          <a:chExt cx="0" cy="0"/>
-        </a:xfrm>
-      </p:grpSpPr>
-      <p:sp>
-        <p:nvSpPr>
-          <p:cNvPr id="2" name="제목 1">
-            <a:extLst>
-              <a:ext uri="{FF2B5EF4-FFF2-40B4-BE49-F238E27FC236}">
-                <a16:creationId xmlns:a16="http://schemas.microsoft.com/office/drawing/2014/main" id="{1B4042C3-FC63-5023-7020-C35CFF92DA54}"/>
-              </a:ext>
-            </a:extLst>
-          </p:cNvPr>
-          <p:cNvSpPr>
-            <a:spLocks noGrp="1"/>
-          </p:cNvSpPr>
-          <p:nvPr>
-            <p:ph type="title"/>
-          </p:nvPr>
-        </p:nvSpPr>
-        <p:spPr/>
-        <p:txBody>
-          <a:bodyPr/>
-          <a:lstStyle/>
-          <a:p>
-            <a:endParaRPr lang="ko-KR" altLang="en-US"/>
-          </a:p>
-        </p:txBody>
-      </p:sp>
-      <p:sp>
-        <p:nvSpPr>
-          <p:cNvPr id="3" name="내용 개체 틀 2">
-            <a:extLst>
-              <a:ext uri="{FF2B5EF4-FFF2-40B4-BE49-F238E27FC236}">
-                <a16:creationId xmlns:a16="http://schemas.microsoft.com/office/drawing/2014/main" id="{05D71D12-BB1B-730D-2EAE-4109591AC8D6}"/>
-              </a:ext>
-            </a:extLst>
-          </p:cNvPr>
-          <p:cNvSpPr>
-            <a:spLocks noGrp="1"/>
-          </p:cNvSpPr>
-          <p:nvPr>
-            <p:ph idx="1"/>
-          </p:nvPr>
-        </p:nvSpPr>
-        <p:spPr/>
-        <p:txBody>
-          <a:bodyPr/>
-          <a:lstStyle/>
-          <a:p>
-            <a:endParaRPr lang="ko-KR" altLang="en-US"/>
-          </a:p>
-        </p:txBody>
-      </p:sp>
-      <p:pic>
-        <p:nvPicPr>
-          <p:cNvPr id="5" name="그림 4">
-            <a:extLst>
-              <a:ext uri="{FF2B5EF4-FFF2-40B4-BE49-F238E27FC236}">
-                <a16:creationId xmlns:a16="http://schemas.microsoft.com/office/drawing/2014/main" id="{72FEF2FE-BCAC-46EA-34FB-C2003C6A8194}"/>
-              </a:ext>
-            </a:extLst>
-          </p:cNvPr>
-          <p:cNvPicPr>
-            <a:picLocks noChangeAspect="1"/>
-          </p:cNvPicPr>
-          <p:nvPr/>
-        </p:nvPicPr>
-        <p:blipFill>
-          <a:blip r:embed="rId2"/>
-          <a:stretch>
-            <a:fillRect/>
-          </a:stretch>
-        </p:blipFill>
-        <p:spPr>
-          <a:xfrm>
-            <a:off x="3228575" y="2562104"/>
-            <a:ext cx="5734850" cy="1733792"/>
-          </a:xfrm>
-          <a:prstGeom prst="rect">
-            <a:avLst/>
-          </a:prstGeom>
-        </p:spPr>
-      </p:pic>
-    </p:spTree>
-    <p:extLst>
-      <p:ext uri="{BB962C8B-B14F-4D97-AF65-F5344CB8AC3E}">
-        <p14:creationId xmlns:p14="http://schemas.microsoft.com/office/powerpoint/2010/main" val="1028470326"/>
       </p:ext>
     </p:extLst>
   </p:cSld>
@@ -7031,4 +9299,299 @@
     </a:ext>
   </a:extLst>
 </a:theme>
+</file>
+
+<file path=ppt/theme/theme2.xml><?xml version="1.0" encoding="utf-8"?>
+<a:theme xmlns:a="http://schemas.openxmlformats.org/drawingml/2006/main" name="Office 테마">
+  <a:themeElements>
+    <a:clrScheme name="Office">
+      <a:dk1>
+        <a:sysClr val="windowText" lastClr="000000"/>
+      </a:dk1>
+      <a:lt1>
+        <a:sysClr val="window" lastClr="FFFFFF"/>
+      </a:lt1>
+      <a:dk2>
+        <a:srgbClr val="44546A"/>
+      </a:dk2>
+      <a:lt2>
+        <a:srgbClr val="E7E6E6"/>
+      </a:lt2>
+      <a:accent1>
+        <a:srgbClr val="4472C4"/>
+      </a:accent1>
+      <a:accent2>
+        <a:srgbClr val="ED7D31"/>
+      </a:accent2>
+      <a:accent3>
+        <a:srgbClr val="A5A5A5"/>
+      </a:accent3>
+      <a:accent4>
+        <a:srgbClr val="FFC000"/>
+      </a:accent4>
+      <a:accent5>
+        <a:srgbClr val="5B9BD5"/>
+      </a:accent5>
+      <a:accent6>
+        <a:srgbClr val="70AD47"/>
+      </a:accent6>
+      <a:hlink>
+        <a:srgbClr val="0563C1"/>
+      </a:hlink>
+      <a:folHlink>
+        <a:srgbClr val="954F72"/>
+      </a:folHlink>
+    </a:clrScheme>
+    <a:fontScheme name="Office">
+      <a:majorFont>
+        <a:latin typeface="맑은 고딕" panose="020F0302020204030204"/>
+        <a:ea typeface=""/>
+        <a:cs typeface=""/>
+        <a:font script="Jpan" typeface="游ゴシック Light"/>
+        <a:font script="Hang" typeface="맑은 고딕"/>
+        <a:font script="Hans" typeface="等线 Light"/>
+        <a:font script="Hant" typeface="新細明體"/>
+        <a:font script="Arab" typeface="Times New Roman"/>
+        <a:font script="Hebr" typeface="Times New Roman"/>
+        <a:font script="Thai" typeface="Angsana New"/>
+        <a:font script="Ethi" typeface="Nyala"/>
+        <a:font script="Beng" typeface="Vrinda"/>
+        <a:font script="Gujr" typeface="Shruti"/>
+        <a:font script="Khmr" typeface="MoolBoran"/>
+        <a:font script="Knda" typeface="Tunga"/>
+        <a:font script="Guru" typeface="Raavi"/>
+        <a:font script="Cans" typeface="Euphemia"/>
+        <a:font script="Cher" typeface="Plantagenet Cherokee"/>
+        <a:font script="Yiii" typeface="Microsoft Yi Baiti"/>
+        <a:font script="Tibt" typeface="Microsoft Himalaya"/>
+        <a:font script="Thaa" typeface="MV Boli"/>
+        <a:font script="Deva" typeface="Mangal"/>
+        <a:font script="Telu" typeface="Gautami"/>
+        <a:font script="Taml" typeface="Latha"/>
+        <a:font script="Syrc" typeface="Estrangelo Edessa"/>
+        <a:font script="Orya" typeface="Kalinga"/>
+        <a:font script="Mlym" typeface="Kartika"/>
+        <a:font script="Laoo" typeface="DokChampa"/>
+        <a:font script="Sinh" typeface="Iskoola Pota"/>
+        <a:font script="Mong" typeface="Mongolian Baiti"/>
+        <a:font script="Viet" typeface="Times New Roman"/>
+        <a:font script="Uigh" typeface="Microsoft Uighur"/>
+        <a:font script="Geor" typeface="Sylfaen"/>
+        <a:font script="Armn" typeface="Arial"/>
+        <a:font script="Bugi" typeface="Leelawadee UI"/>
+        <a:font script="Bopo" typeface="Microsoft JhengHei"/>
+        <a:font script="Java" typeface="Javanese Text"/>
+        <a:font script="Lisu" typeface="Segoe UI"/>
+        <a:font script="Mymr" typeface="Myanmar Text"/>
+        <a:font script="Nkoo" typeface="Ebrima"/>
+        <a:font script="Olck" typeface="Nirmala UI"/>
+        <a:font script="Osma" typeface="Ebrima"/>
+        <a:font script="Phag" typeface="Phagspa"/>
+        <a:font script="Syrn" typeface="Estrangelo Edessa"/>
+        <a:font script="Syrj" typeface="Estrangelo Edessa"/>
+        <a:font script="Syre" typeface="Estrangelo Edessa"/>
+        <a:font script="Sora" typeface="Nirmala UI"/>
+        <a:font script="Tale" typeface="Microsoft Tai Le"/>
+        <a:font script="Talu" typeface="Microsoft New Tai Lue"/>
+        <a:font script="Tfng" typeface="Ebrima"/>
+      </a:majorFont>
+      <a:minorFont>
+        <a:latin typeface="맑은 고딕" panose="020F0502020204030204"/>
+        <a:ea typeface=""/>
+        <a:cs typeface=""/>
+        <a:font script="Jpan" typeface="游ゴシック"/>
+        <a:font script="Hang" typeface="맑은 고딕"/>
+        <a:font script="Hans" typeface="等线"/>
+        <a:font script="Hant" typeface="新細明體"/>
+        <a:font script="Arab" typeface="Arial"/>
+        <a:font script="Hebr" typeface="Arial"/>
+        <a:font script="Thai" typeface="Cordia New"/>
+        <a:font script="Ethi" typeface="Nyala"/>
+        <a:font script="Beng" typeface="Vrinda"/>
+        <a:font script="Gujr" typeface="Shruti"/>
+        <a:font script="Khmr" typeface="DaunPenh"/>
+        <a:font script="Knda" typeface="Tunga"/>
+        <a:font script="Guru" typeface="Raavi"/>
+        <a:font script="Cans" typeface="Euphemia"/>
+        <a:font script="Cher" typeface="Plantagenet Cherokee"/>
+        <a:font script="Yiii" typeface="Microsoft Yi Baiti"/>
+        <a:font script="Tibt" typeface="Microsoft Himalaya"/>
+        <a:font script="Thaa" typeface="MV Boli"/>
+        <a:font script="Deva" typeface="Mangal"/>
+        <a:font script="Telu" typeface="Gautami"/>
+        <a:font script="Taml" typeface="Latha"/>
+        <a:font script="Syrc" typeface="Estrangelo Edessa"/>
+        <a:font script="Orya" typeface="Kalinga"/>
+        <a:font script="Mlym" typeface="Kartika"/>
+        <a:font script="Laoo" typeface="DokChampa"/>
+        <a:font script="Sinh" typeface="Iskoola Pota"/>
+        <a:font script="Mong" typeface="Mongolian Baiti"/>
+        <a:font script="Viet" typeface="Arial"/>
+        <a:font script="Uigh" typeface="Microsoft Uighur"/>
+        <a:font script="Geor" typeface="Sylfaen"/>
+        <a:font script="Armn" typeface="Arial"/>
+        <a:font script="Bugi" typeface="Leelawadee UI"/>
+        <a:font script="Bopo" typeface="Microsoft JhengHei"/>
+        <a:font script="Java" typeface="Javanese Text"/>
+        <a:font script="Lisu" typeface="Segoe UI"/>
+        <a:font script="Mymr" typeface="Myanmar Text"/>
+        <a:font script="Nkoo" typeface="Ebrima"/>
+        <a:font script="Olck" typeface="Nirmala UI"/>
+        <a:font script="Osma" typeface="Ebrima"/>
+        <a:font script="Phag" typeface="Phagspa"/>
+        <a:font script="Syrn" typeface="Estrangelo Edessa"/>
+        <a:font script="Syrj" typeface="Estrangelo Edessa"/>
+        <a:font script="Syre" typeface="Estrangelo Edessa"/>
+        <a:font script="Sora" typeface="Nirmala UI"/>
+        <a:font script="Tale" typeface="Microsoft Tai Le"/>
+        <a:font script="Talu" typeface="Microsoft New Tai Lue"/>
+        <a:font script="Tfng" typeface="Ebrima"/>
+      </a:minorFont>
+    </a:fontScheme>
+    <a:fmtScheme name="Office">
+      <a:fillStyleLst>
+        <a:solidFill>
+          <a:schemeClr val="phClr"/>
+        </a:solidFill>
+        <a:gradFill rotWithShape="1">
+          <a:gsLst>
+            <a:gs pos="0">
+              <a:schemeClr val="phClr">
+                <a:lumMod val="110000"/>
+                <a:satMod val="105000"/>
+                <a:tint val="67000"/>
+              </a:schemeClr>
+            </a:gs>
+            <a:gs pos="50000">
+              <a:schemeClr val="phClr">
+                <a:lumMod val="105000"/>
+                <a:satMod val="103000"/>
+                <a:tint val="73000"/>
+              </a:schemeClr>
+            </a:gs>
+            <a:gs pos="100000">
+              <a:schemeClr val="phClr">
+                <a:lumMod val="105000"/>
+                <a:satMod val="109000"/>
+                <a:tint val="81000"/>
+              </a:schemeClr>
+            </a:gs>
+          </a:gsLst>
+          <a:lin ang="5400000" scaled="0"/>
+        </a:gradFill>
+        <a:gradFill rotWithShape="1">
+          <a:gsLst>
+            <a:gs pos="0">
+              <a:schemeClr val="phClr">
+                <a:satMod val="103000"/>
+                <a:lumMod val="102000"/>
+                <a:tint val="94000"/>
+              </a:schemeClr>
+            </a:gs>
+            <a:gs pos="50000">
+              <a:schemeClr val="phClr">
+                <a:satMod val="110000"/>
+                <a:lumMod val="100000"/>
+                <a:shade val="100000"/>
+              </a:schemeClr>
+            </a:gs>
+            <a:gs pos="100000">
+              <a:schemeClr val="phClr">
+                <a:lumMod val="99000"/>
+                <a:satMod val="120000"/>
+                <a:shade val="78000"/>
+              </a:schemeClr>
+            </a:gs>
+          </a:gsLst>
+          <a:lin ang="5400000" scaled="0"/>
+        </a:gradFill>
+      </a:fillStyleLst>
+      <a:lnStyleLst>
+        <a:ln w="6350" cap="flat" cmpd="sng" algn="ctr">
+          <a:solidFill>
+            <a:schemeClr val="phClr"/>
+          </a:solidFill>
+          <a:prstDash val="solid"/>
+          <a:miter lim="800000"/>
+        </a:ln>
+        <a:ln w="12700" cap="flat" cmpd="sng" algn="ctr">
+          <a:solidFill>
+            <a:schemeClr val="phClr"/>
+          </a:solidFill>
+          <a:prstDash val="solid"/>
+          <a:miter lim="800000"/>
+        </a:ln>
+        <a:ln w="19050" cap="flat" cmpd="sng" algn="ctr">
+          <a:solidFill>
+            <a:schemeClr val="phClr"/>
+          </a:solidFill>
+          <a:prstDash val="solid"/>
+          <a:miter lim="800000"/>
+        </a:ln>
+      </a:lnStyleLst>
+      <a:effectStyleLst>
+        <a:effectStyle>
+          <a:effectLst/>
+        </a:effectStyle>
+        <a:effectStyle>
+          <a:effectLst/>
+        </a:effectStyle>
+        <a:effectStyle>
+          <a:effectLst>
+            <a:outerShdw blurRad="57150" dist="19050" dir="5400000" algn="ctr" rotWithShape="0">
+              <a:srgbClr val="000000">
+                <a:alpha val="63000"/>
+              </a:srgbClr>
+            </a:outerShdw>
+          </a:effectLst>
+        </a:effectStyle>
+      </a:effectStyleLst>
+      <a:bgFillStyleLst>
+        <a:solidFill>
+          <a:schemeClr val="phClr"/>
+        </a:solidFill>
+        <a:solidFill>
+          <a:schemeClr val="phClr">
+            <a:tint val="95000"/>
+            <a:satMod val="170000"/>
+          </a:schemeClr>
+        </a:solidFill>
+        <a:gradFill rotWithShape="1">
+          <a:gsLst>
+            <a:gs pos="0">
+              <a:schemeClr val="phClr">
+                <a:tint val="93000"/>
+                <a:satMod val="150000"/>
+                <a:shade val="98000"/>
+                <a:lumMod val="102000"/>
+              </a:schemeClr>
+            </a:gs>
+            <a:gs pos="50000">
+              <a:schemeClr val="phClr">
+                <a:tint val="98000"/>
+                <a:satMod val="130000"/>
+                <a:shade val="90000"/>
+                <a:lumMod val="103000"/>
+              </a:schemeClr>
+            </a:gs>
+            <a:gs pos="100000">
+              <a:schemeClr val="phClr">
+                <a:shade val="63000"/>
+                <a:satMod val="120000"/>
+              </a:schemeClr>
+            </a:gs>
+          </a:gsLst>
+          <a:lin ang="5400000" scaled="0"/>
+        </a:gradFill>
+      </a:bgFillStyleLst>
+    </a:fmtScheme>
+  </a:themeElements>
+  <a:objectDefaults/>
+  <a:extraClrSchemeLst/>
+  <a:extLst>
+    <a:ext uri="{05A4C25C-085E-4340-85A3-A5531E510DB2}">
+      <thm15:themeFamily xmlns:thm15="http://schemas.microsoft.com/office/thememl/2012/main" name="Office Theme" id="{62F939B6-93AF-4DB8-9C6B-D6C7DFDC589F}" vid="{4A3C46E8-61CC-4603-A589-7422A47A8E4A}"/>
+    </a:ext>
+  </a:extLst>
+</a:theme>
 </file>
--- a/[실습](3.27) 상황의 기차칸.pptx
+++ b/[실습](3.27) 상황의 기차칸.pptx
@@ -5,12 +5,10 @@
     <p:sldMasterId id="2147483648" r:id="rId1"/>
   </p:sldMasterIdLst>
   <p:notesMasterIdLst>
-    <p:notesMasterId r:id="rId5"/>
+    <p:notesMasterId r:id="rId3"/>
   </p:notesMasterIdLst>
   <p:sldIdLst>
-    <p:sldId id="256" r:id="rId2"/>
-    <p:sldId id="257" r:id="rId3"/>
-    <p:sldId id="258" r:id="rId4"/>
+    <p:sldId id="258" r:id="rId2"/>
   </p:sldIdLst>
   <p:sldSz cx="12192000" cy="6858000"/>
   <p:notesSz cx="6858000" cy="9144000"/>
@@ -1084,7 +1082,7 @@
           <a:p>
             <a:fld id="{2178B48B-5F30-4934-9677-39BE819839D0}" type="slidenum">
               <a:rPr lang="ko-KR" altLang="en-US" smtClean="0"/>
-              <a:t>3</a:t>
+              <a:t>1</a:t>
             </a:fld>
             <a:endParaRPr lang="ko-KR" altLang="en-US"/>
           </a:p>
@@ -3925,1499 +3923,6 @@
 <file path=ppt/slides/slide1.xml><?xml version="1.0" encoding="utf-8"?>
 <p:sld xmlns:a="http://schemas.openxmlformats.org/drawingml/2006/main" xmlns:r="http://schemas.openxmlformats.org/officeDocument/2006/relationships" xmlns:p="http://schemas.openxmlformats.org/presentationml/2006/main">
   <p:cSld>
-    <p:spTree>
-      <p:nvGrpSpPr>
-        <p:cNvPr id="1" name=""/>
-        <p:cNvGrpSpPr/>
-        <p:nvPr/>
-      </p:nvGrpSpPr>
-      <p:grpSpPr>
-        <a:xfrm>
-          <a:off x="0" y="0"/>
-          <a:ext cx="0" cy="0"/>
-          <a:chOff x="0" y="0"/>
-          <a:chExt cx="0" cy="0"/>
-        </a:xfrm>
-      </p:grpSpPr>
-      <p:sp>
-        <p:nvSpPr>
-          <p:cNvPr id="4" name="이등변 삼각형 3"/>
-          <p:cNvSpPr/>
-          <p:nvPr/>
-        </p:nvSpPr>
-        <p:spPr>
-          <a:xfrm>
-            <a:off x="165168" y="411480"/>
-            <a:ext cx="11850624" cy="6446520"/>
-          </a:xfrm>
-          <a:prstGeom prst="triangle">
-            <a:avLst>
-              <a:gd name="adj" fmla="val 100000"/>
-            </a:avLst>
-          </a:prstGeom>
-        </p:spPr>
-        <p:style>
-          <a:lnRef idx="2">
-            <a:schemeClr val="accent1">
-              <a:shade val="50000"/>
-            </a:schemeClr>
-          </a:lnRef>
-          <a:fillRef idx="1">
-            <a:schemeClr val="accent1"/>
-          </a:fillRef>
-          <a:effectRef idx="0">
-            <a:schemeClr val="accent1"/>
-          </a:effectRef>
-          <a:fontRef idx="minor">
-            <a:schemeClr val="lt1"/>
-          </a:fontRef>
-        </p:style>
-        <p:txBody>
-          <a:bodyPr rtlCol="0" anchor="ctr"/>
-          <a:lstStyle/>
-          <a:p>
-            <a:pPr algn="ctr"/>
-            <a:endParaRPr lang="ko-KR" altLang="en-US"/>
-          </a:p>
-        </p:txBody>
-      </p:sp>
-      <p:sp>
-        <p:nvSpPr>
-          <p:cNvPr id="5" name="이등변 삼각형 4"/>
-          <p:cNvSpPr/>
-          <p:nvPr/>
-        </p:nvSpPr>
-        <p:spPr>
-          <a:xfrm flipH="1" flipV="1">
-            <a:off x="164592" y="0"/>
-            <a:ext cx="11851200" cy="6447600"/>
-          </a:xfrm>
-          <a:prstGeom prst="triangle">
-            <a:avLst>
-              <a:gd name="adj" fmla="val 100000"/>
-            </a:avLst>
-          </a:prstGeom>
-        </p:spPr>
-        <p:style>
-          <a:lnRef idx="2">
-            <a:schemeClr val="accent1">
-              <a:shade val="50000"/>
-            </a:schemeClr>
-          </a:lnRef>
-          <a:fillRef idx="1">
-            <a:schemeClr val="accent1"/>
-          </a:fillRef>
-          <a:effectRef idx="0">
-            <a:schemeClr val="accent1"/>
-          </a:effectRef>
-          <a:fontRef idx="minor">
-            <a:schemeClr val="lt1"/>
-          </a:fontRef>
-        </p:style>
-        <p:txBody>
-          <a:bodyPr rtlCol="0" anchor="ctr"/>
-          <a:lstStyle/>
-          <a:p>
-            <a:pPr algn="ctr"/>
-            <a:endParaRPr lang="ko-KR" altLang="en-US"/>
-          </a:p>
-        </p:txBody>
-      </p:sp>
-      <p:sp>
-        <p:nvSpPr>
-          <p:cNvPr id="6" name="직사각형 5"/>
-          <p:cNvSpPr/>
-          <p:nvPr/>
-        </p:nvSpPr>
-        <p:spPr>
-          <a:xfrm>
-            <a:off x="411480" y="205740"/>
-            <a:ext cx="1069848" cy="411480"/>
-          </a:xfrm>
-          <a:prstGeom prst="rect">
-            <a:avLst/>
-          </a:prstGeom>
-        </p:spPr>
-        <p:style>
-          <a:lnRef idx="2">
-            <a:schemeClr val="accent1">
-              <a:shade val="50000"/>
-            </a:schemeClr>
-          </a:lnRef>
-          <a:fillRef idx="1">
-            <a:schemeClr val="accent1"/>
-          </a:fillRef>
-          <a:effectRef idx="0">
-            <a:schemeClr val="accent1"/>
-          </a:effectRef>
-          <a:fontRef idx="minor">
-            <a:schemeClr val="lt1"/>
-          </a:fontRef>
-        </p:style>
-        <p:txBody>
-          <a:bodyPr rtlCol="0" anchor="ctr"/>
-          <a:lstStyle/>
-          <a:p>
-            <a:pPr algn="ctr"/>
-            <a:r>
-              <a:rPr lang="ko-KR" altLang="en-US" sz="1000">
-                <a:solidFill>
-                  <a:schemeClr val="tx1"/>
-                </a:solidFill>
-              </a:rPr>
-              <a:t>소재들</a:t>
-            </a:r>
-          </a:p>
-        </p:txBody>
-      </p:sp>
-      <p:sp>
-        <p:nvSpPr>
-          <p:cNvPr id="7" name="직사각형 6"/>
-          <p:cNvSpPr/>
-          <p:nvPr/>
-        </p:nvSpPr>
-        <p:spPr>
-          <a:xfrm>
-            <a:off x="490728" y="6278436"/>
-            <a:ext cx="1069848" cy="411480"/>
-          </a:xfrm>
-          <a:prstGeom prst="rect">
-            <a:avLst/>
-          </a:prstGeom>
-          <a:solidFill>
-            <a:srgbClr val="92D050"/>
-          </a:solidFill>
-        </p:spPr>
-        <p:style>
-          <a:lnRef idx="2">
-            <a:schemeClr val="accent1">
-              <a:shade val="50000"/>
-            </a:schemeClr>
-          </a:lnRef>
-          <a:fillRef idx="1">
-            <a:schemeClr val="accent1"/>
-          </a:fillRef>
-          <a:effectRef idx="0">
-            <a:schemeClr val="accent1"/>
-          </a:effectRef>
-          <a:fontRef idx="minor">
-            <a:schemeClr val="lt1"/>
-          </a:fontRef>
-        </p:style>
-        <p:txBody>
-          <a:bodyPr rtlCol="0" anchor="ctr"/>
-          <a:lstStyle/>
-          <a:p>
-            <a:pPr algn="ctr"/>
-            <a:r>
-              <a:rPr lang="ko-KR" altLang="en-US" sz="1000">
-                <a:solidFill>
-                  <a:schemeClr val="tx1"/>
-                </a:solidFill>
-              </a:rPr>
-              <a:t>상황의 기차칸</a:t>
-            </a:r>
-          </a:p>
-        </p:txBody>
-      </p:sp>
-    </p:spTree>
-    <p:extLst>
-      <p:ext uri="{BB962C8B-B14F-4D97-AF65-F5344CB8AC3E}">
-        <p14:creationId xmlns:p14="http://schemas.microsoft.com/office/powerpoint/2010/main" val="1500213970"/>
-      </p:ext>
-    </p:extLst>
-  </p:cSld>
-  <p:clrMapOvr>
-    <a:masterClrMapping/>
-  </p:clrMapOvr>
-</p:sld>
-</file>
-
-<file path=ppt/slides/slide2.xml><?xml version="1.0" encoding="utf-8"?>
-<p:sld xmlns:a="http://schemas.openxmlformats.org/drawingml/2006/main" xmlns:r="http://schemas.openxmlformats.org/officeDocument/2006/relationships" xmlns:p="http://schemas.openxmlformats.org/presentationml/2006/main">
-  <p:cSld>
-    <p:bg>
-      <p:bgPr>
-        <a:solidFill>
-          <a:srgbClr val="4B4443"/>
-        </a:solidFill>
-        <a:effectLst/>
-      </p:bgPr>
-    </p:bg>
-    <p:spTree>
-      <p:nvGrpSpPr>
-        <p:cNvPr id="1" name=""/>
-        <p:cNvGrpSpPr/>
-        <p:nvPr/>
-      </p:nvGrpSpPr>
-      <p:grpSpPr>
-        <a:xfrm>
-          <a:off x="0" y="0"/>
-          <a:ext cx="0" cy="0"/>
-          <a:chOff x="0" y="0"/>
-          <a:chExt cx="0" cy="0"/>
-        </a:xfrm>
-      </p:grpSpPr>
-      <p:sp>
-        <p:nvSpPr>
-          <p:cNvPr id="4" name="이등변 삼각형 3"/>
-          <p:cNvSpPr/>
-          <p:nvPr/>
-        </p:nvSpPr>
-        <p:spPr>
-          <a:xfrm>
-            <a:off x="696000" y="411480"/>
-            <a:ext cx="10800000" cy="6446520"/>
-          </a:xfrm>
-          <a:prstGeom prst="triangle">
-            <a:avLst>
-              <a:gd name="adj" fmla="val 100000"/>
-            </a:avLst>
-          </a:prstGeom>
-          <a:solidFill>
-            <a:srgbClr val="669E40"/>
-          </a:solidFill>
-        </p:spPr>
-        <p:style>
-          <a:lnRef idx="2">
-            <a:schemeClr val="accent1">
-              <a:shade val="50000"/>
-            </a:schemeClr>
-          </a:lnRef>
-          <a:fillRef idx="1">
-            <a:schemeClr val="accent1"/>
-          </a:fillRef>
-          <a:effectRef idx="0">
-            <a:schemeClr val="accent1"/>
-          </a:effectRef>
-          <a:fontRef idx="minor">
-            <a:schemeClr val="lt1"/>
-          </a:fontRef>
-        </p:style>
-        <p:txBody>
-          <a:bodyPr rtlCol="0" anchor="ctr"/>
-          <a:lstStyle/>
-          <a:p>
-            <a:pPr algn="dist"/>
-            <a:endParaRPr lang="ko-KR" altLang="en-US" dirty="0"/>
-          </a:p>
-        </p:txBody>
-      </p:sp>
-      <p:sp>
-        <p:nvSpPr>
-          <p:cNvPr id="33" name="직사각형 32">
-            <a:extLst>
-              <a:ext uri="{FF2B5EF4-FFF2-40B4-BE49-F238E27FC236}">
-                <a16:creationId xmlns:a16="http://schemas.microsoft.com/office/drawing/2014/main" id="{7B91612B-9C7D-5F5D-0C10-A35D76ECBA08}"/>
-              </a:ext>
-            </a:extLst>
-          </p:cNvPr>
-          <p:cNvSpPr/>
-          <p:nvPr/>
-        </p:nvSpPr>
-        <p:spPr>
-          <a:xfrm>
-            <a:off x="695999" y="0"/>
-            <a:ext cx="2160000" cy="6857999"/>
-          </a:xfrm>
-          <a:prstGeom prst="rect">
-            <a:avLst/>
-          </a:prstGeom>
-          <a:solidFill>
-            <a:srgbClr val="4B4443">
-              <a:alpha val="0"/>
-            </a:srgbClr>
-          </a:solidFill>
-          <a:ln>
-            <a:solidFill>
-              <a:srgbClr val="FAEBA0"/>
-            </a:solidFill>
-          </a:ln>
-        </p:spPr>
-        <p:style>
-          <a:lnRef idx="2">
-            <a:schemeClr val="accent1">
-              <a:shade val="15000"/>
-            </a:schemeClr>
-          </a:lnRef>
-          <a:fillRef idx="1">
-            <a:schemeClr val="accent1"/>
-          </a:fillRef>
-          <a:effectRef idx="0">
-            <a:schemeClr val="accent1"/>
-          </a:effectRef>
-          <a:fontRef idx="minor">
-            <a:schemeClr val="lt1"/>
-          </a:fontRef>
-        </p:style>
-        <p:txBody>
-          <a:bodyPr rtlCol="0" anchor="ctr"/>
-          <a:lstStyle/>
-          <a:p>
-            <a:pPr algn="ctr"/>
-            <a:endParaRPr lang="ko-KR" altLang="en-US"/>
-          </a:p>
-        </p:txBody>
-      </p:sp>
-      <p:sp>
-        <p:nvSpPr>
-          <p:cNvPr id="34" name="직사각형 33">
-            <a:extLst>
-              <a:ext uri="{FF2B5EF4-FFF2-40B4-BE49-F238E27FC236}">
-                <a16:creationId xmlns:a16="http://schemas.microsoft.com/office/drawing/2014/main" id="{D23BE304-E2D6-7E6A-9CD7-3D5492D1E2B6}"/>
-              </a:ext>
-            </a:extLst>
-          </p:cNvPr>
-          <p:cNvSpPr/>
-          <p:nvPr/>
-        </p:nvSpPr>
-        <p:spPr>
-          <a:xfrm>
-            <a:off x="2861261" y="1"/>
-            <a:ext cx="2160000" cy="6857999"/>
-          </a:xfrm>
-          <a:prstGeom prst="rect">
-            <a:avLst/>
-          </a:prstGeom>
-          <a:solidFill>
-            <a:srgbClr val="4B4443">
-              <a:alpha val="20000"/>
-            </a:srgbClr>
-          </a:solidFill>
-          <a:ln>
-            <a:solidFill>
-              <a:srgbClr val="FAEBA0"/>
-            </a:solidFill>
-          </a:ln>
-        </p:spPr>
-        <p:style>
-          <a:lnRef idx="2">
-            <a:schemeClr val="accent1">
-              <a:shade val="15000"/>
-            </a:schemeClr>
-          </a:lnRef>
-          <a:fillRef idx="1">
-            <a:schemeClr val="accent1"/>
-          </a:fillRef>
-          <a:effectRef idx="0">
-            <a:schemeClr val="accent1"/>
-          </a:effectRef>
-          <a:fontRef idx="minor">
-            <a:schemeClr val="lt1"/>
-          </a:fontRef>
-        </p:style>
-        <p:txBody>
-          <a:bodyPr rtlCol="0" anchor="ctr"/>
-          <a:lstStyle/>
-          <a:p>
-            <a:pPr algn="ctr"/>
-            <a:endParaRPr lang="ko-KR" altLang="en-US"/>
-          </a:p>
-        </p:txBody>
-      </p:sp>
-      <p:sp>
-        <p:nvSpPr>
-          <p:cNvPr id="35" name="직사각형 34">
-            <a:extLst>
-              <a:ext uri="{FF2B5EF4-FFF2-40B4-BE49-F238E27FC236}">
-                <a16:creationId xmlns:a16="http://schemas.microsoft.com/office/drawing/2014/main" id="{6BD6E198-2DC6-69E8-6766-25F9CE7270D2}"/>
-              </a:ext>
-            </a:extLst>
-          </p:cNvPr>
-          <p:cNvSpPr/>
-          <p:nvPr/>
-        </p:nvSpPr>
-        <p:spPr>
-          <a:xfrm>
-            <a:off x="5026522" y="1"/>
-            <a:ext cx="2160000" cy="6857999"/>
-          </a:xfrm>
-          <a:prstGeom prst="rect">
-            <a:avLst/>
-          </a:prstGeom>
-          <a:solidFill>
-            <a:srgbClr val="4B4443">
-              <a:alpha val="40000"/>
-            </a:srgbClr>
-          </a:solidFill>
-          <a:ln>
-            <a:solidFill>
-              <a:srgbClr val="FAEBA0"/>
-            </a:solidFill>
-          </a:ln>
-        </p:spPr>
-        <p:style>
-          <a:lnRef idx="2">
-            <a:schemeClr val="accent1">
-              <a:shade val="15000"/>
-            </a:schemeClr>
-          </a:lnRef>
-          <a:fillRef idx="1">
-            <a:schemeClr val="accent1"/>
-          </a:fillRef>
-          <a:effectRef idx="0">
-            <a:schemeClr val="accent1"/>
-          </a:effectRef>
-          <a:fontRef idx="minor">
-            <a:schemeClr val="lt1"/>
-          </a:fontRef>
-        </p:style>
-        <p:txBody>
-          <a:bodyPr rtlCol="0" anchor="ctr"/>
-          <a:lstStyle/>
-          <a:p>
-            <a:pPr algn="ctr"/>
-            <a:endParaRPr lang="ko-KR" altLang="en-US"/>
-          </a:p>
-        </p:txBody>
-      </p:sp>
-      <p:sp>
-        <p:nvSpPr>
-          <p:cNvPr id="36" name="직사각형 35">
-            <a:extLst>
-              <a:ext uri="{FF2B5EF4-FFF2-40B4-BE49-F238E27FC236}">
-                <a16:creationId xmlns:a16="http://schemas.microsoft.com/office/drawing/2014/main" id="{22199777-3284-B6B3-AF16-A076073C3331}"/>
-              </a:ext>
-            </a:extLst>
-          </p:cNvPr>
-          <p:cNvSpPr/>
-          <p:nvPr/>
-        </p:nvSpPr>
-        <p:spPr>
-          <a:xfrm>
-            <a:off x="7186522" y="-1"/>
-            <a:ext cx="2160000" cy="6857999"/>
-          </a:xfrm>
-          <a:prstGeom prst="rect">
-            <a:avLst/>
-          </a:prstGeom>
-          <a:solidFill>
-            <a:srgbClr val="4B4443">
-              <a:alpha val="60000"/>
-            </a:srgbClr>
-          </a:solidFill>
-          <a:ln>
-            <a:solidFill>
-              <a:srgbClr val="FAEBA0"/>
-            </a:solidFill>
-          </a:ln>
-        </p:spPr>
-        <p:style>
-          <a:lnRef idx="2">
-            <a:schemeClr val="accent1">
-              <a:shade val="15000"/>
-            </a:schemeClr>
-          </a:lnRef>
-          <a:fillRef idx="1">
-            <a:schemeClr val="accent1"/>
-          </a:fillRef>
-          <a:effectRef idx="0">
-            <a:schemeClr val="accent1"/>
-          </a:effectRef>
-          <a:fontRef idx="minor">
-            <a:schemeClr val="lt1"/>
-          </a:fontRef>
-        </p:style>
-        <p:txBody>
-          <a:bodyPr rtlCol="0" anchor="ctr"/>
-          <a:lstStyle/>
-          <a:p>
-            <a:pPr algn="ctr"/>
-            <a:endParaRPr lang="ko-KR" altLang="en-US"/>
-          </a:p>
-        </p:txBody>
-      </p:sp>
-      <p:sp>
-        <p:nvSpPr>
-          <p:cNvPr id="37" name="직사각형 36">
-            <a:extLst>
-              <a:ext uri="{FF2B5EF4-FFF2-40B4-BE49-F238E27FC236}">
-                <a16:creationId xmlns:a16="http://schemas.microsoft.com/office/drawing/2014/main" id="{AFB9FC9D-29A8-DD23-48AB-6CF067B63D08}"/>
-              </a:ext>
-            </a:extLst>
-          </p:cNvPr>
-          <p:cNvSpPr/>
-          <p:nvPr/>
-        </p:nvSpPr>
-        <p:spPr>
-          <a:xfrm>
-            <a:off x="9344809" y="-3"/>
-            <a:ext cx="2160000" cy="6857999"/>
-          </a:xfrm>
-          <a:prstGeom prst="rect">
-            <a:avLst/>
-          </a:prstGeom>
-          <a:solidFill>
-            <a:srgbClr val="4B4443">
-              <a:alpha val="80000"/>
-            </a:srgbClr>
-          </a:solidFill>
-          <a:ln>
-            <a:solidFill>
-              <a:srgbClr val="FAEBA0"/>
-            </a:solidFill>
-          </a:ln>
-        </p:spPr>
-        <p:style>
-          <a:lnRef idx="2">
-            <a:schemeClr val="accent1">
-              <a:shade val="15000"/>
-            </a:schemeClr>
-          </a:lnRef>
-          <a:fillRef idx="1">
-            <a:schemeClr val="accent1"/>
-          </a:fillRef>
-          <a:effectRef idx="0">
-            <a:schemeClr val="accent1"/>
-          </a:effectRef>
-          <a:fontRef idx="minor">
-            <a:schemeClr val="lt1"/>
-          </a:fontRef>
-        </p:style>
-        <p:txBody>
-          <a:bodyPr rtlCol="0" anchor="ctr"/>
-          <a:lstStyle/>
-          <a:p>
-            <a:pPr algn="ctr"/>
-            <a:endParaRPr lang="ko-KR" altLang="en-US"/>
-          </a:p>
-        </p:txBody>
-      </p:sp>
-      <p:sp>
-        <p:nvSpPr>
-          <p:cNvPr id="5" name="이등변 삼각형 4"/>
-          <p:cNvSpPr/>
-          <p:nvPr/>
-        </p:nvSpPr>
-        <p:spPr>
-          <a:xfrm flipH="1" flipV="1">
-            <a:off x="696000" y="0"/>
-            <a:ext cx="10800000" cy="6447600"/>
-          </a:xfrm>
-          <a:prstGeom prst="triangle">
-            <a:avLst>
-              <a:gd name="adj" fmla="val 100000"/>
-            </a:avLst>
-          </a:prstGeom>
-          <a:solidFill>
-            <a:srgbClr val="540B9D"/>
-          </a:solidFill>
-          <a:ln>
-            <a:noFill/>
-          </a:ln>
-        </p:spPr>
-        <p:style>
-          <a:lnRef idx="2">
-            <a:schemeClr val="accent1">
-              <a:shade val="50000"/>
-            </a:schemeClr>
-          </a:lnRef>
-          <a:fillRef idx="1">
-            <a:schemeClr val="accent1"/>
-          </a:fillRef>
-          <a:effectRef idx="0">
-            <a:schemeClr val="accent1"/>
-          </a:effectRef>
-          <a:fontRef idx="minor">
-            <a:schemeClr val="lt1"/>
-          </a:fontRef>
-        </p:style>
-        <p:txBody>
-          <a:bodyPr rtlCol="0" anchor="ctr"/>
-          <a:lstStyle/>
-          <a:p>
-            <a:pPr algn="ctr"/>
-            <a:endParaRPr lang="ko-KR" altLang="en-US" dirty="0"/>
-          </a:p>
-        </p:txBody>
-      </p:sp>
-      <p:sp>
-        <p:nvSpPr>
-          <p:cNvPr id="6" name="직사각형 5"/>
-          <p:cNvSpPr/>
-          <p:nvPr/>
-        </p:nvSpPr>
-        <p:spPr>
-          <a:xfrm>
-            <a:off x="3281544" y="610155"/>
-            <a:ext cx="1069848" cy="411480"/>
-          </a:xfrm>
-          <a:prstGeom prst="rect">
-            <a:avLst/>
-          </a:prstGeom>
-          <a:noFill/>
-          <a:ln>
-            <a:noFill/>
-          </a:ln>
-        </p:spPr>
-        <p:style>
-          <a:lnRef idx="2">
-            <a:schemeClr val="accent1">
-              <a:shade val="50000"/>
-            </a:schemeClr>
-          </a:lnRef>
-          <a:fillRef idx="1">
-            <a:schemeClr val="accent1"/>
-          </a:fillRef>
-          <a:effectRef idx="0">
-            <a:schemeClr val="accent1"/>
-          </a:effectRef>
-          <a:fontRef idx="minor">
-            <a:schemeClr val="lt1"/>
-          </a:fontRef>
-        </p:style>
-        <p:txBody>
-          <a:bodyPr rtlCol="0" anchor="ctr"/>
-          <a:lstStyle/>
-          <a:p>
-            <a:pPr algn="ctr"/>
-            <a:r>
-              <a:rPr lang="ko-KR" altLang="en-US" sz="1000">
-                <a:solidFill>
-                  <a:schemeClr val="bg1"/>
-                </a:solidFill>
-              </a:rPr>
-              <a:t>쓰레기 줍기</a:t>
-            </a:r>
-          </a:p>
-        </p:txBody>
-      </p:sp>
-      <p:sp>
-        <p:nvSpPr>
-          <p:cNvPr id="8" name="직사각형 7"/>
-          <p:cNvSpPr/>
-          <p:nvPr/>
-        </p:nvSpPr>
-        <p:spPr>
-          <a:xfrm>
-            <a:off x="4676952" y="610155"/>
-            <a:ext cx="1069848" cy="411480"/>
-          </a:xfrm>
-          <a:prstGeom prst="rect">
-            <a:avLst/>
-          </a:prstGeom>
-          <a:noFill/>
-          <a:ln>
-            <a:noFill/>
-          </a:ln>
-        </p:spPr>
-        <p:style>
-          <a:lnRef idx="2">
-            <a:schemeClr val="accent1">
-              <a:shade val="50000"/>
-            </a:schemeClr>
-          </a:lnRef>
-          <a:fillRef idx="1">
-            <a:schemeClr val="accent1"/>
-          </a:fillRef>
-          <a:effectRef idx="0">
-            <a:schemeClr val="accent1"/>
-          </a:effectRef>
-          <a:fontRef idx="minor">
-            <a:schemeClr val="lt1"/>
-          </a:fontRef>
-        </p:style>
-        <p:txBody>
-          <a:bodyPr rtlCol="0" anchor="ctr"/>
-          <a:lstStyle/>
-          <a:p>
-            <a:pPr algn="ctr"/>
-            <a:r>
-              <a:rPr lang="ko-KR" altLang="en-US" sz="1000" dirty="0">
-                <a:solidFill>
-                  <a:schemeClr val="bg1"/>
-                </a:solidFill>
-              </a:rPr>
-              <a:t>첫 번째 균열</a:t>
-            </a:r>
-          </a:p>
-        </p:txBody>
-      </p:sp>
-      <p:sp>
-        <p:nvSpPr>
-          <p:cNvPr id="9" name="직사각형 8"/>
-          <p:cNvSpPr/>
-          <p:nvPr/>
-        </p:nvSpPr>
-        <p:spPr>
-          <a:xfrm>
-            <a:off x="6072360" y="610155"/>
-            <a:ext cx="1069848" cy="411480"/>
-          </a:xfrm>
-          <a:prstGeom prst="rect">
-            <a:avLst/>
-          </a:prstGeom>
-          <a:noFill/>
-          <a:ln>
-            <a:noFill/>
-          </a:ln>
-        </p:spPr>
-        <p:style>
-          <a:lnRef idx="2">
-            <a:schemeClr val="accent1">
-              <a:shade val="50000"/>
-            </a:schemeClr>
-          </a:lnRef>
-          <a:fillRef idx="1">
-            <a:schemeClr val="accent1"/>
-          </a:fillRef>
-          <a:effectRef idx="0">
-            <a:schemeClr val="accent1"/>
-          </a:effectRef>
-          <a:fontRef idx="minor">
-            <a:schemeClr val="lt1"/>
-          </a:fontRef>
-        </p:style>
-        <p:txBody>
-          <a:bodyPr rtlCol="0" anchor="ctr"/>
-          <a:lstStyle/>
-          <a:p>
-            <a:pPr algn="ctr"/>
-            <a:r>
-              <a:rPr lang="ko-KR" altLang="en-US" sz="1000" dirty="0">
-                <a:solidFill>
-                  <a:schemeClr val="bg1"/>
-                </a:solidFill>
-              </a:rPr>
-              <a:t>선의 지수 측정</a:t>
-            </a:r>
-          </a:p>
-        </p:txBody>
-      </p:sp>
-      <p:sp>
-        <p:nvSpPr>
-          <p:cNvPr id="10" name="직사각형 9"/>
-          <p:cNvSpPr/>
-          <p:nvPr/>
-        </p:nvSpPr>
-        <p:spPr>
-          <a:xfrm>
-            <a:off x="1886136" y="610155"/>
-            <a:ext cx="1069848" cy="411480"/>
-          </a:xfrm>
-          <a:prstGeom prst="rect">
-            <a:avLst/>
-          </a:prstGeom>
-          <a:noFill/>
-          <a:ln>
-            <a:noFill/>
-          </a:ln>
-        </p:spPr>
-        <p:style>
-          <a:lnRef idx="2">
-            <a:schemeClr val="accent1">
-              <a:shade val="50000"/>
-            </a:schemeClr>
-          </a:lnRef>
-          <a:fillRef idx="1">
-            <a:schemeClr val="accent1"/>
-          </a:fillRef>
-          <a:effectRef idx="0">
-            <a:schemeClr val="accent1"/>
-          </a:effectRef>
-          <a:fontRef idx="minor">
-            <a:schemeClr val="lt1"/>
-          </a:fontRef>
-        </p:style>
-        <p:txBody>
-          <a:bodyPr rtlCol="0" anchor="ctr"/>
-          <a:lstStyle/>
-          <a:p>
-            <a:pPr algn="ctr"/>
-            <a:r>
-              <a:rPr lang="ko-KR" altLang="en-US" sz="1000" dirty="0">
-                <a:solidFill>
-                  <a:schemeClr val="bg1"/>
-                </a:solidFill>
-              </a:rPr>
-              <a:t>부모의 정서적 학대</a:t>
-            </a:r>
-          </a:p>
-        </p:txBody>
-      </p:sp>
-      <p:sp>
-        <p:nvSpPr>
-          <p:cNvPr id="11" name="직사각형 10"/>
-          <p:cNvSpPr/>
-          <p:nvPr/>
-        </p:nvSpPr>
-        <p:spPr>
-          <a:xfrm>
-            <a:off x="490728" y="610155"/>
-            <a:ext cx="1069848" cy="411480"/>
-          </a:xfrm>
-          <a:prstGeom prst="rect">
-            <a:avLst/>
-          </a:prstGeom>
-          <a:noFill/>
-          <a:ln>
-            <a:noFill/>
-          </a:ln>
-        </p:spPr>
-        <p:style>
-          <a:lnRef idx="2">
-            <a:schemeClr val="accent1">
-              <a:shade val="50000"/>
-            </a:schemeClr>
-          </a:lnRef>
-          <a:fillRef idx="1">
-            <a:schemeClr val="accent1"/>
-          </a:fillRef>
-          <a:effectRef idx="0">
-            <a:schemeClr val="accent1"/>
-          </a:effectRef>
-          <a:fontRef idx="minor">
-            <a:schemeClr val="lt1"/>
-          </a:fontRef>
-        </p:style>
-        <p:txBody>
-          <a:bodyPr rtlCol="0" anchor="ctr"/>
-          <a:lstStyle/>
-          <a:p>
-            <a:pPr algn="ctr"/>
-            <a:r>
-              <a:rPr lang="ko-KR" altLang="en-US" sz="1000" dirty="0">
-                <a:solidFill>
-                  <a:schemeClr val="bg1"/>
-                </a:solidFill>
-              </a:rPr>
-              <a:t>입양</a:t>
-            </a:r>
-          </a:p>
-        </p:txBody>
-      </p:sp>
-      <p:sp>
-        <p:nvSpPr>
-          <p:cNvPr id="12" name="직사각형 11"/>
-          <p:cNvSpPr/>
-          <p:nvPr/>
-        </p:nvSpPr>
-        <p:spPr>
-          <a:xfrm>
-            <a:off x="7467767" y="610155"/>
-            <a:ext cx="1401315" cy="411480"/>
-          </a:xfrm>
-          <a:prstGeom prst="rect">
-            <a:avLst/>
-          </a:prstGeom>
-          <a:noFill/>
-          <a:ln>
-            <a:noFill/>
-          </a:ln>
-        </p:spPr>
-        <p:style>
-          <a:lnRef idx="2">
-            <a:schemeClr val="accent1">
-              <a:shade val="50000"/>
-            </a:schemeClr>
-          </a:lnRef>
-          <a:fillRef idx="1">
-            <a:schemeClr val="accent1"/>
-          </a:fillRef>
-          <a:effectRef idx="0">
-            <a:schemeClr val="accent1"/>
-          </a:effectRef>
-          <a:fontRef idx="minor">
-            <a:schemeClr val="lt1"/>
-          </a:fontRef>
-        </p:style>
-        <p:txBody>
-          <a:bodyPr rtlCol="0" anchor="ctr"/>
-          <a:lstStyle/>
-          <a:p>
-            <a:pPr algn="ctr"/>
-            <a:r>
-              <a:rPr lang="ko-KR" altLang="en-US" sz="1000">
-                <a:solidFill>
-                  <a:schemeClr val="bg1"/>
-                </a:solidFill>
-              </a:rPr>
-              <a:t>무한대의 선의 지수</a:t>
-            </a:r>
-          </a:p>
-        </p:txBody>
-      </p:sp>
-      <p:sp>
-        <p:nvSpPr>
-          <p:cNvPr id="13" name="직사각형 12"/>
-          <p:cNvSpPr/>
-          <p:nvPr/>
-        </p:nvSpPr>
-        <p:spPr>
-          <a:xfrm>
-            <a:off x="3281544" y="1276838"/>
-            <a:ext cx="1069848" cy="411480"/>
-          </a:xfrm>
-          <a:prstGeom prst="rect">
-            <a:avLst/>
-          </a:prstGeom>
-          <a:noFill/>
-          <a:ln>
-            <a:noFill/>
-          </a:ln>
-        </p:spPr>
-        <p:style>
-          <a:lnRef idx="2">
-            <a:schemeClr val="accent1">
-              <a:shade val="50000"/>
-            </a:schemeClr>
-          </a:lnRef>
-          <a:fillRef idx="1">
-            <a:schemeClr val="accent1"/>
-          </a:fillRef>
-          <a:effectRef idx="0">
-            <a:schemeClr val="accent1"/>
-          </a:effectRef>
-          <a:fontRef idx="minor">
-            <a:schemeClr val="lt1"/>
-          </a:fontRef>
-        </p:style>
-        <p:txBody>
-          <a:bodyPr rtlCol="0" anchor="ctr"/>
-          <a:lstStyle/>
-          <a:p>
-            <a:pPr algn="ctr"/>
-            <a:r>
-              <a:rPr lang="ko-KR" altLang="en-US" sz="1000">
-                <a:solidFill>
-                  <a:schemeClr val="bg1"/>
-                </a:solidFill>
-              </a:rPr>
-              <a:t>칭찬 중독</a:t>
-            </a:r>
-          </a:p>
-        </p:txBody>
-      </p:sp>
-      <p:sp>
-        <p:nvSpPr>
-          <p:cNvPr id="14" name="직사각형 13"/>
-          <p:cNvSpPr/>
-          <p:nvPr/>
-        </p:nvSpPr>
-        <p:spPr>
-          <a:xfrm>
-            <a:off x="6072360" y="1276838"/>
-            <a:ext cx="1069848" cy="411480"/>
-          </a:xfrm>
-          <a:prstGeom prst="rect">
-            <a:avLst/>
-          </a:prstGeom>
-          <a:noFill/>
-          <a:ln>
-            <a:noFill/>
-          </a:ln>
-        </p:spPr>
-        <p:style>
-          <a:lnRef idx="2">
-            <a:schemeClr val="accent1">
-              <a:shade val="50000"/>
-            </a:schemeClr>
-          </a:lnRef>
-          <a:fillRef idx="1">
-            <a:schemeClr val="accent1"/>
-          </a:fillRef>
-          <a:effectRef idx="0">
-            <a:schemeClr val="accent1"/>
-          </a:effectRef>
-          <a:fontRef idx="minor">
-            <a:schemeClr val="lt1"/>
-          </a:fontRef>
-        </p:style>
-        <p:txBody>
-          <a:bodyPr rtlCol="0" anchor="ctr"/>
-          <a:lstStyle/>
-          <a:p>
-            <a:pPr algn="ctr"/>
-            <a:r>
-              <a:rPr lang="ko-KR" altLang="en-US" sz="1000">
-                <a:solidFill>
-                  <a:schemeClr val="bg1"/>
-                </a:solidFill>
-              </a:rPr>
-              <a:t>선의 랭킹 시스템</a:t>
-            </a:r>
-          </a:p>
-        </p:txBody>
-      </p:sp>
-      <p:sp>
-        <p:nvSpPr>
-          <p:cNvPr id="15" name="직사각형 14"/>
-          <p:cNvSpPr/>
-          <p:nvPr/>
-        </p:nvSpPr>
-        <p:spPr>
-          <a:xfrm>
-            <a:off x="6072360" y="1943521"/>
-            <a:ext cx="1069848" cy="411480"/>
-          </a:xfrm>
-          <a:prstGeom prst="rect">
-            <a:avLst/>
-          </a:prstGeom>
-          <a:noFill/>
-          <a:ln>
-            <a:noFill/>
-          </a:ln>
-        </p:spPr>
-        <p:style>
-          <a:lnRef idx="2">
-            <a:schemeClr val="accent1">
-              <a:shade val="50000"/>
-            </a:schemeClr>
-          </a:lnRef>
-          <a:fillRef idx="1">
-            <a:schemeClr val="accent1"/>
-          </a:fillRef>
-          <a:effectRef idx="0">
-            <a:schemeClr val="accent1"/>
-          </a:effectRef>
-          <a:fontRef idx="minor">
-            <a:schemeClr val="lt1"/>
-          </a:fontRef>
-        </p:style>
-        <p:txBody>
-          <a:bodyPr rtlCol="0" anchor="ctr"/>
-          <a:lstStyle/>
-          <a:p>
-            <a:pPr algn="ctr"/>
-            <a:r>
-              <a:rPr lang="ko-KR" altLang="en-US" sz="1000">
-                <a:solidFill>
-                  <a:schemeClr val="bg1"/>
-                </a:solidFill>
-              </a:rPr>
-              <a:t>선의 고갈자</a:t>
-            </a:r>
-          </a:p>
-        </p:txBody>
-      </p:sp>
-      <p:sp>
-        <p:nvSpPr>
-          <p:cNvPr id="16" name="직사각형 15"/>
-          <p:cNvSpPr/>
-          <p:nvPr/>
-        </p:nvSpPr>
-        <p:spPr>
-          <a:xfrm>
-            <a:off x="2421060" y="2355001"/>
-            <a:ext cx="1069848" cy="411480"/>
-          </a:xfrm>
-          <a:prstGeom prst="rect">
-            <a:avLst/>
-          </a:prstGeom>
-          <a:noFill/>
-          <a:ln>
-            <a:noFill/>
-          </a:ln>
-        </p:spPr>
-        <p:style>
-          <a:lnRef idx="2">
-            <a:schemeClr val="accent1">
-              <a:shade val="50000"/>
-            </a:schemeClr>
-          </a:lnRef>
-          <a:fillRef idx="1">
-            <a:schemeClr val="accent1"/>
-          </a:fillRef>
-          <a:effectRef idx="0">
-            <a:schemeClr val="accent1"/>
-          </a:effectRef>
-          <a:fontRef idx="minor">
-            <a:schemeClr val="lt1"/>
-          </a:fontRef>
-        </p:style>
-        <p:txBody>
-          <a:bodyPr rtlCol="0" anchor="ctr"/>
-          <a:lstStyle/>
-          <a:p>
-            <a:pPr algn="ctr"/>
-            <a:r>
-              <a:rPr lang="ko-KR" altLang="en-US" sz="1000" dirty="0">
-                <a:solidFill>
-                  <a:schemeClr val="bg1"/>
-                </a:solidFill>
-              </a:rPr>
-              <a:t>첫 붕괴</a:t>
-            </a:r>
-          </a:p>
-        </p:txBody>
-      </p:sp>
-      <p:sp>
-        <p:nvSpPr>
-          <p:cNvPr id="17" name="직사각형 16"/>
-          <p:cNvSpPr/>
-          <p:nvPr/>
-        </p:nvSpPr>
-        <p:spPr>
-          <a:xfrm>
-            <a:off x="4182257" y="2879243"/>
-            <a:ext cx="1069848" cy="411480"/>
-          </a:xfrm>
-          <a:prstGeom prst="rect">
-            <a:avLst/>
-          </a:prstGeom>
-          <a:noFill/>
-          <a:ln>
-            <a:noFill/>
-          </a:ln>
-        </p:spPr>
-        <p:style>
-          <a:lnRef idx="2">
-            <a:schemeClr val="accent1">
-              <a:shade val="50000"/>
-            </a:schemeClr>
-          </a:lnRef>
-          <a:fillRef idx="1">
-            <a:schemeClr val="accent1"/>
-          </a:fillRef>
-          <a:effectRef idx="0">
-            <a:schemeClr val="accent1"/>
-          </a:effectRef>
-          <a:fontRef idx="minor">
-            <a:schemeClr val="lt1"/>
-          </a:fontRef>
-        </p:style>
-        <p:txBody>
-          <a:bodyPr rtlCol="0" anchor="ctr"/>
-          <a:lstStyle/>
-          <a:p>
-            <a:pPr algn="ctr"/>
-            <a:r>
-              <a:rPr lang="ko-KR" altLang="en-US" sz="1000">
-                <a:solidFill>
-                  <a:schemeClr val="bg1"/>
-                </a:solidFill>
-              </a:rPr>
-              <a:t>선의 강제 징집</a:t>
-            </a:r>
-          </a:p>
-        </p:txBody>
-      </p:sp>
-      <p:sp>
-        <p:nvSpPr>
-          <p:cNvPr id="18" name="직사각형 17"/>
-          <p:cNvSpPr/>
-          <p:nvPr/>
-        </p:nvSpPr>
-        <p:spPr>
-          <a:xfrm>
-            <a:off x="4253689" y="1970805"/>
-            <a:ext cx="1069848" cy="411480"/>
-          </a:xfrm>
-          <a:prstGeom prst="rect">
-            <a:avLst/>
-          </a:prstGeom>
-          <a:noFill/>
-          <a:ln>
-            <a:noFill/>
-          </a:ln>
-        </p:spPr>
-        <p:style>
-          <a:lnRef idx="2">
-            <a:schemeClr val="accent1">
-              <a:shade val="50000"/>
-            </a:schemeClr>
-          </a:lnRef>
-          <a:fillRef idx="1">
-            <a:schemeClr val="accent1"/>
-          </a:fillRef>
-          <a:effectRef idx="0">
-            <a:schemeClr val="accent1"/>
-          </a:effectRef>
-          <a:fontRef idx="minor">
-            <a:schemeClr val="lt1"/>
-          </a:fontRef>
-        </p:style>
-        <p:txBody>
-          <a:bodyPr rtlCol="0" anchor="ctr"/>
-          <a:lstStyle/>
-          <a:p>
-            <a:pPr algn="ctr"/>
-            <a:r>
-              <a:rPr lang="ko-KR" altLang="en-US" sz="1000" dirty="0">
-                <a:solidFill>
-                  <a:schemeClr val="bg1"/>
-                </a:solidFill>
-              </a:rPr>
-              <a:t>동생의 한마디</a:t>
-            </a:r>
-          </a:p>
-        </p:txBody>
-      </p:sp>
-      <p:sp>
-        <p:nvSpPr>
-          <p:cNvPr id="19" name="직사각형 18"/>
-          <p:cNvSpPr/>
-          <p:nvPr/>
-        </p:nvSpPr>
-        <p:spPr>
-          <a:xfrm>
-            <a:off x="1188432" y="1597567"/>
-            <a:ext cx="1069848" cy="411480"/>
-          </a:xfrm>
-          <a:prstGeom prst="rect">
-            <a:avLst/>
-          </a:prstGeom>
-          <a:noFill/>
-          <a:ln>
-            <a:noFill/>
-          </a:ln>
-        </p:spPr>
-        <p:style>
-          <a:lnRef idx="2">
-            <a:schemeClr val="accent1">
-              <a:shade val="50000"/>
-            </a:schemeClr>
-          </a:lnRef>
-          <a:fillRef idx="1">
-            <a:schemeClr val="accent1"/>
-          </a:fillRef>
-          <a:effectRef idx="0">
-            <a:schemeClr val="accent1"/>
-          </a:effectRef>
-          <a:fontRef idx="minor">
-            <a:schemeClr val="lt1"/>
-          </a:fontRef>
-        </p:style>
-        <p:txBody>
-          <a:bodyPr rtlCol="0" anchor="ctr"/>
-          <a:lstStyle/>
-          <a:p>
-            <a:pPr algn="ctr"/>
-            <a:r>
-              <a:rPr lang="ko-KR" altLang="en-US" sz="1000">
-                <a:solidFill>
-                  <a:schemeClr val="bg1"/>
-                </a:solidFill>
-              </a:rPr>
-              <a:t>무한의 역설</a:t>
-            </a:r>
-          </a:p>
-        </p:txBody>
-      </p:sp>
-      <p:sp>
-        <p:nvSpPr>
-          <p:cNvPr id="20" name="직사각형 19"/>
-          <p:cNvSpPr/>
-          <p:nvPr/>
-        </p:nvSpPr>
-        <p:spPr>
-          <a:xfrm>
-            <a:off x="1351212" y="3429000"/>
-            <a:ext cx="1069848" cy="411480"/>
-          </a:xfrm>
-          <a:prstGeom prst="rect">
-            <a:avLst/>
-          </a:prstGeom>
-          <a:noFill/>
-          <a:ln>
-            <a:noFill/>
-          </a:ln>
-        </p:spPr>
-        <p:style>
-          <a:lnRef idx="2">
-            <a:schemeClr val="accent1">
-              <a:shade val="50000"/>
-            </a:schemeClr>
-          </a:lnRef>
-          <a:fillRef idx="1">
-            <a:schemeClr val="accent1"/>
-          </a:fillRef>
-          <a:effectRef idx="0">
-            <a:schemeClr val="accent1"/>
-          </a:effectRef>
-          <a:fontRef idx="minor">
-            <a:schemeClr val="lt1"/>
-          </a:fontRef>
-        </p:style>
-        <p:txBody>
-          <a:bodyPr rtlCol="0" anchor="ctr"/>
-          <a:lstStyle/>
-          <a:p>
-            <a:pPr algn="ctr"/>
-            <a:r>
-              <a:rPr lang="ko-KR" altLang="en-US" sz="1000">
-                <a:solidFill>
-                  <a:schemeClr val="bg1"/>
-                </a:solidFill>
-              </a:rPr>
-              <a:t>마지막 선택</a:t>
-            </a:r>
-          </a:p>
-        </p:txBody>
-      </p:sp>
-      <p:sp>
-        <p:nvSpPr>
-          <p:cNvPr id="21" name="직사각형 20"/>
-          <p:cNvSpPr/>
-          <p:nvPr/>
-        </p:nvSpPr>
-        <p:spPr>
-          <a:xfrm>
-            <a:off x="2597020" y="3613824"/>
-            <a:ext cx="1069848" cy="411480"/>
-          </a:xfrm>
-          <a:prstGeom prst="rect">
-            <a:avLst/>
-          </a:prstGeom>
-          <a:noFill/>
-          <a:ln>
-            <a:noFill/>
-          </a:ln>
-        </p:spPr>
-        <p:style>
-          <a:lnRef idx="2">
-            <a:schemeClr val="accent1">
-              <a:shade val="50000"/>
-            </a:schemeClr>
-          </a:lnRef>
-          <a:fillRef idx="1">
-            <a:schemeClr val="accent1"/>
-          </a:fillRef>
-          <a:effectRef idx="0">
-            <a:schemeClr val="accent1"/>
-          </a:effectRef>
-          <a:fontRef idx="minor">
-            <a:schemeClr val="lt1"/>
-          </a:fontRef>
-        </p:style>
-        <p:txBody>
-          <a:bodyPr rtlCol="0" anchor="ctr"/>
-          <a:lstStyle/>
-          <a:p>
-            <a:pPr algn="ctr"/>
-            <a:r>
-              <a:rPr lang="ko-KR" altLang="en-US" sz="1000">
-                <a:solidFill>
-                  <a:schemeClr val="bg1"/>
-                </a:solidFill>
-              </a:rPr>
-              <a:t>거절</a:t>
-            </a:r>
-          </a:p>
-        </p:txBody>
-      </p:sp>
-      <p:sp>
-        <p:nvSpPr>
-          <p:cNvPr id="2" name="화살표: 오각형 1">
-            <a:extLst>
-              <a:ext uri="{FF2B5EF4-FFF2-40B4-BE49-F238E27FC236}">
-                <a16:creationId xmlns:a16="http://schemas.microsoft.com/office/drawing/2014/main" id="{343F3A70-89A0-C5C5-7107-AB9C8A3A4728}"/>
-              </a:ext>
-            </a:extLst>
-          </p:cNvPr>
-          <p:cNvSpPr/>
-          <p:nvPr/>
-        </p:nvSpPr>
-        <p:spPr>
-          <a:xfrm>
-            <a:off x="396579" y="6227806"/>
-            <a:ext cx="1069848" cy="411481"/>
-          </a:xfrm>
-          <a:prstGeom prst="homePlate">
-            <a:avLst/>
-          </a:prstGeom>
-          <a:solidFill>
-            <a:srgbClr val="FAEBA0"/>
-          </a:solidFill>
-        </p:spPr>
-        <p:style>
-          <a:lnRef idx="2">
-            <a:schemeClr val="accent1">
-              <a:shade val="15000"/>
-            </a:schemeClr>
-          </a:lnRef>
-          <a:fillRef idx="1">
-            <a:schemeClr val="accent1"/>
-          </a:fillRef>
-          <a:effectRef idx="0">
-            <a:schemeClr val="accent1"/>
-          </a:effectRef>
-          <a:fontRef idx="minor">
-            <a:schemeClr val="lt1"/>
-          </a:fontRef>
-        </p:style>
-        <p:txBody>
-          <a:bodyPr rtlCol="0" anchor="ctr"/>
-          <a:lstStyle/>
-          <a:p>
-            <a:pPr algn="ctr"/>
-            <a:endParaRPr lang="ko-KR" altLang="en-US" dirty="0"/>
-          </a:p>
-        </p:txBody>
-      </p:sp>
-      <p:sp>
-        <p:nvSpPr>
-          <p:cNvPr id="38" name="직사각형 37">
-            <a:extLst>
-              <a:ext uri="{FF2B5EF4-FFF2-40B4-BE49-F238E27FC236}">
-                <a16:creationId xmlns:a16="http://schemas.microsoft.com/office/drawing/2014/main" id="{4A4014F0-BAF8-8A49-0B9A-48833BDB1F43}"/>
-              </a:ext>
-            </a:extLst>
-          </p:cNvPr>
-          <p:cNvSpPr/>
-          <p:nvPr/>
-        </p:nvSpPr>
-        <p:spPr>
-          <a:xfrm>
-            <a:off x="4607353" y="1433114"/>
-            <a:ext cx="1069848" cy="411480"/>
-          </a:xfrm>
-          <a:prstGeom prst="rect">
-            <a:avLst/>
-          </a:prstGeom>
-          <a:noFill/>
-          <a:ln>
-            <a:noFill/>
-          </a:ln>
-        </p:spPr>
-        <p:style>
-          <a:lnRef idx="2">
-            <a:schemeClr val="accent1">
-              <a:shade val="50000"/>
-            </a:schemeClr>
-          </a:lnRef>
-          <a:fillRef idx="1">
-            <a:schemeClr val="accent1"/>
-          </a:fillRef>
-          <a:effectRef idx="0">
-            <a:schemeClr val="accent1"/>
-          </a:effectRef>
-          <a:fontRef idx="minor">
-            <a:schemeClr val="lt1"/>
-          </a:fontRef>
-        </p:style>
-        <p:txBody>
-          <a:bodyPr rtlCol="0" anchor="ctr"/>
-          <a:lstStyle/>
-          <a:p>
-            <a:pPr algn="ctr"/>
-            <a:r>
-              <a:rPr lang="ko-KR" altLang="en-US" sz="1000" dirty="0">
-                <a:solidFill>
-                  <a:schemeClr val="bg1"/>
-                </a:solidFill>
-              </a:rPr>
-              <a:t>영웅 산업</a:t>
-            </a:r>
-          </a:p>
-        </p:txBody>
-      </p:sp>
-    </p:spTree>
-    <p:extLst>
-      <p:ext uri="{BB962C8B-B14F-4D97-AF65-F5344CB8AC3E}">
-        <p14:creationId xmlns:p14="http://schemas.microsoft.com/office/powerpoint/2010/main" val="2334041143"/>
-      </p:ext>
-    </p:extLst>
-  </p:cSld>
-  <p:clrMapOvr>
-    <a:masterClrMapping/>
-  </p:clrMapOvr>
-</p:sld>
-</file>
-
-<file path=ppt/slides/slide3.xml><?xml version="1.0" encoding="utf-8"?>
-<p:sld xmlns:a="http://schemas.openxmlformats.org/drawingml/2006/main" xmlns:r="http://schemas.openxmlformats.org/officeDocument/2006/relationships" xmlns:p="http://schemas.openxmlformats.org/presentationml/2006/main">
-  <p:cSld>
     <p:bg>
       <p:bgPr>
         <a:solidFill>
@@ -7327,7 +5832,7 @@
         </p:nvSpPr>
         <p:spPr>
           <a:xfrm>
-            <a:off x="3094090" y="5833665"/>
+            <a:off x="3086478" y="5376492"/>
             <a:ext cx="1123360" cy="297092"/>
           </a:xfrm>
           <a:prstGeom prst="homePlate">
@@ -7417,7 +5922,7 @@
         </p:nvSpPr>
         <p:spPr>
           <a:xfrm>
-            <a:off x="3765730" y="6315917"/>
+            <a:off x="3783580" y="5933214"/>
             <a:ext cx="1069848" cy="297092"/>
           </a:xfrm>
           <a:prstGeom prst="homePlate">
@@ -7524,8 +6029,8 @@
         </p:nvCxnSpPr>
         <p:spPr>
           <a:xfrm rot="5400000" flipH="1" flipV="1">
-            <a:off x="2854066" y="6075894"/>
-            <a:ext cx="333706" cy="146341"/>
+            <a:off x="2621674" y="5851114"/>
+            <a:ext cx="790879" cy="138729"/>
           </a:xfrm>
           <a:prstGeom prst="bentConnector2">
             <a:avLst/>
@@ -7570,8 +6075,8 @@
         </p:nvCxnSpPr>
         <p:spPr>
           <a:xfrm>
-            <a:off x="4217450" y="5982211"/>
-            <a:ext cx="8931" cy="333706"/>
+            <a:off x="4209838" y="5525038"/>
+            <a:ext cx="34393" cy="408176"/>
           </a:xfrm>
           <a:prstGeom prst="bentConnector2">
             <a:avLst/>
@@ -7612,7 +6117,7 @@
         </p:nvSpPr>
         <p:spPr>
           <a:xfrm>
-            <a:off x="4935942" y="6315917"/>
+            <a:off x="5606202" y="4045486"/>
             <a:ext cx="1069848" cy="297092"/>
           </a:xfrm>
           <a:prstGeom prst="homePlate">
@@ -7895,18 +6400,20 @@
           </p:cNvPr>
           <p:cNvCxnSpPr>
             <a:cxnSpLocks/>
-            <a:stCxn id="54" idx="0"/>
             <a:endCxn id="55" idx="1"/>
           </p:cNvCxnSpPr>
           <p:nvPr/>
         </p:nvCxnSpPr>
         <p:spPr>
-          <a:xfrm rot="5400000" flipH="1" flipV="1">
-            <a:off x="5316288" y="6062516"/>
-            <a:ext cx="333706" cy="173097"/>
-          </a:xfrm>
-          <a:prstGeom prst="bentConnector2">
-            <a:avLst/>
+          <a:xfrm rot="5400000">
+            <a:off x="5025594" y="4965814"/>
+            <a:ext cx="1560494" cy="472301"/>
+          </a:xfrm>
+          <a:prstGeom prst="bentConnector4">
+            <a:avLst>
+              <a:gd name="adj1" fmla="val 45240"/>
+              <a:gd name="adj2" fmla="val 148401"/>
+            </a:avLst>
           </a:prstGeom>
           <a:ln w="19050">
             <a:solidFill>
@@ -8590,68 +7097,6 @@
       </p:sp>
       <p:sp>
         <p:nvSpPr>
-          <p:cNvPr id="89" name="생각 풍선: 구름 모양 88">
-            <a:extLst>
-              <a:ext uri="{FF2B5EF4-FFF2-40B4-BE49-F238E27FC236}">
-                <a16:creationId xmlns:a16="http://schemas.microsoft.com/office/drawing/2014/main" id="{0EBC7D41-1B75-4405-892F-02116D9A967C}"/>
-              </a:ext>
-            </a:extLst>
-          </p:cNvPr>
-          <p:cNvSpPr/>
-          <p:nvPr/>
-        </p:nvSpPr>
-        <p:spPr>
-          <a:xfrm>
-            <a:off x="9204288" y="215365"/>
-            <a:ext cx="1262254" cy="411480"/>
-          </a:xfrm>
-          <a:prstGeom prst="cloudCallout">
-            <a:avLst/>
-          </a:prstGeom>
-          <a:solidFill>
-            <a:schemeClr val="bg1"/>
-          </a:solidFill>
-          <a:ln>
-            <a:noFill/>
-          </a:ln>
-          <a:effectLst>
-            <a:softEdge rad="25400"/>
-          </a:effectLst>
-        </p:spPr>
-        <p:style>
-          <a:lnRef idx="2">
-            <a:schemeClr val="accent1">
-              <a:shade val="50000"/>
-            </a:schemeClr>
-          </a:lnRef>
-          <a:fillRef idx="1">
-            <a:schemeClr val="accent1"/>
-          </a:fillRef>
-          <a:effectRef idx="0">
-            <a:schemeClr val="accent1"/>
-          </a:effectRef>
-          <a:fontRef idx="minor">
-            <a:schemeClr val="lt1"/>
-          </a:fontRef>
-        </p:style>
-        <p:txBody>
-          <a:bodyPr rtlCol="0" anchor="ctr"/>
-          <a:lstStyle/>
-          <a:p>
-            <a:pPr algn="ctr"/>
-            <a:r>
-              <a:rPr lang="ko-KR" altLang="en-US" sz="1000" dirty="0">
-                <a:solidFill>
-                  <a:schemeClr val="tx1"/>
-                </a:solidFill>
-              </a:rPr>
-              <a:t>강제 징집</a:t>
-            </a:r>
-          </a:p>
-        </p:txBody>
-      </p:sp>
-      <p:sp>
-        <p:nvSpPr>
           <p:cNvPr id="91" name="직사각형 90">
             <a:extLst>
               <a:ext uri="{FF2B5EF4-FFF2-40B4-BE49-F238E27FC236}">
@@ -8946,17 +7391,19 @@
           </p:cNvPr>
           <p:cNvCxnSpPr>
             <a:cxnSpLocks/>
+            <a:stCxn id="47" idx="3"/>
+            <a:endCxn id="54" idx="1"/>
           </p:cNvCxnSpPr>
           <p:nvPr/>
         </p:nvCxnSpPr>
         <p:spPr>
-          <a:xfrm rot="16200000" flipH="1">
-            <a:off x="4804412" y="6039839"/>
-            <a:ext cx="5428" cy="1161490"/>
+          <a:xfrm flipV="1">
+            <a:off x="4853428" y="4194032"/>
+            <a:ext cx="752774" cy="1887728"/>
           </a:xfrm>
           <a:prstGeom prst="bentConnector3">
             <a:avLst>
-              <a:gd name="adj1" fmla="val 2219510"/>
+              <a:gd name="adj1" fmla="val 50000"/>
             </a:avLst>
           </a:prstGeom>
           <a:ln w="19050">
@@ -9027,6 +7474,68 @@
           </a:fontRef>
         </p:style>
       </p:cxnSp>
+      <p:sp>
+        <p:nvSpPr>
+          <p:cNvPr id="59" name="직사각형 58">
+            <a:extLst>
+              <a:ext uri="{FF2B5EF4-FFF2-40B4-BE49-F238E27FC236}">
+                <a16:creationId xmlns:a16="http://schemas.microsoft.com/office/drawing/2014/main" id="{0A5A3AF7-5731-8BDD-2C11-8F2E1CB81D7E}"/>
+              </a:ext>
+            </a:extLst>
+          </p:cNvPr>
+          <p:cNvSpPr/>
+          <p:nvPr/>
+        </p:nvSpPr>
+        <p:spPr>
+          <a:xfrm>
+            <a:off x="8967046" y="321870"/>
+            <a:ext cx="1702601" cy="411480"/>
+          </a:xfrm>
+          <a:prstGeom prst="rect">
+            <a:avLst/>
+          </a:prstGeom>
+          <a:noFill/>
+          <a:ln>
+            <a:noFill/>
+          </a:ln>
+        </p:spPr>
+        <p:style>
+          <a:lnRef idx="2">
+            <a:schemeClr val="accent1">
+              <a:shade val="50000"/>
+            </a:schemeClr>
+          </a:lnRef>
+          <a:fillRef idx="1">
+            <a:schemeClr val="accent1"/>
+          </a:fillRef>
+          <a:effectRef idx="0">
+            <a:schemeClr val="accent1"/>
+          </a:effectRef>
+          <a:fontRef idx="minor">
+            <a:schemeClr val="lt1"/>
+          </a:fontRef>
+        </p:style>
+        <p:txBody>
+          <a:bodyPr rtlCol="0" anchor="ctr"/>
+          <a:lstStyle/>
+          <a:p>
+            <a:pPr algn="ctr"/>
+            <a:r>
+              <a:rPr lang="ko-KR" altLang="en-US" sz="1000" smtClean="0">
+                <a:solidFill>
+                  <a:schemeClr val="bg1"/>
+                </a:solidFill>
+              </a:rPr>
+              <a:t>강제 징집</a:t>
+            </a:r>
+            <a:endParaRPr lang="ko-KR" altLang="en-US" sz="1000" dirty="0">
+              <a:solidFill>
+                <a:schemeClr val="bg1"/>
+              </a:solidFill>
+            </a:endParaRPr>
+          </a:p>
+        </p:txBody>
+      </p:sp>
     </p:spTree>
     <p:extLst>
       <p:ext uri="{BB962C8B-B14F-4D97-AF65-F5344CB8AC3E}">
@@ -9291,7 +7800,47 @@
       </a:bgFillStyleLst>
     </a:fmtScheme>
   </a:themeElements>
-  <a:objectDefaults/>
+  <a:objectDefaults>
+    <a:spDef>
+      <a:spPr>
+        <a:solidFill>
+          <a:schemeClr val="bg1"/>
+        </a:solidFill>
+        <a:ln>
+          <a:noFill/>
+        </a:ln>
+        <a:effectLst>
+          <a:softEdge rad="25400"/>
+        </a:effectLst>
+      </a:spPr>
+      <a:bodyPr rtlCol="0" anchor="ctr"/>
+      <a:lstStyle>
+        <a:defPPr algn="ctr">
+          <a:defRPr sz="1000" dirty="0">
+            <a:solidFill>
+              <a:schemeClr val="tx1"/>
+            </a:solidFill>
+          </a:defRPr>
+        </a:defPPr>
+      </a:lstStyle>
+      <a:style>
+        <a:lnRef idx="2">
+          <a:schemeClr val="accent1">
+            <a:shade val="50000"/>
+          </a:schemeClr>
+        </a:lnRef>
+        <a:fillRef idx="1">
+          <a:schemeClr val="accent1"/>
+        </a:fillRef>
+        <a:effectRef idx="0">
+          <a:schemeClr val="accent1"/>
+        </a:effectRef>
+        <a:fontRef idx="minor">
+          <a:schemeClr val="lt1"/>
+        </a:fontRef>
+      </a:style>
+    </a:spDef>
+  </a:objectDefaults>
   <a:extraClrSchemeLst/>
   <a:extLst>
     <a:ext uri="{05A4C25C-085E-4340-85A3-A5531E510DB2}">

--- a/[실습](3.27) 상황의 기차칸.pptx
+++ b/[실습](3.27) 상황의 기차칸.pptx
@@ -750,7 +750,7 @@
           <a:p>
             <a:fld id="{00232D13-99AA-4636-90AA-800F69AD8C37}" type="datetimeFigureOut">
               <a:rPr lang="ko-KR" altLang="en-US" smtClean="0"/>
-              <a:t>2026-03-30</a:t>
+              <a:t>2026-03-31</a:t>
             </a:fld>
             <a:endParaRPr lang="ko-KR" altLang="en-US"/>
           </a:p>
@@ -1230,7 +1230,7 @@
           <a:p>
             <a:fld id="{1F511268-C062-4462-9948-2814E8F03C39}" type="datetimeFigureOut">
               <a:rPr lang="ko-KR" altLang="en-US" smtClean="0"/>
-              <a:t>2026-03-30</a:t>
+              <a:t>2026-03-31</a:t>
             </a:fld>
             <a:endParaRPr lang="ko-KR" altLang="en-US"/>
           </a:p>
@@ -1398,7 +1398,7 @@
           <a:p>
             <a:fld id="{1F511268-C062-4462-9948-2814E8F03C39}" type="datetimeFigureOut">
               <a:rPr lang="ko-KR" altLang="en-US" smtClean="0"/>
-              <a:t>2026-03-30</a:t>
+              <a:t>2026-03-31</a:t>
             </a:fld>
             <a:endParaRPr lang="ko-KR" altLang="en-US"/>
           </a:p>
@@ -1576,7 +1576,7 @@
           <a:p>
             <a:fld id="{1F511268-C062-4462-9948-2814E8F03C39}" type="datetimeFigureOut">
               <a:rPr lang="ko-KR" altLang="en-US" smtClean="0"/>
-              <a:t>2026-03-30</a:t>
+              <a:t>2026-03-31</a:t>
             </a:fld>
             <a:endParaRPr lang="ko-KR" altLang="en-US"/>
           </a:p>
@@ -1744,7 +1744,7 @@
           <a:p>
             <a:fld id="{1F511268-C062-4462-9948-2814E8F03C39}" type="datetimeFigureOut">
               <a:rPr lang="ko-KR" altLang="en-US" smtClean="0"/>
-              <a:t>2026-03-30</a:t>
+              <a:t>2026-03-31</a:t>
             </a:fld>
             <a:endParaRPr lang="ko-KR" altLang="en-US"/>
           </a:p>
@@ -1989,7 +1989,7 @@
           <a:p>
             <a:fld id="{1F511268-C062-4462-9948-2814E8F03C39}" type="datetimeFigureOut">
               <a:rPr lang="ko-KR" altLang="en-US" smtClean="0"/>
-              <a:t>2026-03-30</a:t>
+              <a:t>2026-03-31</a:t>
             </a:fld>
             <a:endParaRPr lang="ko-KR" altLang="en-US"/>
           </a:p>
@@ -2218,7 +2218,7 @@
           <a:p>
             <a:fld id="{1F511268-C062-4462-9948-2814E8F03C39}" type="datetimeFigureOut">
               <a:rPr lang="ko-KR" altLang="en-US" smtClean="0"/>
-              <a:t>2026-03-30</a:t>
+              <a:t>2026-03-31</a:t>
             </a:fld>
             <a:endParaRPr lang="ko-KR" altLang="en-US"/>
           </a:p>
@@ -2582,7 +2582,7 @@
           <a:p>
             <a:fld id="{1F511268-C062-4462-9948-2814E8F03C39}" type="datetimeFigureOut">
               <a:rPr lang="ko-KR" altLang="en-US" smtClean="0"/>
-              <a:t>2026-03-30</a:t>
+              <a:t>2026-03-31</a:t>
             </a:fld>
             <a:endParaRPr lang="ko-KR" altLang="en-US"/>
           </a:p>
@@ -2699,7 +2699,7 @@
           <a:p>
             <a:fld id="{1F511268-C062-4462-9948-2814E8F03C39}" type="datetimeFigureOut">
               <a:rPr lang="ko-KR" altLang="en-US" smtClean="0"/>
-              <a:t>2026-03-30</a:t>
+              <a:t>2026-03-31</a:t>
             </a:fld>
             <a:endParaRPr lang="ko-KR" altLang="en-US"/>
           </a:p>
@@ -2794,7 +2794,7 @@
           <a:p>
             <a:fld id="{1F511268-C062-4462-9948-2814E8F03C39}" type="datetimeFigureOut">
               <a:rPr lang="ko-KR" altLang="en-US" smtClean="0"/>
-              <a:t>2026-03-30</a:t>
+              <a:t>2026-03-31</a:t>
             </a:fld>
             <a:endParaRPr lang="ko-KR" altLang="en-US"/>
           </a:p>
@@ -3069,7 +3069,7 @@
           <a:p>
             <a:fld id="{1F511268-C062-4462-9948-2814E8F03C39}" type="datetimeFigureOut">
               <a:rPr lang="ko-KR" altLang="en-US" smtClean="0"/>
-              <a:t>2026-03-30</a:t>
+              <a:t>2026-03-31</a:t>
             </a:fld>
             <a:endParaRPr lang="ko-KR" altLang="en-US"/>
           </a:p>
@@ -3321,7 +3321,7 @@
           <a:p>
             <a:fld id="{1F511268-C062-4462-9948-2814E8F03C39}" type="datetimeFigureOut">
               <a:rPr lang="ko-KR" altLang="en-US" smtClean="0"/>
-              <a:t>2026-03-30</a:t>
+              <a:t>2026-03-31</a:t>
             </a:fld>
             <a:endParaRPr lang="ko-KR" altLang="en-US"/>
           </a:p>
@@ -3532,7 +3532,7 @@
           <a:p>
             <a:fld id="{1F511268-C062-4462-9948-2814E8F03C39}" type="datetimeFigureOut">
               <a:rPr lang="ko-KR" altLang="en-US" smtClean="0"/>
-              <a:t>2026-03-30</a:t>
+              <a:t>2026-03-31</a:t>
             </a:fld>
             <a:endParaRPr lang="ko-KR" altLang="en-US"/>
           </a:p>
@@ -4350,7 +4350,7 @@
         </p:nvSpPr>
         <p:spPr>
           <a:xfrm>
-            <a:off x="2571723" y="1031909"/>
+            <a:off x="976647" y="432532"/>
             <a:ext cx="1069848" cy="411480"/>
           </a:xfrm>
           <a:prstGeom prst="rect">
@@ -4381,7 +4381,7 @@
           <a:bodyPr rtlCol="0" anchor="ctr"/>
           <a:lstStyle/>
           <a:p>
-            <a:pPr algn="ctr"/>
+            <a:pPr algn="just"/>
             <a:r>
               <a:rPr lang="ko-KR" altLang="en-US" sz="1000" dirty="0">
                 <a:solidFill>
@@ -4407,7 +4407,7 @@
         </p:nvSpPr>
         <p:spPr>
           <a:xfrm>
-            <a:off x="3867023" y="476360"/>
+            <a:off x="1901457" y="450113"/>
             <a:ext cx="1069848" cy="411480"/>
           </a:xfrm>
           <a:prstGeom prst="rect">
@@ -4438,7 +4438,7 @@
           <a:bodyPr rtlCol="0" anchor="ctr"/>
           <a:lstStyle/>
           <a:p>
-            <a:pPr algn="ctr"/>
+            <a:pPr algn="just"/>
             <a:r>
               <a:rPr lang="ko-KR" altLang="en-US" sz="1000" dirty="0">
                 <a:solidFill>
@@ -4464,7 +4464,7 @@
         </p:nvSpPr>
         <p:spPr>
           <a:xfrm>
-            <a:off x="6072360" y="610155"/>
+            <a:off x="3149428" y="447144"/>
             <a:ext cx="1069848" cy="411480"/>
           </a:xfrm>
           <a:prstGeom prst="rect">
@@ -4495,7 +4495,7 @@
           <a:bodyPr rtlCol="0" anchor="ctr"/>
           <a:lstStyle/>
           <a:p>
-            <a:pPr algn="ctr"/>
+            <a:pPr algn="just"/>
             <a:r>
               <a:rPr lang="ko-KR" altLang="en-US" sz="1000" dirty="0">
                 <a:solidFill>
@@ -4521,7 +4521,7 @@
         </p:nvSpPr>
         <p:spPr>
           <a:xfrm>
-            <a:off x="1783779" y="333102"/>
+            <a:off x="114822" y="439360"/>
             <a:ext cx="1361488" cy="411480"/>
           </a:xfrm>
           <a:prstGeom prst="rect">
@@ -4552,7 +4552,7 @@
           <a:bodyPr rtlCol="0" anchor="ctr"/>
           <a:lstStyle/>
           <a:p>
-            <a:pPr algn="ctr"/>
+            <a:pPr algn="just"/>
             <a:r>
               <a:rPr lang="ko-KR" altLang="en-US" sz="1000" dirty="0">
                 <a:solidFill>
@@ -4578,7 +4578,7 @@
         </p:nvSpPr>
         <p:spPr>
           <a:xfrm>
-            <a:off x="7467767" y="610155"/>
+            <a:off x="4424057" y="447144"/>
             <a:ext cx="1702601" cy="411480"/>
           </a:xfrm>
           <a:prstGeom prst="rect">
@@ -4609,7 +4609,7 @@
           <a:bodyPr rtlCol="0" anchor="ctr"/>
           <a:lstStyle/>
           <a:p>
-            <a:pPr algn="ctr"/>
+            <a:pPr algn="just"/>
             <a:r>
               <a:rPr lang="ko-KR" altLang="en-US" sz="1000" dirty="0">
                 <a:solidFill>
@@ -4635,7 +4635,7 @@
         </p:nvSpPr>
         <p:spPr>
           <a:xfrm>
-            <a:off x="3230806" y="1582033"/>
+            <a:off x="976647" y="1525091"/>
             <a:ext cx="1069848" cy="411480"/>
           </a:xfrm>
           <a:prstGeom prst="rect">
@@ -4666,7 +4666,7 @@
           <a:bodyPr rtlCol="0" anchor="ctr"/>
           <a:lstStyle/>
           <a:p>
-            <a:pPr algn="ctr"/>
+            <a:pPr algn="just"/>
             <a:r>
               <a:rPr lang="ko-KR" altLang="en-US" sz="1000" dirty="0">
                 <a:solidFill>
@@ -4692,7 +4692,7 @@
         </p:nvSpPr>
         <p:spPr>
           <a:xfrm>
-            <a:off x="2734743" y="2894462"/>
+            <a:off x="6039211" y="450382"/>
             <a:ext cx="1262254" cy="411480"/>
           </a:xfrm>
           <a:prstGeom prst="rect">
@@ -4723,7 +4723,7 @@
           <a:bodyPr rtlCol="0" anchor="ctr"/>
           <a:lstStyle/>
           <a:p>
-            <a:pPr algn="ctr"/>
+            <a:pPr algn="just"/>
             <a:r>
               <a:rPr lang="ko-KR" altLang="en-US" sz="1000" dirty="0">
                 <a:solidFill>
@@ -4749,7 +4749,7 @@
         </p:nvSpPr>
         <p:spPr>
           <a:xfrm>
-            <a:off x="5458488" y="2370604"/>
+            <a:off x="4415492" y="1877441"/>
             <a:ext cx="1069848" cy="411480"/>
           </a:xfrm>
           <a:prstGeom prst="rect">
@@ -4780,7 +4780,7 @@
           <a:bodyPr rtlCol="0" anchor="ctr"/>
           <a:lstStyle/>
           <a:p>
-            <a:pPr algn="ctr"/>
+            <a:pPr algn="just"/>
             <a:r>
               <a:rPr lang="ko-KR" altLang="en-US" sz="1000" dirty="0">
                 <a:solidFill>
@@ -4802,120 +4802,6 @@
                 <a:schemeClr val="bg1"/>
               </a:solidFill>
             </a:endParaRPr>
-          </a:p>
-        </p:txBody>
-      </p:sp>
-      <p:sp>
-        <p:nvSpPr>
-          <p:cNvPr id="16" name="직사각형 15">
-            <a:extLst>
-              <a:ext uri="{FF2B5EF4-FFF2-40B4-BE49-F238E27FC236}">
-                <a16:creationId xmlns:a16="http://schemas.microsoft.com/office/drawing/2014/main" id="{F5F303D5-2F6F-1585-A736-4F94BC3CC874}"/>
-              </a:ext>
-            </a:extLst>
-          </p:cNvPr>
-          <p:cNvSpPr/>
-          <p:nvPr/>
-        </p:nvSpPr>
-        <p:spPr>
-          <a:xfrm>
-            <a:off x="2421060" y="2355001"/>
-            <a:ext cx="1069848" cy="411480"/>
-          </a:xfrm>
-          <a:prstGeom prst="rect">
-            <a:avLst/>
-          </a:prstGeom>
-          <a:noFill/>
-          <a:ln>
-            <a:noFill/>
-          </a:ln>
-        </p:spPr>
-        <p:style>
-          <a:lnRef idx="2">
-            <a:schemeClr val="accent1">
-              <a:shade val="50000"/>
-            </a:schemeClr>
-          </a:lnRef>
-          <a:fillRef idx="1">
-            <a:schemeClr val="accent1"/>
-          </a:fillRef>
-          <a:effectRef idx="0">
-            <a:schemeClr val="accent1"/>
-          </a:effectRef>
-          <a:fontRef idx="minor">
-            <a:schemeClr val="lt1"/>
-          </a:fontRef>
-        </p:style>
-        <p:txBody>
-          <a:bodyPr rtlCol="0" anchor="ctr"/>
-          <a:lstStyle/>
-          <a:p>
-            <a:pPr algn="ctr"/>
-            <a:r>
-              <a:rPr lang="ko-KR" altLang="en-US" sz="1000" dirty="0">
-                <a:solidFill>
-                  <a:schemeClr val="bg1"/>
-                </a:solidFill>
-              </a:rPr>
-              <a:t>첫 붕괴</a:t>
-            </a:r>
-          </a:p>
-        </p:txBody>
-      </p:sp>
-      <p:sp>
-        <p:nvSpPr>
-          <p:cNvPr id="17" name="직사각형 16">
-            <a:extLst>
-              <a:ext uri="{FF2B5EF4-FFF2-40B4-BE49-F238E27FC236}">
-                <a16:creationId xmlns:a16="http://schemas.microsoft.com/office/drawing/2014/main" id="{C097B9AA-4B38-F750-705B-E419957719F2}"/>
-              </a:ext>
-            </a:extLst>
-          </p:cNvPr>
-          <p:cNvSpPr/>
-          <p:nvPr/>
-        </p:nvSpPr>
-        <p:spPr>
-          <a:xfrm>
-            <a:off x="4182257" y="2879243"/>
-            <a:ext cx="1069848" cy="411480"/>
-          </a:xfrm>
-          <a:prstGeom prst="rect">
-            <a:avLst/>
-          </a:prstGeom>
-          <a:noFill/>
-          <a:ln>
-            <a:noFill/>
-          </a:ln>
-        </p:spPr>
-        <p:style>
-          <a:lnRef idx="2">
-            <a:schemeClr val="accent1">
-              <a:shade val="50000"/>
-            </a:schemeClr>
-          </a:lnRef>
-          <a:fillRef idx="1">
-            <a:schemeClr val="accent1"/>
-          </a:fillRef>
-          <a:effectRef idx="0">
-            <a:schemeClr val="accent1"/>
-          </a:effectRef>
-          <a:fontRef idx="minor">
-            <a:schemeClr val="lt1"/>
-          </a:fontRef>
-        </p:style>
-        <p:txBody>
-          <a:bodyPr rtlCol="0" anchor="ctr"/>
-          <a:lstStyle/>
-          <a:p>
-            <a:pPr algn="ctr"/>
-            <a:r>
-              <a:rPr lang="ko-KR" altLang="en-US" sz="1000" dirty="0">
-                <a:solidFill>
-                  <a:schemeClr val="bg1"/>
-                </a:solidFill>
-              </a:rPr>
-              <a:t>선의 강제 징집</a:t>
-            </a:r>
           </a:p>
         </p:txBody>
       </p:sp>
@@ -4933,7 +4819,7 @@
         </p:nvSpPr>
         <p:spPr>
           <a:xfrm>
-            <a:off x="4253689" y="1970805"/>
+            <a:off x="6039952" y="1869904"/>
             <a:ext cx="1069848" cy="411480"/>
           </a:xfrm>
           <a:prstGeom prst="rect">
@@ -4964,7 +4850,7 @@
           <a:bodyPr rtlCol="0" anchor="ctr"/>
           <a:lstStyle/>
           <a:p>
-            <a:pPr algn="ctr"/>
+            <a:pPr algn="just"/>
             <a:r>
               <a:rPr lang="ko-KR" altLang="en-US" sz="1000" dirty="0">
                 <a:solidFill>
@@ -4972,63 +4858,6 @@
                 </a:solidFill>
               </a:rPr>
               <a:t>동생의 한마디</a:t>
-            </a:r>
-          </a:p>
-        </p:txBody>
-      </p:sp>
-      <p:sp>
-        <p:nvSpPr>
-          <p:cNvPr id="20" name="직사각형 19">
-            <a:extLst>
-              <a:ext uri="{FF2B5EF4-FFF2-40B4-BE49-F238E27FC236}">
-                <a16:creationId xmlns:a16="http://schemas.microsoft.com/office/drawing/2014/main" id="{AE514579-EFB6-D419-82FA-AF51F61CAE56}"/>
-              </a:ext>
-            </a:extLst>
-          </p:cNvPr>
-          <p:cNvSpPr/>
-          <p:nvPr/>
-        </p:nvSpPr>
-        <p:spPr>
-          <a:xfrm>
-            <a:off x="1351212" y="3429000"/>
-            <a:ext cx="1069848" cy="411480"/>
-          </a:xfrm>
-          <a:prstGeom prst="rect">
-            <a:avLst/>
-          </a:prstGeom>
-          <a:noFill/>
-          <a:ln>
-            <a:noFill/>
-          </a:ln>
-        </p:spPr>
-        <p:style>
-          <a:lnRef idx="2">
-            <a:schemeClr val="accent1">
-              <a:shade val="50000"/>
-            </a:schemeClr>
-          </a:lnRef>
-          <a:fillRef idx="1">
-            <a:schemeClr val="accent1"/>
-          </a:fillRef>
-          <a:effectRef idx="0">
-            <a:schemeClr val="accent1"/>
-          </a:effectRef>
-          <a:fontRef idx="minor">
-            <a:schemeClr val="lt1"/>
-          </a:fontRef>
-        </p:style>
-        <p:txBody>
-          <a:bodyPr rtlCol="0" anchor="ctr"/>
-          <a:lstStyle/>
-          <a:p>
-            <a:pPr algn="ctr"/>
-            <a:r>
-              <a:rPr lang="ko-KR" altLang="en-US" sz="1000" dirty="0">
-                <a:solidFill>
-                  <a:schemeClr val="bg1"/>
-                </a:solidFill>
-              </a:rPr>
-              <a:t>마지막 선택</a:t>
             </a:r>
           </a:p>
         </p:txBody>
@@ -5047,7 +4876,7 @@
         </p:nvSpPr>
         <p:spPr>
           <a:xfrm>
-            <a:off x="4788613" y="1223582"/>
+            <a:off x="3157186" y="2191448"/>
             <a:ext cx="1069848" cy="411480"/>
           </a:xfrm>
           <a:prstGeom prst="rect">
@@ -5078,7 +4907,7 @@
           <a:bodyPr rtlCol="0" anchor="ctr"/>
           <a:lstStyle/>
           <a:p>
-            <a:pPr algn="ctr"/>
+            <a:pPr algn="just"/>
             <a:r>
               <a:rPr lang="ko-KR" altLang="en-US" sz="1000" dirty="0">
                 <a:solidFill>
@@ -5104,7 +4933,7 @@
         </p:nvSpPr>
         <p:spPr>
           <a:xfrm>
-            <a:off x="842792" y="2522975"/>
+            <a:off x="1822792" y="3955191"/>
             <a:ext cx="1069848" cy="411480"/>
           </a:xfrm>
           <a:prstGeom prst="rect">
@@ -5135,15 +4964,20 @@
           <a:bodyPr rtlCol="0" anchor="ctr"/>
           <a:lstStyle/>
           <a:p>
-            <a:pPr algn="ctr"/>
-            <a:r>
-              <a:rPr lang="ko-KR" altLang="en-US" sz="1000" dirty="0">
+            <a:pPr algn="just"/>
+            <a:r>
+              <a:rPr lang="ko-KR" altLang="en-US" sz="1000" smtClean="0">
                 <a:solidFill>
                   <a:schemeClr val="bg1"/>
                 </a:solidFill>
               </a:rPr>
-              <a:t>정서적 피난처</a:t>
-            </a:r>
+              <a:t>첫 번째 협력자</a:t>
+            </a:r>
+            <a:endParaRPr lang="ko-KR" altLang="en-US" sz="1000" dirty="0">
+              <a:solidFill>
+                <a:schemeClr val="bg1"/>
+              </a:solidFill>
+            </a:endParaRPr>
           </a:p>
         </p:txBody>
       </p:sp>
@@ -5161,7 +4995,7 @@
         </p:nvSpPr>
         <p:spPr>
           <a:xfrm>
-            <a:off x="547101" y="815895"/>
+            <a:off x="3146826" y="1528563"/>
             <a:ext cx="1069848" cy="411480"/>
           </a:xfrm>
           <a:prstGeom prst="rect">
@@ -5192,15 +5026,20 @@
           <a:bodyPr rtlCol="0" anchor="ctr"/>
           <a:lstStyle/>
           <a:p>
-            <a:pPr algn="ctr"/>
-            <a:r>
-              <a:rPr lang="ko-KR" altLang="en-US" sz="1000" dirty="0">
+            <a:pPr algn="just"/>
+            <a:r>
+              <a:rPr lang="ko-KR" altLang="en-US" sz="1000" smtClean="0">
                 <a:solidFill>
                   <a:schemeClr val="bg1"/>
                 </a:solidFill>
               </a:rPr>
-              <a:t>첫 번째 거절</a:t>
-            </a:r>
+              <a:t>거절</a:t>
+            </a:r>
+            <a:endParaRPr lang="ko-KR" altLang="en-US" sz="1000" dirty="0">
+              <a:solidFill>
+                <a:schemeClr val="bg1"/>
+              </a:solidFill>
+            </a:endParaRPr>
           </a:p>
         </p:txBody>
       </p:sp>
@@ -5218,7 +5057,7 @@
         </p:nvSpPr>
         <p:spPr>
           <a:xfrm>
-            <a:off x="1204864" y="1576585"/>
+            <a:off x="1896333" y="1531526"/>
             <a:ext cx="1069848" cy="411480"/>
           </a:xfrm>
           <a:prstGeom prst="rect">
@@ -5249,7 +5088,7 @@
           <a:bodyPr rtlCol="0" anchor="ctr"/>
           <a:lstStyle/>
           <a:p>
-            <a:pPr algn="ctr"/>
+            <a:pPr algn="just"/>
             <a:r>
               <a:rPr lang="ko-KR" altLang="en-US" sz="1000" dirty="0">
                 <a:solidFill>
@@ -5275,7 +5114,7 @@
         </p:nvSpPr>
         <p:spPr>
           <a:xfrm>
-            <a:off x="2713732" y="3733057"/>
+            <a:off x="8564781" y="439360"/>
             <a:ext cx="1069848" cy="411480"/>
           </a:xfrm>
           <a:prstGeom prst="rect">
@@ -5306,7 +5145,7 @@
           <a:bodyPr rtlCol="0" anchor="ctr"/>
           <a:lstStyle/>
           <a:p>
-            <a:pPr algn="ctr"/>
+            <a:pPr algn="just"/>
             <a:r>
               <a:rPr lang="ko-KR" altLang="en-US" sz="1000" dirty="0">
                 <a:solidFill>
@@ -6117,7 +5956,7 @@
         </p:nvSpPr>
         <p:spPr>
           <a:xfrm>
-            <a:off x="5606202" y="4045486"/>
+            <a:off x="5010695" y="6305030"/>
             <a:ext cx="1069848" cy="297092"/>
           </a:xfrm>
           <a:prstGeom prst="homePlate">
@@ -6223,7 +6062,7 @@
         </p:nvSpPr>
         <p:spPr>
           <a:xfrm>
-            <a:off x="5569690" y="5833665"/>
+            <a:off x="5699789" y="5116918"/>
             <a:ext cx="1069848" cy="297092"/>
           </a:xfrm>
           <a:prstGeom prst="homePlate">
@@ -6313,7 +6152,7 @@
         </p:nvSpPr>
         <p:spPr>
           <a:xfrm>
-            <a:off x="6214574" y="6315917"/>
+            <a:off x="6225272" y="4246465"/>
             <a:ext cx="1069848" cy="297092"/>
           </a:xfrm>
           <a:prstGeom prst="homePlate">
@@ -6400,20 +6239,18 @@
           </p:cNvPr>
           <p:cNvCxnSpPr>
             <a:cxnSpLocks/>
+            <a:stCxn id="54" idx="0"/>
             <a:endCxn id="55" idx="1"/>
           </p:cNvCxnSpPr>
           <p:nvPr/>
         </p:nvCxnSpPr>
         <p:spPr>
-          <a:xfrm rot="5400000">
-            <a:off x="5025594" y="4965814"/>
-            <a:ext cx="1560494" cy="472301"/>
-          </a:xfrm>
-          <a:prstGeom prst="bentConnector4">
-            <a:avLst>
-              <a:gd name="adj1" fmla="val 45240"/>
-              <a:gd name="adj2" fmla="val 148401"/>
-            </a:avLst>
+          <a:xfrm rot="5400000" flipH="1" flipV="1">
+            <a:off x="5065784" y="5671026"/>
+            <a:ext cx="1039566" cy="228443"/>
+          </a:xfrm>
+          <a:prstGeom prst="bentConnector2">
+            <a:avLst/>
           </a:prstGeom>
           <a:ln w="19050">
             <a:solidFill>
@@ -6448,18 +6285,20 @@
           </p:cNvPr>
           <p:cNvCxnSpPr>
             <a:cxnSpLocks/>
-            <a:stCxn id="55" idx="3"/>
+            <a:stCxn id="55" idx="0"/>
             <a:endCxn id="56" idx="0"/>
           </p:cNvCxnSpPr>
           <p:nvPr/>
         </p:nvCxnSpPr>
         <p:spPr>
-          <a:xfrm>
-            <a:off x="6639538" y="5982211"/>
-            <a:ext cx="35687" cy="333706"/>
-          </a:xfrm>
-          <a:prstGeom prst="bentConnector2">
-            <a:avLst/>
+          <a:xfrm rot="5400000" flipH="1" flipV="1">
+            <a:off x="5987955" y="4418951"/>
+            <a:ext cx="870453" cy="525483"/>
+          </a:xfrm>
+          <a:prstGeom prst="bentConnector3">
+            <a:avLst>
+              <a:gd name="adj1" fmla="val 126262"/>
+            </a:avLst>
           </a:prstGeom>
           <a:ln w="19050">
             <a:solidFill>
@@ -6497,7 +6336,7 @@
         </p:nvSpPr>
         <p:spPr>
           <a:xfrm>
-            <a:off x="7380526" y="6310488"/>
+            <a:off x="7543295" y="6331089"/>
             <a:ext cx="1069848" cy="297092"/>
           </a:xfrm>
           <a:prstGeom prst="homePlate">
@@ -6587,7 +6426,7 @@
         </p:nvSpPr>
         <p:spPr>
           <a:xfrm>
-            <a:off x="8014274" y="5828236"/>
+            <a:off x="8142657" y="4985022"/>
             <a:ext cx="1069848" cy="297092"/>
           </a:xfrm>
           <a:prstGeom prst="homePlate">
@@ -6677,7 +6516,7 @@
         </p:nvSpPr>
         <p:spPr>
           <a:xfrm>
-            <a:off x="8659158" y="6310488"/>
+            <a:off x="8707192" y="3290723"/>
             <a:ext cx="1069848" cy="297092"/>
           </a:xfrm>
           <a:prstGeom prst="homePlate">
@@ -6771,8 +6610,8 @@
         </p:nvCxnSpPr>
         <p:spPr>
           <a:xfrm rot="5400000" flipH="1" flipV="1">
-            <a:off x="7760872" y="6057087"/>
-            <a:ext cx="333706" cy="173097"/>
+            <a:off x="7474541" y="5662974"/>
+            <a:ext cx="1197521" cy="138711"/>
           </a:xfrm>
           <a:prstGeom prst="bentConnector2">
             <a:avLst/>
@@ -6810,17 +6649,65 @@
           </p:cNvPr>
           <p:cNvCxnSpPr>
             <a:cxnSpLocks/>
-            <a:stCxn id="68" idx="3"/>
+            <a:stCxn id="68" idx="0"/>
             <a:endCxn id="69" idx="0"/>
           </p:cNvCxnSpPr>
           <p:nvPr/>
         </p:nvCxnSpPr>
         <p:spPr>
+          <a:xfrm rot="5400000" flipH="1" flipV="1">
+            <a:off x="8038426" y="3855606"/>
+            <a:ext cx="1694299" cy="564535"/>
+          </a:xfrm>
+          <a:prstGeom prst="bentConnector3">
+            <a:avLst>
+              <a:gd name="adj1" fmla="val 113492"/>
+            </a:avLst>
+          </a:prstGeom>
+          <a:ln w="19050">
+            <a:solidFill>
+              <a:srgbClr val="FAEBA0"/>
+            </a:solidFill>
+            <a:tailEnd type="triangle"/>
+          </a:ln>
+        </p:spPr>
+        <p:style>
+          <a:lnRef idx="1">
+            <a:schemeClr val="accent1"/>
+          </a:lnRef>
+          <a:fillRef idx="0">
+            <a:schemeClr val="accent1"/>
+          </a:fillRef>
+          <a:effectRef idx="0">
+            <a:schemeClr val="accent1"/>
+          </a:effectRef>
+          <a:fontRef idx="minor">
+            <a:schemeClr val="tx1"/>
+          </a:fontRef>
+        </p:style>
+      </p:cxnSp>
+      <p:cxnSp>
+        <p:nvCxnSpPr>
+          <p:cNvPr id="84" name="직선 화살표 연결선 83">
+            <a:extLst>
+              <a:ext uri="{FF2B5EF4-FFF2-40B4-BE49-F238E27FC236}">
+                <a16:creationId xmlns:a16="http://schemas.microsoft.com/office/drawing/2014/main" id="{BADBD593-F14C-0FE6-82A5-BCC7AB757BEB}"/>
+              </a:ext>
+            </a:extLst>
+          </p:cNvPr>
+          <p:cNvCxnSpPr>
+            <a:cxnSpLocks/>
+            <a:stCxn id="69" idx="3"/>
+            <a:endCxn id="165" idx="1"/>
+          </p:cNvCxnSpPr>
+          <p:nvPr/>
+        </p:nvCxnSpPr>
+        <p:spPr>
           <a:xfrm>
-            <a:off x="9084122" y="5976782"/>
-            <a:ext cx="35687" cy="333706"/>
-          </a:xfrm>
-          <a:prstGeom prst="bentConnector2">
+            <a:off x="9777040" y="3439269"/>
+            <a:ext cx="149560" cy="5155"/>
+          </a:xfrm>
+          <a:prstGeom prst="straightConnector1">
             <a:avLst/>
           </a:prstGeom>
           <a:ln w="19050">
@@ -6847,7 +6734,1214 @@
       </p:cxnSp>
       <p:sp>
         <p:nvSpPr>
-          <p:cNvPr id="76" name="화살표: 오각형 75">
+          <p:cNvPr id="91" name="직사각형 90">
+            <a:extLst>
+              <a:ext uri="{FF2B5EF4-FFF2-40B4-BE49-F238E27FC236}">
+                <a16:creationId xmlns:a16="http://schemas.microsoft.com/office/drawing/2014/main" id="{0BACF5E8-B18E-E4F1-31F5-D15622A47334}"/>
+              </a:ext>
+            </a:extLst>
+          </p:cNvPr>
+          <p:cNvSpPr/>
+          <p:nvPr/>
+        </p:nvSpPr>
+        <p:spPr>
+          <a:xfrm>
+            <a:off x="6043564" y="1523025"/>
+            <a:ext cx="1262254" cy="411480"/>
+          </a:xfrm>
+          <a:prstGeom prst="rect">
+            <a:avLst/>
+          </a:prstGeom>
+          <a:noFill/>
+          <a:ln>
+            <a:noFill/>
+          </a:ln>
+        </p:spPr>
+        <p:style>
+          <a:lnRef idx="2">
+            <a:schemeClr val="accent1">
+              <a:shade val="50000"/>
+            </a:schemeClr>
+          </a:lnRef>
+          <a:fillRef idx="1">
+            <a:schemeClr val="accent1"/>
+          </a:fillRef>
+          <a:effectRef idx="0">
+            <a:schemeClr val="accent1"/>
+          </a:effectRef>
+          <a:fontRef idx="minor">
+            <a:schemeClr val="lt1"/>
+          </a:fontRef>
+        </p:style>
+        <p:txBody>
+          <a:bodyPr rtlCol="0" anchor="ctr"/>
+          <a:lstStyle/>
+          <a:p>
+            <a:pPr algn="just"/>
+            <a:r>
+              <a:rPr lang="ko-KR" altLang="en-US" sz="1000" dirty="0">
+                <a:solidFill>
+                  <a:schemeClr val="bg1"/>
+                </a:solidFill>
+              </a:rPr>
+              <a:t>구조 실패</a:t>
+            </a:r>
+          </a:p>
+        </p:txBody>
+      </p:sp>
+      <p:sp>
+        <p:nvSpPr>
+          <p:cNvPr id="92" name="직사각형 91">
+            <a:extLst>
+              <a:ext uri="{FF2B5EF4-FFF2-40B4-BE49-F238E27FC236}">
+                <a16:creationId xmlns:a16="http://schemas.microsoft.com/office/drawing/2014/main" id="{F1D86EC7-0B5D-E426-4A1E-96C0AD6369DC}"/>
+              </a:ext>
+            </a:extLst>
+          </p:cNvPr>
+          <p:cNvSpPr/>
+          <p:nvPr/>
+        </p:nvSpPr>
+        <p:spPr>
+          <a:xfrm>
+            <a:off x="3146826" y="1869904"/>
+            <a:ext cx="1262254" cy="411480"/>
+          </a:xfrm>
+          <a:prstGeom prst="rect">
+            <a:avLst/>
+          </a:prstGeom>
+          <a:noFill/>
+          <a:ln>
+            <a:noFill/>
+          </a:ln>
+        </p:spPr>
+        <p:style>
+          <a:lnRef idx="2">
+            <a:schemeClr val="accent1">
+              <a:shade val="50000"/>
+            </a:schemeClr>
+          </a:lnRef>
+          <a:fillRef idx="1">
+            <a:schemeClr val="accent1"/>
+          </a:fillRef>
+          <a:effectRef idx="0">
+            <a:schemeClr val="accent1"/>
+          </a:effectRef>
+          <a:fontRef idx="minor">
+            <a:schemeClr val="lt1"/>
+          </a:fontRef>
+        </p:style>
+        <p:txBody>
+          <a:bodyPr rtlCol="0" anchor="ctr"/>
+          <a:lstStyle/>
+          <a:p>
+            <a:pPr algn="just"/>
+            <a:r>
+              <a:rPr lang="ko-KR" altLang="en-US" sz="1000" dirty="0">
+                <a:solidFill>
+                  <a:schemeClr val="bg1"/>
+                </a:solidFill>
+              </a:rPr>
+              <a:t>선의 랭킹 시스템</a:t>
+            </a:r>
+          </a:p>
+        </p:txBody>
+      </p:sp>
+      <p:sp>
+        <p:nvSpPr>
+          <p:cNvPr id="93" name="직사각형 92">
+            <a:extLst>
+              <a:ext uri="{FF2B5EF4-FFF2-40B4-BE49-F238E27FC236}">
+                <a16:creationId xmlns:a16="http://schemas.microsoft.com/office/drawing/2014/main" id="{C7BEDFB0-C6B6-34D0-27F5-C9C042F80467}"/>
+              </a:ext>
+            </a:extLst>
+          </p:cNvPr>
+          <p:cNvSpPr/>
+          <p:nvPr/>
+        </p:nvSpPr>
+        <p:spPr>
+          <a:xfrm>
+            <a:off x="7230030" y="443893"/>
+            <a:ext cx="1262254" cy="411480"/>
+          </a:xfrm>
+          <a:prstGeom prst="rect">
+            <a:avLst/>
+          </a:prstGeom>
+          <a:noFill/>
+          <a:ln>
+            <a:noFill/>
+          </a:ln>
+        </p:spPr>
+        <p:style>
+          <a:lnRef idx="2">
+            <a:schemeClr val="accent1">
+              <a:shade val="50000"/>
+            </a:schemeClr>
+          </a:lnRef>
+          <a:fillRef idx="1">
+            <a:schemeClr val="accent1"/>
+          </a:fillRef>
+          <a:effectRef idx="0">
+            <a:schemeClr val="accent1"/>
+          </a:effectRef>
+          <a:fontRef idx="minor">
+            <a:schemeClr val="lt1"/>
+          </a:fontRef>
+        </p:style>
+        <p:txBody>
+          <a:bodyPr rtlCol="0" anchor="ctr"/>
+          <a:lstStyle/>
+          <a:p>
+            <a:pPr algn="just"/>
+            <a:r>
+              <a:rPr lang="ko-KR" altLang="en-US" sz="1000" dirty="0">
+                <a:solidFill>
+                  <a:schemeClr val="bg1"/>
+                </a:solidFill>
+              </a:rPr>
+              <a:t>괴물의 정체</a:t>
+            </a:r>
+          </a:p>
+        </p:txBody>
+      </p:sp>
+      <p:sp>
+        <p:nvSpPr>
+          <p:cNvPr id="95" name="직사각형 94">
+            <a:extLst>
+              <a:ext uri="{FF2B5EF4-FFF2-40B4-BE49-F238E27FC236}">
+                <a16:creationId xmlns:a16="http://schemas.microsoft.com/office/drawing/2014/main" id="{7CEE8659-536F-341A-1E79-4A146B933C78}"/>
+              </a:ext>
+            </a:extLst>
+          </p:cNvPr>
+          <p:cNvSpPr/>
+          <p:nvPr/>
+        </p:nvSpPr>
+        <p:spPr>
+          <a:xfrm>
+            <a:off x="7219679" y="1506467"/>
+            <a:ext cx="1262254" cy="411480"/>
+          </a:xfrm>
+          <a:prstGeom prst="rect">
+            <a:avLst/>
+          </a:prstGeom>
+          <a:noFill/>
+          <a:ln>
+            <a:noFill/>
+          </a:ln>
+        </p:spPr>
+        <p:style>
+          <a:lnRef idx="2">
+            <a:schemeClr val="accent1">
+              <a:shade val="50000"/>
+            </a:schemeClr>
+          </a:lnRef>
+          <a:fillRef idx="1">
+            <a:schemeClr val="accent1"/>
+          </a:fillRef>
+          <a:effectRef idx="0">
+            <a:schemeClr val="accent1"/>
+          </a:effectRef>
+          <a:fontRef idx="minor">
+            <a:schemeClr val="lt1"/>
+          </a:fontRef>
+        </p:style>
+        <p:txBody>
+          <a:bodyPr rtlCol="0" anchor="ctr"/>
+          <a:lstStyle/>
+          <a:p>
+            <a:pPr algn="just"/>
+            <a:r>
+              <a:rPr lang="ko-KR" altLang="en-US" sz="1000" dirty="0">
+                <a:solidFill>
+                  <a:schemeClr val="bg1"/>
+                </a:solidFill>
+              </a:rPr>
+              <a:t>육체 저장소 발견</a:t>
+            </a:r>
+          </a:p>
+        </p:txBody>
+      </p:sp>
+      <p:cxnSp>
+        <p:nvCxnSpPr>
+          <p:cNvPr id="124" name="연결선: 꺾임 123">
+            <a:extLst>
+              <a:ext uri="{FF2B5EF4-FFF2-40B4-BE49-F238E27FC236}">
+                <a16:creationId xmlns:a16="http://schemas.microsoft.com/office/drawing/2014/main" id="{BC660F1B-9D1B-ACB4-23EB-18B00A29F9B9}"/>
+              </a:ext>
+            </a:extLst>
+          </p:cNvPr>
+          <p:cNvCxnSpPr>
+            <a:cxnSpLocks/>
+            <a:stCxn id="47" idx="3"/>
+            <a:endCxn id="54" idx="1"/>
+          </p:cNvCxnSpPr>
+          <p:nvPr/>
+        </p:nvCxnSpPr>
+        <p:spPr>
+          <a:xfrm>
+            <a:off x="4853428" y="6081760"/>
+            <a:ext cx="157267" cy="371816"/>
+          </a:xfrm>
+          <a:prstGeom prst="bentConnector3">
+            <a:avLst>
+              <a:gd name="adj1" fmla="val 50000"/>
+            </a:avLst>
+          </a:prstGeom>
+          <a:ln w="19050">
+            <a:solidFill>
+              <a:srgbClr val="FAEBA0"/>
+            </a:solidFill>
+            <a:tailEnd type="triangle"/>
+          </a:ln>
+        </p:spPr>
+        <p:style>
+          <a:lnRef idx="1">
+            <a:schemeClr val="accent1"/>
+          </a:lnRef>
+          <a:fillRef idx="0">
+            <a:schemeClr val="accent1"/>
+          </a:fillRef>
+          <a:effectRef idx="0">
+            <a:schemeClr val="accent1"/>
+          </a:effectRef>
+          <a:fontRef idx="minor">
+            <a:schemeClr val="tx1"/>
+          </a:fontRef>
+        </p:style>
+      </p:cxnSp>
+      <p:cxnSp>
+        <p:nvCxnSpPr>
+          <p:cNvPr id="127" name="연결선: 꺾임 126">
+            <a:extLst>
+              <a:ext uri="{FF2B5EF4-FFF2-40B4-BE49-F238E27FC236}">
+                <a16:creationId xmlns:a16="http://schemas.microsoft.com/office/drawing/2014/main" id="{55455B5E-7F35-3945-07EC-113BCA670A85}"/>
+              </a:ext>
+            </a:extLst>
+          </p:cNvPr>
+          <p:cNvCxnSpPr>
+            <a:cxnSpLocks/>
+            <a:stCxn id="56" idx="3"/>
+            <a:endCxn id="67" idx="1"/>
+          </p:cNvCxnSpPr>
+          <p:nvPr/>
+        </p:nvCxnSpPr>
+        <p:spPr>
+          <a:xfrm>
+            <a:off x="7295120" y="4395011"/>
+            <a:ext cx="248175" cy="2084624"/>
+          </a:xfrm>
+          <a:prstGeom prst="bentConnector3">
+            <a:avLst>
+              <a:gd name="adj1" fmla="val 50000"/>
+            </a:avLst>
+          </a:prstGeom>
+          <a:ln w="19050">
+            <a:solidFill>
+              <a:srgbClr val="FAEBA0"/>
+            </a:solidFill>
+            <a:tailEnd type="triangle"/>
+          </a:ln>
+        </p:spPr>
+        <p:style>
+          <a:lnRef idx="1">
+            <a:schemeClr val="accent1"/>
+          </a:lnRef>
+          <a:fillRef idx="0">
+            <a:schemeClr val="accent1"/>
+          </a:fillRef>
+          <a:effectRef idx="0">
+            <a:schemeClr val="accent1"/>
+          </a:effectRef>
+          <a:fontRef idx="minor">
+            <a:schemeClr val="tx1"/>
+          </a:fontRef>
+        </p:style>
+      </p:cxnSp>
+      <p:sp>
+        <p:nvSpPr>
+          <p:cNvPr id="59" name="직사각형 58">
+            <a:extLst>
+              <a:ext uri="{FF2B5EF4-FFF2-40B4-BE49-F238E27FC236}">
+                <a16:creationId xmlns:a16="http://schemas.microsoft.com/office/drawing/2014/main" id="{0A5A3AF7-5731-8BDD-2C11-8F2E1CB81D7E}"/>
+              </a:ext>
+            </a:extLst>
+          </p:cNvPr>
+          <p:cNvSpPr/>
+          <p:nvPr/>
+        </p:nvSpPr>
+        <p:spPr>
+          <a:xfrm>
+            <a:off x="4419205" y="1536003"/>
+            <a:ext cx="1702601" cy="411480"/>
+          </a:xfrm>
+          <a:prstGeom prst="rect">
+            <a:avLst/>
+          </a:prstGeom>
+          <a:noFill/>
+          <a:ln>
+            <a:noFill/>
+          </a:ln>
+        </p:spPr>
+        <p:style>
+          <a:lnRef idx="2">
+            <a:schemeClr val="accent1">
+              <a:shade val="50000"/>
+            </a:schemeClr>
+          </a:lnRef>
+          <a:fillRef idx="1">
+            <a:schemeClr val="accent1"/>
+          </a:fillRef>
+          <a:effectRef idx="0">
+            <a:schemeClr val="accent1"/>
+          </a:effectRef>
+          <a:fontRef idx="minor">
+            <a:schemeClr val="lt1"/>
+          </a:fontRef>
+        </p:style>
+        <p:txBody>
+          <a:bodyPr rtlCol="0" anchor="ctr"/>
+          <a:lstStyle/>
+          <a:p>
+            <a:pPr algn="just"/>
+            <a:r>
+              <a:rPr lang="ko-KR" altLang="en-US" sz="1000" smtClean="0">
+                <a:solidFill>
+                  <a:schemeClr val="bg1"/>
+                </a:solidFill>
+              </a:rPr>
+              <a:t>강제 징집</a:t>
+            </a:r>
+            <a:endParaRPr lang="ko-KR" altLang="en-US" sz="1000" dirty="0">
+              <a:solidFill>
+                <a:schemeClr val="bg1"/>
+              </a:solidFill>
+            </a:endParaRPr>
+          </a:p>
+        </p:txBody>
+      </p:sp>
+      <p:cxnSp>
+        <p:nvCxnSpPr>
+          <p:cNvPr id="94" name="직선 연결선 93"/>
+          <p:cNvCxnSpPr/>
+          <p:nvPr/>
+        </p:nvCxnSpPr>
+        <p:spPr>
+          <a:xfrm flipH="1">
+            <a:off x="134560" y="1204515"/>
+            <a:ext cx="1725972" cy="0"/>
+          </a:xfrm>
+          <a:prstGeom prst="line">
+            <a:avLst/>
+          </a:prstGeom>
+          <a:ln w="19050">
+            <a:solidFill>
+              <a:schemeClr val="bg1"/>
+            </a:solidFill>
+            <a:prstDash val="dash"/>
+            <a:headEnd type="arrow"/>
+          </a:ln>
+        </p:spPr>
+        <p:style>
+          <a:lnRef idx="1">
+            <a:schemeClr val="accent1"/>
+          </a:lnRef>
+          <a:fillRef idx="0">
+            <a:schemeClr val="accent1"/>
+          </a:fillRef>
+          <a:effectRef idx="0">
+            <a:schemeClr val="accent1"/>
+          </a:effectRef>
+          <a:fontRef idx="minor">
+            <a:schemeClr val="tx1"/>
+          </a:fontRef>
+        </p:style>
+      </p:cxnSp>
+      <p:sp>
+        <p:nvSpPr>
+          <p:cNvPr id="87" name="모서리가 둥근 직사각형 86"/>
+          <p:cNvSpPr/>
+          <p:nvPr/>
+        </p:nvSpPr>
+        <p:spPr>
+          <a:xfrm>
+            <a:off x="134559" y="115610"/>
+            <a:ext cx="779980" cy="329483"/>
+          </a:xfrm>
+          <a:prstGeom prst="roundRect">
+            <a:avLst/>
+          </a:prstGeom>
+          <a:solidFill>
+            <a:srgbClr val="FAEBA0"/>
+          </a:solidFill>
+          <a:ln>
+            <a:noFill/>
+          </a:ln>
+          <a:effectLst>
+            <a:softEdge rad="25400"/>
+          </a:effectLst>
+        </p:spPr>
+        <p:style>
+          <a:lnRef idx="2">
+            <a:schemeClr val="accent1">
+              <a:shade val="50000"/>
+            </a:schemeClr>
+          </a:lnRef>
+          <a:fillRef idx="1">
+            <a:schemeClr val="accent1"/>
+          </a:fillRef>
+          <a:effectRef idx="0">
+            <a:schemeClr val="accent1"/>
+          </a:effectRef>
+          <a:fontRef idx="minor">
+            <a:schemeClr val="lt1"/>
+          </a:fontRef>
+        </p:style>
+        <p:txBody>
+          <a:bodyPr rtlCol="0" anchor="ctr"/>
+          <a:lstStyle/>
+          <a:p>
+            <a:pPr algn="ctr"/>
+            <a:r>
+              <a:rPr lang="ko-KR" altLang="en-US" sz="1000" smtClean="0">
+                <a:solidFill>
+                  <a:schemeClr val="tx1"/>
+                </a:solidFill>
+              </a:rPr>
+              <a:t>메인 사건</a:t>
+            </a:r>
+            <a:endParaRPr lang="ko-KR" altLang="en-US" sz="1000" dirty="0">
+              <a:solidFill>
+                <a:schemeClr val="tx1"/>
+              </a:solidFill>
+            </a:endParaRPr>
+          </a:p>
+        </p:txBody>
+      </p:sp>
+      <p:sp>
+        <p:nvSpPr>
+          <p:cNvPr id="97" name="모서리가 둥근 직사각형 96"/>
+          <p:cNvSpPr/>
+          <p:nvPr/>
+        </p:nvSpPr>
+        <p:spPr>
+          <a:xfrm>
+            <a:off x="134560" y="1539931"/>
+            <a:ext cx="779980" cy="339946"/>
+          </a:xfrm>
+          <a:prstGeom prst="roundRect">
+            <a:avLst/>
+          </a:prstGeom>
+          <a:solidFill>
+            <a:schemeClr val="bg1"/>
+          </a:solidFill>
+          <a:ln>
+            <a:noFill/>
+          </a:ln>
+          <a:effectLst>
+            <a:softEdge rad="25400"/>
+          </a:effectLst>
+        </p:spPr>
+        <p:style>
+          <a:lnRef idx="2">
+            <a:schemeClr val="accent1">
+              <a:shade val="50000"/>
+            </a:schemeClr>
+          </a:lnRef>
+          <a:fillRef idx="1">
+            <a:schemeClr val="accent1"/>
+          </a:fillRef>
+          <a:effectRef idx="0">
+            <a:schemeClr val="accent1"/>
+          </a:effectRef>
+          <a:fontRef idx="minor">
+            <a:schemeClr val="lt1"/>
+          </a:fontRef>
+        </p:style>
+        <p:txBody>
+          <a:bodyPr rtlCol="0" anchor="ctr"/>
+          <a:lstStyle/>
+          <a:p>
+            <a:pPr algn="ctr"/>
+            <a:r>
+              <a:rPr lang="ko-KR" altLang="en-US" sz="1000" smtClean="0">
+                <a:solidFill>
+                  <a:schemeClr val="tx1"/>
+                </a:solidFill>
+              </a:rPr>
+              <a:t>서브</a:t>
+            </a:r>
+            <a:r>
+              <a:rPr lang="ko-KR" altLang="en-US" sz="1000" smtClean="0">
+                <a:solidFill>
+                  <a:schemeClr val="tx1"/>
+                </a:solidFill>
+              </a:rPr>
+              <a:t> 사건</a:t>
+            </a:r>
+            <a:endParaRPr lang="ko-KR" altLang="en-US" sz="1000" dirty="0">
+              <a:solidFill>
+                <a:schemeClr val="tx1"/>
+              </a:solidFill>
+            </a:endParaRPr>
+          </a:p>
+        </p:txBody>
+      </p:sp>
+      <p:cxnSp>
+        <p:nvCxnSpPr>
+          <p:cNvPr id="107" name="직선 연결선 106"/>
+          <p:cNvCxnSpPr/>
+          <p:nvPr/>
+        </p:nvCxnSpPr>
+        <p:spPr>
+          <a:xfrm flipH="1">
+            <a:off x="1423137" y="1210919"/>
+            <a:ext cx="1725972" cy="0"/>
+          </a:xfrm>
+          <a:prstGeom prst="line">
+            <a:avLst/>
+          </a:prstGeom>
+          <a:ln w="19050">
+            <a:solidFill>
+              <a:schemeClr val="bg1"/>
+            </a:solidFill>
+            <a:prstDash val="dash"/>
+            <a:headEnd type="arrow"/>
+          </a:ln>
+        </p:spPr>
+        <p:style>
+          <a:lnRef idx="1">
+            <a:schemeClr val="accent1"/>
+          </a:lnRef>
+          <a:fillRef idx="0">
+            <a:schemeClr val="accent1"/>
+          </a:fillRef>
+          <a:effectRef idx="0">
+            <a:schemeClr val="accent1"/>
+          </a:effectRef>
+          <a:fontRef idx="minor">
+            <a:schemeClr val="tx1"/>
+          </a:fontRef>
+        </p:style>
+      </p:cxnSp>
+      <p:cxnSp>
+        <p:nvCxnSpPr>
+          <p:cNvPr id="108" name="직선 연결선 107"/>
+          <p:cNvCxnSpPr/>
+          <p:nvPr/>
+        </p:nvCxnSpPr>
+        <p:spPr>
+          <a:xfrm flipH="1">
+            <a:off x="2706694" y="1210919"/>
+            <a:ext cx="1725972" cy="0"/>
+          </a:xfrm>
+          <a:prstGeom prst="line">
+            <a:avLst/>
+          </a:prstGeom>
+          <a:ln w="19050">
+            <a:solidFill>
+              <a:schemeClr val="bg1"/>
+            </a:solidFill>
+            <a:prstDash val="dash"/>
+            <a:headEnd type="arrow"/>
+          </a:ln>
+        </p:spPr>
+        <p:style>
+          <a:lnRef idx="1">
+            <a:schemeClr val="accent1"/>
+          </a:lnRef>
+          <a:fillRef idx="0">
+            <a:schemeClr val="accent1"/>
+          </a:fillRef>
+          <a:effectRef idx="0">
+            <a:schemeClr val="accent1"/>
+          </a:effectRef>
+          <a:fontRef idx="minor">
+            <a:schemeClr val="tx1"/>
+          </a:fontRef>
+        </p:style>
+      </p:cxnSp>
+      <p:cxnSp>
+        <p:nvCxnSpPr>
+          <p:cNvPr id="109" name="직선 연결선 108"/>
+          <p:cNvCxnSpPr/>
+          <p:nvPr/>
+        </p:nvCxnSpPr>
+        <p:spPr>
+          <a:xfrm flipH="1">
+            <a:off x="4349973" y="1210919"/>
+            <a:ext cx="1725972" cy="0"/>
+          </a:xfrm>
+          <a:prstGeom prst="line">
+            <a:avLst/>
+          </a:prstGeom>
+          <a:ln w="19050">
+            <a:solidFill>
+              <a:schemeClr val="bg1"/>
+            </a:solidFill>
+            <a:prstDash val="dash"/>
+            <a:headEnd type="arrow"/>
+          </a:ln>
+        </p:spPr>
+        <p:style>
+          <a:lnRef idx="1">
+            <a:schemeClr val="accent1"/>
+          </a:lnRef>
+          <a:fillRef idx="0">
+            <a:schemeClr val="accent1"/>
+          </a:fillRef>
+          <a:effectRef idx="0">
+            <a:schemeClr val="accent1"/>
+          </a:effectRef>
+          <a:fontRef idx="minor">
+            <a:schemeClr val="tx1"/>
+          </a:fontRef>
+        </p:style>
+      </p:cxnSp>
+      <p:cxnSp>
+        <p:nvCxnSpPr>
+          <p:cNvPr id="110" name="직선 연결선 109"/>
+          <p:cNvCxnSpPr/>
+          <p:nvPr/>
+        </p:nvCxnSpPr>
+        <p:spPr>
+          <a:xfrm flipH="1">
+            <a:off x="5494872" y="1205378"/>
+            <a:ext cx="1725972" cy="0"/>
+          </a:xfrm>
+          <a:prstGeom prst="line">
+            <a:avLst/>
+          </a:prstGeom>
+          <a:ln w="19050">
+            <a:solidFill>
+              <a:schemeClr val="bg1"/>
+            </a:solidFill>
+            <a:prstDash val="dash"/>
+            <a:headEnd type="arrow"/>
+          </a:ln>
+        </p:spPr>
+        <p:style>
+          <a:lnRef idx="1">
+            <a:schemeClr val="accent1"/>
+          </a:lnRef>
+          <a:fillRef idx="0">
+            <a:schemeClr val="accent1"/>
+          </a:fillRef>
+          <a:effectRef idx="0">
+            <a:schemeClr val="accent1"/>
+          </a:effectRef>
+          <a:fontRef idx="minor">
+            <a:schemeClr val="tx1"/>
+          </a:fontRef>
+        </p:style>
+      </p:cxnSp>
+      <p:cxnSp>
+        <p:nvCxnSpPr>
+          <p:cNvPr id="111" name="직선 연결선 110"/>
+          <p:cNvCxnSpPr/>
+          <p:nvPr/>
+        </p:nvCxnSpPr>
+        <p:spPr>
+          <a:xfrm flipH="1">
+            <a:off x="6776284" y="1208981"/>
+            <a:ext cx="1725972" cy="0"/>
+          </a:xfrm>
+          <a:prstGeom prst="line">
+            <a:avLst/>
+          </a:prstGeom>
+          <a:ln w="19050">
+            <a:solidFill>
+              <a:schemeClr val="bg1"/>
+            </a:solidFill>
+            <a:prstDash val="dash"/>
+            <a:headEnd type="arrow"/>
+          </a:ln>
+        </p:spPr>
+        <p:style>
+          <a:lnRef idx="1">
+            <a:schemeClr val="accent1"/>
+          </a:lnRef>
+          <a:fillRef idx="0">
+            <a:schemeClr val="accent1"/>
+          </a:fillRef>
+          <a:effectRef idx="0">
+            <a:schemeClr val="accent1"/>
+          </a:effectRef>
+          <a:fontRef idx="minor">
+            <a:schemeClr val="tx1"/>
+          </a:fontRef>
+        </p:style>
+      </p:cxnSp>
+      <p:cxnSp>
+        <p:nvCxnSpPr>
+          <p:cNvPr id="112" name="직선 연결선 111"/>
+          <p:cNvCxnSpPr/>
+          <p:nvPr/>
+        </p:nvCxnSpPr>
+        <p:spPr>
+          <a:xfrm flipH="1">
+            <a:off x="7926886" y="1205378"/>
+            <a:ext cx="1725972" cy="0"/>
+          </a:xfrm>
+          <a:prstGeom prst="line">
+            <a:avLst/>
+          </a:prstGeom>
+          <a:ln w="19050">
+            <a:solidFill>
+              <a:schemeClr val="bg1"/>
+            </a:solidFill>
+            <a:prstDash val="dash"/>
+            <a:headEnd type="arrow"/>
+          </a:ln>
+        </p:spPr>
+        <p:style>
+          <a:lnRef idx="1">
+            <a:schemeClr val="accent1"/>
+          </a:lnRef>
+          <a:fillRef idx="0">
+            <a:schemeClr val="accent1"/>
+          </a:fillRef>
+          <a:effectRef idx="0">
+            <a:schemeClr val="accent1"/>
+          </a:effectRef>
+          <a:fontRef idx="minor">
+            <a:schemeClr val="tx1"/>
+          </a:fontRef>
+        </p:style>
+      </p:cxnSp>
+      <p:sp>
+        <p:nvSpPr>
+          <p:cNvPr id="115" name="모서리가 둥근 직사각형 114"/>
+          <p:cNvSpPr/>
+          <p:nvPr/>
+        </p:nvSpPr>
+        <p:spPr>
+          <a:xfrm>
+            <a:off x="132305" y="3478372"/>
+            <a:ext cx="779980" cy="339946"/>
+          </a:xfrm>
+          <a:prstGeom prst="roundRect">
+            <a:avLst/>
+          </a:prstGeom>
+          <a:solidFill>
+            <a:srgbClr val="4B4443"/>
+          </a:solidFill>
+          <a:ln>
+            <a:noFill/>
+          </a:ln>
+          <a:effectLst>
+            <a:softEdge rad="25400"/>
+          </a:effectLst>
+        </p:spPr>
+        <p:style>
+          <a:lnRef idx="2">
+            <a:schemeClr val="accent1">
+              <a:shade val="50000"/>
+            </a:schemeClr>
+          </a:lnRef>
+          <a:fillRef idx="1">
+            <a:schemeClr val="accent1"/>
+          </a:fillRef>
+          <a:effectRef idx="0">
+            <a:schemeClr val="accent1"/>
+          </a:effectRef>
+          <a:fontRef idx="minor">
+            <a:schemeClr val="lt1"/>
+          </a:fontRef>
+        </p:style>
+        <p:txBody>
+          <a:bodyPr rtlCol="0" anchor="ctr"/>
+          <a:lstStyle/>
+          <a:p>
+            <a:pPr algn="ctr"/>
+            <a:r>
+              <a:rPr lang="ko-KR" altLang="en-US" sz="1000" smtClean="0">
+                <a:solidFill>
+                  <a:schemeClr val="bg1"/>
+                </a:solidFill>
+              </a:rPr>
+              <a:t>관계</a:t>
+            </a:r>
+            <a:endParaRPr lang="ko-KR" altLang="en-US" sz="1000" dirty="0">
+              <a:solidFill>
+                <a:schemeClr val="bg1"/>
+              </a:solidFill>
+            </a:endParaRPr>
+          </a:p>
+        </p:txBody>
+      </p:sp>
+      <p:sp>
+        <p:nvSpPr>
+          <p:cNvPr id="116" name="직사각형 115">
+            <a:extLst>
+              <a:ext uri="{FF2B5EF4-FFF2-40B4-BE49-F238E27FC236}">
+                <a16:creationId xmlns:a16="http://schemas.microsoft.com/office/drawing/2014/main" id="{4F69904C-EC4D-C12D-19BD-EB2390B91B9C}"/>
+              </a:ext>
+            </a:extLst>
+          </p:cNvPr>
+          <p:cNvSpPr/>
+          <p:nvPr/>
+        </p:nvSpPr>
+        <p:spPr>
+          <a:xfrm>
+            <a:off x="111507" y="3961404"/>
+            <a:ext cx="1321206" cy="411480"/>
+          </a:xfrm>
+          <a:prstGeom prst="rect">
+            <a:avLst/>
+          </a:prstGeom>
+          <a:noFill/>
+          <a:ln>
+            <a:noFill/>
+          </a:ln>
+        </p:spPr>
+        <p:style>
+          <a:lnRef idx="2">
+            <a:schemeClr val="accent1">
+              <a:shade val="50000"/>
+            </a:schemeClr>
+          </a:lnRef>
+          <a:fillRef idx="1">
+            <a:schemeClr val="accent1"/>
+          </a:fillRef>
+          <a:effectRef idx="0">
+            <a:schemeClr val="accent1"/>
+          </a:effectRef>
+          <a:fontRef idx="minor">
+            <a:schemeClr val="lt1"/>
+          </a:fontRef>
+        </p:style>
+        <p:txBody>
+          <a:bodyPr rtlCol="0" anchor="ctr"/>
+          <a:lstStyle/>
+          <a:p>
+            <a:pPr algn="just"/>
+            <a:r>
+              <a:rPr lang="ko-KR" altLang="en-US" sz="1000" smtClean="0">
+                <a:solidFill>
+                  <a:schemeClr val="bg1"/>
+                </a:solidFill>
+              </a:rPr>
+              <a:t>부모의 정서적 학대</a:t>
+            </a:r>
+            <a:endParaRPr lang="ko-KR" altLang="en-US" sz="1000" dirty="0">
+              <a:solidFill>
+                <a:schemeClr val="bg1"/>
+              </a:solidFill>
+            </a:endParaRPr>
+          </a:p>
+        </p:txBody>
+      </p:sp>
+      <p:cxnSp>
+        <p:nvCxnSpPr>
+          <p:cNvPr id="117" name="직선 연결선 116"/>
+          <p:cNvCxnSpPr/>
+          <p:nvPr/>
+        </p:nvCxnSpPr>
+        <p:spPr>
+          <a:xfrm flipH="1">
+            <a:off x="141421" y="3181770"/>
+            <a:ext cx="1725972" cy="0"/>
+          </a:xfrm>
+          <a:prstGeom prst="line">
+            <a:avLst/>
+          </a:prstGeom>
+          <a:ln w="19050">
+            <a:solidFill>
+              <a:schemeClr val="bg1"/>
+            </a:solidFill>
+            <a:prstDash val="dash"/>
+            <a:headEnd type="arrow"/>
+          </a:ln>
+        </p:spPr>
+        <p:style>
+          <a:lnRef idx="1">
+            <a:schemeClr val="accent1"/>
+          </a:lnRef>
+          <a:fillRef idx="0">
+            <a:schemeClr val="accent1"/>
+          </a:fillRef>
+          <a:effectRef idx="0">
+            <a:schemeClr val="accent1"/>
+          </a:effectRef>
+          <a:fontRef idx="minor">
+            <a:schemeClr val="tx1"/>
+          </a:fontRef>
+        </p:style>
+      </p:cxnSp>
+      <p:cxnSp>
+        <p:nvCxnSpPr>
+          <p:cNvPr id="118" name="직선 연결선 117"/>
+          <p:cNvCxnSpPr/>
+          <p:nvPr/>
+        </p:nvCxnSpPr>
+        <p:spPr>
+          <a:xfrm flipH="1">
+            <a:off x="1420854" y="3179030"/>
+            <a:ext cx="1725972" cy="0"/>
+          </a:xfrm>
+          <a:prstGeom prst="line">
+            <a:avLst/>
+          </a:prstGeom>
+          <a:ln w="19050">
+            <a:solidFill>
+              <a:schemeClr val="bg1"/>
+            </a:solidFill>
+            <a:prstDash val="dash"/>
+            <a:headEnd type="arrow"/>
+          </a:ln>
+        </p:spPr>
+        <p:style>
+          <a:lnRef idx="1">
+            <a:schemeClr val="accent1"/>
+          </a:lnRef>
+          <a:fillRef idx="0">
+            <a:schemeClr val="accent1"/>
+          </a:fillRef>
+          <a:effectRef idx="0">
+            <a:schemeClr val="accent1"/>
+          </a:effectRef>
+          <a:fontRef idx="minor">
+            <a:schemeClr val="tx1"/>
+          </a:fontRef>
+        </p:style>
+      </p:cxnSp>
+      <p:sp>
+        <p:nvSpPr>
+          <p:cNvPr id="119" name="직사각형 118">
+            <a:extLst>
+              <a:ext uri="{FF2B5EF4-FFF2-40B4-BE49-F238E27FC236}">
+                <a16:creationId xmlns:a16="http://schemas.microsoft.com/office/drawing/2014/main" id="{4F69904C-EC4D-C12D-19BD-EB2390B91B9C}"/>
+              </a:ext>
+            </a:extLst>
+          </p:cNvPr>
+          <p:cNvSpPr/>
+          <p:nvPr/>
+        </p:nvSpPr>
+        <p:spPr>
+          <a:xfrm>
+            <a:off x="120885" y="4369722"/>
+            <a:ext cx="1321206" cy="411480"/>
+          </a:xfrm>
+          <a:prstGeom prst="rect">
+            <a:avLst/>
+          </a:prstGeom>
+          <a:noFill/>
+          <a:ln>
+            <a:noFill/>
+          </a:ln>
+        </p:spPr>
+        <p:style>
+          <a:lnRef idx="2">
+            <a:schemeClr val="accent1">
+              <a:shade val="50000"/>
+            </a:schemeClr>
+          </a:lnRef>
+          <a:fillRef idx="1">
+            <a:schemeClr val="accent1"/>
+          </a:fillRef>
+          <a:effectRef idx="0">
+            <a:schemeClr val="accent1"/>
+          </a:effectRef>
+          <a:fontRef idx="minor">
+            <a:schemeClr val="lt1"/>
+          </a:fontRef>
+        </p:style>
+        <p:txBody>
+          <a:bodyPr rtlCol="0" anchor="ctr"/>
+          <a:lstStyle/>
+          <a:p>
+            <a:pPr algn="just"/>
+            <a:r>
+              <a:rPr lang="ko-KR" altLang="en-US" sz="1000" smtClean="0">
+                <a:solidFill>
+                  <a:schemeClr val="bg1"/>
+                </a:solidFill>
+              </a:rPr>
+              <a:t>동생과의 차별</a:t>
+            </a:r>
+            <a:endParaRPr lang="ko-KR" altLang="en-US" sz="1000" dirty="0">
+              <a:solidFill>
+                <a:schemeClr val="bg1"/>
+              </a:solidFill>
+            </a:endParaRPr>
+          </a:p>
+        </p:txBody>
+      </p:sp>
+      <p:cxnSp>
+        <p:nvCxnSpPr>
+          <p:cNvPr id="120" name="직선 연결선 119"/>
+          <p:cNvCxnSpPr/>
+          <p:nvPr/>
+        </p:nvCxnSpPr>
+        <p:spPr>
+          <a:xfrm flipH="1">
+            <a:off x="2928401" y="3179030"/>
+            <a:ext cx="3082855" cy="0"/>
+          </a:xfrm>
+          <a:prstGeom prst="line">
+            <a:avLst/>
+          </a:prstGeom>
+          <a:ln w="19050">
+            <a:solidFill>
+              <a:schemeClr val="bg1"/>
+            </a:solidFill>
+            <a:prstDash val="dash"/>
+            <a:headEnd type="arrow"/>
+          </a:ln>
+        </p:spPr>
+        <p:style>
+          <a:lnRef idx="1">
+            <a:schemeClr val="accent1"/>
+          </a:lnRef>
+          <a:fillRef idx="0">
+            <a:schemeClr val="accent1"/>
+          </a:fillRef>
+          <a:effectRef idx="0">
+            <a:schemeClr val="accent1"/>
+          </a:effectRef>
+          <a:fontRef idx="minor">
+            <a:schemeClr val="tx1"/>
+          </a:fontRef>
+        </p:style>
+      </p:cxnSp>
+      <p:sp>
+        <p:nvSpPr>
+          <p:cNvPr id="121" name="직사각형 120">
+            <a:extLst>
+              <a:ext uri="{FF2B5EF4-FFF2-40B4-BE49-F238E27FC236}">
+                <a16:creationId xmlns:a16="http://schemas.microsoft.com/office/drawing/2014/main" id="{4F69904C-EC4D-C12D-19BD-EB2390B91B9C}"/>
+              </a:ext>
+            </a:extLst>
+          </p:cNvPr>
+          <p:cNvSpPr/>
+          <p:nvPr/>
+        </p:nvSpPr>
+        <p:spPr>
+          <a:xfrm>
+            <a:off x="2977295" y="3951768"/>
+            <a:ext cx="1069848" cy="411480"/>
+          </a:xfrm>
+          <a:prstGeom prst="rect">
+            <a:avLst/>
+          </a:prstGeom>
+          <a:noFill/>
+          <a:ln>
+            <a:noFill/>
+          </a:ln>
+        </p:spPr>
+        <p:style>
+          <a:lnRef idx="2">
+            <a:schemeClr val="accent1">
+              <a:shade val="50000"/>
+            </a:schemeClr>
+          </a:lnRef>
+          <a:fillRef idx="1">
+            <a:schemeClr val="accent1"/>
+          </a:fillRef>
+          <a:effectRef idx="0">
+            <a:schemeClr val="accent1"/>
+          </a:effectRef>
+          <a:fontRef idx="minor">
+            <a:schemeClr val="lt1"/>
+          </a:fontRef>
+        </p:style>
+        <p:txBody>
+          <a:bodyPr rtlCol="0" anchor="ctr"/>
+          <a:lstStyle/>
+          <a:p>
+            <a:pPr algn="just"/>
+            <a:r>
+              <a:rPr lang="ko-KR" altLang="en-US" sz="1000" smtClean="0">
+                <a:solidFill>
+                  <a:schemeClr val="bg1"/>
+                </a:solidFill>
+              </a:rPr>
+              <a:t>조력자 등장</a:t>
+            </a:r>
+            <a:endParaRPr lang="ko-KR" altLang="en-US" sz="1000" dirty="0">
+              <a:solidFill>
+                <a:schemeClr val="bg1"/>
+              </a:solidFill>
+            </a:endParaRPr>
+          </a:p>
+        </p:txBody>
+      </p:sp>
+      <p:cxnSp>
+        <p:nvCxnSpPr>
+          <p:cNvPr id="122" name="직선 연결선 121"/>
+          <p:cNvCxnSpPr/>
+          <p:nvPr/>
+        </p:nvCxnSpPr>
+        <p:spPr>
+          <a:xfrm flipH="1">
+            <a:off x="113540" y="1208981"/>
+            <a:ext cx="856574" cy="0"/>
+          </a:xfrm>
+          <a:prstGeom prst="line">
+            <a:avLst/>
+          </a:prstGeom>
+          <a:ln w="19050">
+            <a:solidFill>
+              <a:schemeClr val="bg1"/>
+            </a:solidFill>
+            <a:prstDash val="dash"/>
+            <a:headEnd type="arrow"/>
+          </a:ln>
+        </p:spPr>
+        <p:style>
+          <a:lnRef idx="1">
+            <a:schemeClr val="accent1"/>
+          </a:lnRef>
+          <a:fillRef idx="0">
+            <a:schemeClr val="accent1"/>
+          </a:fillRef>
+          <a:effectRef idx="0">
+            <a:schemeClr val="accent1"/>
+          </a:effectRef>
+          <a:fontRef idx="minor">
+            <a:schemeClr val="tx1"/>
+          </a:fontRef>
+        </p:style>
+      </p:cxnSp>
+      <p:cxnSp>
+        <p:nvCxnSpPr>
+          <p:cNvPr id="125" name="직선 연결선 124"/>
+          <p:cNvCxnSpPr/>
+          <p:nvPr/>
+        </p:nvCxnSpPr>
+        <p:spPr>
+          <a:xfrm flipH="1">
+            <a:off x="113540" y="3177955"/>
+            <a:ext cx="856574" cy="0"/>
+          </a:xfrm>
+          <a:prstGeom prst="line">
+            <a:avLst/>
+          </a:prstGeom>
+          <a:ln w="19050">
+            <a:solidFill>
+              <a:schemeClr val="bg1"/>
+            </a:solidFill>
+            <a:prstDash val="dash"/>
+            <a:headEnd type="arrow"/>
+          </a:ln>
+        </p:spPr>
+        <p:style>
+          <a:lnRef idx="1">
+            <a:schemeClr val="accent1"/>
+          </a:lnRef>
+          <a:fillRef idx="0">
+            <a:schemeClr val="accent1"/>
+          </a:fillRef>
+          <a:effectRef idx="0">
+            <a:schemeClr val="accent1"/>
+          </a:effectRef>
+          <a:fontRef idx="minor">
+            <a:schemeClr val="tx1"/>
+          </a:fontRef>
+        </p:style>
+      </p:cxnSp>
+      <p:sp>
+        <p:nvSpPr>
+          <p:cNvPr id="128" name="화살표: 오각형 75">
             <a:extLst>
               <a:ext uri="{FF2B5EF4-FFF2-40B4-BE49-F238E27FC236}">
                 <a16:creationId xmlns:a16="http://schemas.microsoft.com/office/drawing/2014/main" id="{D216EC82-415A-355B-5917-9E53B0AF762D}"/>
@@ -6859,7 +7953,7 @@
         </p:nvSpPr>
         <p:spPr>
           <a:xfrm>
-            <a:off x="10498796" y="6310484"/>
+            <a:off x="10994542" y="1639479"/>
             <a:ext cx="1069848" cy="297092"/>
           </a:xfrm>
           <a:prstGeom prst="homePlate">
@@ -6925,19 +8019,401 @@
           <a:p>
             <a:pPr algn="ctr"/>
             <a:r>
-              <a:rPr lang="ko-KR" altLang="en-US" sz="800" dirty="0">
+              <a:rPr lang="ko-KR" altLang="en-US" sz="800" smtClean="0">
                 <a:solidFill>
                   <a:schemeClr val="tx1"/>
                 </a:solidFill>
               </a:rPr>
-              <a:t>최종 선택</a:t>
-            </a:r>
+              <a:t>희생 선택</a:t>
+            </a:r>
+            <a:endParaRPr lang="ko-KR" altLang="en-US" sz="800" dirty="0">
+              <a:solidFill>
+                <a:schemeClr val="tx1"/>
+              </a:solidFill>
+            </a:endParaRPr>
+          </a:p>
+        </p:txBody>
+      </p:sp>
+      <p:sp>
+        <p:nvSpPr>
+          <p:cNvPr id="129" name="화살표: 오각형 75">
+            <a:extLst>
+              <a:ext uri="{FF2B5EF4-FFF2-40B4-BE49-F238E27FC236}">
+                <a16:creationId xmlns:a16="http://schemas.microsoft.com/office/drawing/2014/main" id="{D216EC82-415A-355B-5917-9E53B0AF762D}"/>
+              </a:ext>
+            </a:extLst>
+          </p:cNvPr>
+          <p:cNvSpPr/>
+          <p:nvPr/>
+        </p:nvSpPr>
+        <p:spPr>
+          <a:xfrm>
+            <a:off x="11011226" y="4439428"/>
+            <a:ext cx="1069848" cy="297092"/>
+          </a:xfrm>
+          <a:prstGeom prst="homePlate">
+            <a:avLst/>
+          </a:prstGeom>
+          <a:solidFill>
+            <a:srgbClr val="FAEBA0"/>
+          </a:solidFill>
+          <a:ln>
+            <a:gradFill>
+              <a:gsLst>
+                <a:gs pos="0">
+                  <a:schemeClr val="accent1">
+                    <a:lumMod val="5000"/>
+                    <a:lumOff val="95000"/>
+                  </a:schemeClr>
+                </a:gs>
+                <a:gs pos="74000">
+                  <a:schemeClr val="accent1">
+                    <a:lumMod val="45000"/>
+                    <a:lumOff val="55000"/>
+                  </a:schemeClr>
+                </a:gs>
+                <a:gs pos="83000">
+                  <a:schemeClr val="accent1">
+                    <a:lumMod val="45000"/>
+                    <a:lumOff val="55000"/>
+                  </a:schemeClr>
+                </a:gs>
+                <a:gs pos="100000">
+                  <a:schemeClr val="accent1">
+                    <a:lumMod val="30000"/>
+                    <a:lumOff val="70000"/>
+                  </a:schemeClr>
+                </a:gs>
+              </a:gsLst>
+              <a:lin ang="5400000" scaled="1"/>
+            </a:gradFill>
+          </a:ln>
+          <a:effectLst>
+            <a:softEdge rad="19050"/>
+          </a:effectLst>
+        </p:spPr>
+        <p:style>
+          <a:lnRef idx="2">
+            <a:schemeClr val="accent1">
+              <a:shade val="15000"/>
+            </a:schemeClr>
+          </a:lnRef>
+          <a:fillRef idx="1">
+            <a:schemeClr val="accent1"/>
+          </a:fillRef>
+          <a:effectRef idx="0">
+            <a:schemeClr val="accent1"/>
+          </a:effectRef>
+          <a:fontRef idx="minor">
+            <a:schemeClr val="lt1"/>
+          </a:fontRef>
+        </p:style>
+        <p:txBody>
+          <a:bodyPr rtlCol="0" anchor="ctr"/>
+          <a:lstStyle/>
+          <a:p>
+            <a:pPr algn="ctr"/>
+            <a:r>
+              <a:rPr lang="ko-KR" altLang="en-US" sz="800" smtClean="0">
+                <a:solidFill>
+                  <a:schemeClr val="tx1"/>
+                </a:solidFill>
+              </a:rPr>
+              <a:t>생존 선택</a:t>
+            </a:r>
+            <a:endParaRPr lang="ko-KR" altLang="en-US" sz="800" dirty="0">
+              <a:solidFill>
+                <a:schemeClr val="tx1"/>
+              </a:solidFill>
+            </a:endParaRPr>
           </a:p>
         </p:txBody>
       </p:sp>
       <p:cxnSp>
         <p:nvCxnSpPr>
-          <p:cNvPr id="84" name="직선 화살표 연결선 83">
+          <p:cNvPr id="130" name="연결선: 꺾임 70">
+            <a:extLst>
+              <a:ext uri="{FF2B5EF4-FFF2-40B4-BE49-F238E27FC236}">
+                <a16:creationId xmlns:a16="http://schemas.microsoft.com/office/drawing/2014/main" id="{9276516F-B2DC-7B6A-5338-8E4889B4069E}"/>
+              </a:ext>
+            </a:extLst>
+          </p:cNvPr>
+          <p:cNvCxnSpPr>
+            <a:cxnSpLocks/>
+            <a:stCxn id="165" idx="0"/>
+            <a:endCxn id="128" idx="1"/>
+          </p:cNvCxnSpPr>
+          <p:nvPr/>
+        </p:nvCxnSpPr>
+        <p:spPr>
+          <a:xfrm rot="5400000" flipH="1" flipV="1">
+            <a:off x="10101531" y="2271560"/>
+            <a:ext cx="1376545" cy="409477"/>
+          </a:xfrm>
+          <a:prstGeom prst="bentConnector2">
+            <a:avLst/>
+          </a:prstGeom>
+          <a:ln w="19050">
+            <a:solidFill>
+              <a:srgbClr val="FAEBA0"/>
+            </a:solidFill>
+            <a:tailEnd type="triangle"/>
+          </a:ln>
+        </p:spPr>
+        <p:style>
+          <a:lnRef idx="1">
+            <a:schemeClr val="accent1"/>
+          </a:lnRef>
+          <a:fillRef idx="0">
+            <a:schemeClr val="accent1"/>
+          </a:fillRef>
+          <a:effectRef idx="0">
+            <a:schemeClr val="accent1"/>
+          </a:effectRef>
+          <a:fontRef idx="minor">
+            <a:schemeClr val="tx1"/>
+          </a:fontRef>
+        </p:style>
+      </p:cxnSp>
+      <p:cxnSp>
+        <p:nvCxnSpPr>
+          <p:cNvPr id="132" name="연결선: 꺾임 70">
+            <a:extLst>
+              <a:ext uri="{FF2B5EF4-FFF2-40B4-BE49-F238E27FC236}">
+                <a16:creationId xmlns:a16="http://schemas.microsoft.com/office/drawing/2014/main" id="{9276516F-B2DC-7B6A-5338-8E4889B4069E}"/>
+              </a:ext>
+            </a:extLst>
+          </p:cNvPr>
+          <p:cNvCxnSpPr>
+            <a:cxnSpLocks/>
+            <a:stCxn id="165" idx="2"/>
+            <a:endCxn id="129" idx="1"/>
+          </p:cNvCxnSpPr>
+          <p:nvPr/>
+        </p:nvCxnSpPr>
+        <p:spPr>
+          <a:xfrm rot="16200000" flipH="1">
+            <a:off x="10366297" y="3943045"/>
+            <a:ext cx="863696" cy="426161"/>
+          </a:xfrm>
+          <a:prstGeom prst="bentConnector2">
+            <a:avLst/>
+          </a:prstGeom>
+          <a:ln w="19050">
+            <a:solidFill>
+              <a:srgbClr val="FAEBA0"/>
+            </a:solidFill>
+            <a:tailEnd type="triangle"/>
+          </a:ln>
+        </p:spPr>
+        <p:style>
+          <a:lnRef idx="1">
+            <a:schemeClr val="accent1"/>
+          </a:lnRef>
+          <a:fillRef idx="0">
+            <a:schemeClr val="accent1"/>
+          </a:fillRef>
+          <a:effectRef idx="0">
+            <a:schemeClr val="accent1"/>
+          </a:effectRef>
+          <a:fontRef idx="minor">
+            <a:schemeClr val="tx1"/>
+          </a:fontRef>
+        </p:style>
+      </p:cxnSp>
+      <p:sp>
+        <p:nvSpPr>
+          <p:cNvPr id="138" name="화살표: 오각형 75">
+            <a:extLst>
+              <a:ext uri="{FF2B5EF4-FFF2-40B4-BE49-F238E27FC236}">
+                <a16:creationId xmlns:a16="http://schemas.microsoft.com/office/drawing/2014/main" id="{D216EC82-415A-355B-5917-9E53B0AF762D}"/>
+              </a:ext>
+            </a:extLst>
+          </p:cNvPr>
+          <p:cNvSpPr/>
+          <p:nvPr/>
+        </p:nvSpPr>
+        <p:spPr>
+          <a:xfrm>
+            <a:off x="10994542" y="2302864"/>
+            <a:ext cx="1069848" cy="297092"/>
+          </a:xfrm>
+          <a:prstGeom prst="homePlate">
+            <a:avLst/>
+          </a:prstGeom>
+          <a:solidFill>
+            <a:srgbClr val="FAEBA0"/>
+          </a:solidFill>
+          <a:ln>
+            <a:gradFill>
+              <a:gsLst>
+                <a:gs pos="0">
+                  <a:schemeClr val="accent1">
+                    <a:lumMod val="5000"/>
+                    <a:lumOff val="95000"/>
+                  </a:schemeClr>
+                </a:gs>
+                <a:gs pos="74000">
+                  <a:schemeClr val="accent1">
+                    <a:lumMod val="45000"/>
+                    <a:lumOff val="55000"/>
+                  </a:schemeClr>
+                </a:gs>
+                <a:gs pos="83000">
+                  <a:schemeClr val="accent1">
+                    <a:lumMod val="45000"/>
+                    <a:lumOff val="55000"/>
+                  </a:schemeClr>
+                </a:gs>
+                <a:gs pos="100000">
+                  <a:schemeClr val="accent1">
+                    <a:lumMod val="30000"/>
+                    <a:lumOff val="70000"/>
+                  </a:schemeClr>
+                </a:gs>
+              </a:gsLst>
+              <a:lin ang="5400000" scaled="1"/>
+            </a:gradFill>
+          </a:ln>
+          <a:effectLst>
+            <a:softEdge rad="19050"/>
+          </a:effectLst>
+        </p:spPr>
+        <p:style>
+          <a:lnRef idx="2">
+            <a:schemeClr val="accent1">
+              <a:shade val="15000"/>
+            </a:schemeClr>
+          </a:lnRef>
+          <a:fillRef idx="1">
+            <a:schemeClr val="accent1"/>
+          </a:fillRef>
+          <a:effectRef idx="0">
+            <a:schemeClr val="accent1"/>
+          </a:effectRef>
+          <a:fontRef idx="minor">
+            <a:schemeClr val="lt1"/>
+          </a:fontRef>
+        </p:style>
+        <p:txBody>
+          <a:bodyPr rtlCol="0" anchor="ctr"/>
+          <a:lstStyle/>
+          <a:p>
+            <a:pPr algn="ctr"/>
+            <a:r>
+              <a:rPr lang="ko-KR" altLang="en-US" sz="800" smtClean="0">
+                <a:solidFill>
+                  <a:schemeClr val="tx1"/>
+                </a:solidFill>
+              </a:rPr>
+              <a:t>세계 구원</a:t>
+            </a:r>
+            <a:endParaRPr lang="ko-KR" altLang="en-US" sz="800" dirty="0">
+              <a:solidFill>
+                <a:schemeClr val="tx1"/>
+              </a:solidFill>
+            </a:endParaRPr>
+          </a:p>
+        </p:txBody>
+      </p:sp>
+      <p:sp>
+        <p:nvSpPr>
+          <p:cNvPr id="142" name="화살표: 오각형 75">
+            <a:extLst>
+              <a:ext uri="{FF2B5EF4-FFF2-40B4-BE49-F238E27FC236}">
+                <a16:creationId xmlns:a16="http://schemas.microsoft.com/office/drawing/2014/main" id="{D216EC82-415A-355B-5917-9E53B0AF762D}"/>
+              </a:ext>
+            </a:extLst>
+          </p:cNvPr>
+          <p:cNvSpPr/>
+          <p:nvPr/>
+        </p:nvSpPr>
+        <p:spPr>
+          <a:xfrm>
+            <a:off x="10994542" y="2967944"/>
+            <a:ext cx="1069848" cy="297092"/>
+          </a:xfrm>
+          <a:prstGeom prst="homePlate">
+            <a:avLst/>
+          </a:prstGeom>
+          <a:solidFill>
+            <a:srgbClr val="FAEBA0"/>
+          </a:solidFill>
+          <a:ln>
+            <a:gradFill>
+              <a:gsLst>
+                <a:gs pos="0">
+                  <a:schemeClr val="accent1">
+                    <a:lumMod val="5000"/>
+                    <a:lumOff val="95000"/>
+                  </a:schemeClr>
+                </a:gs>
+                <a:gs pos="74000">
+                  <a:schemeClr val="accent1">
+                    <a:lumMod val="45000"/>
+                    <a:lumOff val="55000"/>
+                  </a:schemeClr>
+                </a:gs>
+                <a:gs pos="83000">
+                  <a:schemeClr val="accent1">
+                    <a:lumMod val="45000"/>
+                    <a:lumOff val="55000"/>
+                  </a:schemeClr>
+                </a:gs>
+                <a:gs pos="100000">
+                  <a:schemeClr val="accent1">
+                    <a:lumMod val="30000"/>
+                    <a:lumOff val="70000"/>
+                  </a:schemeClr>
+                </a:gs>
+              </a:gsLst>
+              <a:lin ang="5400000" scaled="1"/>
+            </a:gradFill>
+          </a:ln>
+          <a:effectLst>
+            <a:softEdge rad="19050"/>
+          </a:effectLst>
+        </p:spPr>
+        <p:style>
+          <a:lnRef idx="2">
+            <a:schemeClr val="accent1">
+              <a:shade val="15000"/>
+            </a:schemeClr>
+          </a:lnRef>
+          <a:fillRef idx="1">
+            <a:schemeClr val="accent1"/>
+          </a:fillRef>
+          <a:effectRef idx="0">
+            <a:schemeClr val="accent1"/>
+          </a:effectRef>
+          <a:fontRef idx="minor">
+            <a:schemeClr val="lt1"/>
+          </a:fontRef>
+        </p:style>
+        <p:txBody>
+          <a:bodyPr rtlCol="0" anchor="ctr"/>
+          <a:lstStyle/>
+          <a:p>
+            <a:pPr algn="ctr"/>
+            <a:r>
+              <a:rPr lang="ko-KR" altLang="en-US" sz="800" smtClean="0">
+                <a:solidFill>
+                  <a:schemeClr val="tx1"/>
+                </a:solidFill>
+              </a:rPr>
+              <a:t>잊혀짐</a:t>
+            </a:r>
+            <a:endParaRPr lang="ko-KR" altLang="en-US" sz="800" dirty="0">
+              <a:solidFill>
+                <a:schemeClr val="tx1"/>
+              </a:solidFill>
+            </a:endParaRPr>
+          </a:p>
+        </p:txBody>
+      </p:sp>
+      <p:cxnSp>
+        <p:nvCxnSpPr>
+          <p:cNvPr id="143" name="직선 화살표 연결선 142">
             <a:extLst>
               <a:ext uri="{FF2B5EF4-FFF2-40B4-BE49-F238E27FC236}">
                 <a16:creationId xmlns:a16="http://schemas.microsoft.com/office/drawing/2014/main" id="{BADBD593-F14C-0FE6-82A5-BCC7AB757BEB}"/>
@@ -6946,15 +8422,15 @@
           </p:cNvPr>
           <p:cNvCxnSpPr>
             <a:cxnSpLocks/>
-            <a:stCxn id="69" idx="3"/>
-            <a:endCxn id="76" idx="1"/>
+            <a:stCxn id="138" idx="2"/>
+            <a:endCxn id="142" idx="0"/>
           </p:cNvCxnSpPr>
           <p:nvPr/>
         </p:nvCxnSpPr>
         <p:spPr>
-          <a:xfrm flipV="1">
-            <a:off x="9729006" y="6459030"/>
-            <a:ext cx="769790" cy="4"/>
+          <a:xfrm>
+            <a:off x="11455193" y="2599956"/>
+            <a:ext cx="0" cy="367988"/>
           </a:xfrm>
           <a:prstGeom prst="straightConnector1">
             <a:avLst/>
@@ -6983,10 +8459,10 @@
       </p:cxnSp>
       <p:sp>
         <p:nvSpPr>
-          <p:cNvPr id="86" name="직사각형 85">
+          <p:cNvPr id="147" name="화살표: 오각형 75">
             <a:extLst>
               <a:ext uri="{FF2B5EF4-FFF2-40B4-BE49-F238E27FC236}">
-                <a16:creationId xmlns:a16="http://schemas.microsoft.com/office/drawing/2014/main" id="{D798ACD7-B299-C70A-E579-659B7593696E}"/>
+                <a16:creationId xmlns:a16="http://schemas.microsoft.com/office/drawing/2014/main" id="{D216EC82-415A-355B-5917-9E53B0AF762D}"/>
               </a:ext>
             </a:extLst>
           </p:cNvPr>
@@ -6995,16 +8471,251 @@
         </p:nvSpPr>
         <p:spPr>
           <a:xfrm>
-            <a:off x="7406088" y="1370845"/>
-            <a:ext cx="1262254" cy="411480"/>
-          </a:xfrm>
-          <a:prstGeom prst="rect">
+            <a:off x="11011226" y="5098019"/>
+            <a:ext cx="1069848" cy="297092"/>
+          </a:xfrm>
+          <a:prstGeom prst="homePlate">
             <a:avLst/>
           </a:prstGeom>
-          <a:noFill/>
+          <a:solidFill>
+            <a:srgbClr val="FAEBA0"/>
+          </a:solidFill>
+          <a:ln>
+            <a:gradFill>
+              <a:gsLst>
+                <a:gs pos="0">
+                  <a:schemeClr val="accent1">
+                    <a:lumMod val="5000"/>
+                    <a:lumOff val="95000"/>
+                  </a:schemeClr>
+                </a:gs>
+                <a:gs pos="74000">
+                  <a:schemeClr val="accent1">
+                    <a:lumMod val="45000"/>
+                    <a:lumOff val="55000"/>
+                  </a:schemeClr>
+                </a:gs>
+                <a:gs pos="83000">
+                  <a:schemeClr val="accent1">
+                    <a:lumMod val="45000"/>
+                    <a:lumOff val="55000"/>
+                  </a:schemeClr>
+                </a:gs>
+                <a:gs pos="100000">
+                  <a:schemeClr val="accent1">
+                    <a:lumMod val="30000"/>
+                    <a:lumOff val="70000"/>
+                  </a:schemeClr>
+                </a:gs>
+              </a:gsLst>
+              <a:lin ang="5400000" scaled="1"/>
+            </a:gradFill>
+          </a:ln>
+          <a:effectLst>
+            <a:softEdge rad="19050"/>
+          </a:effectLst>
+        </p:spPr>
+        <p:style>
+          <a:lnRef idx="2">
+            <a:schemeClr val="accent1">
+              <a:shade val="15000"/>
+            </a:schemeClr>
+          </a:lnRef>
+          <a:fillRef idx="1">
+            <a:schemeClr val="accent1"/>
+          </a:fillRef>
+          <a:effectRef idx="0">
+            <a:schemeClr val="accent1"/>
+          </a:effectRef>
+          <a:fontRef idx="minor">
+            <a:schemeClr val="lt1"/>
+          </a:fontRef>
+        </p:style>
+        <p:txBody>
+          <a:bodyPr rtlCol="0" anchor="ctr"/>
+          <a:lstStyle/>
+          <a:p>
+            <a:pPr algn="ctr"/>
+            <a:r>
+              <a:rPr lang="ko-KR" altLang="en-US" sz="800" smtClean="0">
+                <a:solidFill>
+                  <a:schemeClr val="tx1"/>
+                </a:solidFill>
+              </a:rPr>
+              <a:t>비난</a:t>
+            </a:r>
+            <a:endParaRPr lang="ko-KR" altLang="en-US" sz="800" dirty="0">
+              <a:solidFill>
+                <a:schemeClr val="tx1"/>
+              </a:solidFill>
+            </a:endParaRPr>
+          </a:p>
+        </p:txBody>
+      </p:sp>
+      <p:sp>
+        <p:nvSpPr>
+          <p:cNvPr id="153" name="화살표: 오각형 75">
+            <a:extLst>
+              <a:ext uri="{FF2B5EF4-FFF2-40B4-BE49-F238E27FC236}">
+                <a16:creationId xmlns:a16="http://schemas.microsoft.com/office/drawing/2014/main" id="{D216EC82-415A-355B-5917-9E53B0AF762D}"/>
+              </a:ext>
+            </a:extLst>
+          </p:cNvPr>
+          <p:cNvSpPr/>
+          <p:nvPr/>
+        </p:nvSpPr>
+        <p:spPr>
+          <a:xfrm>
+            <a:off x="11013168" y="5756610"/>
+            <a:ext cx="1069848" cy="297092"/>
+          </a:xfrm>
+          <a:prstGeom prst="homePlate">
+            <a:avLst/>
+          </a:prstGeom>
+          <a:solidFill>
+            <a:srgbClr val="FAEBA0"/>
+          </a:solidFill>
+          <a:ln>
+            <a:gradFill>
+              <a:gsLst>
+                <a:gs pos="0">
+                  <a:schemeClr val="accent1">
+                    <a:lumMod val="5000"/>
+                    <a:lumOff val="95000"/>
+                  </a:schemeClr>
+                </a:gs>
+                <a:gs pos="74000">
+                  <a:schemeClr val="accent1">
+                    <a:lumMod val="45000"/>
+                    <a:lumOff val="55000"/>
+                  </a:schemeClr>
+                </a:gs>
+                <a:gs pos="83000">
+                  <a:schemeClr val="accent1">
+                    <a:lumMod val="45000"/>
+                    <a:lumOff val="55000"/>
+                  </a:schemeClr>
+                </a:gs>
+                <a:gs pos="100000">
+                  <a:schemeClr val="accent1">
+                    <a:lumMod val="30000"/>
+                    <a:lumOff val="70000"/>
+                  </a:schemeClr>
+                </a:gs>
+              </a:gsLst>
+              <a:lin ang="5400000" scaled="1"/>
+            </a:gradFill>
+          </a:ln>
+          <a:effectLst>
+            <a:softEdge rad="19050"/>
+          </a:effectLst>
+        </p:spPr>
+        <p:style>
+          <a:lnRef idx="2">
+            <a:schemeClr val="accent1">
+              <a:shade val="15000"/>
+            </a:schemeClr>
+          </a:lnRef>
+          <a:fillRef idx="1">
+            <a:schemeClr val="accent1"/>
+          </a:fillRef>
+          <a:effectRef idx="0">
+            <a:schemeClr val="accent1"/>
+          </a:effectRef>
+          <a:fontRef idx="minor">
+            <a:schemeClr val="lt1"/>
+          </a:fontRef>
+        </p:style>
+        <p:txBody>
+          <a:bodyPr rtlCol="0" anchor="ctr"/>
+          <a:lstStyle/>
+          <a:p>
+            <a:pPr algn="ctr"/>
+            <a:r>
+              <a:rPr lang="ko-KR" altLang="en-US" sz="800" smtClean="0">
+                <a:solidFill>
+                  <a:schemeClr val="tx1"/>
+                </a:solidFill>
+              </a:rPr>
+              <a:t>이제야 움직이는 세상</a:t>
+            </a:r>
+            <a:endParaRPr lang="ko-KR" altLang="en-US" sz="800" dirty="0">
+              <a:solidFill>
+                <a:schemeClr val="tx1"/>
+              </a:solidFill>
+            </a:endParaRPr>
+          </a:p>
+        </p:txBody>
+      </p:sp>
+      <p:cxnSp>
+        <p:nvCxnSpPr>
+          <p:cNvPr id="154" name="직선 화살표 연결선 153">
+            <a:extLst>
+              <a:ext uri="{FF2B5EF4-FFF2-40B4-BE49-F238E27FC236}">
+                <a16:creationId xmlns:a16="http://schemas.microsoft.com/office/drawing/2014/main" id="{BADBD593-F14C-0FE6-82A5-BCC7AB757BEB}"/>
+              </a:ext>
+            </a:extLst>
+          </p:cNvPr>
+          <p:cNvCxnSpPr>
+            <a:cxnSpLocks/>
+            <a:stCxn id="147" idx="2"/>
+            <a:endCxn id="153" idx="0"/>
+          </p:cNvCxnSpPr>
+          <p:nvPr/>
+        </p:nvCxnSpPr>
+        <p:spPr>
+          <a:xfrm>
+            <a:off x="11471877" y="5395111"/>
+            <a:ext cx="1942" cy="361499"/>
+          </a:xfrm>
+          <a:prstGeom prst="straightConnector1">
+            <a:avLst/>
+          </a:prstGeom>
+          <a:ln w="19050">
+            <a:solidFill>
+              <a:srgbClr val="FAEBA0"/>
+            </a:solidFill>
+            <a:tailEnd type="triangle"/>
+          </a:ln>
+        </p:spPr>
+        <p:style>
+          <a:lnRef idx="1">
+            <a:schemeClr val="accent1"/>
+          </a:lnRef>
+          <a:fillRef idx="0">
+            <a:schemeClr val="accent1"/>
+          </a:fillRef>
+          <a:effectRef idx="0">
+            <a:schemeClr val="accent1"/>
+          </a:effectRef>
+          <a:fontRef idx="minor">
+            <a:schemeClr val="tx1"/>
+          </a:fontRef>
+        </p:style>
+      </p:cxnSp>
+      <p:sp>
+        <p:nvSpPr>
+          <p:cNvPr id="165" name="순서도: 판단 164"/>
+          <p:cNvSpPr/>
+          <p:nvPr/>
+        </p:nvSpPr>
+        <p:spPr>
+          <a:xfrm>
+            <a:off x="9926600" y="3164570"/>
+            <a:ext cx="1316930" cy="559708"/>
+          </a:xfrm>
+          <a:prstGeom prst="flowChartDecision">
+            <a:avLst/>
+          </a:prstGeom>
+          <a:solidFill>
+            <a:schemeClr val="bg1"/>
+          </a:solidFill>
           <a:ln>
             <a:noFill/>
           </a:ln>
+          <a:effectLst>
+            <a:softEdge rad="25400"/>
+          </a:effectLst>
         </p:spPr>
         <p:style>
           <a:lnRef idx="2">
@@ -7028,383 +8739,44 @@
           <a:p>
             <a:pPr algn="ctr"/>
             <a:r>
-              <a:rPr lang="ko-KR" altLang="en-US" sz="1000" dirty="0">
+              <a:rPr lang="ko-KR" altLang="en-US" sz="800" smtClean="0">
                 <a:solidFill>
-                  <a:schemeClr val="bg1"/>
-                </a:solidFill>
-              </a:rPr>
-              <a:t>선의 랭킹 시스템</a:t>
-            </a:r>
-          </a:p>
-        </p:txBody>
-      </p:sp>
-      <p:sp>
-        <p:nvSpPr>
-          <p:cNvPr id="88" name="직사각형 87">
-            <a:extLst>
-              <a:ext uri="{FF2B5EF4-FFF2-40B4-BE49-F238E27FC236}">
-                <a16:creationId xmlns:a16="http://schemas.microsoft.com/office/drawing/2014/main" id="{F7EE0F87-CA86-AF01-237B-0AB7CC4EA54F}"/>
-              </a:ext>
-            </a:extLst>
-          </p:cNvPr>
-          <p:cNvSpPr/>
-          <p:nvPr/>
-        </p:nvSpPr>
-        <p:spPr>
-          <a:xfrm>
-            <a:off x="324682" y="4375390"/>
-            <a:ext cx="1262254" cy="411480"/>
-          </a:xfrm>
-          <a:prstGeom prst="rect">
-            <a:avLst/>
-          </a:prstGeom>
-          <a:noFill/>
-          <a:ln>
-            <a:noFill/>
-          </a:ln>
-        </p:spPr>
-        <p:style>
-          <a:lnRef idx="2">
-            <a:schemeClr val="accent1">
-              <a:shade val="50000"/>
-            </a:schemeClr>
-          </a:lnRef>
-          <a:fillRef idx="1">
-            <a:schemeClr val="accent1"/>
-          </a:fillRef>
-          <a:effectRef idx="0">
-            <a:schemeClr val="accent1"/>
-          </a:effectRef>
-          <a:fontRef idx="minor">
-            <a:schemeClr val="lt1"/>
-          </a:fontRef>
-        </p:style>
-        <p:txBody>
-          <a:bodyPr rtlCol="0" anchor="ctr"/>
-          <a:lstStyle/>
-          <a:p>
-            <a:pPr algn="ctr"/>
-            <a:r>
-              <a:rPr lang="ko-KR" altLang="en-US" sz="1000" dirty="0">
-                <a:solidFill>
-                  <a:schemeClr val="bg1"/>
-                </a:solidFill>
-              </a:rPr>
-              <a:t>강제 징집</a:t>
-            </a:r>
-          </a:p>
-        </p:txBody>
-      </p:sp>
-      <p:sp>
-        <p:nvSpPr>
-          <p:cNvPr id="91" name="직사각형 90">
-            <a:extLst>
-              <a:ext uri="{FF2B5EF4-FFF2-40B4-BE49-F238E27FC236}">
-                <a16:creationId xmlns:a16="http://schemas.microsoft.com/office/drawing/2014/main" id="{0BACF5E8-B18E-E4F1-31F5-D15622A47334}"/>
-              </a:ext>
-            </a:extLst>
-          </p:cNvPr>
-          <p:cNvSpPr/>
-          <p:nvPr/>
-        </p:nvSpPr>
-        <p:spPr>
-          <a:xfrm>
-            <a:off x="1808954" y="4375390"/>
-            <a:ext cx="1262254" cy="411480"/>
-          </a:xfrm>
-          <a:prstGeom prst="rect">
-            <a:avLst/>
-          </a:prstGeom>
-          <a:noFill/>
-          <a:ln>
-            <a:noFill/>
-          </a:ln>
-        </p:spPr>
-        <p:style>
-          <a:lnRef idx="2">
-            <a:schemeClr val="accent1">
-              <a:shade val="50000"/>
-            </a:schemeClr>
-          </a:lnRef>
-          <a:fillRef idx="1">
-            <a:schemeClr val="accent1"/>
-          </a:fillRef>
-          <a:effectRef idx="0">
-            <a:schemeClr val="accent1"/>
-          </a:effectRef>
-          <a:fontRef idx="minor">
-            <a:schemeClr val="lt1"/>
-          </a:fontRef>
-        </p:style>
-        <p:txBody>
-          <a:bodyPr rtlCol="0" anchor="ctr"/>
-          <a:lstStyle/>
-          <a:p>
-            <a:pPr algn="ctr"/>
-            <a:r>
-              <a:rPr lang="ko-KR" altLang="en-US" sz="1000" dirty="0">
-                <a:solidFill>
-                  <a:schemeClr val="bg1"/>
-                </a:solidFill>
-              </a:rPr>
-              <a:t>구조 실패</a:t>
-            </a:r>
-          </a:p>
-        </p:txBody>
-      </p:sp>
-      <p:sp>
-        <p:nvSpPr>
-          <p:cNvPr id="92" name="직사각형 91">
-            <a:extLst>
-              <a:ext uri="{FF2B5EF4-FFF2-40B4-BE49-F238E27FC236}">
-                <a16:creationId xmlns:a16="http://schemas.microsoft.com/office/drawing/2014/main" id="{F1D86EC7-0B5D-E426-4A1E-96C0AD6369DC}"/>
-              </a:ext>
-            </a:extLst>
-          </p:cNvPr>
-          <p:cNvSpPr/>
-          <p:nvPr/>
-        </p:nvSpPr>
-        <p:spPr>
-          <a:xfrm>
-            <a:off x="6072360" y="1276838"/>
-            <a:ext cx="1262254" cy="411480"/>
-          </a:xfrm>
-          <a:prstGeom prst="rect">
-            <a:avLst/>
-          </a:prstGeom>
-          <a:noFill/>
-          <a:ln>
-            <a:noFill/>
-          </a:ln>
-        </p:spPr>
-        <p:style>
-          <a:lnRef idx="2">
-            <a:schemeClr val="accent1">
-              <a:shade val="50000"/>
-            </a:schemeClr>
-          </a:lnRef>
-          <a:fillRef idx="1">
-            <a:schemeClr val="accent1"/>
-          </a:fillRef>
-          <a:effectRef idx="0">
-            <a:schemeClr val="accent1"/>
-          </a:effectRef>
-          <a:fontRef idx="minor">
-            <a:schemeClr val="lt1"/>
-          </a:fontRef>
-        </p:style>
-        <p:txBody>
-          <a:bodyPr rtlCol="0" anchor="ctr"/>
-          <a:lstStyle/>
-          <a:p>
-            <a:pPr algn="ctr"/>
-            <a:r>
-              <a:rPr lang="ko-KR" altLang="en-US" sz="1000" dirty="0">
-                <a:solidFill>
-                  <a:schemeClr val="bg1"/>
-                </a:solidFill>
-              </a:rPr>
-              <a:t>선의 랭킹 시스템</a:t>
-            </a:r>
-          </a:p>
-        </p:txBody>
-      </p:sp>
-      <p:sp>
-        <p:nvSpPr>
-          <p:cNvPr id="93" name="직사각형 92">
-            <a:extLst>
-              <a:ext uri="{FF2B5EF4-FFF2-40B4-BE49-F238E27FC236}">
-                <a16:creationId xmlns:a16="http://schemas.microsoft.com/office/drawing/2014/main" id="{C7BEDFB0-C6B6-34D0-27F5-C9C042F80467}"/>
-              </a:ext>
-            </a:extLst>
-          </p:cNvPr>
-          <p:cNvSpPr/>
-          <p:nvPr/>
-        </p:nvSpPr>
-        <p:spPr>
-          <a:xfrm>
-            <a:off x="5015819" y="205740"/>
-            <a:ext cx="1262254" cy="411480"/>
-          </a:xfrm>
-          <a:prstGeom prst="rect">
-            <a:avLst/>
-          </a:prstGeom>
-          <a:noFill/>
-          <a:ln>
-            <a:noFill/>
-          </a:ln>
-        </p:spPr>
-        <p:style>
-          <a:lnRef idx="2">
-            <a:schemeClr val="accent1">
-              <a:shade val="50000"/>
-            </a:schemeClr>
-          </a:lnRef>
-          <a:fillRef idx="1">
-            <a:schemeClr val="accent1"/>
-          </a:fillRef>
-          <a:effectRef idx="0">
-            <a:schemeClr val="accent1"/>
-          </a:effectRef>
-          <a:fontRef idx="minor">
-            <a:schemeClr val="lt1"/>
-          </a:fontRef>
-        </p:style>
-        <p:txBody>
-          <a:bodyPr rtlCol="0" anchor="ctr"/>
-          <a:lstStyle/>
-          <a:p>
-            <a:pPr algn="ctr"/>
-            <a:r>
-              <a:rPr lang="ko-KR" altLang="en-US" sz="1000" dirty="0">
-                <a:solidFill>
-                  <a:schemeClr val="bg1"/>
-                </a:solidFill>
-              </a:rPr>
-              <a:t>괴물의 정체</a:t>
-            </a:r>
-          </a:p>
-        </p:txBody>
-      </p:sp>
-      <p:sp>
-        <p:nvSpPr>
-          <p:cNvPr id="95" name="직사각형 94">
-            <a:extLst>
-              <a:ext uri="{FF2B5EF4-FFF2-40B4-BE49-F238E27FC236}">
-                <a16:creationId xmlns:a16="http://schemas.microsoft.com/office/drawing/2014/main" id="{7CEE8659-536F-341A-1E79-4A146B933C78}"/>
-              </a:ext>
-            </a:extLst>
-          </p:cNvPr>
-          <p:cNvSpPr/>
-          <p:nvPr/>
-        </p:nvSpPr>
-        <p:spPr>
-          <a:xfrm>
-            <a:off x="57063" y="3172051"/>
-            <a:ext cx="1262254" cy="411480"/>
-          </a:xfrm>
-          <a:prstGeom prst="rect">
-            <a:avLst/>
-          </a:prstGeom>
-          <a:noFill/>
-          <a:ln>
-            <a:noFill/>
-          </a:ln>
-        </p:spPr>
-        <p:style>
-          <a:lnRef idx="2">
-            <a:schemeClr val="accent1">
-              <a:shade val="50000"/>
-            </a:schemeClr>
-          </a:lnRef>
-          <a:fillRef idx="1">
-            <a:schemeClr val="accent1"/>
-          </a:fillRef>
-          <a:effectRef idx="0">
-            <a:schemeClr val="accent1"/>
-          </a:effectRef>
-          <a:fontRef idx="minor">
-            <a:schemeClr val="lt1"/>
-          </a:fontRef>
-        </p:style>
-        <p:txBody>
-          <a:bodyPr rtlCol="0" anchor="ctr"/>
-          <a:lstStyle/>
-          <a:p>
-            <a:pPr algn="ctr"/>
-            <a:r>
-              <a:rPr lang="ko-KR" altLang="en-US" sz="1000" dirty="0">
-                <a:solidFill>
-                  <a:schemeClr val="bg1"/>
-                </a:solidFill>
-              </a:rPr>
-              <a:t>육체 저장소 발견</a:t>
-            </a:r>
-          </a:p>
-        </p:txBody>
-      </p:sp>
-      <p:sp>
-        <p:nvSpPr>
-          <p:cNvPr id="96" name="직사각형 95">
-            <a:extLst>
-              <a:ext uri="{FF2B5EF4-FFF2-40B4-BE49-F238E27FC236}">
-                <a16:creationId xmlns:a16="http://schemas.microsoft.com/office/drawing/2014/main" id="{95FB94F2-6C50-AA50-740E-7841E9A0DF03}"/>
-              </a:ext>
-            </a:extLst>
-          </p:cNvPr>
-          <p:cNvSpPr/>
-          <p:nvPr/>
-        </p:nvSpPr>
-        <p:spPr>
-          <a:xfrm>
-            <a:off x="-93566" y="1397475"/>
-            <a:ext cx="1262254" cy="411480"/>
-          </a:xfrm>
-          <a:prstGeom prst="rect">
-            <a:avLst/>
-          </a:prstGeom>
-          <a:noFill/>
-          <a:ln>
-            <a:noFill/>
-          </a:ln>
-        </p:spPr>
-        <p:style>
-          <a:lnRef idx="2">
-            <a:schemeClr val="accent1">
-              <a:shade val="50000"/>
-            </a:schemeClr>
-          </a:lnRef>
-          <a:fillRef idx="1">
-            <a:schemeClr val="accent1"/>
-          </a:fillRef>
-          <a:effectRef idx="0">
-            <a:schemeClr val="accent1"/>
-          </a:effectRef>
-          <a:fontRef idx="minor">
-            <a:schemeClr val="lt1"/>
-          </a:fontRef>
-        </p:style>
-        <p:txBody>
-          <a:bodyPr rtlCol="0" anchor="ctr"/>
-          <a:lstStyle/>
-          <a:p>
-            <a:pPr algn="ctr"/>
-            <a:r>
-              <a:rPr lang="ko-KR" altLang="en-US" sz="1000" dirty="0">
-                <a:solidFill>
-                  <a:schemeClr val="bg1"/>
+                  <a:schemeClr val="tx1"/>
                 </a:solidFill>
               </a:rPr>
               <a:t>최종 선택</a:t>
             </a:r>
+            <a:endParaRPr lang="ko-KR" altLang="en-US" sz="800" dirty="0">
+              <a:solidFill>
+                <a:schemeClr val="tx1"/>
+              </a:solidFill>
+            </a:endParaRPr>
           </a:p>
         </p:txBody>
       </p:sp>
       <p:cxnSp>
         <p:nvCxnSpPr>
-          <p:cNvPr id="124" name="연결선: 꺾임 123">
+          <p:cNvPr id="177" name="직선 화살표 연결선 176">
             <a:extLst>
               <a:ext uri="{FF2B5EF4-FFF2-40B4-BE49-F238E27FC236}">
-                <a16:creationId xmlns:a16="http://schemas.microsoft.com/office/drawing/2014/main" id="{BC660F1B-9D1B-ACB4-23EB-18B00A29F9B9}"/>
+                <a16:creationId xmlns:a16="http://schemas.microsoft.com/office/drawing/2014/main" id="{BADBD593-F14C-0FE6-82A5-BCC7AB757BEB}"/>
               </a:ext>
             </a:extLst>
           </p:cNvPr>
           <p:cNvCxnSpPr>
             <a:cxnSpLocks/>
-            <a:stCxn id="47" idx="3"/>
-            <a:endCxn id="54" idx="1"/>
+            <a:stCxn id="128" idx="2"/>
+            <a:endCxn id="138" idx="0"/>
           </p:cNvCxnSpPr>
           <p:nvPr/>
         </p:nvCxnSpPr>
         <p:spPr>
-          <a:xfrm flipV="1">
-            <a:off x="4853428" y="4194032"/>
-            <a:ext cx="752774" cy="1887728"/>
-          </a:xfrm>
-          <a:prstGeom prst="bentConnector3">
-            <a:avLst>
-              <a:gd name="adj1" fmla="val 50000"/>
-            </a:avLst>
+          <a:xfrm>
+            <a:off x="11455193" y="1936571"/>
+            <a:ext cx="0" cy="366293"/>
+          </a:xfrm>
+          <a:prstGeom prst="straightConnector1">
+            <a:avLst/>
           </a:prstGeom>
           <a:ln w="19050">
             <a:solidFill>
@@ -7430,27 +8802,27 @@
       </p:cxnSp>
       <p:cxnSp>
         <p:nvCxnSpPr>
-          <p:cNvPr id="127" name="연결선: 꺾임 126">
+          <p:cNvPr id="181" name="직선 화살표 연결선 180">
             <a:extLst>
               <a:ext uri="{FF2B5EF4-FFF2-40B4-BE49-F238E27FC236}">
-                <a16:creationId xmlns:a16="http://schemas.microsoft.com/office/drawing/2014/main" id="{55455B5E-7F35-3945-07EC-113BCA670A85}"/>
+                <a16:creationId xmlns:a16="http://schemas.microsoft.com/office/drawing/2014/main" id="{BADBD593-F14C-0FE6-82A5-BCC7AB757BEB}"/>
               </a:ext>
             </a:extLst>
           </p:cNvPr>
           <p:cNvCxnSpPr>
             <a:cxnSpLocks/>
+            <a:stCxn id="129" idx="2"/>
+            <a:endCxn id="147" idx="0"/>
           </p:cNvCxnSpPr>
           <p:nvPr/>
         </p:nvCxnSpPr>
         <p:spPr>
-          <a:xfrm rot="16200000" flipH="1">
-            <a:off x="7251739" y="6037349"/>
-            <a:ext cx="5428" cy="1161490"/>
-          </a:xfrm>
-          <a:prstGeom prst="bentConnector3">
-            <a:avLst>
-              <a:gd name="adj1" fmla="val 2219510"/>
-            </a:avLst>
+          <a:xfrm>
+            <a:off x="11471877" y="4736520"/>
+            <a:ext cx="0" cy="361499"/>
+          </a:xfrm>
+          <a:prstGeom prst="straightConnector1">
+            <a:avLst/>
           </a:prstGeom>
           <a:ln w="19050">
             <a:solidFill>
@@ -7476,61 +8848,194 @@
       </p:cxnSp>
       <p:sp>
         <p:nvSpPr>
-          <p:cNvPr id="59" name="직사각형 58">
-            <a:extLst>
-              <a:ext uri="{FF2B5EF4-FFF2-40B4-BE49-F238E27FC236}">
-                <a16:creationId xmlns:a16="http://schemas.microsoft.com/office/drawing/2014/main" id="{0A5A3AF7-5731-8BDD-2C11-8F2E1CB81D7E}"/>
-              </a:ext>
-            </a:extLst>
-          </p:cNvPr>
-          <p:cNvSpPr/>
+          <p:cNvPr id="185" name="TextBox 184"/>
+          <p:cNvSpPr txBox="1"/>
           <p:nvPr/>
         </p:nvSpPr>
         <p:spPr>
-          <a:xfrm>
-            <a:off x="8967046" y="321870"/>
-            <a:ext cx="1702601" cy="411480"/>
+          <a:xfrm rot="19927908">
+            <a:off x="1772839" y="5089967"/>
+            <a:ext cx="611179" cy="246221"/>
           </a:xfrm>
           <a:prstGeom prst="rect">
             <a:avLst/>
           </a:prstGeom>
           <a:noFill/>
-          <a:ln>
-            <a:noFill/>
-          </a:ln>
-        </p:spPr>
-        <p:style>
-          <a:lnRef idx="2">
-            <a:schemeClr val="accent1">
-              <a:shade val="50000"/>
-            </a:schemeClr>
-          </a:lnRef>
-          <a:fillRef idx="1">
-            <a:schemeClr val="accent1"/>
-          </a:fillRef>
-          <a:effectRef idx="0">
-            <a:schemeClr val="accent1"/>
-          </a:effectRef>
-          <a:fontRef idx="minor">
-            <a:schemeClr val="lt1"/>
-          </a:fontRef>
-        </p:style>
-        <p:txBody>
-          <a:bodyPr rtlCol="0" anchor="ctr"/>
+        </p:spPr>
+        <p:txBody>
+          <a:bodyPr wrap="square" rtlCol="0">
+            <a:spAutoFit/>
+          </a:bodyPr>
           <a:lstStyle/>
           <a:p>
             <a:pPr algn="ctr"/>
             <a:r>
               <a:rPr lang="ko-KR" altLang="en-US" sz="1000" smtClean="0">
                 <a:solidFill>
-                  <a:schemeClr val="bg1"/>
+                  <a:srgbClr val="FAEBA0"/>
                 </a:solidFill>
               </a:rPr>
-              <a:t>강제 징집</a:t>
-            </a:r>
-            <a:endParaRPr lang="ko-KR" altLang="en-US" sz="1000" dirty="0">
+              <a:t>발단</a:t>
+            </a:r>
+            <a:endParaRPr lang="ko-KR" altLang="en-US" sz="1000">
               <a:solidFill>
-                <a:schemeClr val="bg1"/>
+                <a:srgbClr val="FAEBA0"/>
+              </a:solidFill>
+            </a:endParaRPr>
+          </a:p>
+        </p:txBody>
+      </p:sp>
+      <p:sp>
+        <p:nvSpPr>
+          <p:cNvPr id="187" name="TextBox 186"/>
+          <p:cNvSpPr txBox="1"/>
+          <p:nvPr/>
+        </p:nvSpPr>
+        <p:spPr>
+          <a:xfrm rot="19927908">
+            <a:off x="4211798" y="3791447"/>
+            <a:ext cx="611179" cy="246221"/>
+          </a:xfrm>
+          <a:prstGeom prst="rect">
+            <a:avLst/>
+          </a:prstGeom>
+          <a:noFill/>
+        </p:spPr>
+        <p:txBody>
+          <a:bodyPr wrap="square" rtlCol="0">
+            <a:spAutoFit/>
+          </a:bodyPr>
+          <a:lstStyle/>
+          <a:p>
+            <a:pPr algn="ctr"/>
+            <a:r>
+              <a:rPr lang="ko-KR" altLang="en-US" sz="1000" smtClean="0">
+                <a:solidFill>
+                  <a:srgbClr val="FAEBA0"/>
+                </a:solidFill>
+              </a:rPr>
+              <a:t>전개</a:t>
+            </a:r>
+            <a:endParaRPr lang="ko-KR" altLang="en-US" sz="1000">
+              <a:solidFill>
+                <a:srgbClr val="FAEBA0"/>
+              </a:solidFill>
+            </a:endParaRPr>
+          </a:p>
+        </p:txBody>
+      </p:sp>
+      <p:sp>
+        <p:nvSpPr>
+          <p:cNvPr id="188" name="TextBox 187"/>
+          <p:cNvSpPr txBox="1"/>
+          <p:nvPr/>
+        </p:nvSpPr>
+        <p:spPr>
+          <a:xfrm rot="19927908">
+            <a:off x="6623486" y="2516256"/>
+            <a:ext cx="611179" cy="246221"/>
+          </a:xfrm>
+          <a:prstGeom prst="rect">
+            <a:avLst/>
+          </a:prstGeom>
+          <a:noFill/>
+        </p:spPr>
+        <p:txBody>
+          <a:bodyPr wrap="square" rtlCol="0">
+            <a:spAutoFit/>
+          </a:bodyPr>
+          <a:lstStyle/>
+          <a:p>
+            <a:pPr algn="ctr"/>
+            <a:r>
+              <a:rPr lang="ko-KR" altLang="en-US" sz="1000" smtClean="0">
+                <a:solidFill>
+                  <a:srgbClr val="FAEBA0"/>
+                </a:solidFill>
+              </a:rPr>
+              <a:t>위기</a:t>
+            </a:r>
+            <a:endParaRPr lang="ko-KR" altLang="en-US" sz="1000">
+              <a:solidFill>
+                <a:srgbClr val="FAEBA0"/>
+              </a:solidFill>
+            </a:endParaRPr>
+          </a:p>
+        </p:txBody>
+      </p:sp>
+      <p:sp>
+        <p:nvSpPr>
+          <p:cNvPr id="189" name="TextBox 188"/>
+          <p:cNvSpPr txBox="1"/>
+          <p:nvPr/>
+        </p:nvSpPr>
+        <p:spPr>
+          <a:xfrm rot="19927908">
+            <a:off x="9004550" y="1260531"/>
+            <a:ext cx="611179" cy="246221"/>
+          </a:xfrm>
+          <a:prstGeom prst="rect">
+            <a:avLst/>
+          </a:prstGeom>
+          <a:noFill/>
+        </p:spPr>
+        <p:txBody>
+          <a:bodyPr wrap="square" rtlCol="0">
+            <a:spAutoFit/>
+          </a:bodyPr>
+          <a:lstStyle/>
+          <a:p>
+            <a:pPr algn="ctr"/>
+            <a:r>
+              <a:rPr lang="ko-KR" altLang="en-US" sz="1000" smtClean="0">
+                <a:solidFill>
+                  <a:srgbClr val="FAEBA0"/>
+                </a:solidFill>
+              </a:rPr>
+              <a:t>절정</a:t>
+            </a:r>
+            <a:endParaRPr lang="ko-KR" altLang="en-US" sz="1000">
+              <a:solidFill>
+                <a:srgbClr val="FAEBA0"/>
+              </a:solidFill>
+            </a:endParaRPr>
+          </a:p>
+        </p:txBody>
+      </p:sp>
+      <p:sp>
+        <p:nvSpPr>
+          <p:cNvPr id="190" name="TextBox 189"/>
+          <p:cNvSpPr txBox="1"/>
+          <p:nvPr/>
+        </p:nvSpPr>
+        <p:spPr>
+          <a:xfrm rot="19927908">
+            <a:off x="11335798" y="36692"/>
+            <a:ext cx="611179" cy="246221"/>
+          </a:xfrm>
+          <a:prstGeom prst="rect">
+            <a:avLst/>
+          </a:prstGeom>
+          <a:noFill/>
+        </p:spPr>
+        <p:txBody>
+          <a:bodyPr wrap="square" rtlCol="0">
+            <a:spAutoFit/>
+          </a:bodyPr>
+          <a:lstStyle/>
+          <a:p>
+            <a:pPr algn="ctr"/>
+            <a:r>
+              <a:rPr lang="ko-KR" altLang="en-US" sz="1000" smtClean="0">
+                <a:solidFill>
+                  <a:srgbClr val="FAEBA0"/>
+                </a:solidFill>
+              </a:rPr>
+              <a:t>결말</a:t>
+            </a:r>
+            <a:endParaRPr lang="ko-KR" altLang="en-US" sz="1000">
+              <a:solidFill>
+                <a:srgbClr val="FAEBA0"/>
               </a:solidFill>
             </a:endParaRPr>
           </a:p>

--- a/[실습](3.27) 상황의 기차칸.pptx
+++ b/[실습](3.27) 상황의 기차칸.pptx
@@ -118,7 +118,7 @@
 <file path=ppt/revisionInfo.xml><?xml version="1.0" encoding="utf-8"?>
 <p1510:revInfo xmlns:a="http://schemas.openxmlformats.org/drawingml/2006/main" xmlns:r="http://schemas.openxmlformats.org/officeDocument/2006/relationships" xmlns:p1510="http://schemas.microsoft.com/office/powerpoint/2015/10/main">
   <p1510:revLst>
-    <p1510:client id="{BE85CAB5-BF9D-4577-A3CE-8E24176FA968}" v="33" dt="2026-03-30T02:20:20.268"/>
+    <p1510:client id="{BE85CAB5-BF9D-4577-A3CE-8E24176FA968}" v="41" dt="2026-04-03T02:29:53.040"/>
   </p1510:revLst>
 </p1510:revInfo>
 </file>
@@ -128,267 +128,12 @@
   <pc:docChgLst>
     <pc:chgData name="musukie52@gmail.com" userId="017bd91f96aa8751" providerId="LiveId" clId="{5B2C3894-F97E-4CAB-8812-5BB4D83AAC6A}"/>
     <pc:docChg chg="undo custSel addSld modSld">
-      <pc:chgData name="musukie52@gmail.com" userId="017bd91f96aa8751" providerId="LiveId" clId="{5B2C3894-F97E-4CAB-8812-5BB4D83AAC6A}" dt="2026-03-30T02:21:16.645" v="429" actId="22"/>
+      <pc:chgData name="musukie52@gmail.com" userId="017bd91f96aa8751" providerId="LiveId" clId="{5B2C3894-F97E-4CAB-8812-5BB4D83AAC6A}" dt="2026-04-03T02:29:53.040" v="591"/>
       <pc:docMkLst>
         <pc:docMk/>
       </pc:docMkLst>
-      <pc:sldChg chg="addSp delSp modSp mod setBg">
-        <pc:chgData name="musukie52@gmail.com" userId="017bd91f96aa8751" providerId="LiveId" clId="{5B2C3894-F97E-4CAB-8812-5BB4D83AAC6A}" dt="2026-03-30T01:55:19.062" v="169" actId="2085"/>
-        <pc:sldMkLst>
-          <pc:docMk/>
-          <pc:sldMk cId="2334041143" sldId="257"/>
-        </pc:sldMkLst>
-        <pc:spChg chg="add mod ord">
-          <ac:chgData name="musukie52@gmail.com" userId="017bd91f96aa8751" providerId="LiveId" clId="{5B2C3894-F97E-4CAB-8812-5BB4D83AAC6A}" dt="2026-03-30T01:31:24.392" v="105" actId="166"/>
-          <ac:spMkLst>
-            <pc:docMk/>
-            <pc:sldMk cId="2334041143" sldId="257"/>
-            <ac:spMk id="2" creationId="{343F3A70-89A0-C5C5-7107-AB9C8A3A4728}"/>
-          </ac:spMkLst>
-        </pc:spChg>
-        <pc:spChg chg="add del mod">
-          <ac:chgData name="musukie52@gmail.com" userId="017bd91f96aa8751" providerId="LiveId" clId="{5B2C3894-F97E-4CAB-8812-5BB4D83AAC6A}" dt="2026-03-30T01:27:29.582" v="62" actId="478"/>
-          <ac:spMkLst>
-            <pc:docMk/>
-            <pc:sldMk cId="2334041143" sldId="257"/>
-            <ac:spMk id="3" creationId="{50A00D17-7F9C-2C1E-9C42-2B7E6257356A}"/>
-          </ac:spMkLst>
-        </pc:spChg>
-        <pc:spChg chg="mod">
-          <ac:chgData name="musukie52@gmail.com" userId="017bd91f96aa8751" providerId="LiveId" clId="{5B2C3894-F97E-4CAB-8812-5BB4D83AAC6A}" dt="2026-03-30T01:54:25.661" v="164" actId="207"/>
-          <ac:spMkLst>
-            <pc:docMk/>
-            <pc:sldMk cId="2334041143" sldId="257"/>
-            <ac:spMk id="4" creationId="{00000000-0000-0000-0000-000000000000}"/>
-          </ac:spMkLst>
-        </pc:spChg>
-        <pc:spChg chg="mod">
-          <ac:chgData name="musukie52@gmail.com" userId="017bd91f96aa8751" providerId="LiveId" clId="{5B2C3894-F97E-4CAB-8812-5BB4D83AAC6A}" dt="2026-03-30T01:55:19.062" v="169" actId="2085"/>
-          <ac:spMkLst>
-            <pc:docMk/>
-            <pc:sldMk cId="2334041143" sldId="257"/>
-            <ac:spMk id="5" creationId="{00000000-0000-0000-0000-000000000000}"/>
-          </ac:spMkLst>
-        </pc:spChg>
-        <pc:spChg chg="mod ord">
-          <ac:chgData name="musukie52@gmail.com" userId="017bd91f96aa8751" providerId="LiveId" clId="{5B2C3894-F97E-4CAB-8812-5BB4D83AAC6A}" dt="2026-03-30T01:31:24.392" v="105" actId="166"/>
-          <ac:spMkLst>
-            <pc:docMk/>
-            <pc:sldMk cId="2334041143" sldId="257"/>
-            <ac:spMk id="6" creationId="{00000000-0000-0000-0000-000000000000}"/>
-          </ac:spMkLst>
-        </pc:spChg>
-        <pc:spChg chg="del mod">
-          <ac:chgData name="musukie52@gmail.com" userId="017bd91f96aa8751" providerId="LiveId" clId="{5B2C3894-F97E-4CAB-8812-5BB4D83AAC6A}" dt="2026-03-30T01:20:22.607" v="18" actId="478"/>
-          <ac:spMkLst>
-            <pc:docMk/>
-            <pc:sldMk cId="2334041143" sldId="257"/>
-            <ac:spMk id="7" creationId="{00000000-0000-0000-0000-000000000000}"/>
-          </ac:spMkLst>
-        </pc:spChg>
-        <pc:spChg chg="mod">
-          <ac:chgData name="musukie52@gmail.com" userId="017bd91f96aa8751" providerId="LiveId" clId="{5B2C3894-F97E-4CAB-8812-5BB4D83AAC6A}" dt="2026-03-30T01:39:58.497" v="108" actId="20577"/>
-          <ac:spMkLst>
-            <pc:docMk/>
-            <pc:sldMk cId="2334041143" sldId="257"/>
-            <ac:spMk id="8" creationId="{00000000-0000-0000-0000-000000000000}"/>
-          </ac:spMkLst>
-        </pc:spChg>
-        <pc:spChg chg="mod ord">
-          <ac:chgData name="musukie52@gmail.com" userId="017bd91f96aa8751" providerId="LiveId" clId="{5B2C3894-F97E-4CAB-8812-5BB4D83AAC6A}" dt="2026-03-30T01:40:14.059" v="121"/>
-          <ac:spMkLst>
-            <pc:docMk/>
-            <pc:sldMk cId="2334041143" sldId="257"/>
-            <ac:spMk id="9" creationId="{00000000-0000-0000-0000-000000000000}"/>
-          </ac:spMkLst>
-        </pc:spChg>
-        <pc:spChg chg="mod ord">
-          <ac:chgData name="musukie52@gmail.com" userId="017bd91f96aa8751" providerId="LiveId" clId="{5B2C3894-F97E-4CAB-8812-5BB4D83AAC6A}" dt="2026-03-30T01:31:24.392" v="105" actId="166"/>
-          <ac:spMkLst>
-            <pc:docMk/>
-            <pc:sldMk cId="2334041143" sldId="257"/>
-            <ac:spMk id="11" creationId="{00000000-0000-0000-0000-000000000000}"/>
-          </ac:spMkLst>
-        </pc:spChg>
-        <pc:spChg chg="mod ord">
-          <ac:chgData name="musukie52@gmail.com" userId="017bd91f96aa8751" providerId="LiveId" clId="{5B2C3894-F97E-4CAB-8812-5BB4D83AAC6A}" dt="2026-03-30T01:40:22.437" v="134" actId="14100"/>
-          <ac:spMkLst>
-            <pc:docMk/>
-            <pc:sldMk cId="2334041143" sldId="257"/>
-            <ac:spMk id="12" creationId="{00000000-0000-0000-0000-000000000000}"/>
-          </ac:spMkLst>
-        </pc:spChg>
-        <pc:spChg chg="mod">
-          <ac:chgData name="musukie52@gmail.com" userId="017bd91f96aa8751" providerId="LiveId" clId="{5B2C3894-F97E-4CAB-8812-5BB4D83AAC6A}" dt="2026-03-30T01:21:07.498" v="25" actId="207"/>
-          <ac:spMkLst>
-            <pc:docMk/>
-            <pc:sldMk cId="2334041143" sldId="257"/>
-            <ac:spMk id="13" creationId="{00000000-0000-0000-0000-000000000000}"/>
-          </ac:spMkLst>
-        </pc:spChg>
-        <pc:spChg chg="mod">
-          <ac:chgData name="musukie52@gmail.com" userId="017bd91f96aa8751" providerId="LiveId" clId="{5B2C3894-F97E-4CAB-8812-5BB4D83AAC6A}" dt="2026-03-30T01:21:07.498" v="25" actId="207"/>
-          <ac:spMkLst>
-            <pc:docMk/>
-            <pc:sldMk cId="2334041143" sldId="257"/>
-            <ac:spMk id="14" creationId="{00000000-0000-0000-0000-000000000000}"/>
-          </ac:spMkLst>
-        </pc:spChg>
-        <pc:spChg chg="mod ord">
-          <ac:chgData name="musukie52@gmail.com" userId="017bd91f96aa8751" providerId="LiveId" clId="{5B2C3894-F97E-4CAB-8812-5BB4D83AAC6A}" dt="2026-03-30T01:31:24.392" v="105" actId="166"/>
-          <ac:spMkLst>
-            <pc:docMk/>
-            <pc:sldMk cId="2334041143" sldId="257"/>
-            <ac:spMk id="15" creationId="{00000000-0000-0000-0000-000000000000}"/>
-          </ac:spMkLst>
-        </pc:spChg>
-        <pc:spChg chg="mod ord">
-          <ac:chgData name="musukie52@gmail.com" userId="017bd91f96aa8751" providerId="LiveId" clId="{5B2C3894-F97E-4CAB-8812-5BB4D83AAC6A}" dt="2026-03-30T01:41:07.776" v="139" actId="20577"/>
-          <ac:spMkLst>
-            <pc:docMk/>
-            <pc:sldMk cId="2334041143" sldId="257"/>
-            <ac:spMk id="16" creationId="{00000000-0000-0000-0000-000000000000}"/>
-          </ac:spMkLst>
-        </pc:spChg>
-        <pc:spChg chg="mod ord">
-          <ac:chgData name="musukie52@gmail.com" userId="017bd91f96aa8751" providerId="LiveId" clId="{5B2C3894-F97E-4CAB-8812-5BB4D83AAC6A}" dt="2026-03-30T01:31:24.392" v="105" actId="166"/>
-          <ac:spMkLst>
-            <pc:docMk/>
-            <pc:sldMk cId="2334041143" sldId="257"/>
-            <ac:spMk id="18" creationId="{00000000-0000-0000-0000-000000000000}"/>
-          </ac:spMkLst>
-        </pc:spChg>
-        <pc:spChg chg="mod ord">
-          <ac:chgData name="musukie52@gmail.com" userId="017bd91f96aa8751" providerId="LiveId" clId="{5B2C3894-F97E-4CAB-8812-5BB4D83AAC6A}" dt="2026-03-30T01:31:24.392" v="105" actId="166"/>
-          <ac:spMkLst>
-            <pc:docMk/>
-            <pc:sldMk cId="2334041143" sldId="257"/>
-            <ac:spMk id="20" creationId="{00000000-0000-0000-0000-000000000000}"/>
-          </ac:spMkLst>
-        </pc:spChg>
-        <pc:spChg chg="mod ord">
-          <ac:chgData name="musukie52@gmail.com" userId="017bd91f96aa8751" providerId="LiveId" clId="{5B2C3894-F97E-4CAB-8812-5BB4D83AAC6A}" dt="2026-03-30T01:31:24.392" v="105" actId="166"/>
-          <ac:spMkLst>
-            <pc:docMk/>
-            <pc:sldMk cId="2334041143" sldId="257"/>
-            <ac:spMk id="21" creationId="{00000000-0000-0000-0000-000000000000}"/>
-          </ac:spMkLst>
-        </pc:spChg>
-        <pc:spChg chg="add del mod">
-          <ac:chgData name="musukie52@gmail.com" userId="017bd91f96aa8751" providerId="LiveId" clId="{5B2C3894-F97E-4CAB-8812-5BB4D83AAC6A}" dt="2026-03-30T01:26:02.806" v="38" actId="478"/>
-          <ac:spMkLst>
-            <pc:docMk/>
-            <pc:sldMk cId="2334041143" sldId="257"/>
-            <ac:spMk id="22" creationId="{98339D06-E0F2-2205-960B-A2621009D7D8}"/>
-          </ac:spMkLst>
-        </pc:spChg>
-        <pc:spChg chg="add del mod">
-          <ac:chgData name="musukie52@gmail.com" userId="017bd91f96aa8751" providerId="LiveId" clId="{5B2C3894-F97E-4CAB-8812-5BB4D83AAC6A}" dt="2026-03-30T01:26:03.256" v="39" actId="478"/>
-          <ac:spMkLst>
-            <pc:docMk/>
-            <pc:sldMk cId="2334041143" sldId="257"/>
-            <ac:spMk id="23" creationId="{C9A870D7-E401-4343-0AC0-08C4FC013504}"/>
-          </ac:spMkLst>
-        </pc:spChg>
-        <pc:spChg chg="add del mod">
-          <ac:chgData name="musukie52@gmail.com" userId="017bd91f96aa8751" providerId="LiveId" clId="{5B2C3894-F97E-4CAB-8812-5BB4D83AAC6A}" dt="2026-03-30T01:26:03.793" v="40" actId="478"/>
-          <ac:spMkLst>
-            <pc:docMk/>
-            <pc:sldMk cId="2334041143" sldId="257"/>
-            <ac:spMk id="24" creationId="{190598F3-116A-F31F-86CD-ACAA4DC793AF}"/>
-          </ac:spMkLst>
-        </pc:spChg>
-        <pc:spChg chg="add del mod">
-          <ac:chgData name="musukie52@gmail.com" userId="017bd91f96aa8751" providerId="LiveId" clId="{5B2C3894-F97E-4CAB-8812-5BB4D83AAC6A}" dt="2026-03-30T01:27:28.975" v="61" actId="478"/>
-          <ac:spMkLst>
-            <pc:docMk/>
-            <pc:sldMk cId="2334041143" sldId="257"/>
-            <ac:spMk id="25" creationId="{E780C323-B81F-26BD-8DFC-85DA3C0C9A22}"/>
-          </ac:spMkLst>
-        </pc:spChg>
-        <pc:spChg chg="add del mod">
-          <ac:chgData name="musukie52@gmail.com" userId="017bd91f96aa8751" providerId="LiveId" clId="{5B2C3894-F97E-4CAB-8812-5BB4D83AAC6A}" dt="2026-03-30T01:27:28.358" v="60" actId="478"/>
-          <ac:spMkLst>
-            <pc:docMk/>
-            <pc:sldMk cId="2334041143" sldId="257"/>
-            <ac:spMk id="26" creationId="{98D2D97A-5CF3-A8E8-21A5-56B4C2937060}"/>
-          </ac:spMkLst>
-        </pc:spChg>
-        <pc:spChg chg="add del mod">
-          <ac:chgData name="musukie52@gmail.com" userId="017bd91f96aa8751" providerId="LiveId" clId="{5B2C3894-F97E-4CAB-8812-5BB4D83AAC6A}" dt="2026-03-30T01:27:27.897" v="59" actId="478"/>
-          <ac:spMkLst>
-            <pc:docMk/>
-            <pc:sldMk cId="2334041143" sldId="257"/>
-            <ac:spMk id="27" creationId="{8BC47970-913A-F821-B674-191C6B98ADD2}"/>
-          </ac:spMkLst>
-        </pc:spChg>
-        <pc:spChg chg="add del mod">
-          <ac:chgData name="musukie52@gmail.com" userId="017bd91f96aa8751" providerId="LiveId" clId="{5B2C3894-F97E-4CAB-8812-5BB4D83AAC6A}" dt="2026-03-30T01:27:27.223" v="58" actId="478"/>
-          <ac:spMkLst>
-            <pc:docMk/>
-            <pc:sldMk cId="2334041143" sldId="257"/>
-            <ac:spMk id="28" creationId="{A69413CE-3F21-8A86-5B97-5F896758CD74}"/>
-          </ac:spMkLst>
-        </pc:spChg>
-        <pc:spChg chg="add mod">
-          <ac:chgData name="musukie52@gmail.com" userId="017bd91f96aa8751" providerId="LiveId" clId="{5B2C3894-F97E-4CAB-8812-5BB4D83AAC6A}" dt="2026-03-30T01:30:26.061" v="94" actId="207"/>
-          <ac:spMkLst>
-            <pc:docMk/>
-            <pc:sldMk cId="2334041143" sldId="257"/>
-            <ac:spMk id="33" creationId="{7B91612B-9C7D-5F5D-0C10-A35D76ECBA08}"/>
-          </ac:spMkLst>
-        </pc:spChg>
-        <pc:spChg chg="add mod">
-          <ac:chgData name="musukie52@gmail.com" userId="017bd91f96aa8751" providerId="LiveId" clId="{5B2C3894-F97E-4CAB-8812-5BB4D83AAC6A}" dt="2026-03-30T01:30:34.826" v="98" actId="207"/>
-          <ac:spMkLst>
-            <pc:docMk/>
-            <pc:sldMk cId="2334041143" sldId="257"/>
-            <ac:spMk id="34" creationId="{D23BE304-E2D6-7E6A-9CD7-3D5492D1E2B6}"/>
-          </ac:spMkLst>
-        </pc:spChg>
-        <pc:spChg chg="add mod">
-          <ac:chgData name="musukie52@gmail.com" userId="017bd91f96aa8751" providerId="LiveId" clId="{5B2C3894-F97E-4CAB-8812-5BB4D83AAC6A}" dt="2026-03-30T01:30:40.534" v="100" actId="207"/>
-          <ac:spMkLst>
-            <pc:docMk/>
-            <pc:sldMk cId="2334041143" sldId="257"/>
-            <ac:spMk id="35" creationId="{6BD6E198-2DC6-69E8-6766-25F9CE7270D2}"/>
-          </ac:spMkLst>
-        </pc:spChg>
-        <pc:spChg chg="add mod">
-          <ac:chgData name="musukie52@gmail.com" userId="017bd91f96aa8751" providerId="LiveId" clId="{5B2C3894-F97E-4CAB-8812-5BB4D83AAC6A}" dt="2026-03-30T01:30:44.854" v="102" actId="207"/>
-          <ac:spMkLst>
-            <pc:docMk/>
-            <pc:sldMk cId="2334041143" sldId="257"/>
-            <ac:spMk id="36" creationId="{22199777-3284-B6B3-AF16-A076073C3331}"/>
-          </ac:spMkLst>
-        </pc:spChg>
-        <pc:spChg chg="add mod">
-          <ac:chgData name="musukie52@gmail.com" userId="017bd91f96aa8751" providerId="LiveId" clId="{5B2C3894-F97E-4CAB-8812-5BB4D83AAC6A}" dt="2026-03-30T01:30:48.207" v="104" actId="207"/>
-          <ac:spMkLst>
-            <pc:docMk/>
-            <pc:sldMk cId="2334041143" sldId="257"/>
-            <ac:spMk id="37" creationId="{AFB9FC9D-29A8-DD23-48AB-6CF067B63D08}"/>
-          </ac:spMkLst>
-        </pc:spChg>
-        <pc:spChg chg="add mod">
-          <ac:chgData name="musukie52@gmail.com" userId="017bd91f96aa8751" providerId="LiveId" clId="{5B2C3894-F97E-4CAB-8812-5BB4D83AAC6A}" dt="2026-03-30T01:53:42.772" v="162" actId="20577"/>
-          <ac:spMkLst>
-            <pc:docMk/>
-            <pc:sldMk cId="2334041143" sldId="257"/>
-            <ac:spMk id="38" creationId="{4A4014F0-BAF8-8A49-0B9A-48833BDB1F43}"/>
-          </ac:spMkLst>
-        </pc:spChg>
-        <pc:cxnChg chg="add del mod">
-          <ac:chgData name="musukie52@gmail.com" userId="017bd91f96aa8751" providerId="LiveId" clId="{5B2C3894-F97E-4CAB-8812-5BB4D83AAC6A}" dt="2026-03-30T01:28:59.397" v="74" actId="478"/>
-          <ac:cxnSpMkLst>
-            <pc:docMk/>
-            <pc:sldMk cId="2334041143" sldId="257"/>
-            <ac:cxnSpMk id="30" creationId="{4D2EA3D9-ED12-4B11-B906-0996B37732E5}"/>
-          </ac:cxnSpMkLst>
-        </pc:cxnChg>
-      </pc:sldChg>
       <pc:sldChg chg="addSp delSp modSp add mod setBg">
-        <pc:chgData name="musukie52@gmail.com" userId="017bd91f96aa8751" providerId="LiveId" clId="{5B2C3894-F97E-4CAB-8812-5BB4D83AAC6A}" dt="2026-03-30T02:20:41.255" v="423" actId="20577"/>
+        <pc:chgData name="musukie52@gmail.com" userId="017bd91f96aa8751" providerId="LiveId" clId="{5B2C3894-F97E-4CAB-8812-5BB4D83AAC6A}" dt="2026-04-03T02:29:53.040" v="591"/>
         <pc:sldMkLst>
           <pc:docMk/>
           <pc:sldMk cId="4091973683" sldId="258"/>
@@ -457,14 +202,6 @@
             <ac:spMk id="10" creationId="{62BFBB14-C716-834C-6AD0-F0E2287E355A}"/>
           </ac:spMkLst>
         </pc:spChg>
-        <pc:spChg chg="del ord">
-          <ac:chgData name="musukie52@gmail.com" userId="017bd91f96aa8751" providerId="LiveId" clId="{5B2C3894-F97E-4CAB-8812-5BB4D83AAC6A}" dt="2026-03-30T02:10:06.306" v="258" actId="478"/>
-          <ac:spMkLst>
-            <pc:docMk/>
-            <pc:sldMk cId="4091973683" sldId="258"/>
-            <ac:spMk id="11" creationId="{F94B4076-1B67-5045-86AB-CD7350AA1560}"/>
-          </ac:spMkLst>
-        </pc:spChg>
         <pc:spChg chg="ord">
           <ac:chgData name="musukie52@gmail.com" userId="017bd91f96aa8751" providerId="LiveId" clId="{5B2C3894-F97E-4CAB-8812-5BB4D83AAC6A}" dt="2026-03-30T01:58:53.444" v="213" actId="166"/>
           <ac:spMkLst>
@@ -473,12 +210,20 @@
             <ac:spMk id="14" creationId="{26BE3C65-3436-8099-22CC-BD47487B38E6}"/>
           </ac:spMkLst>
         </pc:spChg>
-        <pc:spChg chg="ord">
-          <ac:chgData name="musukie52@gmail.com" userId="017bd91f96aa8751" providerId="LiveId" clId="{5B2C3894-F97E-4CAB-8812-5BB4D83AAC6A}" dt="2026-03-30T01:58:53.444" v="213" actId="166"/>
+        <pc:spChg chg="add mod">
+          <ac:chgData name="musukie52@gmail.com" userId="017bd91f96aa8751" providerId="LiveId" clId="{5B2C3894-F97E-4CAB-8812-5BB4D83AAC6A}" dt="2026-04-03T02:28:37.486" v="534" actId="20577"/>
           <ac:spMkLst>
             <pc:docMk/>
             <pc:sldMk cId="4091973683" sldId="258"/>
-            <ac:spMk id="16" creationId="{F5F303D5-2F6F-1585-A736-4F94BC3CC874}"/>
+            <ac:spMk id="16" creationId="{D1D1280A-F3ED-19A3-647C-B700D4514F18}"/>
+          </ac:spMkLst>
+        </pc:spChg>
+        <pc:spChg chg="add mod">
+          <ac:chgData name="musukie52@gmail.com" userId="017bd91f96aa8751" providerId="LiveId" clId="{5B2C3894-F97E-4CAB-8812-5BB4D83AAC6A}" dt="2026-04-03T02:29:02.664" v="552" actId="20577"/>
+          <ac:spMkLst>
+            <pc:docMk/>
+            <pc:sldMk cId="4091973683" sldId="258"/>
+            <ac:spMk id="17" creationId="{E18A4BCA-56FE-BE9A-3ADF-65AA2616F75B}"/>
           </ac:spMkLst>
         </pc:spChg>
         <pc:spChg chg="ord">
@@ -489,28 +234,20 @@
             <ac:spMk id="18" creationId="{F8B62E21-B0C9-CE94-7A9A-07D8D4C68B8E}"/>
           </ac:spMkLst>
         </pc:spChg>
-        <pc:spChg chg="del">
-          <ac:chgData name="musukie52@gmail.com" userId="017bd91f96aa8751" providerId="LiveId" clId="{5B2C3894-F97E-4CAB-8812-5BB4D83AAC6A}" dt="2026-03-30T02:19:21.266" v="353" actId="478"/>
+        <pc:spChg chg="add mod">
+          <ac:chgData name="musukie52@gmail.com" userId="017bd91f96aa8751" providerId="LiveId" clId="{5B2C3894-F97E-4CAB-8812-5BB4D83AAC6A}" dt="2026-04-03T02:29:49.779" v="584"/>
           <ac:spMkLst>
             <pc:docMk/>
             <pc:sldMk cId="4091973683" sldId="258"/>
-            <ac:spMk id="19" creationId="{5C59755A-FE78-8634-7A4D-88039FA0FCC9}"/>
+            <ac:spMk id="20" creationId="{CB4B7EB1-B68F-1867-8D0B-AF4EA8CE5D81}"/>
           </ac:spMkLst>
         </pc:spChg>
-        <pc:spChg chg="ord">
-          <ac:chgData name="musukie52@gmail.com" userId="017bd91f96aa8751" providerId="LiveId" clId="{5B2C3894-F97E-4CAB-8812-5BB4D83AAC6A}" dt="2026-03-30T01:58:53.444" v="213" actId="166"/>
+        <pc:spChg chg="add mod">
+          <ac:chgData name="musukie52@gmail.com" userId="017bd91f96aa8751" providerId="LiveId" clId="{5B2C3894-F97E-4CAB-8812-5BB4D83AAC6A}" dt="2026-04-03T02:29:53.040" v="591"/>
           <ac:spMkLst>
             <pc:docMk/>
             <pc:sldMk cId="4091973683" sldId="258"/>
-            <ac:spMk id="20" creationId="{AE514579-EFB6-D419-82FA-AF51F61CAE56}"/>
-          </ac:spMkLst>
-        </pc:spChg>
-        <pc:spChg chg="del">
-          <ac:chgData name="musukie52@gmail.com" userId="017bd91f96aa8751" providerId="LiveId" clId="{5B2C3894-F97E-4CAB-8812-5BB4D83AAC6A}" dt="2026-03-30T01:59:35.687" v="215" actId="478"/>
-          <ac:spMkLst>
-            <pc:docMk/>
-            <pc:sldMk cId="4091973683" sldId="258"/>
-            <ac:spMk id="21" creationId="{39B6332B-0BF6-7504-A901-6F9D3FF6A4E9}"/>
+            <ac:spMk id="21" creationId="{DDE9DE73-1214-A125-BCE1-0C6EAF7BF125}"/>
           </ac:spMkLst>
         </pc:spChg>
         <pc:spChg chg="add mod">
@@ -554,14 +291,6 @@
           </ac:spMkLst>
         </pc:spChg>
         <pc:spChg chg="add mod">
-          <ac:chgData name="musukie52@gmail.com" userId="017bd91f96aa8751" providerId="LiveId" clId="{5B2C3894-F97E-4CAB-8812-5BB4D83AAC6A}" dt="2026-03-30T02:19:09.760" v="352" actId="1076"/>
-          <ac:spMkLst>
-            <pc:docMk/>
-            <pc:sldMk cId="4091973683" sldId="258"/>
-            <ac:spMk id="27" creationId="{0A393C18-E6DB-CEE8-AC60-F383BCB35996}"/>
-          </ac:spMkLst>
-        </pc:spChg>
-        <pc:spChg chg="add mod">
           <ac:chgData name="musukie52@gmail.com" userId="017bd91f96aa8751" providerId="LiveId" clId="{5B2C3894-F97E-4CAB-8812-5BB4D83AAC6A}" dt="2026-03-30T02:20:20.253" v="383" actId="20577"/>
           <ac:spMkLst>
             <pc:docMk/>
@@ -577,91 +306,6 @@
             <ac:spMk id="29" creationId="{6ACADD41-7720-83F3-AEEC-14895C32BE4B}"/>
           </ac:spMkLst>
         </pc:spChg>
-        <pc:spChg chg="del">
-          <ac:chgData name="musukie52@gmail.com" userId="017bd91f96aa8751" providerId="LiveId" clId="{5B2C3894-F97E-4CAB-8812-5BB4D83AAC6A}" dt="2026-03-30T01:55:54.375" v="177" actId="478"/>
-          <ac:spMkLst>
-            <pc:docMk/>
-            <pc:sldMk cId="4091973683" sldId="258"/>
-            <ac:spMk id="33" creationId="{766406AA-BF1A-F69C-3FB3-B092A283DD44}"/>
-          </ac:spMkLst>
-        </pc:spChg>
-        <pc:spChg chg="del">
-          <ac:chgData name="musukie52@gmail.com" userId="017bd91f96aa8751" providerId="LiveId" clId="{5B2C3894-F97E-4CAB-8812-5BB4D83AAC6A}" dt="2026-03-30T01:55:52.613" v="176" actId="478"/>
-          <ac:spMkLst>
-            <pc:docMk/>
-            <pc:sldMk cId="4091973683" sldId="258"/>
-            <ac:spMk id="34" creationId="{499F7333-F174-6456-AF12-09A75590C99D}"/>
-          </ac:spMkLst>
-        </pc:spChg>
-        <pc:spChg chg="del">
-          <ac:chgData name="musukie52@gmail.com" userId="017bd91f96aa8751" providerId="LiveId" clId="{5B2C3894-F97E-4CAB-8812-5BB4D83AAC6A}" dt="2026-03-30T01:55:51.788" v="175" actId="478"/>
-          <ac:spMkLst>
-            <pc:docMk/>
-            <pc:sldMk cId="4091973683" sldId="258"/>
-            <ac:spMk id="35" creationId="{54C3C0D3-CB36-96C1-C639-481AA3A25125}"/>
-          </ac:spMkLst>
-        </pc:spChg>
-        <pc:spChg chg="del">
-          <ac:chgData name="musukie52@gmail.com" userId="017bd91f96aa8751" providerId="LiveId" clId="{5B2C3894-F97E-4CAB-8812-5BB4D83AAC6A}" dt="2026-03-30T01:55:50.641" v="174" actId="478"/>
-          <ac:spMkLst>
-            <pc:docMk/>
-            <pc:sldMk cId="4091973683" sldId="258"/>
-            <ac:spMk id="36" creationId="{C4181032-F4F6-1605-FA97-CCE7F60C1EBF}"/>
-          </ac:spMkLst>
-        </pc:spChg>
-        <pc:spChg chg="del">
-          <ac:chgData name="musukie52@gmail.com" userId="017bd91f96aa8751" providerId="LiveId" clId="{5B2C3894-F97E-4CAB-8812-5BB4D83AAC6A}" dt="2026-03-30T01:55:49.961" v="173" actId="478"/>
-          <ac:spMkLst>
-            <pc:docMk/>
-            <pc:sldMk cId="4091973683" sldId="258"/>
-            <ac:spMk id="37" creationId="{10CB756F-ADF5-01AD-5D23-A72820AE19A4}"/>
-          </ac:spMkLst>
-        </pc:spChg>
-      </pc:sldChg>
-      <pc:sldChg chg="addSp new mod">
-        <pc:chgData name="musukie52@gmail.com" userId="017bd91f96aa8751" providerId="LiveId" clId="{5B2C3894-F97E-4CAB-8812-5BB4D83AAC6A}" dt="2026-03-30T02:20:51.827" v="425" actId="22"/>
-        <pc:sldMkLst>
-          <pc:docMk/>
-          <pc:sldMk cId="3102480730" sldId="259"/>
-        </pc:sldMkLst>
-        <pc:picChg chg="add">
-          <ac:chgData name="musukie52@gmail.com" userId="017bd91f96aa8751" providerId="LiveId" clId="{5B2C3894-F97E-4CAB-8812-5BB4D83AAC6A}" dt="2026-03-30T02:20:51.827" v="425" actId="22"/>
-          <ac:picMkLst>
-            <pc:docMk/>
-            <pc:sldMk cId="3102480730" sldId="259"/>
-            <ac:picMk id="5" creationId="{9BB5BBA8-1E41-8F9A-A1F1-A6F0D5787EC6}"/>
-          </ac:picMkLst>
-        </pc:picChg>
-      </pc:sldChg>
-      <pc:sldChg chg="addSp new mod">
-        <pc:chgData name="musukie52@gmail.com" userId="017bd91f96aa8751" providerId="LiveId" clId="{5B2C3894-F97E-4CAB-8812-5BB4D83AAC6A}" dt="2026-03-30T02:21:04.926" v="427" actId="22"/>
-        <pc:sldMkLst>
-          <pc:docMk/>
-          <pc:sldMk cId="1706705401" sldId="260"/>
-        </pc:sldMkLst>
-        <pc:picChg chg="add">
-          <ac:chgData name="musukie52@gmail.com" userId="017bd91f96aa8751" providerId="LiveId" clId="{5B2C3894-F97E-4CAB-8812-5BB4D83AAC6A}" dt="2026-03-30T02:21:04.926" v="427" actId="22"/>
-          <ac:picMkLst>
-            <pc:docMk/>
-            <pc:sldMk cId="1706705401" sldId="260"/>
-            <ac:picMk id="5" creationId="{72F39C75-ACE8-C326-62EB-678B363BC616}"/>
-          </ac:picMkLst>
-        </pc:picChg>
-      </pc:sldChg>
-      <pc:sldChg chg="addSp new mod">
-        <pc:chgData name="musukie52@gmail.com" userId="017bd91f96aa8751" providerId="LiveId" clId="{5B2C3894-F97E-4CAB-8812-5BB4D83AAC6A}" dt="2026-03-30T02:21:16.645" v="429" actId="22"/>
-        <pc:sldMkLst>
-          <pc:docMk/>
-          <pc:sldMk cId="1028470326" sldId="261"/>
-        </pc:sldMkLst>
-        <pc:picChg chg="add">
-          <ac:chgData name="musukie52@gmail.com" userId="017bd91f96aa8751" providerId="LiveId" clId="{5B2C3894-F97E-4CAB-8812-5BB4D83AAC6A}" dt="2026-03-30T02:21:16.645" v="429" actId="22"/>
-          <ac:picMkLst>
-            <pc:docMk/>
-            <pc:sldMk cId="1028470326" sldId="261"/>
-            <ac:picMk id="5" creationId="{72FEF2FE-BCAC-46EA-34FB-C2003C6A8194}"/>
-          </ac:picMkLst>
-        </pc:picChg>
       </pc:sldChg>
     </pc:docChg>
   </pc:docChgLst>
@@ -750,7 +394,7 @@
           <a:p>
             <a:fld id="{00232D13-99AA-4636-90AA-800F69AD8C37}" type="datetimeFigureOut">
               <a:rPr lang="ko-KR" altLang="en-US" smtClean="0"/>
-              <a:t>2026-03-31</a:t>
+              <a:t>2026-04-03</a:t>
             </a:fld>
             <a:endParaRPr lang="ko-KR" altLang="en-US"/>
           </a:p>
@@ -1230,7 +874,7 @@
           <a:p>
             <a:fld id="{1F511268-C062-4462-9948-2814E8F03C39}" type="datetimeFigureOut">
               <a:rPr lang="ko-KR" altLang="en-US" smtClean="0"/>
-              <a:t>2026-03-31</a:t>
+              <a:t>2026-04-03</a:t>
             </a:fld>
             <a:endParaRPr lang="ko-KR" altLang="en-US"/>
           </a:p>
@@ -1398,7 +1042,7 @@
           <a:p>
             <a:fld id="{1F511268-C062-4462-9948-2814E8F03C39}" type="datetimeFigureOut">
               <a:rPr lang="ko-KR" altLang="en-US" smtClean="0"/>
-              <a:t>2026-03-31</a:t>
+              <a:t>2026-04-03</a:t>
             </a:fld>
             <a:endParaRPr lang="ko-KR" altLang="en-US"/>
           </a:p>
@@ -1576,7 +1220,7 @@
           <a:p>
             <a:fld id="{1F511268-C062-4462-9948-2814E8F03C39}" type="datetimeFigureOut">
               <a:rPr lang="ko-KR" altLang="en-US" smtClean="0"/>
-              <a:t>2026-03-31</a:t>
+              <a:t>2026-04-03</a:t>
             </a:fld>
             <a:endParaRPr lang="ko-KR" altLang="en-US"/>
           </a:p>
@@ -1744,7 +1388,7 @@
           <a:p>
             <a:fld id="{1F511268-C062-4462-9948-2814E8F03C39}" type="datetimeFigureOut">
               <a:rPr lang="ko-KR" altLang="en-US" smtClean="0"/>
-              <a:t>2026-03-31</a:t>
+              <a:t>2026-04-03</a:t>
             </a:fld>
             <a:endParaRPr lang="ko-KR" altLang="en-US"/>
           </a:p>
@@ -1989,7 +1633,7 @@
           <a:p>
             <a:fld id="{1F511268-C062-4462-9948-2814E8F03C39}" type="datetimeFigureOut">
               <a:rPr lang="ko-KR" altLang="en-US" smtClean="0"/>
-              <a:t>2026-03-31</a:t>
+              <a:t>2026-04-03</a:t>
             </a:fld>
             <a:endParaRPr lang="ko-KR" altLang="en-US"/>
           </a:p>
@@ -2218,7 +1862,7 @@
           <a:p>
             <a:fld id="{1F511268-C062-4462-9948-2814E8F03C39}" type="datetimeFigureOut">
               <a:rPr lang="ko-KR" altLang="en-US" smtClean="0"/>
-              <a:t>2026-03-31</a:t>
+              <a:t>2026-04-03</a:t>
             </a:fld>
             <a:endParaRPr lang="ko-KR" altLang="en-US"/>
           </a:p>
@@ -2582,7 +2226,7 @@
           <a:p>
             <a:fld id="{1F511268-C062-4462-9948-2814E8F03C39}" type="datetimeFigureOut">
               <a:rPr lang="ko-KR" altLang="en-US" smtClean="0"/>
-              <a:t>2026-03-31</a:t>
+              <a:t>2026-04-03</a:t>
             </a:fld>
             <a:endParaRPr lang="ko-KR" altLang="en-US"/>
           </a:p>
@@ -2699,7 +2343,7 @@
           <a:p>
             <a:fld id="{1F511268-C062-4462-9948-2814E8F03C39}" type="datetimeFigureOut">
               <a:rPr lang="ko-KR" altLang="en-US" smtClean="0"/>
-              <a:t>2026-03-31</a:t>
+              <a:t>2026-04-03</a:t>
             </a:fld>
             <a:endParaRPr lang="ko-KR" altLang="en-US"/>
           </a:p>
@@ -2794,7 +2438,7 @@
           <a:p>
             <a:fld id="{1F511268-C062-4462-9948-2814E8F03C39}" type="datetimeFigureOut">
               <a:rPr lang="ko-KR" altLang="en-US" smtClean="0"/>
-              <a:t>2026-03-31</a:t>
+              <a:t>2026-04-03</a:t>
             </a:fld>
             <a:endParaRPr lang="ko-KR" altLang="en-US"/>
           </a:p>
@@ -3069,7 +2713,7 @@
           <a:p>
             <a:fld id="{1F511268-C062-4462-9948-2814E8F03C39}" type="datetimeFigureOut">
               <a:rPr lang="ko-KR" altLang="en-US" smtClean="0"/>
-              <a:t>2026-03-31</a:t>
+              <a:t>2026-04-03</a:t>
             </a:fld>
             <a:endParaRPr lang="ko-KR" altLang="en-US"/>
           </a:p>
@@ -3321,7 +2965,7 @@
           <a:p>
             <a:fld id="{1F511268-C062-4462-9948-2814E8F03C39}" type="datetimeFigureOut">
               <a:rPr lang="ko-KR" altLang="en-US" smtClean="0"/>
-              <a:t>2026-03-31</a:t>
+              <a:t>2026-04-03</a:t>
             </a:fld>
             <a:endParaRPr lang="ko-KR" altLang="en-US"/>
           </a:p>
@@ -3532,7 +3176,7 @@
           <a:p>
             <a:fld id="{1F511268-C062-4462-9948-2814E8F03C39}" type="datetimeFigureOut">
               <a:rPr lang="ko-KR" altLang="en-US" smtClean="0"/>
-              <a:t>2026-03-31</a:t>
+              <a:t>2026-04-03</a:t>
             </a:fld>
             <a:endParaRPr lang="ko-KR" altLang="en-US"/>
           </a:p>
@@ -4966,7 +4610,7 @@
           <a:p>
             <a:pPr algn="just"/>
             <a:r>
-              <a:rPr lang="ko-KR" altLang="en-US" sz="1000" smtClean="0">
+              <a:rPr lang="ko-KR" altLang="en-US" sz="1000">
                 <a:solidFill>
                   <a:schemeClr val="bg1"/>
                 </a:solidFill>
@@ -5028,7 +4672,7 @@
           <a:p>
             <a:pPr algn="just"/>
             <a:r>
-              <a:rPr lang="ko-KR" altLang="en-US" sz="1000" smtClean="0">
+              <a:rPr lang="ko-KR" altLang="en-US" sz="1000">
                 <a:solidFill>
                   <a:schemeClr val="bg1"/>
                 </a:solidFill>
@@ -7103,7 +6747,7 @@
           <a:p>
             <a:pPr algn="just"/>
             <a:r>
-              <a:rPr lang="ko-KR" altLang="en-US" sz="1000" smtClean="0">
+              <a:rPr lang="ko-KR" altLang="en-US" sz="1000">
                 <a:solidFill>
                   <a:schemeClr val="bg1"/>
                 </a:solidFill>
@@ -7201,7 +6845,7 @@
           <a:p>
             <a:pPr algn="ctr"/>
             <a:r>
-              <a:rPr lang="ko-KR" altLang="en-US" sz="1000" smtClean="0">
+              <a:rPr lang="ko-KR" altLang="en-US" sz="1000">
                 <a:solidFill>
                   <a:schemeClr val="tx1"/>
                 </a:solidFill>
@@ -7262,20 +6906,12 @@
           <a:p>
             <a:pPr algn="ctr"/>
             <a:r>
-              <a:rPr lang="ko-KR" altLang="en-US" sz="1000" smtClean="0">
+              <a:rPr lang="ko-KR" altLang="en-US" sz="1000">
                 <a:solidFill>
                   <a:schemeClr val="tx1"/>
                 </a:solidFill>
               </a:rPr>
-              <a:t>서브</a:t>
-            </a:r>
-            <a:r>
-              <a:rPr lang="ko-KR" altLang="en-US" sz="1000" smtClean="0">
-                <a:solidFill>
-                  <a:schemeClr val="tx1"/>
-                </a:solidFill>
-              </a:rPr>
-              <a:t> 사건</a:t>
+              <a:t>서브 사건</a:t>
             </a:r>
             <a:endParaRPr lang="ko-KR" altLang="en-US" sz="1000" dirty="0">
               <a:solidFill>
@@ -7553,7 +7189,7 @@
           <a:p>
             <a:pPr algn="ctr"/>
             <a:r>
-              <a:rPr lang="ko-KR" altLang="en-US" sz="1000" smtClean="0">
+              <a:rPr lang="ko-KR" altLang="en-US" sz="1000">
                 <a:solidFill>
                   <a:schemeClr val="bg1"/>
                 </a:solidFill>
@@ -7615,7 +7251,7 @@
           <a:p>
             <a:pPr algn="just"/>
             <a:r>
-              <a:rPr lang="ko-KR" altLang="en-US" sz="1000" smtClean="0">
+              <a:rPr lang="ko-KR" altLang="en-US" sz="1000">
                 <a:solidFill>
                   <a:schemeClr val="bg1"/>
                 </a:solidFill>
@@ -7751,7 +7387,7 @@
           <a:p>
             <a:pPr algn="just"/>
             <a:r>
-              <a:rPr lang="ko-KR" altLang="en-US" sz="1000" smtClean="0">
+              <a:rPr lang="ko-KR" altLang="en-US" sz="1000">
                 <a:solidFill>
                   <a:schemeClr val="bg1"/>
                 </a:solidFill>
@@ -7850,7 +7486,7 @@
           <a:p>
             <a:pPr algn="just"/>
             <a:r>
-              <a:rPr lang="ko-KR" altLang="en-US" sz="1000" smtClean="0">
+              <a:rPr lang="ko-KR" altLang="en-US" sz="1000">
                 <a:solidFill>
                   <a:schemeClr val="bg1"/>
                 </a:solidFill>
@@ -8019,7 +7655,7 @@
           <a:p>
             <a:pPr algn="ctr"/>
             <a:r>
-              <a:rPr lang="ko-KR" altLang="en-US" sz="800" smtClean="0">
+              <a:rPr lang="ko-KR" altLang="en-US" sz="800">
                 <a:solidFill>
                   <a:schemeClr val="tx1"/>
                 </a:solidFill>
@@ -8114,7 +7750,7 @@
           <a:p>
             <a:pPr algn="ctr"/>
             <a:r>
-              <a:rPr lang="ko-KR" altLang="en-US" sz="800" smtClean="0">
+              <a:rPr lang="ko-KR" altLang="en-US" sz="800">
                 <a:solidFill>
                   <a:schemeClr val="tx1"/>
                 </a:solidFill>
@@ -8301,7 +7937,7 @@
           <a:p>
             <a:pPr algn="ctr"/>
             <a:r>
-              <a:rPr lang="ko-KR" altLang="en-US" sz="800" smtClean="0">
+              <a:rPr lang="ko-KR" altLang="en-US" sz="800">
                 <a:solidFill>
                   <a:schemeClr val="tx1"/>
                 </a:solidFill>
@@ -8396,7 +8032,7 @@
           <a:p>
             <a:pPr algn="ctr"/>
             <a:r>
-              <a:rPr lang="ko-KR" altLang="en-US" sz="800" smtClean="0">
+              <a:rPr lang="ko-KR" altLang="en-US" sz="800">
                 <a:solidFill>
                   <a:schemeClr val="tx1"/>
                 </a:solidFill>
@@ -8537,7 +8173,7 @@
           <a:p>
             <a:pPr algn="ctr"/>
             <a:r>
-              <a:rPr lang="ko-KR" altLang="en-US" sz="800" smtClean="0">
+              <a:rPr lang="ko-KR" altLang="en-US" sz="800">
                 <a:solidFill>
                   <a:schemeClr val="tx1"/>
                 </a:solidFill>
@@ -8632,7 +8268,7 @@
           <a:p>
             <a:pPr algn="ctr"/>
             <a:r>
-              <a:rPr lang="ko-KR" altLang="en-US" sz="800" smtClean="0">
+              <a:rPr lang="ko-KR" altLang="en-US" sz="800">
                 <a:solidFill>
                   <a:schemeClr val="tx1"/>
                 </a:solidFill>
@@ -8739,7 +8375,7 @@
           <a:p>
             <a:pPr algn="ctr"/>
             <a:r>
-              <a:rPr lang="ko-KR" altLang="en-US" sz="800" smtClean="0">
+              <a:rPr lang="ko-KR" altLang="en-US" sz="800">
                 <a:solidFill>
                   <a:schemeClr val="tx1"/>
                 </a:solidFill>
@@ -8870,18 +8506,13 @@
           <a:p>
             <a:pPr algn="ctr"/>
             <a:r>
-              <a:rPr lang="ko-KR" altLang="en-US" sz="1000" smtClean="0">
+              <a:rPr lang="ko-KR" altLang="en-US" sz="1000">
                 <a:solidFill>
                   <a:srgbClr val="FAEBA0"/>
                 </a:solidFill>
               </a:rPr>
               <a:t>발단</a:t>
             </a:r>
-            <a:endParaRPr lang="ko-KR" altLang="en-US" sz="1000">
-              <a:solidFill>
-                <a:srgbClr val="FAEBA0"/>
-              </a:solidFill>
-            </a:endParaRPr>
           </a:p>
         </p:txBody>
       </p:sp>
@@ -8909,18 +8540,13 @@
           <a:p>
             <a:pPr algn="ctr"/>
             <a:r>
-              <a:rPr lang="ko-KR" altLang="en-US" sz="1000" smtClean="0">
+              <a:rPr lang="ko-KR" altLang="en-US" sz="1000">
                 <a:solidFill>
                   <a:srgbClr val="FAEBA0"/>
                 </a:solidFill>
               </a:rPr>
               <a:t>전개</a:t>
             </a:r>
-            <a:endParaRPr lang="ko-KR" altLang="en-US" sz="1000">
-              <a:solidFill>
-                <a:srgbClr val="FAEBA0"/>
-              </a:solidFill>
-            </a:endParaRPr>
           </a:p>
         </p:txBody>
       </p:sp>
@@ -8948,18 +8574,13 @@
           <a:p>
             <a:pPr algn="ctr"/>
             <a:r>
-              <a:rPr lang="ko-KR" altLang="en-US" sz="1000" smtClean="0">
+              <a:rPr lang="ko-KR" altLang="en-US" sz="1000">
                 <a:solidFill>
                   <a:srgbClr val="FAEBA0"/>
                 </a:solidFill>
               </a:rPr>
               <a:t>위기</a:t>
             </a:r>
-            <a:endParaRPr lang="ko-KR" altLang="en-US" sz="1000">
-              <a:solidFill>
-                <a:srgbClr val="FAEBA0"/>
-              </a:solidFill>
-            </a:endParaRPr>
           </a:p>
         </p:txBody>
       </p:sp>
@@ -8987,18 +8608,13 @@
           <a:p>
             <a:pPr algn="ctr"/>
             <a:r>
-              <a:rPr lang="ko-KR" altLang="en-US" sz="1000" smtClean="0">
+              <a:rPr lang="ko-KR" altLang="en-US" sz="1000">
                 <a:solidFill>
                   <a:srgbClr val="FAEBA0"/>
                 </a:solidFill>
               </a:rPr>
               <a:t>절정</a:t>
             </a:r>
-            <a:endParaRPr lang="ko-KR" altLang="en-US" sz="1000">
-              <a:solidFill>
-                <a:srgbClr val="FAEBA0"/>
-              </a:solidFill>
-            </a:endParaRPr>
           </a:p>
         </p:txBody>
       </p:sp>
@@ -9026,16 +8642,327 @@
           <a:p>
             <a:pPr algn="ctr"/>
             <a:r>
-              <a:rPr lang="ko-KR" altLang="en-US" sz="1000" smtClean="0">
+              <a:rPr lang="ko-KR" altLang="en-US" sz="1000">
                 <a:solidFill>
                   <a:srgbClr val="FAEBA0"/>
                 </a:solidFill>
               </a:rPr>
               <a:t>결말</a:t>
             </a:r>
-            <a:endParaRPr lang="ko-KR" altLang="en-US" sz="1000">
+          </a:p>
+        </p:txBody>
+      </p:sp>
+      <p:sp>
+        <p:nvSpPr>
+          <p:cNvPr id="16" name="직사각형 15">
+            <a:extLst>
+              <a:ext uri="{FF2B5EF4-FFF2-40B4-BE49-F238E27FC236}">
+                <a16:creationId xmlns:a16="http://schemas.microsoft.com/office/drawing/2014/main" id="{D1D1280A-F3ED-19A3-647C-B700D4514F18}"/>
+              </a:ext>
+            </a:extLst>
+          </p:cNvPr>
+          <p:cNvSpPr/>
+          <p:nvPr/>
+        </p:nvSpPr>
+        <p:spPr>
+          <a:xfrm>
+            <a:off x="1123071" y="17174"/>
+            <a:ext cx="1069848" cy="411480"/>
+          </a:xfrm>
+          <a:prstGeom prst="rect">
+            <a:avLst/>
+          </a:prstGeom>
+          <a:noFill/>
+          <a:ln>
+            <a:noFill/>
+          </a:ln>
+        </p:spPr>
+        <p:style>
+          <a:lnRef idx="2">
+            <a:schemeClr val="accent1">
+              <a:shade val="50000"/>
+            </a:schemeClr>
+          </a:lnRef>
+          <a:fillRef idx="1">
+            <a:schemeClr val="accent1"/>
+          </a:fillRef>
+          <a:effectRef idx="0">
+            <a:schemeClr val="accent1"/>
+          </a:effectRef>
+          <a:fontRef idx="minor">
+            <a:schemeClr val="lt1"/>
+          </a:fontRef>
+        </p:style>
+        <p:txBody>
+          <a:bodyPr rtlCol="0" anchor="ctr"/>
+          <a:lstStyle/>
+          <a:p>
+            <a:pPr algn="just"/>
+            <a:r>
+              <a:rPr lang="ko-KR" altLang="en-US" sz="1000" err="1">
+                <a:solidFill>
+                  <a:schemeClr val="accent2">
+                    <a:lumMod val="60000"/>
+                    <a:lumOff val="40000"/>
+                  </a:schemeClr>
+                </a:solidFill>
+              </a:rPr>
+              <a:t>차우선</a:t>
+            </a:r>
+            <a:r>
+              <a:rPr lang="ko-KR" altLang="en-US" sz="1000" dirty="0">
+                <a:solidFill>
+                  <a:schemeClr val="accent2">
+                    <a:lumMod val="60000"/>
+                    <a:lumOff val="40000"/>
+                  </a:schemeClr>
+                </a:solidFill>
+              </a:rPr>
+              <a:t> </a:t>
+            </a:r>
+            <a:r>
+              <a:rPr lang="en-US" altLang="ko-KR" sz="1000" dirty="0">
+                <a:solidFill>
+                  <a:schemeClr val="accent2">
+                    <a:lumMod val="60000"/>
+                    <a:lumOff val="40000"/>
+                  </a:schemeClr>
+                </a:solidFill>
+              </a:rPr>
+              <a:t>(</a:t>
+            </a:r>
+            <a:r>
+              <a:rPr lang="ko-KR" altLang="en-US" sz="1000" dirty="0">
+                <a:solidFill>
+                  <a:schemeClr val="accent2">
+                    <a:lumMod val="60000"/>
+                    <a:lumOff val="40000"/>
+                  </a:schemeClr>
+                </a:solidFill>
+              </a:rPr>
+              <a:t>동생</a:t>
+            </a:r>
+            <a:r>
+              <a:rPr lang="en-US" altLang="ko-KR" sz="1000" dirty="0">
+                <a:solidFill>
+                  <a:schemeClr val="accent2">
+                    <a:lumMod val="60000"/>
+                    <a:lumOff val="40000"/>
+                  </a:schemeClr>
+                </a:solidFill>
+              </a:rPr>
+              <a:t>)</a:t>
+            </a:r>
+            <a:endParaRPr lang="ko-KR" altLang="en-US" sz="1000" dirty="0">
               <a:solidFill>
-                <a:srgbClr val="FAEBA0"/>
+                <a:schemeClr val="accent2">
+                  <a:lumMod val="60000"/>
+                  <a:lumOff val="40000"/>
+                </a:schemeClr>
+              </a:solidFill>
+            </a:endParaRPr>
+          </a:p>
+        </p:txBody>
+      </p:sp>
+      <p:sp>
+        <p:nvSpPr>
+          <p:cNvPr id="17" name="직사각형 16">
+            <a:extLst>
+              <a:ext uri="{FF2B5EF4-FFF2-40B4-BE49-F238E27FC236}">
+                <a16:creationId xmlns:a16="http://schemas.microsoft.com/office/drawing/2014/main" id="{E18A4BCA-56FE-BE9A-3ADF-65AA2616F75B}"/>
+              </a:ext>
+            </a:extLst>
+          </p:cNvPr>
+          <p:cNvSpPr/>
+          <p:nvPr/>
+        </p:nvSpPr>
+        <p:spPr>
+          <a:xfrm>
+            <a:off x="2654417" y="47299"/>
+            <a:ext cx="1069848" cy="411480"/>
+          </a:xfrm>
+          <a:prstGeom prst="rect">
+            <a:avLst/>
+          </a:prstGeom>
+          <a:noFill/>
+          <a:ln>
+            <a:noFill/>
+          </a:ln>
+        </p:spPr>
+        <p:style>
+          <a:lnRef idx="2">
+            <a:schemeClr val="accent1">
+              <a:shade val="50000"/>
+            </a:schemeClr>
+          </a:lnRef>
+          <a:fillRef idx="1">
+            <a:schemeClr val="accent1"/>
+          </a:fillRef>
+          <a:effectRef idx="0">
+            <a:schemeClr val="accent1"/>
+          </a:effectRef>
+          <a:fontRef idx="minor">
+            <a:schemeClr val="lt1"/>
+          </a:fontRef>
+        </p:style>
+        <p:txBody>
+          <a:bodyPr rtlCol="0" anchor="ctr"/>
+          <a:lstStyle/>
+          <a:p>
+            <a:pPr algn="just"/>
+            <a:r>
+              <a:rPr lang="ko-KR" altLang="en-US" sz="1000" dirty="0" err="1">
+                <a:solidFill>
+                  <a:schemeClr val="accent2">
+                    <a:lumMod val="60000"/>
+                    <a:lumOff val="40000"/>
+                  </a:schemeClr>
+                </a:solidFill>
+              </a:rPr>
+              <a:t>서주안</a:t>
+            </a:r>
+            <a:endParaRPr lang="ko-KR" altLang="en-US" sz="1000" dirty="0">
+              <a:solidFill>
+                <a:schemeClr val="accent2">
+                  <a:lumMod val="60000"/>
+                  <a:lumOff val="40000"/>
+                </a:schemeClr>
+              </a:solidFill>
+            </a:endParaRPr>
+          </a:p>
+        </p:txBody>
+      </p:sp>
+      <p:sp>
+        <p:nvSpPr>
+          <p:cNvPr id="20" name="직사각형 19">
+            <a:extLst>
+              <a:ext uri="{FF2B5EF4-FFF2-40B4-BE49-F238E27FC236}">
+                <a16:creationId xmlns:a16="http://schemas.microsoft.com/office/drawing/2014/main" id="{CB4B7EB1-B68F-1867-8D0B-AF4EA8CE5D81}"/>
+              </a:ext>
+            </a:extLst>
+          </p:cNvPr>
+          <p:cNvSpPr/>
+          <p:nvPr/>
+        </p:nvSpPr>
+        <p:spPr>
+          <a:xfrm>
+            <a:off x="3755403" y="42144"/>
+            <a:ext cx="1069848" cy="411480"/>
+          </a:xfrm>
+          <a:prstGeom prst="rect">
+            <a:avLst/>
+          </a:prstGeom>
+          <a:noFill/>
+          <a:ln>
+            <a:noFill/>
+          </a:ln>
+        </p:spPr>
+        <p:style>
+          <a:lnRef idx="2">
+            <a:schemeClr val="accent1">
+              <a:shade val="50000"/>
+            </a:schemeClr>
+          </a:lnRef>
+          <a:fillRef idx="1">
+            <a:schemeClr val="accent1"/>
+          </a:fillRef>
+          <a:effectRef idx="0">
+            <a:schemeClr val="accent1"/>
+          </a:effectRef>
+          <a:fontRef idx="minor">
+            <a:schemeClr val="lt1"/>
+          </a:fontRef>
+        </p:style>
+        <p:txBody>
+          <a:bodyPr rtlCol="0" anchor="ctr"/>
+          <a:lstStyle/>
+          <a:p>
+            <a:pPr algn="just"/>
+            <a:r>
+              <a:rPr lang="ko-KR" altLang="en-US" sz="1000" dirty="0" err="1">
+                <a:solidFill>
+                  <a:schemeClr val="accent2">
+                    <a:lumMod val="60000"/>
+                    <a:lumOff val="40000"/>
+                  </a:schemeClr>
+                </a:solidFill>
+              </a:rPr>
+              <a:t>나통령</a:t>
+            </a:r>
+            <a:endParaRPr lang="ko-KR" altLang="en-US" sz="1000" dirty="0">
+              <a:solidFill>
+                <a:schemeClr val="accent2">
+                  <a:lumMod val="60000"/>
+                  <a:lumOff val="40000"/>
+                </a:schemeClr>
+              </a:solidFill>
+            </a:endParaRPr>
+          </a:p>
+        </p:txBody>
+      </p:sp>
+      <p:sp>
+        <p:nvSpPr>
+          <p:cNvPr id="21" name="직사각형 20">
+            <a:extLst>
+              <a:ext uri="{FF2B5EF4-FFF2-40B4-BE49-F238E27FC236}">
+                <a16:creationId xmlns:a16="http://schemas.microsoft.com/office/drawing/2014/main" id="{DDE9DE73-1214-A125-BCE1-0C6EAF7BF125}"/>
+              </a:ext>
+            </a:extLst>
+          </p:cNvPr>
+          <p:cNvSpPr/>
+          <p:nvPr/>
+        </p:nvSpPr>
+        <p:spPr>
+          <a:xfrm>
+            <a:off x="4877740" y="74611"/>
+            <a:ext cx="1069848" cy="411480"/>
+          </a:xfrm>
+          <a:prstGeom prst="rect">
+            <a:avLst/>
+          </a:prstGeom>
+          <a:noFill/>
+          <a:ln>
+            <a:noFill/>
+          </a:ln>
+        </p:spPr>
+        <p:style>
+          <a:lnRef idx="2">
+            <a:schemeClr val="accent1">
+              <a:shade val="50000"/>
+            </a:schemeClr>
+          </a:lnRef>
+          <a:fillRef idx="1">
+            <a:schemeClr val="accent1"/>
+          </a:fillRef>
+          <a:effectRef idx="0">
+            <a:schemeClr val="accent1"/>
+          </a:effectRef>
+          <a:fontRef idx="minor">
+            <a:schemeClr val="lt1"/>
+          </a:fontRef>
+        </p:style>
+        <p:txBody>
+          <a:bodyPr rtlCol="0" anchor="ctr"/>
+          <a:lstStyle/>
+          <a:p>
+            <a:pPr algn="just"/>
+            <a:r>
+              <a:rPr lang="ko-KR" altLang="en-US" sz="1000" dirty="0" err="1">
+                <a:solidFill>
+                  <a:schemeClr val="accent2">
+                    <a:lumMod val="60000"/>
+                    <a:lumOff val="40000"/>
+                  </a:schemeClr>
+                </a:solidFill>
+              </a:rPr>
+              <a:t>박폭력</a:t>
+            </a:r>
+            <a:endParaRPr lang="ko-KR" altLang="en-US" sz="1000" dirty="0">
+              <a:solidFill>
+                <a:schemeClr val="accent2">
+                  <a:lumMod val="60000"/>
+                  <a:lumOff val="40000"/>
+                </a:schemeClr>
               </a:solidFill>
             </a:endParaRPr>
           </a:p>

--- a/[실습](3.27) 상황의 기차칸.pptx
+++ b/[실습](3.27) 상황의 기차칸.pptx
@@ -8666,7 +8666,7 @@
         </p:nvSpPr>
         <p:spPr>
           <a:xfrm>
-            <a:off x="1123071" y="17174"/>
+            <a:off x="1150500" y="46819"/>
             <a:ext cx="1069848" cy="411480"/>
           </a:xfrm>
           <a:prstGeom prst="rect">
@@ -8846,7 +8846,7 @@
         </p:nvSpPr>
         <p:spPr>
           <a:xfrm>
-            <a:off x="3755403" y="42144"/>
+            <a:off x="3756340" y="42144"/>
             <a:ext cx="1069848" cy="411480"/>
           </a:xfrm>
           <a:prstGeom prst="rect">
@@ -8879,7 +8879,7 @@
           <a:p>
             <a:pPr algn="just"/>
             <a:r>
-              <a:rPr lang="ko-KR" altLang="en-US" sz="1000" dirty="0" err="1">
+              <a:rPr lang="ko-KR" altLang="en-US" sz="1000" smtClean="0">
                 <a:solidFill>
                   <a:schemeClr val="accent2">
                     <a:lumMod val="60000"/>
@@ -8887,7 +8887,7 @@
                   </a:schemeClr>
                 </a:solidFill>
               </a:rPr>
-              <a:t>나통령</a:t>
+              <a:t>이용익</a:t>
             </a:r>
             <a:endParaRPr lang="ko-KR" altLang="en-US" sz="1000" dirty="0">
               <a:solidFill>
@@ -8914,7 +8914,7 @@
         </p:nvSpPr>
         <p:spPr>
           <a:xfrm>
-            <a:off x="4877740" y="74611"/>
+            <a:off x="4849410" y="44944"/>
             <a:ext cx="1069848" cy="411480"/>
           </a:xfrm>
           <a:prstGeom prst="rect">
@@ -8947,7 +8947,7 @@
           <a:p>
             <a:pPr algn="just"/>
             <a:r>
-              <a:rPr lang="ko-KR" altLang="en-US" sz="1000" dirty="0" err="1">
+              <a:rPr lang="ko-KR" altLang="en-US" sz="1000" smtClean="0">
                 <a:solidFill>
                   <a:schemeClr val="accent2">
                     <a:lumMod val="60000"/>
@@ -8955,7 +8955,7 @@
                   </a:schemeClr>
                 </a:solidFill>
               </a:rPr>
-              <a:t>박폭력</a:t>
+              <a:t>강재준</a:t>
             </a:r>
             <a:endParaRPr lang="ko-KR" altLang="en-US" sz="1000" dirty="0">
               <a:solidFill>
